--- a/public/downloads/praesentation/M19.pptx
+++ b/public/downloads/praesentation/M19.pptx
@@ -17,6 +17,15 @@
     <p:sldId id="265" r:id="rId16"/>
     <p:sldId id="266" r:id="rId17"/>
     <p:sldId id="267" r:id="rId18"/>
+    <p:sldId id="268" r:id="rId19"/>
+    <p:sldId id="269" r:id="rId20"/>
+    <p:sldId id="270" r:id="rId21"/>
+    <p:sldId id="271" r:id="rId22"/>
+    <p:sldId id="272" r:id="rId23"/>
+    <p:sldId id="273" r:id="rId24"/>
+    <p:sldId id="274" r:id="rId25"/>
+    <p:sldId id="275" r:id="rId26"/>
+    <p:sldId id="276" r:id="rId27"/>
   </p:sldIdLst>
   <p:sldSz cx="12188952" cy="6858000" type="screen4x3"/>
   <p:notesSz cx="6858000" cy="9144000"/>
@@ -3158,8 +3167,8 @@
         </p:nvSpPr>
         <p:spPr>
           <a:xfrm>
-            <a:off x="365760" y="365760"/>
-            <a:ext cx="11430000" cy="457200"/>
+            <a:off x="365760" y="320040"/>
+            <a:ext cx="11430000" cy="411480"/>
           </a:xfrm>
           <a:prstGeom prst="rect">
             <a:avLst/>
@@ -3174,13 +3183,13 @@
           <a:p>
             <a:pPr algn="l"/>
             <a:r>
-              <a:rPr sz="1100" b="0">
-                <a:solidFill>
-                  <a:srgbClr val="FFFFFF"/>
-                </a:solidFill>
-                <a:latin typeface="Arial"/>
-              </a:rPr>
-              <a:t>M19  ·  K-06 Führung &amp; Entwicklung  ·  Sparringspartner  ·  90 Min.</a:t>
+              <a:rPr sz="1100" b="0" i="0">
+                <a:solidFill>
+                  <a:srgbClr val="BBCCEE"/>
+                </a:solidFill>
+                <a:latin typeface="Arial"/>
+              </a:rPr>
+              <a:t>M19  ·  K-06 Führung &amp; Entwicklung  ·  Zielstufe: Sparringspartner  ·  90 Min.</a:t>
             </a:r>
           </a:p>
         </p:txBody>
@@ -3193,14 +3202,14 @@
         </p:nvSpPr>
         <p:spPr>
           <a:xfrm>
-            <a:off x="365760" y="868680"/>
-            <a:ext cx="7315200" cy="27432"/>
+            <a:off x="365760" y="804672"/>
+            <a:ext cx="8229600" cy="22860"/>
           </a:xfrm>
           <a:prstGeom prst="rect">
             <a:avLst/>
           </a:prstGeom>
           <a:solidFill>
-            <a:srgbClr val="FFFFFF"/>
+            <a:srgbClr val="335CC0"/>
           </a:solidFill>
           <a:ln>
             <a:noFill/>
@@ -3236,8 +3245,8 @@
         </p:nvSpPr>
         <p:spPr>
           <a:xfrm>
-            <a:off x="365760" y="1097280"/>
-            <a:ext cx="11430000" cy="2286000"/>
+            <a:off x="365760" y="1005840"/>
+            <a:ext cx="11430000" cy="2560320"/>
           </a:xfrm>
           <a:prstGeom prst="rect">
             <a:avLst/>
@@ -3252,7 +3261,7 @@
           <a:p>
             <a:pPr algn="l"/>
             <a:r>
-              <a:rPr sz="4000" b="1">
+              <a:rPr sz="4200" b="1" i="0">
                 <a:solidFill>
                   <a:srgbClr val="FFFFFF"/>
                 </a:solidFill>
@@ -3271,8 +3280,8 @@
         </p:nvSpPr>
         <p:spPr>
           <a:xfrm>
-            <a:off x="365760" y="3200400"/>
-            <a:ext cx="9144000" cy="914400"/>
+            <a:off x="365760" y="3383280"/>
+            <a:ext cx="10058400" cy="822960"/>
           </a:xfrm>
           <a:prstGeom prst="rect">
             <a:avLst/>
@@ -3287,7 +3296,7 @@
           <a:p>
             <a:pPr algn="l"/>
             <a:r>
-              <a:rPr sz="2000" b="0">
+              <a:rPr sz="2000" b="0" i="1">
                 <a:solidFill>
                   <a:srgbClr val="CCD6F0"/>
                 </a:solidFill>
@@ -3306,8 +3315,8 @@
         </p:nvSpPr>
         <p:spPr>
           <a:xfrm>
-            <a:off x="365760" y="6217920"/>
-            <a:ext cx="11430000" cy="457200"/>
+            <a:off x="365760" y="6309360"/>
+            <a:ext cx="11430000" cy="365760"/>
           </a:xfrm>
           <a:prstGeom prst="rect">
             <a:avLst/>
@@ -3322,9 +3331,9 @@
           <a:p>
             <a:pPr algn="l"/>
             <a:r>
-              <a:rPr sz="1000" b="0">
-                <a:solidFill>
-                  <a:srgbClr val="99AACC"/>
+              <a:rPr sz="900" b="0" i="0">
+                <a:solidFill>
+                  <a:srgbClr val="889ACC"/>
                 </a:solidFill>
                 <a:latin typeface="Arial"/>
               </a:rPr>
@@ -3347,7 +3356,7 @@
     <p:bg>
       <p:bgPr>
         <a:solidFill>
-          <a:srgbClr val="1A1A1A"/>
+          <a:srgbClr val="FFFFFF"/>
         </a:solidFill>
         <a:effectLst/>
       </p:bgPr>
@@ -3374,7 +3383,7 @@
             <a:avLst/>
           </a:prstGeom>
           <a:solidFill>
-            <a:srgbClr val="E05B00"/>
+            <a:srgbClr val="003DA5"/>
           </a:solidFill>
           <a:ln>
             <a:noFill/>
@@ -3410,8 +3419,8 @@
         </p:nvSpPr>
         <p:spPr>
           <a:xfrm>
-            <a:off x="365760" y="2286000"/>
-            <a:ext cx="11430000" cy="1828800"/>
+            <a:off x="228600" y="182880"/>
+            <a:ext cx="11430000" cy="320040"/>
           </a:xfrm>
           <a:prstGeom prst="rect">
             <a:avLst/>
@@ -3426,13 +3435,250 @@
           <a:p>
             <a:pPr algn="l"/>
             <a:r>
-              <a:rPr sz="3600" b="1">
-                <a:solidFill>
-                  <a:srgbClr val="FFFFFF"/>
-                </a:solidFill>
-                <a:latin typeface="Arial"/>
-              </a:rPr>
-              <a:t>Arbeitsblatt 2: Fallbesprechung vorbereiten</a:t>
+              <a:rPr sz="900" b="0" i="0">
+                <a:solidFill>
+                  <a:srgbClr val="556575"/>
+                </a:solidFill>
+                <a:latin typeface="Arial"/>
+              </a:rPr>
+              <a:t>M19 · 4.5 Fünf bewährte Transfermethoden im FK-Kontext</a:t>
+            </a:r>
+          </a:p>
+        </p:txBody>
+      </p:sp>
+      <p:sp>
+        <p:nvSpPr>
+          <p:cNvPr id="4" name="TextBox 3"/>
+          <p:cNvSpPr txBox="1"/>
+          <p:nvPr/>
+        </p:nvSpPr>
+        <p:spPr>
+          <a:xfrm>
+            <a:off x="365760" y="274320"/>
+            <a:ext cx="11430000" cy="777240"/>
+          </a:xfrm>
+          <a:prstGeom prst="rect">
+            <a:avLst/>
+          </a:prstGeom>
+          <a:noFill/>
+        </p:spPr>
+        <p:txBody>
+          <a:bodyPr wrap="square">
+            <a:spAutoFit/>
+          </a:bodyPr>
+          <a:lstStyle/>
+          <a:p>
+            <a:pPr algn="l"/>
+            <a:r>
+              <a:rPr sz="2200" b="1" i="0">
+                <a:solidFill>
+                  <a:srgbClr val="003DA5"/>
+                </a:solidFill>
+                <a:latin typeface="Arial"/>
+              </a:rPr>
+              <a:t>Methode 4: Lunch-and-Learn (15 Minuten)</a:t>
+            </a:r>
+          </a:p>
+        </p:txBody>
+      </p:sp>
+      <p:sp>
+        <p:nvSpPr>
+          <p:cNvPr id="5" name="Rectangle 4"/>
+          <p:cNvSpPr/>
+          <p:nvPr/>
+        </p:nvSpPr>
+        <p:spPr>
+          <a:xfrm>
+            <a:off x="365760" y="1005840"/>
+            <a:ext cx="11430000" cy="27432"/>
+          </a:xfrm>
+          <a:prstGeom prst="rect">
+            <a:avLst/>
+          </a:prstGeom>
+          <a:solidFill>
+            <a:srgbClr val="D1D5DB"/>
+          </a:solidFill>
+          <a:ln>
+            <a:noFill/>
+          </a:ln>
+        </p:spPr>
+        <p:style>
+          <a:lnRef idx="1">
+            <a:schemeClr val="accent1"/>
+          </a:lnRef>
+          <a:fillRef idx="3">
+            <a:schemeClr val="accent1"/>
+          </a:fillRef>
+          <a:effectRef idx="2">
+            <a:schemeClr val="accent1"/>
+          </a:effectRef>
+          <a:fontRef idx="minor">
+            <a:schemeClr val="lt1"/>
+          </a:fontRef>
+        </p:style>
+        <p:txBody>
+          <a:bodyPr rtlCol="0" anchor="ctr"/>
+          <a:lstStyle/>
+          <a:p>
+            <a:pPr algn="ctr"/>
+          </a:p>
+        </p:txBody>
+      </p:sp>
+      <p:sp>
+        <p:nvSpPr>
+          <p:cNvPr id="6" name="TextBox 5"/>
+          <p:cNvSpPr txBox="1"/>
+          <p:nvPr/>
+        </p:nvSpPr>
+        <p:spPr>
+          <a:xfrm>
+            <a:off x="365760" y="1143000"/>
+            <a:ext cx="11430000" cy="5212080"/>
+          </a:xfrm>
+          <a:prstGeom prst="rect">
+            <a:avLst/>
+          </a:prstGeom>
+          <a:noFill/>
+        </p:spPr>
+        <p:txBody>
+          <a:bodyPr wrap="square">
+            <a:spAutoFit/>
+          </a:bodyPr>
+          <a:lstStyle/>
+          <a:p>
+            <a:pPr>
+              <a:spcBef>
+                <a:spcPts val="500"/>
+              </a:spcBef>
+            </a:pPr>
+            <a:r>
+              <a:rPr sz="1500">
+                <a:solidFill>
+                  <a:srgbClr val="003DA5"/>
+                </a:solidFill>
+                <a:latin typeface="Arial"/>
+              </a:rPr>
+              <a:t>▪  </a:t>
+            </a:r>
+            <a:r>
+              <a:rPr sz="1700" b="1">
+                <a:solidFill>
+                  <a:srgbClr val="003DA5"/>
+                </a:solidFill>
+                <a:latin typeface="Arial"/>
+              </a:rPr>
+              <a:t>Was: </a:t>
+            </a:r>
+            <a:r>
+              <a:rPr sz="1700">
+                <a:solidFill>
+                  <a:srgbClr val="1A1A1A"/>
+                </a:solidFill>
+                <a:latin typeface="Arial"/>
+              </a:rPr>
+              <a:t>Kurzes, informelles Wissensformat – ein Berater erklärt an einem konkreten Beispiel eine Technik oder ein Konzept.</a:t>
+            </a:r>
+          </a:p>
+          <a:p>
+            <a:pPr>
+              <a:spcBef>
+                <a:spcPts val="500"/>
+              </a:spcBef>
+            </a:pPr>
+            <a:r>
+              <a:rPr sz="1500">
+                <a:solidFill>
+                  <a:srgbClr val="003DA5"/>
+                </a:solidFill>
+                <a:latin typeface="Arial"/>
+              </a:rPr>
+              <a:t>▪  </a:t>
+            </a:r>
+            <a:r>
+              <a:rPr sz="1700" b="1">
+                <a:solidFill>
+                  <a:srgbClr val="003DA5"/>
+                </a:solidFill>
+                <a:latin typeface="Arial"/>
+              </a:rPr>
+              <a:t>Wann: </a:t>
+            </a:r>
+            <a:r>
+              <a:rPr sz="1700">
+                <a:solidFill>
+                  <a:srgbClr val="1A1A1A"/>
+                </a:solidFill>
+                <a:latin typeface="Arial"/>
+              </a:rPr>
+              <a:t>Spontan oder geplant, 1–2× pro Monat.</a:t>
+            </a:r>
+          </a:p>
+          <a:p>
+            <a:pPr>
+              <a:spcBef>
+                <a:spcPts val="500"/>
+              </a:spcBef>
+            </a:pPr>
+            <a:r>
+              <a:rPr sz="1500">
+                <a:solidFill>
+                  <a:srgbClr val="003DA5"/>
+                </a:solidFill>
+                <a:latin typeface="Arial"/>
+              </a:rPr>
+              <a:t>▪  </a:t>
+            </a:r>
+            <a:r>
+              <a:rPr sz="1700" b="1">
+                <a:solidFill>
+                  <a:srgbClr val="003DA5"/>
+                </a:solidFill>
+                <a:latin typeface="Arial"/>
+              </a:rPr>
+              <a:t>Beispielthemen: </a:t>
+            </a:r>
+            <a:r>
+              <a:rPr sz="1700">
+                <a:solidFill>
+                  <a:srgbClr val="1A1A1A"/>
+                </a:solidFill>
+                <a:latin typeface="Arial"/>
+              </a:rPr>
+              <a:t>„Wie ich eine Nachfolgesituation erkannt habe, bevor der Kunde es angesprochen hat" | „Meine Erfahrungen mit §18 KWG-Gesprächen in der Landwirtschaft" | „agree-Trick: Kombinierte…</a:t>
+            </a:r>
+          </a:p>
+          <a:p>
+            <a:pPr>
+              <a:spcBef>
+                <a:spcPts val="500"/>
+              </a:spcBef>
+            </a:pPr>
+            <a:r>
+              <a:rPr sz="1500">
+                <a:solidFill>
+                  <a:srgbClr val="003DA5"/>
+                </a:solidFill>
+                <a:latin typeface="Arial"/>
+              </a:rPr>
+              <a:t>▪  </a:t>
+            </a:r>
+            <a:r>
+              <a:rPr sz="1700" b="1">
+                <a:solidFill>
+                  <a:srgbClr val="003DA5"/>
+                </a:solidFill>
+                <a:latin typeface="Arial"/>
+              </a:rPr>
+              <a:t>Qualitätsfaktor: </a:t>
+            </a:r>
+            <a:r>
+              <a:rPr sz="1700">
+                <a:solidFill>
+                  <a:srgbClr val="1A1A1A"/>
+                </a:solidFill>
+                <a:latin typeface="Arial"/>
+              </a:rPr>
+              <a:t>Keine Präsentation, keine Vorbereitung – nur Erzählen + Fragen.</a:t>
             </a:r>
           </a:p>
         </p:txBody>
@@ -3514,8 +3760,8 @@
         </p:nvSpPr>
         <p:spPr>
           <a:xfrm>
-            <a:off x="365760" y="2286000"/>
-            <a:ext cx="11430000" cy="1828800"/>
+            <a:off x="365760" y="2011680"/>
+            <a:ext cx="11430000" cy="2011680"/>
           </a:xfrm>
           <a:prstGeom prst="rect">
             <a:avLst/>
@@ -3530,13 +3776,13 @@
           <a:p>
             <a:pPr algn="l"/>
             <a:r>
-              <a:rPr sz="3600" b="1">
+              <a:rPr sz="3600" b="1" i="0">
                 <a:solidFill>
                   <a:srgbClr val="FFFFFF"/>
                 </a:solidFill>
                 <a:latin typeface="Arial"/>
               </a:rPr>
-              <a:t>Arbeitsblatt 3: Wissenstransfer-Maßnahmenplan</a:t>
+              <a:t>Hinweis: Hybride und standortverteilte Teams</a:t>
             </a:r>
           </a:p>
         </p:txBody>
@@ -3550,6 +3796,3459 @@
 </file>
 
 <file path=ppt/slides/slide12.xml><?xml version="1.0" encoding="utf-8"?>
+<p:sld xmlns:a="http://schemas.openxmlformats.org/drawingml/2006/main" xmlns:p="http://schemas.openxmlformats.org/presentationml/2006/main" xmlns:r="http://schemas.openxmlformats.org/officeDocument/2006/relationships">
+  <p:cSld>
+    <p:bg>
+      <p:bgPr>
+        <a:solidFill>
+          <a:srgbClr val="FFFFFF"/>
+        </a:solidFill>
+        <a:effectLst/>
+      </p:bgPr>
+    </p:bg>
+    <p:spTree>
+      <p:nvGrpSpPr>
+        <p:cNvPr id="1" name=""/>
+        <p:cNvGrpSpPr/>
+        <p:nvPr/>
+      </p:nvGrpSpPr>
+      <p:grpSpPr/>
+      <p:sp>
+        <p:nvSpPr>
+          <p:cNvPr id="2" name="Rectangle 1"/>
+          <p:cNvSpPr/>
+          <p:nvPr/>
+        </p:nvSpPr>
+        <p:spPr>
+          <a:xfrm>
+            <a:off x="0" y="0"/>
+            <a:ext cx="73152" cy="6858000"/>
+          </a:xfrm>
+          <a:prstGeom prst="rect">
+            <a:avLst/>
+          </a:prstGeom>
+          <a:solidFill>
+            <a:srgbClr val="003DA5"/>
+          </a:solidFill>
+          <a:ln>
+            <a:noFill/>
+          </a:ln>
+        </p:spPr>
+        <p:style>
+          <a:lnRef idx="1">
+            <a:schemeClr val="accent1"/>
+          </a:lnRef>
+          <a:fillRef idx="3">
+            <a:schemeClr val="accent1"/>
+          </a:fillRef>
+          <a:effectRef idx="2">
+            <a:schemeClr val="accent1"/>
+          </a:effectRef>
+          <a:fontRef idx="minor">
+            <a:schemeClr val="lt1"/>
+          </a:fontRef>
+        </p:style>
+        <p:txBody>
+          <a:bodyPr rtlCol="0" anchor="ctr"/>
+          <a:lstStyle/>
+          <a:p>
+            <a:pPr algn="ctr"/>
+          </a:p>
+        </p:txBody>
+      </p:sp>
+      <p:sp>
+        <p:nvSpPr>
+          <p:cNvPr id="3" name="TextBox 2"/>
+          <p:cNvSpPr txBox="1"/>
+          <p:nvPr/>
+        </p:nvSpPr>
+        <p:spPr>
+          <a:xfrm>
+            <a:off x="228600" y="182880"/>
+            <a:ext cx="11430000" cy="320040"/>
+          </a:xfrm>
+          <a:prstGeom prst="rect">
+            <a:avLst/>
+          </a:prstGeom>
+          <a:noFill/>
+        </p:spPr>
+        <p:txBody>
+          <a:bodyPr wrap="square">
+            <a:spAutoFit/>
+          </a:bodyPr>
+          <a:lstStyle/>
+          <a:p>
+            <a:pPr algn="l"/>
+            <a:r>
+              <a:rPr sz="900" b="0" i="0">
+                <a:solidFill>
+                  <a:srgbClr val="556575"/>
+                </a:solidFill>
+                <a:latin typeface="Arial"/>
+              </a:rPr>
+              <a:t>M19 · 4.5 Fünf bewährte Transfermethoden im FK-Kontext</a:t>
+            </a:r>
+          </a:p>
+        </p:txBody>
+      </p:sp>
+      <p:sp>
+        <p:nvSpPr>
+          <p:cNvPr id="4" name="TextBox 3"/>
+          <p:cNvSpPr txBox="1"/>
+          <p:nvPr/>
+        </p:nvSpPr>
+        <p:spPr>
+          <a:xfrm>
+            <a:off x="365760" y="274320"/>
+            <a:ext cx="11430000" cy="777240"/>
+          </a:xfrm>
+          <a:prstGeom prst="rect">
+            <a:avLst/>
+          </a:prstGeom>
+          <a:noFill/>
+        </p:spPr>
+        <p:txBody>
+          <a:bodyPr wrap="square">
+            <a:spAutoFit/>
+          </a:bodyPr>
+          <a:lstStyle/>
+          <a:p>
+            <a:pPr algn="l"/>
+            <a:r>
+              <a:rPr sz="2200" b="1" i="0">
+                <a:solidFill>
+                  <a:srgbClr val="003DA5"/>
+                </a:solidFill>
+                <a:latin typeface="Arial"/>
+              </a:rPr>
+              <a:t>Hinweis: Hybride und standortverteilte Teams</a:t>
+            </a:r>
+          </a:p>
+        </p:txBody>
+      </p:sp>
+      <p:sp>
+        <p:nvSpPr>
+          <p:cNvPr id="5" name="Rectangle 4"/>
+          <p:cNvSpPr/>
+          <p:nvPr/>
+        </p:nvSpPr>
+        <p:spPr>
+          <a:xfrm>
+            <a:off x="365760" y="1005840"/>
+            <a:ext cx="11430000" cy="27432"/>
+          </a:xfrm>
+          <a:prstGeom prst="rect">
+            <a:avLst/>
+          </a:prstGeom>
+          <a:solidFill>
+            <a:srgbClr val="D1D5DB"/>
+          </a:solidFill>
+          <a:ln>
+            <a:noFill/>
+          </a:ln>
+        </p:spPr>
+        <p:style>
+          <a:lnRef idx="1">
+            <a:schemeClr val="accent1"/>
+          </a:lnRef>
+          <a:fillRef idx="3">
+            <a:schemeClr val="accent1"/>
+          </a:fillRef>
+          <a:effectRef idx="2">
+            <a:schemeClr val="accent1"/>
+          </a:effectRef>
+          <a:fontRef idx="minor">
+            <a:schemeClr val="lt1"/>
+          </a:fontRef>
+        </p:style>
+        <p:txBody>
+          <a:bodyPr rtlCol="0" anchor="ctr"/>
+          <a:lstStyle/>
+          <a:p>
+            <a:pPr algn="ctr"/>
+          </a:p>
+        </p:txBody>
+      </p:sp>
+      <p:graphicFrame>
+        <p:nvGraphicFramePr>
+          <p:cNvPr id="6" name="Table 5"/>
+          <p:cNvGraphicFramePr>
+            <a:graphicFrameLocks noGrp="1"/>
+          </p:cNvGraphicFramePr>
+          <p:nvPr/>
+        </p:nvGraphicFramePr>
+        <p:xfrm>
+          <a:off x="365760" y="1143000"/>
+          <a:ext cx="11430000" cy="2377440"/>
+        </p:xfrm>
+        <a:graphic>
+          <a:graphicData uri="http://schemas.openxmlformats.org/drawingml/2006/table">
+            <a:tbl>
+              <a:tblPr firstRow="1" bandRow="1">
+                <a:tableStyleId>{5C22544A-7EE6-4342-B048-85BDC9FD1C3A}</a:tableStyleId>
+              </a:tblPr>
+              <a:tblGrid>
+                <a:gridCol w="3810000"/>
+                <a:gridCol w="3810000"/>
+                <a:gridCol w="3810000"/>
+              </a:tblGrid>
+              <a:tr h="475488">
+                <a:tc>
+                  <a:txBody>
+                    <a:bodyPr wrap="square"/>
+                    <a:lstStyle/>
+                    <a:p>
+                      <a:r>
+                        <a:rPr sz="1100" b="1">
+                          <a:solidFill>
+                            <a:srgbClr val="FFFFFF"/>
+                          </a:solidFill>
+                          <a:latin typeface="Arial"/>
+                        </a:rPr>
+                        <a:t>Methode</a:t>
+                      </a:r>
+                    </a:p>
+                  </a:txBody>
+                  <a:tcPr>
+                    <a:solidFill>
+                      <a:srgbClr val="003DA5"/>
+                    </a:solidFill>
+                  </a:tcPr>
+                </a:tc>
+                <a:tc>
+                  <a:txBody>
+                    <a:bodyPr wrap="square"/>
+                    <a:lstStyle/>
+                    <a:p>
+                      <a:r>
+                        <a:rPr sz="1100" b="1">
+                          <a:solidFill>
+                            <a:srgbClr val="FFFFFF"/>
+                          </a:solidFill>
+                          <a:latin typeface="Arial"/>
+                        </a:rPr>
+                        <a:t>Präsenz-Variante</a:t>
+                      </a:r>
+                    </a:p>
+                  </a:txBody>
+                  <a:tcPr>
+                    <a:solidFill>
+                      <a:srgbClr val="003DA5"/>
+                    </a:solidFill>
+                  </a:tcPr>
+                </a:tc>
+                <a:tc>
+                  <a:txBody>
+                    <a:bodyPr wrap="square"/>
+                    <a:lstStyle/>
+                    <a:p>
+                      <a:r>
+                        <a:rPr sz="1100" b="1">
+                          <a:solidFill>
+                            <a:srgbClr val="FFFFFF"/>
+                          </a:solidFill>
+                          <a:latin typeface="Arial"/>
+                        </a:rPr>
+                        <a:t>Digital-/Hybrid-Variante</a:t>
+                      </a:r>
+                    </a:p>
+                  </a:txBody>
+                  <a:tcPr>
+                    <a:solidFill>
+                      <a:srgbClr val="003DA5"/>
+                    </a:solidFill>
+                  </a:tcPr>
+                </a:tc>
+              </a:tr>
+              <a:tr h="475488">
+                <a:tc>
+                  <a:txBody>
+                    <a:bodyPr wrap="square"/>
+                    <a:lstStyle/>
+                    <a:p>
+                      <a:r>
+                        <a:rPr sz="1100" b="0">
+                          <a:solidFill>
+                            <a:srgbClr val="1A1A1A"/>
+                          </a:solidFill>
+                          <a:latin typeface="Arial"/>
+                        </a:rPr>
+                        <a:t>Tandem-Besuch</a:t>
+                      </a:r>
+                    </a:p>
+                  </a:txBody>
+                  <a:tcPr>
+                    <a:solidFill>
+                      <a:srgbClr val="FFFFFF"/>
+                    </a:solidFill>
+                  </a:tcPr>
+                </a:tc>
+                <a:tc>
+                  <a:txBody>
+                    <a:bodyPr wrap="square"/>
+                    <a:lstStyle/>
+                    <a:p>
+                      <a:r>
+                        <a:rPr sz="1100" b="0">
+                          <a:solidFill>
+                            <a:srgbClr val="1A1A1A"/>
+                          </a:solidFill>
+                          <a:latin typeface="Arial"/>
+                        </a:rPr>
+                        <a:t>Physisch beim Kunden</a:t>
+                      </a:r>
+                    </a:p>
+                  </a:txBody>
+                  <a:tcPr>
+                    <a:solidFill>
+                      <a:srgbClr val="FFFFFF"/>
+                    </a:solidFill>
+                  </a:tcPr>
+                </a:tc>
+                <a:tc>
+                  <a:txBody>
+                    <a:bodyPr wrap="square"/>
+                    <a:lstStyle/>
+                    <a:p>
+                      <a:r>
+                        <a:rPr sz="1100" b="0">
+                          <a:solidFill>
+                            <a:srgbClr val="1A1A1A"/>
+                          </a:solidFill>
+                          <a:latin typeface="Arial"/>
+                        </a:rPr>
+                        <a:t>Nur bei physischen Kundenterminen; Nachbesprechung per MS Teams möglich</a:t>
+                      </a:r>
+                    </a:p>
+                  </a:txBody>
+                  <a:tcPr>
+                    <a:solidFill>
+                      <a:srgbClr val="FFFFFF"/>
+                    </a:solidFill>
+                  </a:tcPr>
+                </a:tc>
+              </a:tr>
+              <a:tr h="475488">
+                <a:tc>
+                  <a:txBody>
+                    <a:bodyPr wrap="square"/>
+                    <a:lstStyle/>
+                    <a:p>
+                      <a:r>
+                        <a:rPr sz="1100" b="0">
+                          <a:solidFill>
+                            <a:srgbClr val="1A1A1A"/>
+                          </a:solidFill>
+                          <a:latin typeface="Arial"/>
+                        </a:rPr>
+                        <a:t>Fallbesprechung</a:t>
+                      </a:r>
+                    </a:p>
+                  </a:txBody>
+                  <a:tcPr>
+                    <a:solidFill>
+                      <a:srgbClr val="F4F6FA"/>
+                    </a:solidFill>
+                  </a:tcPr>
+                </a:tc>
+                <a:tc>
+                  <a:txBody>
+                    <a:bodyPr wrap="square"/>
+                    <a:lstStyle/>
+                    <a:p>
+                      <a:r>
+                        <a:rPr sz="1100" b="0">
+                          <a:solidFill>
+                            <a:srgbClr val="1A1A1A"/>
+                          </a:solidFill>
+                          <a:latin typeface="Arial"/>
+                        </a:rPr>
+                        <a:t>Gemeinsamer Raum</a:t>
+                      </a:r>
+                    </a:p>
+                  </a:txBody>
+                  <a:tcPr>
+                    <a:solidFill>
+                      <a:srgbClr val="F4F6FA"/>
+                    </a:solidFill>
+                  </a:tcPr>
+                </a:tc>
+                <a:tc>
+                  <a:txBody>
+                    <a:bodyPr wrap="square"/>
+                    <a:lstStyle/>
+                    <a:p>
+                      <a:r>
+                        <a:rPr sz="1100" b="0">
+                          <a:solidFill>
+                            <a:srgbClr val="1A1A1A"/>
+                          </a:solidFill>
+                          <a:latin typeface="Arial"/>
+                        </a:rPr>
+                        <a:t>MS-Teams-Videocall, 45 Min., Whiteboard-Funktion für stille Reflexionsphase</a:t>
+                      </a:r>
+                    </a:p>
+                  </a:txBody>
+                  <a:tcPr>
+                    <a:solidFill>
+                      <a:srgbClr val="F4F6FA"/>
+                    </a:solidFill>
+                  </a:tcPr>
+                </a:tc>
+              </a:tr>
+              <a:tr h="475488">
+                <a:tc>
+                  <a:txBody>
+                    <a:bodyPr wrap="square"/>
+                    <a:lstStyle/>
+                    <a:p>
+                      <a:r>
+                        <a:rPr sz="1100" b="0">
+                          <a:solidFill>
+                            <a:srgbClr val="1A1A1A"/>
+                          </a:solidFill>
+                          <a:latin typeface="Arial"/>
+                        </a:rPr>
+                        <a:t>Wissenslandkarte</a:t>
+                      </a:r>
+                    </a:p>
+                  </a:txBody>
+                  <a:tcPr>
+                    <a:solidFill>
+                      <a:srgbClr val="FFFFFF"/>
+                    </a:solidFill>
+                  </a:tcPr>
+                </a:tc>
+                <a:tc>
+                  <a:txBody>
+                    <a:bodyPr wrap="square"/>
+                    <a:lstStyle/>
+                    <a:p>
+                      <a:r>
+                        <a:rPr sz="1100" b="0">
+                          <a:solidFill>
+                            <a:srgbClr val="1A1A1A"/>
+                          </a:solidFill>
+                          <a:latin typeface="Arial"/>
+                        </a:rPr>
+                        <a:t>Pinnwand im Teamraum</a:t>
+                      </a:r>
+                    </a:p>
+                  </a:txBody>
+                  <a:tcPr>
+                    <a:solidFill>
+                      <a:srgbClr val="FFFFFF"/>
+                    </a:solidFill>
+                  </a:tcPr>
+                </a:tc>
+                <a:tc>
+                  <a:txBody>
+                    <a:bodyPr wrap="square"/>
+                    <a:lstStyle/>
+                    <a:p>
+                      <a:r>
+                        <a:rPr sz="1100" b="0">
+                          <a:solidFill>
+                            <a:srgbClr val="1A1A1A"/>
+                          </a:solidFill>
+                          <a:latin typeface="Arial"/>
+                        </a:rPr>
+                        <a:t>Teams-Kanal mit fixiertem Beitrags-Thread oder SharePoint-OneNote</a:t>
+                      </a:r>
+                    </a:p>
+                  </a:txBody>
+                  <a:tcPr>
+                    <a:solidFill>
+                      <a:srgbClr val="FFFFFF"/>
+                    </a:solidFill>
+                  </a:tcPr>
+                </a:tc>
+              </a:tr>
+              <a:tr h="475488">
+                <a:tc>
+                  <a:txBody>
+                    <a:bodyPr wrap="square"/>
+                    <a:lstStyle/>
+                    <a:p>
+                      <a:r>
+                        <a:rPr sz="1100" b="0">
+                          <a:solidFill>
+                            <a:srgbClr val="1A1A1A"/>
+                          </a:solidFill>
+                          <a:latin typeface="Arial"/>
+                        </a:rPr>
+                        <a:t>Lunch-and-Learn</a:t>
+                      </a:r>
+                    </a:p>
+                  </a:txBody>
+                  <a:tcPr>
+                    <a:solidFill>
+                      <a:srgbClr val="F4F6FA"/>
+                    </a:solidFill>
+                  </a:tcPr>
+                </a:tc>
+                <a:tc>
+                  <a:txBody>
+                    <a:bodyPr wrap="square"/>
+                    <a:lstStyle/>
+                    <a:p>
+                      <a:r>
+                        <a:rPr sz="1100" b="0">
+                          <a:solidFill>
+                            <a:srgbClr val="1A1A1A"/>
+                          </a:solidFill>
+                          <a:latin typeface="Arial"/>
+                        </a:rPr>
+                        <a:t>Informell im Büro</a:t>
+                      </a:r>
+                    </a:p>
+                  </a:txBody>
+                  <a:tcPr>
+                    <a:solidFill>
+                      <a:srgbClr val="F4F6FA"/>
+                    </a:solidFill>
+                  </a:tcPr>
+                </a:tc>
+                <a:tc>
+                  <a:txBody>
+                    <a:bodyPr wrap="square"/>
+                    <a:lstStyle/>
+                    <a:p>
+                      <a:r>
+                        <a:rPr sz="1100" b="0">
+                          <a:solidFill>
+                            <a:srgbClr val="1A1A1A"/>
+                          </a:solidFill>
+                          <a:latin typeface="Arial"/>
+                        </a:rPr>
+                        <a:t>15 Min. MS Teams – auch asynchron als aufgezeichnetes Kurzvideo (5 Min.)</a:t>
+                      </a:r>
+                    </a:p>
+                  </a:txBody>
+                  <a:tcPr>
+                    <a:solidFill>
+                      <a:srgbClr val="F4F6FA"/>
+                    </a:solidFill>
+                  </a:tcPr>
+                </a:tc>
+              </a:tr>
+            </a:tbl>
+          </a:graphicData>
+        </a:graphic>
+      </p:graphicFrame>
+    </p:spTree>
+  </p:cSld>
+  <p:clrMapOvr>
+    <a:masterClrMapping/>
+  </p:clrMapOvr>
+</p:sld>
+</file>
+
+<file path=ppt/slides/slide13.xml><?xml version="1.0" encoding="utf-8"?>
+<p:sld xmlns:a="http://schemas.openxmlformats.org/drawingml/2006/main" xmlns:p="http://schemas.openxmlformats.org/presentationml/2006/main" xmlns:r="http://schemas.openxmlformats.org/officeDocument/2006/relationships">
+  <p:cSld>
+    <p:bg>
+      <p:bgPr>
+        <a:solidFill>
+          <a:srgbClr val="1A1A1A"/>
+        </a:solidFill>
+        <a:effectLst/>
+      </p:bgPr>
+    </p:bg>
+    <p:spTree>
+      <p:nvGrpSpPr>
+        <p:cNvPr id="1" name=""/>
+        <p:cNvGrpSpPr/>
+        <p:nvPr/>
+      </p:nvGrpSpPr>
+      <p:grpSpPr/>
+      <p:sp>
+        <p:nvSpPr>
+          <p:cNvPr id="2" name="Rectangle 1"/>
+          <p:cNvSpPr/>
+          <p:nvPr/>
+        </p:nvSpPr>
+        <p:spPr>
+          <a:xfrm>
+            <a:off x="0" y="0"/>
+            <a:ext cx="73152" cy="6858000"/>
+          </a:xfrm>
+          <a:prstGeom prst="rect">
+            <a:avLst/>
+          </a:prstGeom>
+          <a:solidFill>
+            <a:srgbClr val="E05B00"/>
+          </a:solidFill>
+          <a:ln>
+            <a:noFill/>
+          </a:ln>
+        </p:spPr>
+        <p:style>
+          <a:lnRef idx="1">
+            <a:schemeClr val="accent1"/>
+          </a:lnRef>
+          <a:fillRef idx="3">
+            <a:schemeClr val="accent1"/>
+          </a:fillRef>
+          <a:effectRef idx="2">
+            <a:schemeClr val="accent1"/>
+          </a:effectRef>
+          <a:fontRef idx="minor">
+            <a:schemeClr val="lt1"/>
+          </a:fontRef>
+        </p:style>
+        <p:txBody>
+          <a:bodyPr rtlCol="0" anchor="ctr"/>
+          <a:lstStyle/>
+          <a:p>
+            <a:pPr algn="ctr"/>
+          </a:p>
+        </p:txBody>
+      </p:sp>
+      <p:sp>
+        <p:nvSpPr>
+          <p:cNvPr id="3" name="TextBox 2"/>
+          <p:cNvSpPr txBox="1"/>
+          <p:nvPr/>
+        </p:nvSpPr>
+        <p:spPr>
+          <a:xfrm>
+            <a:off x="365760" y="2011680"/>
+            <a:ext cx="11430000" cy="2011680"/>
+          </a:xfrm>
+          <a:prstGeom prst="rect">
+            <a:avLst/>
+          </a:prstGeom>
+          <a:noFill/>
+        </p:spPr>
+        <p:txBody>
+          <a:bodyPr wrap="square">
+            <a:spAutoFit/>
+          </a:bodyPr>
+          <a:lstStyle/>
+          <a:p>
+            <a:pPr algn="l"/>
+            <a:r>
+              <a:rPr sz="3600" b="1" i="0">
+                <a:solidFill>
+                  <a:srgbClr val="FFFFFF"/>
+                </a:solidFill>
+                <a:latin typeface="Arial"/>
+              </a:rPr>
+              <a:t>Methode 5: Reverse Mentoring</a:t>
+            </a:r>
+          </a:p>
+        </p:txBody>
+      </p:sp>
+    </p:spTree>
+  </p:cSld>
+  <p:clrMapOvr>
+    <a:masterClrMapping/>
+  </p:clrMapOvr>
+</p:sld>
+</file>
+
+<file path=ppt/slides/slide14.xml><?xml version="1.0" encoding="utf-8"?>
+<p:sld xmlns:a="http://schemas.openxmlformats.org/drawingml/2006/main" xmlns:p="http://schemas.openxmlformats.org/presentationml/2006/main" xmlns:r="http://schemas.openxmlformats.org/officeDocument/2006/relationships">
+  <p:cSld>
+    <p:bg>
+      <p:bgPr>
+        <a:solidFill>
+          <a:srgbClr val="FFFFFF"/>
+        </a:solidFill>
+        <a:effectLst/>
+      </p:bgPr>
+    </p:bg>
+    <p:spTree>
+      <p:nvGrpSpPr>
+        <p:cNvPr id="1" name=""/>
+        <p:cNvGrpSpPr/>
+        <p:nvPr/>
+      </p:nvGrpSpPr>
+      <p:grpSpPr/>
+      <p:sp>
+        <p:nvSpPr>
+          <p:cNvPr id="2" name="Rectangle 1"/>
+          <p:cNvSpPr/>
+          <p:nvPr/>
+        </p:nvSpPr>
+        <p:spPr>
+          <a:xfrm>
+            <a:off x="0" y="0"/>
+            <a:ext cx="73152" cy="6858000"/>
+          </a:xfrm>
+          <a:prstGeom prst="rect">
+            <a:avLst/>
+          </a:prstGeom>
+          <a:solidFill>
+            <a:srgbClr val="003DA5"/>
+          </a:solidFill>
+          <a:ln>
+            <a:noFill/>
+          </a:ln>
+        </p:spPr>
+        <p:style>
+          <a:lnRef idx="1">
+            <a:schemeClr val="accent1"/>
+          </a:lnRef>
+          <a:fillRef idx="3">
+            <a:schemeClr val="accent1"/>
+          </a:fillRef>
+          <a:effectRef idx="2">
+            <a:schemeClr val="accent1"/>
+          </a:effectRef>
+          <a:fontRef idx="minor">
+            <a:schemeClr val="lt1"/>
+          </a:fontRef>
+        </p:style>
+        <p:txBody>
+          <a:bodyPr rtlCol="0" anchor="ctr"/>
+          <a:lstStyle/>
+          <a:p>
+            <a:pPr algn="ctr"/>
+          </a:p>
+        </p:txBody>
+      </p:sp>
+      <p:sp>
+        <p:nvSpPr>
+          <p:cNvPr id="3" name="TextBox 2"/>
+          <p:cNvSpPr txBox="1"/>
+          <p:nvPr/>
+        </p:nvSpPr>
+        <p:spPr>
+          <a:xfrm>
+            <a:off x="228600" y="182880"/>
+            <a:ext cx="11430000" cy="320040"/>
+          </a:xfrm>
+          <a:prstGeom prst="rect">
+            <a:avLst/>
+          </a:prstGeom>
+          <a:noFill/>
+        </p:spPr>
+        <p:txBody>
+          <a:bodyPr wrap="square">
+            <a:spAutoFit/>
+          </a:bodyPr>
+          <a:lstStyle/>
+          <a:p>
+            <a:pPr algn="l"/>
+            <a:r>
+              <a:rPr sz="900" b="0" i="0">
+                <a:solidFill>
+                  <a:srgbClr val="556575"/>
+                </a:solidFill>
+                <a:latin typeface="Arial"/>
+              </a:rPr>
+              <a:t>M19 · 4.5 Fünf bewährte Transfermethoden im FK-Kontext</a:t>
+            </a:r>
+          </a:p>
+        </p:txBody>
+      </p:sp>
+      <p:sp>
+        <p:nvSpPr>
+          <p:cNvPr id="4" name="TextBox 3"/>
+          <p:cNvSpPr txBox="1"/>
+          <p:nvPr/>
+        </p:nvSpPr>
+        <p:spPr>
+          <a:xfrm>
+            <a:off x="365760" y="274320"/>
+            <a:ext cx="11430000" cy="777240"/>
+          </a:xfrm>
+          <a:prstGeom prst="rect">
+            <a:avLst/>
+          </a:prstGeom>
+          <a:noFill/>
+        </p:spPr>
+        <p:txBody>
+          <a:bodyPr wrap="square">
+            <a:spAutoFit/>
+          </a:bodyPr>
+          <a:lstStyle/>
+          <a:p>
+            <a:pPr algn="l"/>
+            <a:r>
+              <a:rPr sz="2200" b="1" i="0">
+                <a:solidFill>
+                  <a:srgbClr val="003DA5"/>
+                </a:solidFill>
+                <a:latin typeface="Arial"/>
+              </a:rPr>
+              <a:t>Methode 5: Reverse Mentoring</a:t>
+            </a:r>
+          </a:p>
+        </p:txBody>
+      </p:sp>
+      <p:sp>
+        <p:nvSpPr>
+          <p:cNvPr id="5" name="Rectangle 4"/>
+          <p:cNvSpPr/>
+          <p:nvPr/>
+        </p:nvSpPr>
+        <p:spPr>
+          <a:xfrm>
+            <a:off x="365760" y="1005840"/>
+            <a:ext cx="11430000" cy="27432"/>
+          </a:xfrm>
+          <a:prstGeom prst="rect">
+            <a:avLst/>
+          </a:prstGeom>
+          <a:solidFill>
+            <a:srgbClr val="D1D5DB"/>
+          </a:solidFill>
+          <a:ln>
+            <a:noFill/>
+          </a:ln>
+        </p:spPr>
+        <p:style>
+          <a:lnRef idx="1">
+            <a:schemeClr val="accent1"/>
+          </a:lnRef>
+          <a:fillRef idx="3">
+            <a:schemeClr val="accent1"/>
+          </a:fillRef>
+          <a:effectRef idx="2">
+            <a:schemeClr val="accent1"/>
+          </a:effectRef>
+          <a:fontRef idx="minor">
+            <a:schemeClr val="lt1"/>
+          </a:fontRef>
+        </p:style>
+        <p:txBody>
+          <a:bodyPr rtlCol="0" anchor="ctr"/>
+          <a:lstStyle/>
+          <a:p>
+            <a:pPr algn="ctr"/>
+          </a:p>
+        </p:txBody>
+      </p:sp>
+      <p:sp>
+        <p:nvSpPr>
+          <p:cNvPr id="6" name="TextBox 5"/>
+          <p:cNvSpPr txBox="1"/>
+          <p:nvPr/>
+        </p:nvSpPr>
+        <p:spPr>
+          <a:xfrm>
+            <a:off x="365760" y="1143000"/>
+            <a:ext cx="11430000" cy="5212080"/>
+          </a:xfrm>
+          <a:prstGeom prst="rect">
+            <a:avLst/>
+          </a:prstGeom>
+          <a:noFill/>
+        </p:spPr>
+        <p:txBody>
+          <a:bodyPr wrap="square">
+            <a:spAutoFit/>
+          </a:bodyPr>
+          <a:lstStyle/>
+          <a:p>
+            <a:pPr>
+              <a:spcBef>
+                <a:spcPts val="500"/>
+              </a:spcBef>
+            </a:pPr>
+            <a:r>
+              <a:rPr sz="1500">
+                <a:solidFill>
+                  <a:srgbClr val="003DA5"/>
+                </a:solidFill>
+                <a:latin typeface="Arial"/>
+              </a:rPr>
+              <a:t>▪  </a:t>
+            </a:r>
+            <a:r>
+              <a:rPr sz="1700" b="1">
+                <a:solidFill>
+                  <a:srgbClr val="003DA5"/>
+                </a:solidFill>
+                <a:latin typeface="Arial"/>
+              </a:rPr>
+              <a:t>Was: </a:t>
+            </a:r>
+            <a:r>
+              <a:rPr sz="1700">
+                <a:solidFill>
+                  <a:srgbClr val="1A1A1A"/>
+                </a:solidFill>
+                <a:latin typeface="Arial"/>
+              </a:rPr>
+              <a:t>Jüngere/neuere Berater unterweisen erfahrene Berater in Digitalthemen oder neuen Systemfunktionen.</a:t>
+            </a:r>
+          </a:p>
+          <a:p>
+            <a:pPr>
+              <a:spcBef>
+                <a:spcPts val="500"/>
+              </a:spcBef>
+            </a:pPr>
+            <a:r>
+              <a:rPr sz="1500">
+                <a:solidFill>
+                  <a:srgbClr val="003DA5"/>
+                </a:solidFill>
+                <a:latin typeface="Arial"/>
+              </a:rPr>
+              <a:t>▪  </a:t>
+            </a:r>
+            <a:r>
+              <a:rPr sz="1700" b="1">
+                <a:solidFill>
+                  <a:srgbClr val="003DA5"/>
+                </a:solidFill>
+                <a:latin typeface="Arial"/>
+              </a:rPr>
+              <a:t>Wann: </a:t>
+            </a:r>
+            <a:r>
+              <a:rPr sz="1700">
+                <a:solidFill>
+                  <a:srgbClr val="1A1A1A"/>
+                </a:solidFill>
+                <a:latin typeface="Arial"/>
+              </a:rPr>
+              <a:t>Bei Einführung neuer Tools (z.B. agree-Updates, CRM-Erweiterungen).</a:t>
+            </a:r>
+          </a:p>
+          <a:p>
+            <a:pPr>
+              <a:spcBef>
+                <a:spcPts val="500"/>
+              </a:spcBef>
+            </a:pPr>
+            <a:r>
+              <a:rPr sz="1500">
+                <a:solidFill>
+                  <a:srgbClr val="003DA5"/>
+                </a:solidFill>
+                <a:latin typeface="Arial"/>
+              </a:rPr>
+              <a:t>▪  </a:t>
+            </a:r>
+            <a:r>
+              <a:rPr sz="1700" b="1">
+                <a:solidFill>
+                  <a:srgbClr val="003DA5"/>
+                </a:solidFill>
+                <a:latin typeface="Arial"/>
+              </a:rPr>
+              <a:t>Nutzen: </a:t>
+            </a:r>
+            <a:r>
+              <a:rPr sz="1700">
+                <a:solidFill>
+                  <a:srgbClr val="1A1A1A"/>
+                </a:solidFill>
+                <a:latin typeface="Arial"/>
+              </a:rPr>
+              <a:t>Durchbricht die Hierarchie als Wissensbarriere; wertet beide Seiten auf.</a:t>
+            </a:r>
+          </a:p>
+        </p:txBody>
+      </p:sp>
+    </p:spTree>
+  </p:cSld>
+  <p:clrMapOvr>
+    <a:masterClrMapping/>
+  </p:clrMapOvr>
+</p:sld>
+</file>
+
+<file path=ppt/slides/slide15.xml><?xml version="1.0" encoding="utf-8"?>
+<p:sld xmlns:a="http://schemas.openxmlformats.org/drawingml/2006/main" xmlns:p="http://schemas.openxmlformats.org/presentationml/2006/main" xmlns:r="http://schemas.openxmlformats.org/officeDocument/2006/relationships">
+  <p:cSld>
+    <p:bg>
+      <p:bgPr>
+        <a:solidFill>
+          <a:srgbClr val="1A1A1A"/>
+        </a:solidFill>
+        <a:effectLst/>
+      </p:bgPr>
+    </p:bg>
+    <p:spTree>
+      <p:nvGrpSpPr>
+        <p:cNvPr id="1" name=""/>
+        <p:cNvGrpSpPr/>
+        <p:nvPr/>
+      </p:nvGrpSpPr>
+      <p:grpSpPr/>
+      <p:sp>
+        <p:nvSpPr>
+          <p:cNvPr id="2" name="Rectangle 1"/>
+          <p:cNvSpPr/>
+          <p:nvPr/>
+        </p:nvSpPr>
+        <p:spPr>
+          <a:xfrm>
+            <a:off x="0" y="0"/>
+            <a:ext cx="73152" cy="6858000"/>
+          </a:xfrm>
+          <a:prstGeom prst="rect">
+            <a:avLst/>
+          </a:prstGeom>
+          <a:solidFill>
+            <a:srgbClr val="E05B00"/>
+          </a:solidFill>
+          <a:ln>
+            <a:noFill/>
+          </a:ln>
+        </p:spPr>
+        <p:style>
+          <a:lnRef idx="1">
+            <a:schemeClr val="accent1"/>
+          </a:lnRef>
+          <a:fillRef idx="3">
+            <a:schemeClr val="accent1"/>
+          </a:fillRef>
+          <a:effectRef idx="2">
+            <a:schemeClr val="accent1"/>
+          </a:effectRef>
+          <a:fontRef idx="minor">
+            <a:schemeClr val="lt1"/>
+          </a:fontRef>
+        </p:style>
+        <p:txBody>
+          <a:bodyPr rtlCol="0" anchor="ctr"/>
+          <a:lstStyle/>
+          <a:p>
+            <a:pPr algn="ctr"/>
+          </a:p>
+        </p:txBody>
+      </p:sp>
+      <p:sp>
+        <p:nvSpPr>
+          <p:cNvPr id="3" name="TextBox 2"/>
+          <p:cNvSpPr txBox="1"/>
+          <p:nvPr/>
+        </p:nvSpPr>
+        <p:spPr>
+          <a:xfrm>
+            <a:off x="365760" y="2011680"/>
+            <a:ext cx="11430000" cy="2011680"/>
+          </a:xfrm>
+          <a:prstGeom prst="rect">
+            <a:avLst/>
+          </a:prstGeom>
+          <a:noFill/>
+        </p:spPr>
+        <p:txBody>
+          <a:bodyPr wrap="square">
+            <a:spAutoFit/>
+          </a:bodyPr>
+          <a:lstStyle/>
+          <a:p>
+            <a:pPr algn="l"/>
+            <a:r>
+              <a:rPr sz="3600" b="1" i="0">
+                <a:solidFill>
+                  <a:srgbClr val="FFFFFF"/>
+                </a:solidFill>
+                <a:latin typeface="Arial"/>
+              </a:rPr>
+              <a:t>Arbeitsblatt 1: Wissenslandkarte – eigener Steckbrief</a:t>
+            </a:r>
+          </a:p>
+        </p:txBody>
+      </p:sp>
+    </p:spTree>
+  </p:cSld>
+  <p:clrMapOvr>
+    <a:masterClrMapping/>
+  </p:clrMapOvr>
+</p:sld>
+</file>
+
+<file path=ppt/slides/slide16.xml><?xml version="1.0" encoding="utf-8"?>
+<p:sld xmlns:a="http://schemas.openxmlformats.org/drawingml/2006/main" xmlns:p="http://schemas.openxmlformats.org/presentationml/2006/main" xmlns:r="http://schemas.openxmlformats.org/officeDocument/2006/relationships">
+  <p:cSld>
+    <p:bg>
+      <p:bgPr>
+        <a:solidFill>
+          <a:srgbClr val="FFFFFF"/>
+        </a:solidFill>
+        <a:effectLst/>
+      </p:bgPr>
+    </p:bg>
+    <p:spTree>
+      <p:nvGrpSpPr>
+        <p:cNvPr id="1" name=""/>
+        <p:cNvGrpSpPr/>
+        <p:nvPr/>
+      </p:nvGrpSpPr>
+      <p:grpSpPr/>
+      <p:sp>
+        <p:nvSpPr>
+          <p:cNvPr id="2" name="Rectangle 1"/>
+          <p:cNvSpPr/>
+          <p:nvPr/>
+        </p:nvSpPr>
+        <p:spPr>
+          <a:xfrm>
+            <a:off x="0" y="0"/>
+            <a:ext cx="73152" cy="6858000"/>
+          </a:xfrm>
+          <a:prstGeom prst="rect">
+            <a:avLst/>
+          </a:prstGeom>
+          <a:solidFill>
+            <a:srgbClr val="003DA5"/>
+          </a:solidFill>
+          <a:ln>
+            <a:noFill/>
+          </a:ln>
+        </p:spPr>
+        <p:style>
+          <a:lnRef idx="1">
+            <a:schemeClr val="accent1"/>
+          </a:lnRef>
+          <a:fillRef idx="3">
+            <a:schemeClr val="accent1"/>
+          </a:fillRef>
+          <a:effectRef idx="2">
+            <a:schemeClr val="accent1"/>
+          </a:effectRef>
+          <a:fontRef idx="minor">
+            <a:schemeClr val="lt1"/>
+          </a:fontRef>
+        </p:style>
+        <p:txBody>
+          <a:bodyPr rtlCol="0" anchor="ctr"/>
+          <a:lstStyle/>
+          <a:p>
+            <a:pPr algn="ctr"/>
+          </a:p>
+        </p:txBody>
+      </p:sp>
+      <p:sp>
+        <p:nvSpPr>
+          <p:cNvPr id="3" name="TextBox 2"/>
+          <p:cNvSpPr txBox="1"/>
+          <p:nvPr/>
+        </p:nvSpPr>
+        <p:spPr>
+          <a:xfrm>
+            <a:off x="228600" y="182880"/>
+            <a:ext cx="11430000" cy="320040"/>
+          </a:xfrm>
+          <a:prstGeom prst="rect">
+            <a:avLst/>
+          </a:prstGeom>
+          <a:noFill/>
+        </p:spPr>
+        <p:txBody>
+          <a:bodyPr wrap="square">
+            <a:spAutoFit/>
+          </a:bodyPr>
+          <a:lstStyle/>
+          <a:p>
+            <a:pPr algn="l"/>
+            <a:r>
+              <a:rPr sz="900" b="0" i="0">
+                <a:solidFill>
+                  <a:srgbClr val="556575"/>
+                </a:solidFill>
+                <a:latin typeface="Arial"/>
+              </a:rPr>
+              <a:t>M19 · 4.8 Arbeitsblätter</a:t>
+            </a:r>
+          </a:p>
+        </p:txBody>
+      </p:sp>
+      <p:sp>
+        <p:nvSpPr>
+          <p:cNvPr id="4" name="TextBox 3"/>
+          <p:cNvSpPr txBox="1"/>
+          <p:nvPr/>
+        </p:nvSpPr>
+        <p:spPr>
+          <a:xfrm>
+            <a:off x="365760" y="274320"/>
+            <a:ext cx="11430000" cy="777240"/>
+          </a:xfrm>
+          <a:prstGeom prst="rect">
+            <a:avLst/>
+          </a:prstGeom>
+          <a:noFill/>
+        </p:spPr>
+        <p:txBody>
+          <a:bodyPr wrap="square">
+            <a:spAutoFit/>
+          </a:bodyPr>
+          <a:lstStyle/>
+          <a:p>
+            <a:pPr algn="l"/>
+            <a:r>
+              <a:rPr sz="2200" b="1" i="0">
+                <a:solidFill>
+                  <a:srgbClr val="003DA5"/>
+                </a:solidFill>
+                <a:latin typeface="Arial"/>
+              </a:rPr>
+              <a:t>Arbeitsblatt 1: Wissenslandkarte – eigener Steckbrief</a:t>
+            </a:r>
+          </a:p>
+        </p:txBody>
+      </p:sp>
+      <p:sp>
+        <p:nvSpPr>
+          <p:cNvPr id="5" name="Rectangle 4"/>
+          <p:cNvSpPr/>
+          <p:nvPr/>
+        </p:nvSpPr>
+        <p:spPr>
+          <a:xfrm>
+            <a:off x="365760" y="1005840"/>
+            <a:ext cx="11430000" cy="27432"/>
+          </a:xfrm>
+          <a:prstGeom prst="rect">
+            <a:avLst/>
+          </a:prstGeom>
+          <a:solidFill>
+            <a:srgbClr val="D1D5DB"/>
+          </a:solidFill>
+          <a:ln>
+            <a:noFill/>
+          </a:ln>
+        </p:spPr>
+        <p:style>
+          <a:lnRef idx="1">
+            <a:schemeClr val="accent1"/>
+          </a:lnRef>
+          <a:fillRef idx="3">
+            <a:schemeClr val="accent1"/>
+          </a:fillRef>
+          <a:effectRef idx="2">
+            <a:schemeClr val="accent1"/>
+          </a:effectRef>
+          <a:fontRef idx="minor">
+            <a:schemeClr val="lt1"/>
+          </a:fontRef>
+        </p:style>
+        <p:txBody>
+          <a:bodyPr rtlCol="0" anchor="ctr"/>
+          <a:lstStyle/>
+          <a:p>
+            <a:pPr algn="ctr"/>
+          </a:p>
+        </p:txBody>
+      </p:sp>
+      <p:graphicFrame>
+        <p:nvGraphicFramePr>
+          <p:cNvPr id="6" name="Table 5"/>
+          <p:cNvGraphicFramePr>
+            <a:graphicFrameLocks noGrp="1"/>
+          </p:cNvGraphicFramePr>
+          <p:nvPr/>
+        </p:nvGraphicFramePr>
+        <p:xfrm>
+          <a:off x="365760" y="1143000"/>
+          <a:ext cx="11430000" cy="2852928"/>
+        </p:xfrm>
+        <a:graphic>
+          <a:graphicData uri="http://schemas.openxmlformats.org/drawingml/2006/table">
+            <a:tbl>
+              <a:tblPr firstRow="1" bandRow="1">
+                <a:tableStyleId>{5C22544A-7EE6-4342-B048-85BDC9FD1C3A}</a:tableStyleId>
+              </a:tblPr>
+              <a:tblGrid>
+                <a:gridCol w="5715000"/>
+                <a:gridCol w="5715000"/>
+              </a:tblGrid>
+              <a:tr h="475488">
+                <a:tc>
+                  <a:txBody>
+                    <a:bodyPr wrap="square"/>
+                    <a:lstStyle/>
+                    <a:p>
+                      <a:r>
+                        <a:rPr sz="1100" b="1">
+                          <a:solidFill>
+                            <a:srgbClr val="FFFFFF"/>
+                          </a:solidFill>
+                          <a:latin typeface="Arial"/>
+                        </a:rPr>
+                        <a:t>Frage</a:t>
+                      </a:r>
+                    </a:p>
+                  </a:txBody>
+                  <a:tcPr>
+                    <a:solidFill>
+                      <a:srgbClr val="003DA5"/>
+                    </a:solidFill>
+                  </a:tcPr>
+                </a:tc>
+                <a:tc>
+                  <a:txBody>
+                    <a:bodyPr wrap="square"/>
+                    <a:lstStyle/>
+                    <a:p>
+                      <a:r>
+                        <a:rPr sz="1100" b="1">
+                          <a:solidFill>
+                            <a:srgbClr val="FFFFFF"/>
+                          </a:solidFill>
+                          <a:latin typeface="Arial"/>
+                        </a:rPr>
+                        <a:t>Ihre Antwort</a:t>
+                      </a:r>
+                    </a:p>
+                  </a:txBody>
+                  <a:tcPr>
+                    <a:solidFill>
+                      <a:srgbClr val="003DA5"/>
+                    </a:solidFill>
+                  </a:tcPr>
+                </a:tc>
+              </a:tr>
+              <a:tr h="475488">
+                <a:tc>
+                  <a:txBody>
+                    <a:bodyPr wrap="square"/>
+                    <a:lstStyle/>
+                    <a:p>
+                      <a:r>
+                        <a:rPr sz="1100" b="0">
+                          <a:solidFill>
+                            <a:srgbClr val="1A1A1A"/>
+                          </a:solidFill>
+                          <a:latin typeface="Arial"/>
+                        </a:rPr>
+                        <a:t>Meine Branchenschwerpunkte (Top 3)</a:t>
+                      </a:r>
+                    </a:p>
+                  </a:txBody>
+                  <a:tcPr>
+                    <a:solidFill>
+                      <a:srgbClr val="FFFFFF"/>
+                    </a:solidFill>
+                  </a:tcPr>
+                </a:tc>
+                <a:tc>
+                  <a:txBody>
+                    <a:bodyPr wrap="square"/>
+                    <a:lstStyle/>
+                    <a:p>
+                      <a:r>
+                        <a:rPr sz="1100" b="0">
+                          <a:solidFill>
+                            <a:srgbClr val="1A1A1A"/>
+                          </a:solidFill>
+                          <a:latin typeface="Arial"/>
+                        </a:rPr>
+                        <a:t/>
+                      </a:r>
+                    </a:p>
+                  </a:txBody>
+                  <a:tcPr>
+                    <a:solidFill>
+                      <a:srgbClr val="FFFFFF"/>
+                    </a:solidFill>
+                  </a:tcPr>
+                </a:tc>
+              </a:tr>
+              <a:tr h="475488">
+                <a:tc>
+                  <a:txBody>
+                    <a:bodyPr wrap="square"/>
+                    <a:lstStyle/>
+                    <a:p>
+                      <a:r>
+                        <a:rPr sz="1100" b="0">
+                          <a:solidFill>
+                            <a:srgbClr val="1A1A1A"/>
+                          </a:solidFill>
+                          <a:latin typeface="Arial"/>
+                        </a:rPr>
+                        <a:t>Wissen, das ich habe und andere kaum (implizit)</a:t>
+                      </a:r>
+                    </a:p>
+                  </a:txBody>
+                  <a:tcPr>
+                    <a:solidFill>
+                      <a:srgbClr val="F4F6FA"/>
+                    </a:solidFill>
+                  </a:tcPr>
+                </a:tc>
+                <a:tc>
+                  <a:txBody>
+                    <a:bodyPr wrap="square"/>
+                    <a:lstStyle/>
+                    <a:p>
+                      <a:r>
+                        <a:rPr sz="1100" b="0">
+                          <a:solidFill>
+                            <a:srgbClr val="1A1A1A"/>
+                          </a:solidFill>
+                          <a:latin typeface="Arial"/>
+                        </a:rPr>
+                        <a:t/>
+                      </a:r>
+                    </a:p>
+                  </a:txBody>
+                  <a:tcPr>
+                    <a:solidFill>
+                      <a:srgbClr val="F4F6FA"/>
+                    </a:solidFill>
+                  </a:tcPr>
+                </a:tc>
+              </a:tr>
+              <a:tr h="475488">
+                <a:tc>
+                  <a:txBody>
+                    <a:bodyPr wrap="square"/>
+                    <a:lstStyle/>
+                    <a:p>
+                      <a:r>
+                        <a:rPr sz="1100" b="0">
+                          <a:solidFill>
+                            <a:srgbClr val="1A1A1A"/>
+                          </a:solidFill>
+                          <a:latin typeface="Arial"/>
+                        </a:rPr>
+                        <a:t>Erfahrungen, die ich gerne weitergeben würde</a:t>
+                      </a:r>
+                    </a:p>
+                  </a:txBody>
+                  <a:tcPr>
+                    <a:solidFill>
+                      <a:srgbClr val="FFFFFF"/>
+                    </a:solidFill>
+                  </a:tcPr>
+                </a:tc>
+                <a:tc>
+                  <a:txBody>
+                    <a:bodyPr wrap="square"/>
+                    <a:lstStyle/>
+                    <a:p>
+                      <a:r>
+                        <a:rPr sz="1100" b="0">
+                          <a:solidFill>
+                            <a:srgbClr val="1A1A1A"/>
+                          </a:solidFill>
+                          <a:latin typeface="Arial"/>
+                        </a:rPr>
+                        <a:t/>
+                      </a:r>
+                    </a:p>
+                  </a:txBody>
+                  <a:tcPr>
+                    <a:solidFill>
+                      <a:srgbClr val="FFFFFF"/>
+                    </a:solidFill>
+                  </a:tcPr>
+                </a:tc>
+              </a:tr>
+              <a:tr h="475488">
+                <a:tc>
+                  <a:txBody>
+                    <a:bodyPr wrap="square"/>
+                    <a:lstStyle/>
+                    <a:p>
+                      <a:r>
+                        <a:rPr sz="1100" b="0">
+                          <a:solidFill>
+                            <a:srgbClr val="1A1A1A"/>
+                          </a:solidFill>
+                          <a:latin typeface="Arial"/>
+                        </a:rPr>
+                        <a:t>Themen, bei denen ich von anderen lernen möchte</a:t>
+                      </a:r>
+                    </a:p>
+                  </a:txBody>
+                  <a:tcPr>
+                    <a:solidFill>
+                      <a:srgbClr val="F4F6FA"/>
+                    </a:solidFill>
+                  </a:tcPr>
+                </a:tc>
+                <a:tc>
+                  <a:txBody>
+                    <a:bodyPr wrap="square"/>
+                    <a:lstStyle/>
+                    <a:p>
+                      <a:r>
+                        <a:rPr sz="1100" b="0">
+                          <a:solidFill>
+                            <a:srgbClr val="1A1A1A"/>
+                          </a:solidFill>
+                          <a:latin typeface="Arial"/>
+                        </a:rPr>
+                        <a:t/>
+                      </a:r>
+                    </a:p>
+                  </a:txBody>
+                  <a:tcPr>
+                    <a:solidFill>
+                      <a:srgbClr val="F4F6FA"/>
+                    </a:solidFill>
+                  </a:tcPr>
+                </a:tc>
+              </a:tr>
+              <a:tr h="475488">
+                <a:tc>
+                  <a:txBody>
+                    <a:bodyPr wrap="square"/>
+                    <a:lstStyle/>
+                    <a:p>
+                      <a:r>
+                        <a:rPr sz="1100" b="0">
+                          <a:solidFill>
+                            <a:srgbClr val="1A1A1A"/>
+                          </a:solidFill>
+                          <a:latin typeface="Arial"/>
+                        </a:rPr>
+                        <a:t>Kollegen, die ich gerne als Tandem-Partner hätte</a:t>
+                      </a:r>
+                    </a:p>
+                  </a:txBody>
+                  <a:tcPr>
+                    <a:solidFill>
+                      <a:srgbClr val="FFFFFF"/>
+                    </a:solidFill>
+                  </a:tcPr>
+                </a:tc>
+                <a:tc>
+                  <a:txBody>
+                    <a:bodyPr wrap="square"/>
+                    <a:lstStyle/>
+                    <a:p>
+                      <a:r>
+                        <a:rPr sz="1100" b="0">
+                          <a:solidFill>
+                            <a:srgbClr val="1A1A1A"/>
+                          </a:solidFill>
+                          <a:latin typeface="Arial"/>
+                        </a:rPr>
+                        <a:t/>
+                      </a:r>
+                    </a:p>
+                  </a:txBody>
+                  <a:tcPr>
+                    <a:solidFill>
+                      <a:srgbClr val="FFFFFF"/>
+                    </a:solidFill>
+                  </a:tcPr>
+                </a:tc>
+              </a:tr>
+            </a:tbl>
+          </a:graphicData>
+        </a:graphic>
+      </p:graphicFrame>
+    </p:spTree>
+  </p:cSld>
+  <p:clrMapOvr>
+    <a:masterClrMapping/>
+  </p:clrMapOvr>
+</p:sld>
+</file>
+
+<file path=ppt/slides/slide17.xml><?xml version="1.0" encoding="utf-8"?>
+<p:sld xmlns:a="http://schemas.openxmlformats.org/drawingml/2006/main" xmlns:p="http://schemas.openxmlformats.org/presentationml/2006/main" xmlns:r="http://schemas.openxmlformats.org/officeDocument/2006/relationships">
+  <p:cSld>
+    <p:bg>
+      <p:bgPr>
+        <a:solidFill>
+          <a:srgbClr val="1A1A1A"/>
+        </a:solidFill>
+        <a:effectLst/>
+      </p:bgPr>
+    </p:bg>
+    <p:spTree>
+      <p:nvGrpSpPr>
+        <p:cNvPr id="1" name=""/>
+        <p:cNvGrpSpPr/>
+        <p:nvPr/>
+      </p:nvGrpSpPr>
+      <p:grpSpPr/>
+      <p:sp>
+        <p:nvSpPr>
+          <p:cNvPr id="2" name="Rectangle 1"/>
+          <p:cNvSpPr/>
+          <p:nvPr/>
+        </p:nvSpPr>
+        <p:spPr>
+          <a:xfrm>
+            <a:off x="0" y="0"/>
+            <a:ext cx="73152" cy="6858000"/>
+          </a:xfrm>
+          <a:prstGeom prst="rect">
+            <a:avLst/>
+          </a:prstGeom>
+          <a:solidFill>
+            <a:srgbClr val="E05B00"/>
+          </a:solidFill>
+          <a:ln>
+            <a:noFill/>
+          </a:ln>
+        </p:spPr>
+        <p:style>
+          <a:lnRef idx="1">
+            <a:schemeClr val="accent1"/>
+          </a:lnRef>
+          <a:fillRef idx="3">
+            <a:schemeClr val="accent1"/>
+          </a:fillRef>
+          <a:effectRef idx="2">
+            <a:schemeClr val="accent1"/>
+          </a:effectRef>
+          <a:fontRef idx="minor">
+            <a:schemeClr val="lt1"/>
+          </a:fontRef>
+        </p:style>
+        <p:txBody>
+          <a:bodyPr rtlCol="0" anchor="ctr"/>
+          <a:lstStyle/>
+          <a:p>
+            <a:pPr algn="ctr"/>
+          </a:p>
+        </p:txBody>
+      </p:sp>
+      <p:sp>
+        <p:nvSpPr>
+          <p:cNvPr id="3" name="TextBox 2"/>
+          <p:cNvSpPr txBox="1"/>
+          <p:nvPr/>
+        </p:nvSpPr>
+        <p:spPr>
+          <a:xfrm>
+            <a:off x="365760" y="2011680"/>
+            <a:ext cx="11430000" cy="2011680"/>
+          </a:xfrm>
+          <a:prstGeom prst="rect">
+            <a:avLst/>
+          </a:prstGeom>
+          <a:noFill/>
+        </p:spPr>
+        <p:txBody>
+          <a:bodyPr wrap="square">
+            <a:spAutoFit/>
+          </a:bodyPr>
+          <a:lstStyle/>
+          <a:p>
+            <a:pPr algn="l"/>
+            <a:r>
+              <a:rPr sz="3600" b="1" i="0">
+                <a:solidFill>
+                  <a:srgbClr val="FFFFFF"/>
+                </a:solidFill>
+                <a:latin typeface="Arial"/>
+              </a:rPr>
+              <a:t>Arbeitsblatt 2: Fallbesprechung vorbereiten</a:t>
+            </a:r>
+          </a:p>
+        </p:txBody>
+      </p:sp>
+    </p:spTree>
+  </p:cSld>
+  <p:clrMapOvr>
+    <a:masterClrMapping/>
+  </p:clrMapOvr>
+</p:sld>
+</file>
+
+<file path=ppt/slides/slide18.xml><?xml version="1.0" encoding="utf-8"?>
+<p:sld xmlns:a="http://schemas.openxmlformats.org/drawingml/2006/main" xmlns:p="http://schemas.openxmlformats.org/presentationml/2006/main" xmlns:r="http://schemas.openxmlformats.org/officeDocument/2006/relationships">
+  <p:cSld>
+    <p:bg>
+      <p:bgPr>
+        <a:solidFill>
+          <a:srgbClr val="FFFFFF"/>
+        </a:solidFill>
+        <a:effectLst/>
+      </p:bgPr>
+    </p:bg>
+    <p:spTree>
+      <p:nvGrpSpPr>
+        <p:cNvPr id="1" name=""/>
+        <p:cNvGrpSpPr/>
+        <p:nvPr/>
+      </p:nvGrpSpPr>
+      <p:grpSpPr/>
+      <p:sp>
+        <p:nvSpPr>
+          <p:cNvPr id="2" name="Rectangle 1"/>
+          <p:cNvSpPr/>
+          <p:nvPr/>
+        </p:nvSpPr>
+        <p:spPr>
+          <a:xfrm>
+            <a:off x="0" y="0"/>
+            <a:ext cx="73152" cy="6858000"/>
+          </a:xfrm>
+          <a:prstGeom prst="rect">
+            <a:avLst/>
+          </a:prstGeom>
+          <a:solidFill>
+            <a:srgbClr val="003DA5"/>
+          </a:solidFill>
+          <a:ln>
+            <a:noFill/>
+          </a:ln>
+        </p:spPr>
+        <p:style>
+          <a:lnRef idx="1">
+            <a:schemeClr val="accent1"/>
+          </a:lnRef>
+          <a:fillRef idx="3">
+            <a:schemeClr val="accent1"/>
+          </a:fillRef>
+          <a:effectRef idx="2">
+            <a:schemeClr val="accent1"/>
+          </a:effectRef>
+          <a:fontRef idx="minor">
+            <a:schemeClr val="lt1"/>
+          </a:fontRef>
+        </p:style>
+        <p:txBody>
+          <a:bodyPr rtlCol="0" anchor="ctr"/>
+          <a:lstStyle/>
+          <a:p>
+            <a:pPr algn="ctr"/>
+          </a:p>
+        </p:txBody>
+      </p:sp>
+      <p:sp>
+        <p:nvSpPr>
+          <p:cNvPr id="3" name="TextBox 2"/>
+          <p:cNvSpPr txBox="1"/>
+          <p:nvPr/>
+        </p:nvSpPr>
+        <p:spPr>
+          <a:xfrm>
+            <a:off x="228600" y="182880"/>
+            <a:ext cx="11430000" cy="320040"/>
+          </a:xfrm>
+          <a:prstGeom prst="rect">
+            <a:avLst/>
+          </a:prstGeom>
+          <a:noFill/>
+        </p:spPr>
+        <p:txBody>
+          <a:bodyPr wrap="square">
+            <a:spAutoFit/>
+          </a:bodyPr>
+          <a:lstStyle/>
+          <a:p>
+            <a:pPr algn="l"/>
+            <a:r>
+              <a:rPr sz="900" b="0" i="0">
+                <a:solidFill>
+                  <a:srgbClr val="556575"/>
+                </a:solidFill>
+                <a:latin typeface="Arial"/>
+              </a:rPr>
+              <a:t>M19 · 4.8 Arbeitsblätter</a:t>
+            </a:r>
+          </a:p>
+        </p:txBody>
+      </p:sp>
+      <p:sp>
+        <p:nvSpPr>
+          <p:cNvPr id="4" name="TextBox 3"/>
+          <p:cNvSpPr txBox="1"/>
+          <p:nvPr/>
+        </p:nvSpPr>
+        <p:spPr>
+          <a:xfrm>
+            <a:off x="365760" y="274320"/>
+            <a:ext cx="11430000" cy="777240"/>
+          </a:xfrm>
+          <a:prstGeom prst="rect">
+            <a:avLst/>
+          </a:prstGeom>
+          <a:noFill/>
+        </p:spPr>
+        <p:txBody>
+          <a:bodyPr wrap="square">
+            <a:spAutoFit/>
+          </a:bodyPr>
+          <a:lstStyle/>
+          <a:p>
+            <a:pPr algn="l"/>
+            <a:r>
+              <a:rPr sz="2200" b="1" i="0">
+                <a:solidFill>
+                  <a:srgbClr val="003DA5"/>
+                </a:solidFill>
+                <a:latin typeface="Arial"/>
+              </a:rPr>
+              <a:t>Arbeitsblatt 2: Fallbesprechung vorbereiten</a:t>
+            </a:r>
+          </a:p>
+        </p:txBody>
+      </p:sp>
+      <p:sp>
+        <p:nvSpPr>
+          <p:cNvPr id="5" name="Rectangle 4"/>
+          <p:cNvSpPr/>
+          <p:nvPr/>
+        </p:nvSpPr>
+        <p:spPr>
+          <a:xfrm>
+            <a:off x="365760" y="1005840"/>
+            <a:ext cx="11430000" cy="27432"/>
+          </a:xfrm>
+          <a:prstGeom prst="rect">
+            <a:avLst/>
+          </a:prstGeom>
+          <a:solidFill>
+            <a:srgbClr val="D1D5DB"/>
+          </a:solidFill>
+          <a:ln>
+            <a:noFill/>
+          </a:ln>
+        </p:spPr>
+        <p:style>
+          <a:lnRef idx="1">
+            <a:schemeClr val="accent1"/>
+          </a:lnRef>
+          <a:fillRef idx="3">
+            <a:schemeClr val="accent1"/>
+          </a:fillRef>
+          <a:effectRef idx="2">
+            <a:schemeClr val="accent1"/>
+          </a:effectRef>
+          <a:fontRef idx="minor">
+            <a:schemeClr val="lt1"/>
+          </a:fontRef>
+        </p:style>
+        <p:txBody>
+          <a:bodyPr rtlCol="0" anchor="ctr"/>
+          <a:lstStyle/>
+          <a:p>
+            <a:pPr algn="ctr"/>
+          </a:p>
+        </p:txBody>
+      </p:sp>
+      <p:graphicFrame>
+        <p:nvGraphicFramePr>
+          <p:cNvPr id="6" name="Table 5"/>
+          <p:cNvGraphicFramePr>
+            <a:graphicFrameLocks noGrp="1"/>
+          </p:cNvGraphicFramePr>
+          <p:nvPr/>
+        </p:nvGraphicFramePr>
+        <p:xfrm>
+          <a:off x="365760" y="1143000"/>
+          <a:ext cx="11430000" cy="2852928"/>
+        </p:xfrm>
+        <a:graphic>
+          <a:graphicData uri="http://schemas.openxmlformats.org/drawingml/2006/table">
+            <a:tbl>
+              <a:tblPr firstRow="1" bandRow="1">
+                <a:tableStyleId>{5C22544A-7EE6-4342-B048-85BDC9FD1C3A}</a:tableStyleId>
+              </a:tblPr>
+              <a:tblGrid>
+                <a:gridCol w="5715000"/>
+                <a:gridCol w="5715000"/>
+              </a:tblGrid>
+              <a:tr h="475488">
+                <a:tc>
+                  <a:txBody>
+                    <a:bodyPr wrap="square"/>
+                    <a:lstStyle/>
+                    <a:p>
+                      <a:r>
+                        <a:rPr sz="1100" b="1">
+                          <a:solidFill>
+                            <a:srgbClr val="FFFFFF"/>
+                          </a:solidFill>
+                          <a:latin typeface="Arial"/>
+                        </a:rPr>
+                        <a:t>Punkt</a:t>
+                      </a:r>
+                    </a:p>
+                  </a:txBody>
+                  <a:tcPr>
+                    <a:solidFill>
+                      <a:srgbClr val="003DA5"/>
+                    </a:solidFill>
+                  </a:tcPr>
+                </a:tc>
+                <a:tc>
+                  <a:txBody>
+                    <a:bodyPr wrap="square"/>
+                    <a:lstStyle/>
+                    <a:p>
+                      <a:r>
+                        <a:rPr sz="1100" b="1">
+                          <a:solidFill>
+                            <a:srgbClr val="FFFFFF"/>
+                          </a:solidFill>
+                          <a:latin typeface="Arial"/>
+                        </a:rPr>
+                        <a:t>Ihre Notizen</a:t>
+                      </a:r>
+                    </a:p>
+                  </a:txBody>
+                  <a:tcPr>
+                    <a:solidFill>
+                      <a:srgbClr val="003DA5"/>
+                    </a:solidFill>
+                  </a:tcPr>
+                </a:tc>
+              </a:tr>
+              <a:tr h="475488">
+                <a:tc>
+                  <a:txBody>
+                    <a:bodyPr wrap="square"/>
+                    <a:lstStyle/>
+                    <a:p>
+                      <a:r>
+                        <a:rPr sz="1100" b="0">
+                          <a:solidFill>
+                            <a:srgbClr val="1A1A1A"/>
+                          </a:solidFill>
+                          <a:latin typeface="Arial"/>
+                        </a:rPr>
+                        <a:t>Worum geht es (1 Satz)?</a:t>
+                      </a:r>
+                    </a:p>
+                  </a:txBody>
+                  <a:tcPr>
+                    <a:solidFill>
+                      <a:srgbClr val="FFFFFF"/>
+                    </a:solidFill>
+                  </a:tcPr>
+                </a:tc>
+                <a:tc>
+                  <a:txBody>
+                    <a:bodyPr wrap="square"/>
+                    <a:lstStyle/>
+                    <a:p>
+                      <a:r>
+                        <a:rPr sz="1100" b="0">
+                          <a:solidFill>
+                            <a:srgbClr val="1A1A1A"/>
+                          </a:solidFill>
+                          <a:latin typeface="Arial"/>
+                        </a:rPr>
+                        <a:t/>
+                      </a:r>
+                    </a:p>
+                  </a:txBody>
+                  <a:tcPr>
+                    <a:solidFill>
+                      <a:srgbClr val="FFFFFF"/>
+                    </a:solidFill>
+                  </a:tcPr>
+                </a:tc>
+              </a:tr>
+              <a:tr h="475488">
+                <a:tc>
+                  <a:txBody>
+                    <a:bodyPr wrap="square"/>
+                    <a:lstStyle/>
+                    <a:p>
+                      <a:r>
+                        <a:rPr sz="1100" b="0">
+                          <a:solidFill>
+                            <a:srgbClr val="1A1A1A"/>
+                          </a:solidFill>
+                          <a:latin typeface="Arial"/>
+                        </a:rPr>
+                        <a:t>Was ist mein Ziel/meine Frage an das Team?</a:t>
+                      </a:r>
+                    </a:p>
+                  </a:txBody>
+                  <a:tcPr>
+                    <a:solidFill>
+                      <a:srgbClr val="F4F6FA"/>
+                    </a:solidFill>
+                  </a:tcPr>
+                </a:tc>
+                <a:tc>
+                  <a:txBody>
+                    <a:bodyPr wrap="square"/>
+                    <a:lstStyle/>
+                    <a:p>
+                      <a:r>
+                        <a:rPr sz="1100" b="0">
+                          <a:solidFill>
+                            <a:srgbClr val="1A1A1A"/>
+                          </a:solidFill>
+                          <a:latin typeface="Arial"/>
+                        </a:rPr>
+                        <a:t/>
+                      </a:r>
+                    </a:p>
+                  </a:txBody>
+                  <a:tcPr>
+                    <a:solidFill>
+                      <a:srgbClr val="F4F6FA"/>
+                    </a:solidFill>
+                  </a:tcPr>
+                </a:tc>
+              </a:tr>
+              <a:tr h="475488">
+                <a:tc>
+                  <a:txBody>
+                    <a:bodyPr wrap="square"/>
+                    <a:lstStyle/>
+                    <a:p>
+                      <a:r>
+                        <a:rPr sz="1100" b="0">
+                          <a:solidFill>
+                            <a:srgbClr val="1A1A1A"/>
+                          </a:solidFill>
+                          <a:latin typeface="Arial"/>
+                        </a:rPr>
+                        <a:t>Was habe ich bereits versucht?</a:t>
+                      </a:r>
+                    </a:p>
+                  </a:txBody>
+                  <a:tcPr>
+                    <a:solidFill>
+                      <a:srgbClr val="FFFFFF"/>
+                    </a:solidFill>
+                  </a:tcPr>
+                </a:tc>
+                <a:tc>
+                  <a:txBody>
+                    <a:bodyPr wrap="square"/>
+                    <a:lstStyle/>
+                    <a:p>
+                      <a:r>
+                        <a:rPr sz="1100" b="0">
+                          <a:solidFill>
+                            <a:srgbClr val="1A1A1A"/>
+                          </a:solidFill>
+                          <a:latin typeface="Arial"/>
+                        </a:rPr>
+                        <a:t/>
+                      </a:r>
+                    </a:p>
+                  </a:txBody>
+                  <a:tcPr>
+                    <a:solidFill>
+                      <a:srgbClr val="FFFFFF"/>
+                    </a:solidFill>
+                  </a:tcPr>
+                </a:tc>
+              </a:tr>
+              <a:tr h="475488">
+                <a:tc>
+                  <a:txBody>
+                    <a:bodyPr wrap="square"/>
+                    <a:lstStyle/>
+                    <a:p>
+                      <a:r>
+                        <a:rPr sz="1100" b="0">
+                          <a:solidFill>
+                            <a:srgbClr val="1A1A1A"/>
+                          </a:solidFill>
+                          <a:latin typeface="Arial"/>
+                        </a:rPr>
+                        <a:t>Was ist der Kontext (Branche, Unternehmensgröße, Beziehungshistorie)?</a:t>
+                      </a:r>
+                    </a:p>
+                  </a:txBody>
+                  <a:tcPr>
+                    <a:solidFill>
+                      <a:srgbClr val="F4F6FA"/>
+                    </a:solidFill>
+                  </a:tcPr>
+                </a:tc>
+                <a:tc>
+                  <a:txBody>
+                    <a:bodyPr wrap="square"/>
+                    <a:lstStyle/>
+                    <a:p>
+                      <a:r>
+                        <a:rPr sz="1100" b="0">
+                          <a:solidFill>
+                            <a:srgbClr val="1A1A1A"/>
+                          </a:solidFill>
+                          <a:latin typeface="Arial"/>
+                        </a:rPr>
+                        <a:t/>
+                      </a:r>
+                    </a:p>
+                  </a:txBody>
+                  <a:tcPr>
+                    <a:solidFill>
+                      <a:srgbClr val="F4F6FA"/>
+                    </a:solidFill>
+                  </a:tcPr>
+                </a:tc>
+              </a:tr>
+              <a:tr h="475488">
+                <a:tc>
+                  <a:txBody>
+                    <a:bodyPr wrap="square"/>
+                    <a:lstStyle/>
+                    <a:p>
+                      <a:r>
+                        <a:rPr sz="1100" b="0">
+                          <a:solidFill>
+                            <a:srgbClr val="1A1A1A"/>
+                          </a:solidFill>
+                          <a:latin typeface="Arial"/>
+                        </a:rPr>
+                        <a:t>Was wäre für mich ein gutes Ergebnis dieser Besprechung?</a:t>
+                      </a:r>
+                    </a:p>
+                  </a:txBody>
+                  <a:tcPr>
+                    <a:solidFill>
+                      <a:srgbClr val="FFFFFF"/>
+                    </a:solidFill>
+                  </a:tcPr>
+                </a:tc>
+                <a:tc>
+                  <a:txBody>
+                    <a:bodyPr wrap="square"/>
+                    <a:lstStyle/>
+                    <a:p>
+                      <a:r>
+                        <a:rPr sz="1100" b="0">
+                          <a:solidFill>
+                            <a:srgbClr val="1A1A1A"/>
+                          </a:solidFill>
+                          <a:latin typeface="Arial"/>
+                        </a:rPr>
+                        <a:t/>
+                      </a:r>
+                    </a:p>
+                  </a:txBody>
+                  <a:tcPr>
+                    <a:solidFill>
+                      <a:srgbClr val="FFFFFF"/>
+                    </a:solidFill>
+                  </a:tcPr>
+                </a:tc>
+              </a:tr>
+            </a:tbl>
+          </a:graphicData>
+        </a:graphic>
+      </p:graphicFrame>
+    </p:spTree>
+  </p:cSld>
+  <p:clrMapOvr>
+    <a:masterClrMapping/>
+  </p:clrMapOvr>
+</p:sld>
+</file>
+
+<file path=ppt/slides/slide19.xml><?xml version="1.0" encoding="utf-8"?>
+<p:sld xmlns:a="http://schemas.openxmlformats.org/drawingml/2006/main" xmlns:p="http://schemas.openxmlformats.org/presentationml/2006/main" xmlns:r="http://schemas.openxmlformats.org/officeDocument/2006/relationships">
+  <p:cSld>
+    <p:bg>
+      <p:bgPr>
+        <a:solidFill>
+          <a:srgbClr val="1A1A1A"/>
+        </a:solidFill>
+        <a:effectLst/>
+      </p:bgPr>
+    </p:bg>
+    <p:spTree>
+      <p:nvGrpSpPr>
+        <p:cNvPr id="1" name=""/>
+        <p:cNvGrpSpPr/>
+        <p:nvPr/>
+      </p:nvGrpSpPr>
+      <p:grpSpPr/>
+      <p:sp>
+        <p:nvSpPr>
+          <p:cNvPr id="2" name="Rectangle 1"/>
+          <p:cNvSpPr/>
+          <p:nvPr/>
+        </p:nvSpPr>
+        <p:spPr>
+          <a:xfrm>
+            <a:off x="0" y="0"/>
+            <a:ext cx="73152" cy="6858000"/>
+          </a:xfrm>
+          <a:prstGeom prst="rect">
+            <a:avLst/>
+          </a:prstGeom>
+          <a:solidFill>
+            <a:srgbClr val="E05B00"/>
+          </a:solidFill>
+          <a:ln>
+            <a:noFill/>
+          </a:ln>
+        </p:spPr>
+        <p:style>
+          <a:lnRef idx="1">
+            <a:schemeClr val="accent1"/>
+          </a:lnRef>
+          <a:fillRef idx="3">
+            <a:schemeClr val="accent1"/>
+          </a:fillRef>
+          <a:effectRef idx="2">
+            <a:schemeClr val="accent1"/>
+          </a:effectRef>
+          <a:fontRef idx="minor">
+            <a:schemeClr val="lt1"/>
+          </a:fontRef>
+        </p:style>
+        <p:txBody>
+          <a:bodyPr rtlCol="0" anchor="ctr"/>
+          <a:lstStyle/>
+          <a:p>
+            <a:pPr algn="ctr"/>
+          </a:p>
+        </p:txBody>
+      </p:sp>
+      <p:sp>
+        <p:nvSpPr>
+          <p:cNvPr id="3" name="TextBox 2"/>
+          <p:cNvSpPr txBox="1"/>
+          <p:nvPr/>
+        </p:nvSpPr>
+        <p:spPr>
+          <a:xfrm>
+            <a:off x="365760" y="2011680"/>
+            <a:ext cx="11430000" cy="2011680"/>
+          </a:xfrm>
+          <a:prstGeom prst="rect">
+            <a:avLst/>
+          </a:prstGeom>
+          <a:noFill/>
+        </p:spPr>
+        <p:txBody>
+          <a:bodyPr wrap="square">
+            <a:spAutoFit/>
+          </a:bodyPr>
+          <a:lstStyle/>
+          <a:p>
+            <a:pPr algn="l"/>
+            <a:r>
+              <a:rPr sz="3600" b="1" i="0">
+                <a:solidFill>
+                  <a:srgbClr val="FFFFFF"/>
+                </a:solidFill>
+                <a:latin typeface="Arial"/>
+              </a:rPr>
+              <a:t>Arbeitsblatt 3: Wissenstransfer-Maßnahmenplan</a:t>
+            </a:r>
+          </a:p>
+        </p:txBody>
+      </p:sp>
+    </p:spTree>
+  </p:cSld>
+  <p:clrMapOvr>
+    <a:masterClrMapping/>
+  </p:clrMapOvr>
+</p:sld>
+</file>
+
+<file path=ppt/slides/slide2.xml><?xml version="1.0" encoding="utf-8"?>
+<p:sld xmlns:a="http://schemas.openxmlformats.org/drawingml/2006/main" xmlns:p="http://schemas.openxmlformats.org/presentationml/2006/main" xmlns:r="http://schemas.openxmlformats.org/officeDocument/2006/relationships">
+  <p:cSld>
+    <p:bg>
+      <p:bgPr>
+        <a:solidFill>
+          <a:srgbClr val="F4F6FA"/>
+        </a:solidFill>
+        <a:effectLst/>
+      </p:bgPr>
+    </p:bg>
+    <p:spTree>
+      <p:nvGrpSpPr>
+        <p:cNvPr id="1" name=""/>
+        <p:cNvGrpSpPr/>
+        <p:nvPr/>
+      </p:nvGrpSpPr>
+      <p:grpSpPr/>
+      <p:sp>
+        <p:nvSpPr>
+          <p:cNvPr id="2" name="Rectangle 1"/>
+          <p:cNvSpPr/>
+          <p:nvPr/>
+        </p:nvSpPr>
+        <p:spPr>
+          <a:xfrm>
+            <a:off x="0" y="0"/>
+            <a:ext cx="73152" cy="6858000"/>
+          </a:xfrm>
+          <a:prstGeom prst="rect">
+            <a:avLst/>
+          </a:prstGeom>
+          <a:solidFill>
+            <a:srgbClr val="003DA5"/>
+          </a:solidFill>
+          <a:ln>
+            <a:noFill/>
+          </a:ln>
+        </p:spPr>
+        <p:style>
+          <a:lnRef idx="1">
+            <a:schemeClr val="accent1"/>
+          </a:lnRef>
+          <a:fillRef idx="3">
+            <a:schemeClr val="accent1"/>
+          </a:fillRef>
+          <a:effectRef idx="2">
+            <a:schemeClr val="accent1"/>
+          </a:effectRef>
+          <a:fontRef idx="minor">
+            <a:schemeClr val="lt1"/>
+          </a:fontRef>
+        </p:style>
+        <p:txBody>
+          <a:bodyPr rtlCol="0" anchor="ctr"/>
+          <a:lstStyle/>
+          <a:p>
+            <a:pPr algn="ctr"/>
+          </a:p>
+        </p:txBody>
+      </p:sp>
+      <p:sp>
+        <p:nvSpPr>
+          <p:cNvPr id="3" name="Rectangle 2"/>
+          <p:cNvSpPr/>
+          <p:nvPr/>
+        </p:nvSpPr>
+        <p:spPr>
+          <a:xfrm>
+            <a:off x="228600" y="804672"/>
+            <a:ext cx="11612880" cy="22860"/>
+          </a:xfrm>
+          <a:prstGeom prst="rect">
+            <a:avLst/>
+          </a:prstGeom>
+          <a:solidFill>
+            <a:srgbClr val="D1D5DB"/>
+          </a:solidFill>
+          <a:ln>
+            <a:noFill/>
+          </a:ln>
+        </p:spPr>
+        <p:style>
+          <a:lnRef idx="1">
+            <a:schemeClr val="accent1"/>
+          </a:lnRef>
+          <a:fillRef idx="3">
+            <a:schemeClr val="accent1"/>
+          </a:fillRef>
+          <a:effectRef idx="2">
+            <a:schemeClr val="accent1"/>
+          </a:effectRef>
+          <a:fontRef idx="minor">
+            <a:schemeClr val="lt1"/>
+          </a:fontRef>
+        </p:style>
+        <p:txBody>
+          <a:bodyPr rtlCol="0" anchor="ctr"/>
+          <a:lstStyle/>
+          <a:p>
+            <a:pPr algn="ctr"/>
+          </a:p>
+        </p:txBody>
+      </p:sp>
+      <p:sp>
+        <p:nvSpPr>
+          <p:cNvPr id="4" name="TextBox 3"/>
+          <p:cNvSpPr txBox="1"/>
+          <p:nvPr/>
+        </p:nvSpPr>
+        <p:spPr>
+          <a:xfrm>
+            <a:off x="365760" y="320040"/>
+            <a:ext cx="4572000" cy="347472"/>
+          </a:xfrm>
+          <a:prstGeom prst="rect">
+            <a:avLst/>
+          </a:prstGeom>
+          <a:noFill/>
+        </p:spPr>
+        <p:txBody>
+          <a:bodyPr wrap="square">
+            <a:spAutoFit/>
+          </a:bodyPr>
+          <a:lstStyle/>
+          <a:p>
+            <a:pPr algn="l"/>
+            <a:r>
+              <a:rPr sz="900" b="1" i="0">
+                <a:solidFill>
+                  <a:srgbClr val="003DA5"/>
+                </a:solidFill>
+                <a:latin typeface="Arial"/>
+              </a:rPr>
+              <a:t>LERNZIELE</a:t>
+            </a:r>
+          </a:p>
+        </p:txBody>
+      </p:sp>
+      <p:sp>
+        <p:nvSpPr>
+          <p:cNvPr id="5" name="TextBox 4"/>
+          <p:cNvSpPr txBox="1"/>
+          <p:nvPr/>
+        </p:nvSpPr>
+        <p:spPr>
+          <a:xfrm>
+            <a:off x="365760" y="502920"/>
+            <a:ext cx="10058400" cy="640080"/>
+          </a:xfrm>
+          <a:prstGeom prst="rect">
+            <a:avLst/>
+          </a:prstGeom>
+          <a:noFill/>
+        </p:spPr>
+        <p:txBody>
+          <a:bodyPr wrap="square">
+            <a:spAutoFit/>
+          </a:bodyPr>
+          <a:lstStyle/>
+          <a:p>
+            <a:pPr algn="l"/>
+            <a:r>
+              <a:rPr sz="2400" b="1" i="0">
+                <a:solidFill>
+                  <a:srgbClr val="1A1A1A"/>
+                </a:solidFill>
+                <a:latin typeface="Arial"/>
+              </a:rPr>
+              <a:t>Was Sie nach diesem Modul können.</a:t>
+            </a:r>
+          </a:p>
+        </p:txBody>
+      </p:sp>
+      <p:sp>
+        <p:nvSpPr>
+          <p:cNvPr id="6" name="TextBox 5"/>
+          <p:cNvSpPr txBox="1"/>
+          <p:nvPr/>
+        </p:nvSpPr>
+        <p:spPr>
+          <a:xfrm>
+            <a:off x="365760" y="1234440"/>
+            <a:ext cx="11430000" cy="5303520"/>
+          </a:xfrm>
+          <a:prstGeom prst="rect">
+            <a:avLst/>
+          </a:prstGeom>
+          <a:noFill/>
+        </p:spPr>
+        <p:txBody>
+          <a:bodyPr wrap="square">
+            <a:spAutoFit/>
+          </a:bodyPr>
+          <a:lstStyle/>
+          <a:p>
+            <a:pPr>
+              <a:spcBef>
+                <a:spcPts val="500"/>
+              </a:spcBef>
+            </a:pPr>
+            <a:r>
+              <a:rPr sz="1500">
+                <a:solidFill>
+                  <a:srgbClr val="003DA5"/>
+                </a:solidFill>
+                <a:latin typeface="Arial"/>
+              </a:rPr>
+              <a:t>▪  </a:t>
+            </a:r>
+            <a:r>
+              <a:rPr sz="1700">
+                <a:solidFill>
+                  <a:srgbClr val="1A1A1A"/>
+                </a:solidFill>
+                <a:latin typeface="Arial"/>
+              </a:rPr>
+              <a:t>Explizites von implizitem Wissen unterscheiden und ungenutzte Transferbereiche identifizieren</a:t>
+            </a:r>
+          </a:p>
+          <a:p>
+            <a:pPr>
+              <a:spcBef>
+                <a:spcPts val="500"/>
+              </a:spcBef>
+            </a:pPr>
+            <a:r>
+              <a:rPr sz="1500">
+                <a:solidFill>
+                  <a:srgbClr val="003DA5"/>
+                </a:solidFill>
+                <a:latin typeface="Arial"/>
+              </a:rPr>
+              <a:t>▪  </a:t>
+            </a:r>
+            <a:r>
+              <a:rPr sz="1700">
+                <a:solidFill>
+                  <a:srgbClr val="1A1A1A"/>
+                </a:solidFill>
+                <a:latin typeface="Arial"/>
+              </a:rPr>
+              <a:t>Mindestens zwei Wissenstransfer-Methoden auf den eigenen Teamkontext anwenden</a:t>
+            </a:r>
+          </a:p>
+          <a:p>
+            <a:pPr>
+              <a:spcBef>
+                <a:spcPts val="500"/>
+              </a:spcBef>
+            </a:pPr>
+            <a:r>
+              <a:rPr sz="1500">
+                <a:solidFill>
+                  <a:srgbClr val="003DA5"/>
+                </a:solidFill>
+                <a:latin typeface="Arial"/>
+              </a:rPr>
+              <a:t>▪  </a:t>
+            </a:r>
+            <a:r>
+              <a:rPr sz="1700">
+                <a:solidFill>
+                  <a:srgbClr val="1A1A1A"/>
+                </a:solidFill>
+                <a:latin typeface="Arial"/>
+              </a:rPr>
+              <a:t>Typische Transferbarrieren analysieren und Gegenmaßnahmen ableiten</a:t>
+            </a:r>
+          </a:p>
+          <a:p>
+            <a:pPr>
+              <a:spcBef>
+                <a:spcPts val="500"/>
+              </a:spcBef>
+            </a:pPr>
+            <a:r>
+              <a:rPr sz="1500">
+                <a:solidFill>
+                  <a:srgbClr val="003DA5"/>
+                </a:solidFill>
+                <a:latin typeface="Arial"/>
+              </a:rPr>
+              <a:t>▪  </a:t>
+            </a:r>
+            <a:r>
+              <a:rPr sz="1700">
+                <a:solidFill>
+                  <a:srgbClr val="1A1A1A"/>
+                </a:solidFill>
+                <a:latin typeface="Arial"/>
+              </a:rPr>
+              <a:t>Eine geeignete Wissenstransfer-Routine für den Teamkontext auswählen und die Wahl anhand von Transferbarrieren begründen</a:t>
+            </a:r>
+          </a:p>
+          <a:p>
+            <a:pPr>
+              <a:spcBef>
+                <a:spcPts val="500"/>
+              </a:spcBef>
+            </a:pPr>
+            <a:r>
+              <a:rPr sz="1500">
+                <a:solidFill>
+                  <a:srgbClr val="003DA5"/>
+                </a:solidFill>
+                <a:latin typeface="Arial"/>
+              </a:rPr>
+              <a:t>▪  </a:t>
+            </a:r>
+            <a:r>
+              <a:rPr sz="1700">
+                <a:solidFill>
+                  <a:srgbClr val="1A1A1A"/>
+                </a:solidFill>
+                <a:latin typeface="Arial"/>
+              </a:rPr>
+              <a:t>Den Nutzen des Teams als Community of Practice bewerten und konkrete Stärkungsschritte begründen</a:t>
+            </a:r>
+          </a:p>
+        </p:txBody>
+      </p:sp>
+    </p:spTree>
+  </p:cSld>
+  <p:clrMapOvr>
+    <a:masterClrMapping/>
+  </p:clrMapOvr>
+</p:sld>
+</file>
+
+<file path=ppt/slides/slide20.xml><?xml version="1.0" encoding="utf-8"?>
+<p:sld xmlns:a="http://schemas.openxmlformats.org/drawingml/2006/main" xmlns:p="http://schemas.openxmlformats.org/presentationml/2006/main" xmlns:r="http://schemas.openxmlformats.org/officeDocument/2006/relationships">
+  <p:cSld>
+    <p:bg>
+      <p:bgPr>
+        <a:solidFill>
+          <a:srgbClr val="FFFFFF"/>
+        </a:solidFill>
+        <a:effectLst/>
+      </p:bgPr>
+    </p:bg>
+    <p:spTree>
+      <p:nvGrpSpPr>
+        <p:cNvPr id="1" name=""/>
+        <p:cNvGrpSpPr/>
+        <p:nvPr/>
+      </p:nvGrpSpPr>
+      <p:grpSpPr/>
+      <p:sp>
+        <p:nvSpPr>
+          <p:cNvPr id="2" name="Rectangle 1"/>
+          <p:cNvSpPr/>
+          <p:nvPr/>
+        </p:nvSpPr>
+        <p:spPr>
+          <a:xfrm>
+            <a:off x="0" y="0"/>
+            <a:ext cx="73152" cy="6858000"/>
+          </a:xfrm>
+          <a:prstGeom prst="rect">
+            <a:avLst/>
+          </a:prstGeom>
+          <a:solidFill>
+            <a:srgbClr val="003DA5"/>
+          </a:solidFill>
+          <a:ln>
+            <a:noFill/>
+          </a:ln>
+        </p:spPr>
+        <p:style>
+          <a:lnRef idx="1">
+            <a:schemeClr val="accent1"/>
+          </a:lnRef>
+          <a:fillRef idx="3">
+            <a:schemeClr val="accent1"/>
+          </a:fillRef>
+          <a:effectRef idx="2">
+            <a:schemeClr val="accent1"/>
+          </a:effectRef>
+          <a:fontRef idx="minor">
+            <a:schemeClr val="lt1"/>
+          </a:fontRef>
+        </p:style>
+        <p:txBody>
+          <a:bodyPr rtlCol="0" anchor="ctr"/>
+          <a:lstStyle/>
+          <a:p>
+            <a:pPr algn="ctr"/>
+          </a:p>
+        </p:txBody>
+      </p:sp>
+      <p:sp>
+        <p:nvSpPr>
+          <p:cNvPr id="3" name="TextBox 2"/>
+          <p:cNvSpPr txBox="1"/>
+          <p:nvPr/>
+        </p:nvSpPr>
+        <p:spPr>
+          <a:xfrm>
+            <a:off x="228600" y="182880"/>
+            <a:ext cx="11430000" cy="320040"/>
+          </a:xfrm>
+          <a:prstGeom prst="rect">
+            <a:avLst/>
+          </a:prstGeom>
+          <a:noFill/>
+        </p:spPr>
+        <p:txBody>
+          <a:bodyPr wrap="square">
+            <a:spAutoFit/>
+          </a:bodyPr>
+          <a:lstStyle/>
+          <a:p>
+            <a:pPr algn="l"/>
+            <a:r>
+              <a:rPr sz="900" b="0" i="0">
+                <a:solidFill>
+                  <a:srgbClr val="556575"/>
+                </a:solidFill>
+                <a:latin typeface="Arial"/>
+              </a:rPr>
+              <a:t>M19 · 4.8 Arbeitsblätter</a:t>
+            </a:r>
+          </a:p>
+        </p:txBody>
+      </p:sp>
+      <p:sp>
+        <p:nvSpPr>
+          <p:cNvPr id="4" name="TextBox 3"/>
+          <p:cNvSpPr txBox="1"/>
+          <p:nvPr/>
+        </p:nvSpPr>
+        <p:spPr>
+          <a:xfrm>
+            <a:off x="365760" y="274320"/>
+            <a:ext cx="11430000" cy="777240"/>
+          </a:xfrm>
+          <a:prstGeom prst="rect">
+            <a:avLst/>
+          </a:prstGeom>
+          <a:noFill/>
+        </p:spPr>
+        <p:txBody>
+          <a:bodyPr wrap="square">
+            <a:spAutoFit/>
+          </a:bodyPr>
+          <a:lstStyle/>
+          <a:p>
+            <a:pPr algn="l"/>
+            <a:r>
+              <a:rPr sz="2200" b="1" i="0">
+                <a:solidFill>
+                  <a:srgbClr val="003DA5"/>
+                </a:solidFill>
+                <a:latin typeface="Arial"/>
+              </a:rPr>
+              <a:t>Arbeitsblatt 3: Wissenstransfer-Maßnahmenplan</a:t>
+            </a:r>
+          </a:p>
+        </p:txBody>
+      </p:sp>
+      <p:sp>
+        <p:nvSpPr>
+          <p:cNvPr id="5" name="Rectangle 4"/>
+          <p:cNvSpPr/>
+          <p:nvPr/>
+        </p:nvSpPr>
+        <p:spPr>
+          <a:xfrm>
+            <a:off x="365760" y="1005840"/>
+            <a:ext cx="11430000" cy="27432"/>
+          </a:xfrm>
+          <a:prstGeom prst="rect">
+            <a:avLst/>
+          </a:prstGeom>
+          <a:solidFill>
+            <a:srgbClr val="D1D5DB"/>
+          </a:solidFill>
+          <a:ln>
+            <a:noFill/>
+          </a:ln>
+        </p:spPr>
+        <p:style>
+          <a:lnRef idx="1">
+            <a:schemeClr val="accent1"/>
+          </a:lnRef>
+          <a:fillRef idx="3">
+            <a:schemeClr val="accent1"/>
+          </a:fillRef>
+          <a:effectRef idx="2">
+            <a:schemeClr val="accent1"/>
+          </a:effectRef>
+          <a:fontRef idx="minor">
+            <a:schemeClr val="lt1"/>
+          </a:fontRef>
+        </p:style>
+        <p:txBody>
+          <a:bodyPr rtlCol="0" anchor="ctr"/>
+          <a:lstStyle/>
+          <a:p>
+            <a:pPr algn="ctr"/>
+          </a:p>
+        </p:txBody>
+      </p:sp>
+      <p:graphicFrame>
+        <p:nvGraphicFramePr>
+          <p:cNvPr id="6" name="Table 5"/>
+          <p:cNvGraphicFramePr>
+            <a:graphicFrameLocks noGrp="1"/>
+          </p:cNvGraphicFramePr>
+          <p:nvPr/>
+        </p:nvGraphicFramePr>
+        <p:xfrm>
+          <a:off x="365760" y="1143000"/>
+          <a:ext cx="11430000" cy="2852928"/>
+        </p:xfrm>
+        <a:graphic>
+          <a:graphicData uri="http://schemas.openxmlformats.org/drawingml/2006/table">
+            <a:tbl>
+              <a:tblPr firstRow="1" bandRow="1">
+                <a:tableStyleId>{5C22544A-7EE6-4342-B048-85BDC9FD1C3A}</a:tableStyleId>
+              </a:tblPr>
+              <a:tblGrid>
+                <a:gridCol w="2286000"/>
+                <a:gridCol w="2286000"/>
+                <a:gridCol w="2286000"/>
+                <a:gridCol w="2286000"/>
+                <a:gridCol w="2286000"/>
+              </a:tblGrid>
+              <a:tr h="475488">
+                <a:tc>
+                  <a:txBody>
+                    <a:bodyPr wrap="square"/>
+                    <a:lstStyle/>
+                    <a:p>
+                      <a:r>
+                        <a:rPr sz="1100" b="1">
+                          <a:solidFill>
+                            <a:srgbClr val="FFFFFF"/>
+                          </a:solidFill>
+                          <a:latin typeface="Arial"/>
+                        </a:rPr>
+                        <a:t>Methode</a:t>
+                      </a:r>
+                    </a:p>
+                  </a:txBody>
+                  <a:tcPr>
+                    <a:solidFill>
+                      <a:srgbClr val="003DA5"/>
+                    </a:solidFill>
+                  </a:tcPr>
+                </a:tc>
+                <a:tc>
+                  <a:txBody>
+                    <a:bodyPr wrap="square"/>
+                    <a:lstStyle/>
+                    <a:p>
+                      <a:r>
+                        <a:rPr sz="1100" b="1">
+                          <a:solidFill>
+                            <a:srgbClr val="FFFFFF"/>
+                          </a:solidFill>
+                          <a:latin typeface="Arial"/>
+                        </a:rPr>
+                        <a:t>Wann?</a:t>
+                      </a:r>
+                    </a:p>
+                  </a:txBody>
+                  <a:tcPr>
+                    <a:solidFill>
+                      <a:srgbClr val="003DA5"/>
+                    </a:solidFill>
+                  </a:tcPr>
+                </a:tc>
+                <a:tc>
+                  <a:txBody>
+                    <a:bodyPr wrap="square"/>
+                    <a:lstStyle/>
+                    <a:p>
+                      <a:r>
+                        <a:rPr sz="1100" b="1">
+                          <a:solidFill>
+                            <a:srgbClr val="FFFFFF"/>
+                          </a:solidFill>
+                          <a:latin typeface="Arial"/>
+                        </a:rPr>
+                        <a:t>Wer organisiert?</a:t>
+                      </a:r>
+                    </a:p>
+                  </a:txBody>
+                  <a:tcPr>
+                    <a:solidFill>
+                      <a:srgbClr val="003DA5"/>
+                    </a:solidFill>
+                  </a:tcPr>
+                </a:tc>
+                <a:tc>
+                  <a:txBody>
+                    <a:bodyPr wrap="square"/>
+                    <a:lstStyle/>
+                    <a:p>
+                      <a:r>
+                        <a:rPr sz="1100" b="1">
+                          <a:solidFill>
+                            <a:srgbClr val="FFFFFF"/>
+                          </a:solidFill>
+                          <a:latin typeface="Arial"/>
+                        </a:rPr>
+                        <a:t>Wer nimmt teil?</a:t>
+                      </a:r>
+                    </a:p>
+                  </a:txBody>
+                  <a:tcPr>
+                    <a:solidFill>
+                      <a:srgbClr val="003DA5"/>
+                    </a:solidFill>
+                  </a:tcPr>
+                </a:tc>
+                <a:tc>
+                  <a:txBody>
+                    <a:bodyPr wrap="square"/>
+                    <a:lstStyle/>
+                    <a:p>
+                      <a:r>
+                        <a:rPr sz="1100" b="1">
+                          <a:solidFill>
+                            <a:srgbClr val="FFFFFF"/>
+                          </a:solidFill>
+                          <a:latin typeface="Arial"/>
+                        </a:rPr>
+                        <a:t>Erfolgskriterium</a:t>
+                      </a:r>
+                    </a:p>
+                  </a:txBody>
+                  <a:tcPr>
+                    <a:solidFill>
+                      <a:srgbClr val="003DA5"/>
+                    </a:solidFill>
+                  </a:tcPr>
+                </a:tc>
+              </a:tr>
+              <a:tr h="475488">
+                <a:tc>
+                  <a:txBody>
+                    <a:bodyPr wrap="square"/>
+                    <a:lstStyle/>
+                    <a:p>
+                      <a:r>
+                        <a:rPr sz="1100" b="0">
+                          <a:solidFill>
+                            <a:srgbClr val="1A1A1A"/>
+                          </a:solidFill>
+                          <a:latin typeface="Arial"/>
+                        </a:rPr>
+                        <a:t>Tandem-Besuche</a:t>
+                      </a:r>
+                    </a:p>
+                  </a:txBody>
+                  <a:tcPr>
+                    <a:solidFill>
+                      <a:srgbClr val="FFFFFF"/>
+                    </a:solidFill>
+                  </a:tcPr>
+                </a:tc>
+                <a:tc>
+                  <a:txBody>
+                    <a:bodyPr wrap="square"/>
+                    <a:lstStyle/>
+                    <a:p>
+                      <a:r>
+                        <a:rPr sz="1100" b="0">
+                          <a:solidFill>
+                            <a:srgbClr val="1A1A1A"/>
+                          </a:solidFill>
+                          <a:latin typeface="Arial"/>
+                        </a:rPr>
+                        <a:t/>
+                      </a:r>
+                    </a:p>
+                  </a:txBody>
+                  <a:tcPr>
+                    <a:solidFill>
+                      <a:srgbClr val="FFFFFF"/>
+                    </a:solidFill>
+                  </a:tcPr>
+                </a:tc>
+                <a:tc>
+                  <a:txBody>
+                    <a:bodyPr wrap="square"/>
+                    <a:lstStyle/>
+                    <a:p>
+                      <a:r>
+                        <a:rPr sz="1100" b="0">
+                          <a:solidFill>
+                            <a:srgbClr val="1A1A1A"/>
+                          </a:solidFill>
+                          <a:latin typeface="Arial"/>
+                        </a:rPr>
+                        <a:t/>
+                      </a:r>
+                    </a:p>
+                  </a:txBody>
+                  <a:tcPr>
+                    <a:solidFill>
+                      <a:srgbClr val="FFFFFF"/>
+                    </a:solidFill>
+                  </a:tcPr>
+                </a:tc>
+                <a:tc>
+                  <a:txBody>
+                    <a:bodyPr wrap="square"/>
+                    <a:lstStyle/>
+                    <a:p>
+                      <a:r>
+                        <a:rPr sz="1100" b="0">
+                          <a:solidFill>
+                            <a:srgbClr val="1A1A1A"/>
+                          </a:solidFill>
+                          <a:latin typeface="Arial"/>
+                        </a:rPr>
+                        <a:t/>
+                      </a:r>
+                    </a:p>
+                  </a:txBody>
+                  <a:tcPr>
+                    <a:solidFill>
+                      <a:srgbClr val="FFFFFF"/>
+                    </a:solidFill>
+                  </a:tcPr>
+                </a:tc>
+                <a:tc>
+                  <a:txBody>
+                    <a:bodyPr wrap="square"/>
+                    <a:lstStyle/>
+                    <a:p>
+                      <a:r>
+                        <a:rPr sz="1100" b="0">
+                          <a:solidFill>
+                            <a:srgbClr val="1A1A1A"/>
+                          </a:solidFill>
+                          <a:latin typeface="Arial"/>
+                        </a:rPr>
+                        <a:t/>
+                      </a:r>
+                    </a:p>
+                  </a:txBody>
+                  <a:tcPr>
+                    <a:solidFill>
+                      <a:srgbClr val="FFFFFF"/>
+                    </a:solidFill>
+                  </a:tcPr>
+                </a:tc>
+              </a:tr>
+              <a:tr h="475488">
+                <a:tc>
+                  <a:txBody>
+                    <a:bodyPr wrap="square"/>
+                    <a:lstStyle/>
+                    <a:p>
+                      <a:r>
+                        <a:rPr sz="1100" b="0">
+                          <a:solidFill>
+                            <a:srgbClr val="1A1A1A"/>
+                          </a:solidFill>
+                          <a:latin typeface="Arial"/>
+                        </a:rPr>
+                        <a:t>Monatliche Fallbesprechung</a:t>
+                      </a:r>
+                    </a:p>
+                  </a:txBody>
+                  <a:tcPr>
+                    <a:solidFill>
+                      <a:srgbClr val="F4F6FA"/>
+                    </a:solidFill>
+                  </a:tcPr>
+                </a:tc>
+                <a:tc>
+                  <a:txBody>
+                    <a:bodyPr wrap="square"/>
+                    <a:lstStyle/>
+                    <a:p>
+                      <a:r>
+                        <a:rPr sz="1100" b="0">
+                          <a:solidFill>
+                            <a:srgbClr val="1A1A1A"/>
+                          </a:solidFill>
+                          <a:latin typeface="Arial"/>
+                        </a:rPr>
+                        <a:t/>
+                      </a:r>
+                    </a:p>
+                  </a:txBody>
+                  <a:tcPr>
+                    <a:solidFill>
+                      <a:srgbClr val="F4F6FA"/>
+                    </a:solidFill>
+                  </a:tcPr>
+                </a:tc>
+                <a:tc>
+                  <a:txBody>
+                    <a:bodyPr wrap="square"/>
+                    <a:lstStyle/>
+                    <a:p>
+                      <a:r>
+                        <a:rPr sz="1100" b="0">
+                          <a:solidFill>
+                            <a:srgbClr val="1A1A1A"/>
+                          </a:solidFill>
+                          <a:latin typeface="Arial"/>
+                        </a:rPr>
+                        <a:t/>
+                      </a:r>
+                    </a:p>
+                  </a:txBody>
+                  <a:tcPr>
+                    <a:solidFill>
+                      <a:srgbClr val="F4F6FA"/>
+                    </a:solidFill>
+                  </a:tcPr>
+                </a:tc>
+                <a:tc>
+                  <a:txBody>
+                    <a:bodyPr wrap="square"/>
+                    <a:lstStyle/>
+                    <a:p>
+                      <a:r>
+                        <a:rPr sz="1100" b="0">
+                          <a:solidFill>
+                            <a:srgbClr val="1A1A1A"/>
+                          </a:solidFill>
+                          <a:latin typeface="Arial"/>
+                        </a:rPr>
+                        <a:t/>
+                      </a:r>
+                    </a:p>
+                  </a:txBody>
+                  <a:tcPr>
+                    <a:solidFill>
+                      <a:srgbClr val="F4F6FA"/>
+                    </a:solidFill>
+                  </a:tcPr>
+                </a:tc>
+                <a:tc>
+                  <a:txBody>
+                    <a:bodyPr wrap="square"/>
+                    <a:lstStyle/>
+                    <a:p>
+                      <a:r>
+                        <a:rPr sz="1100" b="0">
+                          <a:solidFill>
+                            <a:srgbClr val="1A1A1A"/>
+                          </a:solidFill>
+                          <a:latin typeface="Arial"/>
+                        </a:rPr>
+                        <a:t/>
+                      </a:r>
+                    </a:p>
+                  </a:txBody>
+                  <a:tcPr>
+                    <a:solidFill>
+                      <a:srgbClr val="F4F6FA"/>
+                    </a:solidFill>
+                  </a:tcPr>
+                </a:tc>
+              </a:tr>
+              <a:tr h="475488">
+                <a:tc>
+                  <a:txBody>
+                    <a:bodyPr wrap="square"/>
+                    <a:lstStyle/>
+                    <a:p>
+                      <a:r>
+                        <a:rPr sz="1100" b="0">
+                          <a:solidFill>
+                            <a:srgbClr val="1A1A1A"/>
+                          </a:solidFill>
+                          <a:latin typeface="Arial"/>
+                        </a:rPr>
+                        <a:t>Wissenslandkarte</a:t>
+                      </a:r>
+                    </a:p>
+                  </a:txBody>
+                  <a:tcPr>
+                    <a:solidFill>
+                      <a:srgbClr val="FFFFFF"/>
+                    </a:solidFill>
+                  </a:tcPr>
+                </a:tc>
+                <a:tc>
+                  <a:txBody>
+                    <a:bodyPr wrap="square"/>
+                    <a:lstStyle/>
+                    <a:p>
+                      <a:r>
+                        <a:rPr sz="1100" b="0">
+                          <a:solidFill>
+                            <a:srgbClr val="1A1A1A"/>
+                          </a:solidFill>
+                          <a:latin typeface="Arial"/>
+                        </a:rPr>
+                        <a:t/>
+                      </a:r>
+                    </a:p>
+                  </a:txBody>
+                  <a:tcPr>
+                    <a:solidFill>
+                      <a:srgbClr val="FFFFFF"/>
+                    </a:solidFill>
+                  </a:tcPr>
+                </a:tc>
+                <a:tc>
+                  <a:txBody>
+                    <a:bodyPr wrap="square"/>
+                    <a:lstStyle/>
+                    <a:p>
+                      <a:r>
+                        <a:rPr sz="1100" b="0">
+                          <a:solidFill>
+                            <a:srgbClr val="1A1A1A"/>
+                          </a:solidFill>
+                          <a:latin typeface="Arial"/>
+                        </a:rPr>
+                        <a:t/>
+                      </a:r>
+                    </a:p>
+                  </a:txBody>
+                  <a:tcPr>
+                    <a:solidFill>
+                      <a:srgbClr val="FFFFFF"/>
+                    </a:solidFill>
+                  </a:tcPr>
+                </a:tc>
+                <a:tc>
+                  <a:txBody>
+                    <a:bodyPr wrap="square"/>
+                    <a:lstStyle/>
+                    <a:p>
+                      <a:r>
+                        <a:rPr sz="1100" b="0">
+                          <a:solidFill>
+                            <a:srgbClr val="1A1A1A"/>
+                          </a:solidFill>
+                          <a:latin typeface="Arial"/>
+                        </a:rPr>
+                        <a:t/>
+                      </a:r>
+                    </a:p>
+                  </a:txBody>
+                  <a:tcPr>
+                    <a:solidFill>
+                      <a:srgbClr val="FFFFFF"/>
+                    </a:solidFill>
+                  </a:tcPr>
+                </a:tc>
+                <a:tc>
+                  <a:txBody>
+                    <a:bodyPr wrap="square"/>
+                    <a:lstStyle/>
+                    <a:p>
+                      <a:r>
+                        <a:rPr sz="1100" b="0">
+                          <a:solidFill>
+                            <a:srgbClr val="1A1A1A"/>
+                          </a:solidFill>
+                          <a:latin typeface="Arial"/>
+                        </a:rPr>
+                        <a:t/>
+                      </a:r>
+                    </a:p>
+                  </a:txBody>
+                  <a:tcPr>
+                    <a:solidFill>
+                      <a:srgbClr val="FFFFFF"/>
+                    </a:solidFill>
+                  </a:tcPr>
+                </a:tc>
+              </a:tr>
+              <a:tr h="475488">
+                <a:tc>
+                  <a:txBody>
+                    <a:bodyPr wrap="square"/>
+                    <a:lstStyle/>
+                    <a:p>
+                      <a:r>
+                        <a:rPr sz="1100" b="0">
+                          <a:solidFill>
+                            <a:srgbClr val="1A1A1A"/>
+                          </a:solidFill>
+                          <a:latin typeface="Arial"/>
+                        </a:rPr>
+                        <a:t>Lunch-and-Learn</a:t>
+                      </a:r>
+                    </a:p>
+                  </a:txBody>
+                  <a:tcPr>
+                    <a:solidFill>
+                      <a:srgbClr val="F4F6FA"/>
+                    </a:solidFill>
+                  </a:tcPr>
+                </a:tc>
+                <a:tc>
+                  <a:txBody>
+                    <a:bodyPr wrap="square"/>
+                    <a:lstStyle/>
+                    <a:p>
+                      <a:r>
+                        <a:rPr sz="1100" b="0">
+                          <a:solidFill>
+                            <a:srgbClr val="1A1A1A"/>
+                          </a:solidFill>
+                          <a:latin typeface="Arial"/>
+                        </a:rPr>
+                        <a:t/>
+                      </a:r>
+                    </a:p>
+                  </a:txBody>
+                  <a:tcPr>
+                    <a:solidFill>
+                      <a:srgbClr val="F4F6FA"/>
+                    </a:solidFill>
+                  </a:tcPr>
+                </a:tc>
+                <a:tc>
+                  <a:txBody>
+                    <a:bodyPr wrap="square"/>
+                    <a:lstStyle/>
+                    <a:p>
+                      <a:r>
+                        <a:rPr sz="1100" b="0">
+                          <a:solidFill>
+                            <a:srgbClr val="1A1A1A"/>
+                          </a:solidFill>
+                          <a:latin typeface="Arial"/>
+                        </a:rPr>
+                        <a:t/>
+                      </a:r>
+                    </a:p>
+                  </a:txBody>
+                  <a:tcPr>
+                    <a:solidFill>
+                      <a:srgbClr val="F4F6FA"/>
+                    </a:solidFill>
+                  </a:tcPr>
+                </a:tc>
+                <a:tc>
+                  <a:txBody>
+                    <a:bodyPr wrap="square"/>
+                    <a:lstStyle/>
+                    <a:p>
+                      <a:r>
+                        <a:rPr sz="1100" b="0">
+                          <a:solidFill>
+                            <a:srgbClr val="1A1A1A"/>
+                          </a:solidFill>
+                          <a:latin typeface="Arial"/>
+                        </a:rPr>
+                        <a:t/>
+                      </a:r>
+                    </a:p>
+                  </a:txBody>
+                  <a:tcPr>
+                    <a:solidFill>
+                      <a:srgbClr val="F4F6FA"/>
+                    </a:solidFill>
+                  </a:tcPr>
+                </a:tc>
+                <a:tc>
+                  <a:txBody>
+                    <a:bodyPr wrap="square"/>
+                    <a:lstStyle/>
+                    <a:p>
+                      <a:r>
+                        <a:rPr sz="1100" b="0">
+                          <a:solidFill>
+                            <a:srgbClr val="1A1A1A"/>
+                          </a:solidFill>
+                          <a:latin typeface="Arial"/>
+                        </a:rPr>
+                        <a:t/>
+                      </a:r>
+                    </a:p>
+                  </a:txBody>
+                  <a:tcPr>
+                    <a:solidFill>
+                      <a:srgbClr val="F4F6FA"/>
+                    </a:solidFill>
+                  </a:tcPr>
+                </a:tc>
+              </a:tr>
+              <a:tr h="475488">
+                <a:tc>
+                  <a:txBody>
+                    <a:bodyPr wrap="square"/>
+                    <a:lstStyle/>
+                    <a:p>
+                      <a:r>
+                        <a:rPr sz="1100" b="0">
+                          <a:solidFill>
+                            <a:srgbClr val="1A1A1A"/>
+                          </a:solidFill>
+                          <a:latin typeface="Arial"/>
+                        </a:rPr>
+                        <a:t>Reverse Mentoring</a:t>
+                      </a:r>
+                    </a:p>
+                  </a:txBody>
+                  <a:tcPr>
+                    <a:solidFill>
+                      <a:srgbClr val="FFFFFF"/>
+                    </a:solidFill>
+                  </a:tcPr>
+                </a:tc>
+                <a:tc>
+                  <a:txBody>
+                    <a:bodyPr wrap="square"/>
+                    <a:lstStyle/>
+                    <a:p>
+                      <a:r>
+                        <a:rPr sz="1100" b="0">
+                          <a:solidFill>
+                            <a:srgbClr val="1A1A1A"/>
+                          </a:solidFill>
+                          <a:latin typeface="Arial"/>
+                        </a:rPr>
+                        <a:t/>
+                      </a:r>
+                    </a:p>
+                  </a:txBody>
+                  <a:tcPr>
+                    <a:solidFill>
+                      <a:srgbClr val="FFFFFF"/>
+                    </a:solidFill>
+                  </a:tcPr>
+                </a:tc>
+                <a:tc>
+                  <a:txBody>
+                    <a:bodyPr wrap="square"/>
+                    <a:lstStyle/>
+                    <a:p>
+                      <a:r>
+                        <a:rPr sz="1100" b="0">
+                          <a:solidFill>
+                            <a:srgbClr val="1A1A1A"/>
+                          </a:solidFill>
+                          <a:latin typeface="Arial"/>
+                        </a:rPr>
+                        <a:t/>
+                      </a:r>
+                    </a:p>
+                  </a:txBody>
+                  <a:tcPr>
+                    <a:solidFill>
+                      <a:srgbClr val="FFFFFF"/>
+                    </a:solidFill>
+                  </a:tcPr>
+                </a:tc>
+                <a:tc>
+                  <a:txBody>
+                    <a:bodyPr wrap="square"/>
+                    <a:lstStyle/>
+                    <a:p>
+                      <a:r>
+                        <a:rPr sz="1100" b="0">
+                          <a:solidFill>
+                            <a:srgbClr val="1A1A1A"/>
+                          </a:solidFill>
+                          <a:latin typeface="Arial"/>
+                        </a:rPr>
+                        <a:t/>
+                      </a:r>
+                    </a:p>
+                  </a:txBody>
+                  <a:tcPr>
+                    <a:solidFill>
+                      <a:srgbClr val="FFFFFF"/>
+                    </a:solidFill>
+                  </a:tcPr>
+                </a:tc>
+                <a:tc>
+                  <a:txBody>
+                    <a:bodyPr wrap="square"/>
+                    <a:lstStyle/>
+                    <a:p>
+                      <a:r>
+                        <a:rPr sz="1100" b="0">
+                          <a:solidFill>
+                            <a:srgbClr val="1A1A1A"/>
+                          </a:solidFill>
+                          <a:latin typeface="Arial"/>
+                        </a:rPr>
+                        <a:t/>
+                      </a:r>
+                    </a:p>
+                  </a:txBody>
+                  <a:tcPr>
+                    <a:solidFill>
+                      <a:srgbClr val="FFFFFF"/>
+                    </a:solidFill>
+                  </a:tcPr>
+                </a:tc>
+              </a:tr>
+            </a:tbl>
+          </a:graphicData>
+        </a:graphic>
+      </p:graphicFrame>
+    </p:spTree>
+  </p:cSld>
+  <p:clrMapOvr>
+    <a:masterClrMapping/>
+  </p:clrMapOvr>
+</p:sld>
+</file>
+
+<file path=ppt/slides/slide21.xml><?xml version="1.0" encoding="utf-8"?>
 <p:sld xmlns:a="http://schemas.openxmlformats.org/drawingml/2006/main" xmlns:p="http://schemas.openxmlformats.org/presentationml/2006/main" xmlns:r="http://schemas.openxmlformats.org/officeDocument/2006/relationships">
   <p:cSld>
     <p:bg>
@@ -3618,8 +7317,8 @@
         </p:nvSpPr>
         <p:spPr>
           <a:xfrm>
-            <a:off x="365760" y="365760"/>
-            <a:ext cx="5486400" cy="365760"/>
+            <a:off x="365760" y="347472"/>
+            <a:ext cx="7315200" cy="384048"/>
           </a:xfrm>
           <a:prstGeom prst="rect">
             <a:avLst/>
@@ -3634,62 +7333,27 @@
           <a:p>
             <a:pPr algn="l"/>
             <a:r>
-              <a:rPr sz="1000" b="1">
+              <a:rPr sz="900" b="1" i="0">
                 <a:solidFill>
                   <a:srgbClr val="CCD6F0"/>
                 </a:solidFill>
                 <a:latin typeface="Arial"/>
               </a:rPr>
-              <a:t>PRAXISTRANSFER</a:t>
-            </a:r>
-          </a:p>
-        </p:txBody>
-      </p:sp>
-      <p:sp>
-        <p:nvSpPr>
-          <p:cNvPr id="4" name="TextBox 3"/>
-          <p:cNvSpPr txBox="1"/>
+              <a:t>PRAXISTRANSFER &amp; NÄCHSTE SCHRITTE</a:t>
+            </a:r>
+          </a:p>
+        </p:txBody>
+      </p:sp>
+      <p:sp>
+        <p:nvSpPr>
+          <p:cNvPr id="4" name="Rectangle 3"/>
+          <p:cNvSpPr/>
           <p:nvPr/>
         </p:nvSpPr>
         <p:spPr>
           <a:xfrm>
-            <a:off x="365760" y="640080"/>
-            <a:ext cx="9144000" cy="914400"/>
-          </a:xfrm>
-          <a:prstGeom prst="rect">
-            <a:avLst/>
-          </a:prstGeom>
-          <a:noFill/>
-        </p:spPr>
-        <p:txBody>
-          <a:bodyPr wrap="square">
-            <a:spAutoFit/>
-          </a:bodyPr>
-          <a:lstStyle/>
-          <a:p>
-            <a:pPr algn="l"/>
-            <a:r>
-              <a:rPr sz="2800" b="1">
-                <a:solidFill>
-                  <a:srgbClr val="FFFFFF"/>
-                </a:solidFill>
-                <a:latin typeface="Arial"/>
-              </a:rPr>
-              <a:t>Was nehmen Sie mit?</a:t>
-            </a:r>
-          </a:p>
-        </p:txBody>
-      </p:sp>
-      <p:sp>
-        <p:nvSpPr>
-          <p:cNvPr id="5" name="Rectangle 4"/>
-          <p:cNvSpPr/>
-          <p:nvPr/>
-        </p:nvSpPr>
-        <p:spPr>
-          <a:xfrm>
-            <a:off x="365760" y="1463040"/>
-            <a:ext cx="7315200" cy="27432"/>
+            <a:off x="365760" y="804672"/>
+            <a:ext cx="8229600" cy="22860"/>
           </a:xfrm>
           <a:prstGeom prst="rect">
             <a:avLst/>
@@ -3725,13 +7389,48 @@
       </p:sp>
       <p:sp>
         <p:nvSpPr>
+          <p:cNvPr id="5" name="TextBox 4"/>
+          <p:cNvSpPr txBox="1"/>
+          <p:nvPr/>
+        </p:nvSpPr>
+        <p:spPr>
+          <a:xfrm>
+            <a:off x="365760" y="960120"/>
+            <a:ext cx="9144000" cy="914400"/>
+          </a:xfrm>
+          <a:prstGeom prst="rect">
+            <a:avLst/>
+          </a:prstGeom>
+          <a:noFill/>
+        </p:spPr>
+        <p:txBody>
+          <a:bodyPr wrap="square">
+            <a:spAutoFit/>
+          </a:bodyPr>
+          <a:lstStyle/>
+          <a:p>
+            <a:pPr algn="l"/>
+            <a:r>
+              <a:rPr sz="3000" b="1" i="0">
+                <a:solidFill>
+                  <a:srgbClr val="FFFFFF"/>
+                </a:solidFill>
+                <a:latin typeface="Arial"/>
+              </a:rPr>
+              <a:t>Was nehmen Sie mit?</a:t>
+            </a:r>
+          </a:p>
+        </p:txBody>
+      </p:sp>
+      <p:sp>
+        <p:nvSpPr>
           <p:cNvPr id="6" name="TextBox 5"/>
           <p:cNvSpPr txBox="1"/>
           <p:nvPr/>
         </p:nvSpPr>
         <p:spPr>
           <a:xfrm>
-            <a:off x="365760" y="1645920"/>
+            <a:off x="365760" y="2103120"/>
             <a:ext cx="11430000" cy="4114800"/>
           </a:xfrm>
           <a:prstGeom prst="rect">
@@ -3747,7 +7446,7 @@
           <a:p>
             <a:pPr>
               <a:spcBef>
-                <a:spcPts val="400"/>
+                <a:spcPts val="500"/>
               </a:spcBef>
             </a:pPr>
             <a:r>
@@ -3772,7 +7471,7 @@
           <a:p>
             <a:pPr>
               <a:spcBef>
-                <a:spcPts val="400"/>
+                <a:spcPts val="500"/>
               </a:spcBef>
             </a:pPr>
             <a:r>
@@ -3791,7 +7490,32 @@
                 </a:solidFill>
                 <a:latin typeface="Arial"/>
               </a:rPr>
-              <a:t>Selbstcheck nach 4 Wochen: Was hat sich verändert?</a:t>
+              <a:t>Selbstcheck nach 4 Wochen: Bewerten Sie Ihre Fortschritte ehrlich.</a:t>
+            </a:r>
+          </a:p>
+          <a:p>
+            <a:pPr>
+              <a:spcBef>
+                <a:spcPts val="500"/>
+              </a:spcBef>
+            </a:pPr>
+            <a:r>
+              <a:rPr sz="1600">
+                <a:solidFill>
+                  <a:srgbClr val="E05B00"/>
+                </a:solidFill>
+                <a:latin typeface="Arial"/>
+              </a:rPr>
+              <a:t>▪  </a:t>
+            </a:r>
+            <a:r>
+              <a:rPr sz="1800">
+                <a:solidFill>
+                  <a:srgbClr val="FFFFFF"/>
+                </a:solidFill>
+                <a:latin typeface="Arial"/>
+              </a:rPr>
+              <a:t>Nächste Module: M20</a:t>
             </a:r>
           </a:p>
         </p:txBody>
@@ -3820,343 +7544,13 @@
           <a:p>
             <a:pPr algn="l"/>
             <a:r>
-              <a:rPr sz="900" b="0">
-                <a:solidFill>
-                  <a:srgbClr val="99AACC"/>
+              <a:rPr sz="900" b="0" i="0">
+                <a:solidFill>
+                  <a:srgbClr val="889ACC"/>
                 </a:solidFill>
                 <a:latin typeface="Arial"/>
               </a:rPr>
               <a:t>M19 · Wissenstransfer im Team  ·  v0.4  ·  Benedikt Zoller Coaching</a:t>
-            </a:r>
-          </a:p>
-        </p:txBody>
-      </p:sp>
-    </p:spTree>
-  </p:cSld>
-  <p:clrMapOvr>
-    <a:masterClrMapping/>
-  </p:clrMapOvr>
-</p:sld>
-</file>
-
-<file path=ppt/slides/slide2.xml><?xml version="1.0" encoding="utf-8"?>
-<p:sld xmlns:a="http://schemas.openxmlformats.org/drawingml/2006/main" xmlns:p="http://schemas.openxmlformats.org/presentationml/2006/main" xmlns:r="http://schemas.openxmlformats.org/officeDocument/2006/relationships">
-  <p:cSld>
-    <p:bg>
-      <p:bgPr>
-        <a:solidFill>
-          <a:srgbClr val="F5F7FA"/>
-        </a:solidFill>
-        <a:effectLst/>
-      </p:bgPr>
-    </p:bg>
-    <p:spTree>
-      <p:nvGrpSpPr>
-        <p:cNvPr id="1" name=""/>
-        <p:cNvGrpSpPr/>
-        <p:nvPr/>
-      </p:nvGrpSpPr>
-      <p:grpSpPr/>
-      <p:sp>
-        <p:nvSpPr>
-          <p:cNvPr id="2" name="Rectangle 1"/>
-          <p:cNvSpPr/>
-          <p:nvPr/>
-        </p:nvSpPr>
-        <p:spPr>
-          <a:xfrm>
-            <a:off x="0" y="0"/>
-            <a:ext cx="73152" cy="6858000"/>
-          </a:xfrm>
-          <a:prstGeom prst="rect">
-            <a:avLst/>
-          </a:prstGeom>
-          <a:solidFill>
-            <a:srgbClr val="003DA5"/>
-          </a:solidFill>
-          <a:ln>
-            <a:noFill/>
-          </a:ln>
-        </p:spPr>
-        <p:style>
-          <a:lnRef idx="1">
-            <a:schemeClr val="accent1"/>
-          </a:lnRef>
-          <a:fillRef idx="3">
-            <a:schemeClr val="accent1"/>
-          </a:fillRef>
-          <a:effectRef idx="2">
-            <a:schemeClr val="accent1"/>
-          </a:effectRef>
-          <a:fontRef idx="minor">
-            <a:schemeClr val="lt1"/>
-          </a:fontRef>
-        </p:style>
-        <p:txBody>
-          <a:bodyPr rtlCol="0" anchor="ctr"/>
-          <a:lstStyle/>
-          <a:p>
-            <a:pPr algn="ctr"/>
-          </a:p>
-        </p:txBody>
-      </p:sp>
-      <p:sp>
-        <p:nvSpPr>
-          <p:cNvPr id="3" name="Rectangle 2"/>
-          <p:cNvSpPr/>
-          <p:nvPr/>
-        </p:nvSpPr>
-        <p:spPr>
-          <a:xfrm>
-            <a:off x="365760" y="868680"/>
-            <a:ext cx="7315200" cy="27432"/>
-          </a:xfrm>
-          <a:prstGeom prst="rect">
-            <a:avLst/>
-          </a:prstGeom>
-          <a:solidFill>
-            <a:srgbClr val="E5E7EB"/>
-          </a:solidFill>
-          <a:ln>
-            <a:noFill/>
-          </a:ln>
-        </p:spPr>
-        <p:style>
-          <a:lnRef idx="1">
-            <a:schemeClr val="accent1"/>
-          </a:lnRef>
-          <a:fillRef idx="3">
-            <a:schemeClr val="accent1"/>
-          </a:fillRef>
-          <a:effectRef idx="2">
-            <a:schemeClr val="accent1"/>
-          </a:effectRef>
-          <a:fontRef idx="minor">
-            <a:schemeClr val="lt1"/>
-          </a:fontRef>
-        </p:style>
-        <p:txBody>
-          <a:bodyPr rtlCol="0" anchor="ctr"/>
-          <a:lstStyle/>
-          <a:p>
-            <a:pPr algn="ctr"/>
-          </a:p>
-        </p:txBody>
-      </p:sp>
-      <p:sp>
-        <p:nvSpPr>
-          <p:cNvPr id="4" name="TextBox 3"/>
-          <p:cNvSpPr txBox="1"/>
-          <p:nvPr/>
-        </p:nvSpPr>
-        <p:spPr>
-          <a:xfrm>
-            <a:off x="365760" y="320040"/>
-            <a:ext cx="3657600" cy="365760"/>
-          </a:xfrm>
-          <a:prstGeom prst="rect">
-            <a:avLst/>
-          </a:prstGeom>
-          <a:noFill/>
-        </p:spPr>
-        <p:txBody>
-          <a:bodyPr wrap="square">
-            <a:spAutoFit/>
-          </a:bodyPr>
-          <a:lstStyle/>
-          <a:p>
-            <a:pPr algn="l"/>
-            <a:r>
-              <a:rPr sz="1000" b="1">
-                <a:solidFill>
-                  <a:srgbClr val="003DA5"/>
-                </a:solidFill>
-                <a:latin typeface="Arial"/>
-              </a:rPr>
-              <a:t>LERNZIELE</a:t>
-            </a:r>
-          </a:p>
-        </p:txBody>
-      </p:sp>
-      <p:sp>
-        <p:nvSpPr>
-          <p:cNvPr id="5" name="TextBox 4"/>
-          <p:cNvSpPr txBox="1"/>
-          <p:nvPr/>
-        </p:nvSpPr>
-        <p:spPr>
-          <a:xfrm>
-            <a:off x="365760" y="502920"/>
-            <a:ext cx="9144000" cy="548640"/>
-          </a:xfrm>
-          <a:prstGeom prst="rect">
-            <a:avLst/>
-          </a:prstGeom>
-          <a:noFill/>
-        </p:spPr>
-        <p:txBody>
-          <a:bodyPr wrap="square">
-            <a:spAutoFit/>
-          </a:bodyPr>
-          <a:lstStyle/>
-          <a:p>
-            <a:pPr algn="l"/>
-            <a:r>
-              <a:rPr sz="2200" b="1">
-                <a:solidFill>
-                  <a:srgbClr val="1A1A1A"/>
-                </a:solidFill>
-                <a:latin typeface="Arial"/>
-              </a:rPr>
-              <a:t>Was Sie nach diesem Modul können.</a:t>
-            </a:r>
-          </a:p>
-        </p:txBody>
-      </p:sp>
-      <p:sp>
-        <p:nvSpPr>
-          <p:cNvPr id="6" name="TextBox 5"/>
-          <p:cNvSpPr txBox="1"/>
-          <p:nvPr/>
-        </p:nvSpPr>
-        <p:spPr>
-          <a:xfrm>
-            <a:off x="365760" y="1188720"/>
-            <a:ext cx="11430000" cy="5303520"/>
-          </a:xfrm>
-          <a:prstGeom prst="rect">
-            <a:avLst/>
-          </a:prstGeom>
-          <a:noFill/>
-        </p:spPr>
-        <p:txBody>
-          <a:bodyPr wrap="square">
-            <a:spAutoFit/>
-          </a:bodyPr>
-          <a:lstStyle/>
-          <a:p>
-            <a:pPr>
-              <a:spcBef>
-                <a:spcPts val="400"/>
-              </a:spcBef>
-            </a:pPr>
-            <a:r>
-              <a:rPr sz="1400">
-                <a:solidFill>
-                  <a:srgbClr val="003DA5"/>
-                </a:solidFill>
-                <a:latin typeface="Arial"/>
-              </a:rPr>
-              <a:t>▪  </a:t>
-            </a:r>
-            <a:r>
-              <a:rPr sz="1600">
-                <a:solidFill>
-                  <a:srgbClr val="1A1A1A"/>
-                </a:solidFill>
-                <a:latin typeface="Arial"/>
-              </a:rPr>
-              <a:t>Explizites von implizitem Wissen unterscheiden und ungenutzte Transferbereiche identifizieren</a:t>
-            </a:r>
-          </a:p>
-          <a:p>
-            <a:pPr>
-              <a:spcBef>
-                <a:spcPts val="400"/>
-              </a:spcBef>
-            </a:pPr>
-            <a:r>
-              <a:rPr sz="1400">
-                <a:solidFill>
-                  <a:srgbClr val="003DA5"/>
-                </a:solidFill>
-                <a:latin typeface="Arial"/>
-              </a:rPr>
-              <a:t>▪  </a:t>
-            </a:r>
-            <a:r>
-              <a:rPr sz="1600">
-                <a:solidFill>
-                  <a:srgbClr val="1A1A1A"/>
-                </a:solidFill>
-                <a:latin typeface="Arial"/>
-              </a:rPr>
-              <a:t>Mindestens zwei Wissenstransfer-Methoden auf den eigenen Teamkontext anwenden</a:t>
-            </a:r>
-          </a:p>
-          <a:p>
-            <a:pPr>
-              <a:spcBef>
-                <a:spcPts val="400"/>
-              </a:spcBef>
-            </a:pPr>
-            <a:r>
-              <a:rPr sz="1400">
-                <a:solidFill>
-                  <a:srgbClr val="003DA5"/>
-                </a:solidFill>
-                <a:latin typeface="Arial"/>
-              </a:rPr>
-              <a:t>▪  </a:t>
-            </a:r>
-            <a:r>
-              <a:rPr sz="1600">
-                <a:solidFill>
-                  <a:srgbClr val="1A1A1A"/>
-                </a:solidFill>
-                <a:latin typeface="Arial"/>
-              </a:rPr>
-              <a:t>Typische Transferbarrieren analysieren und Gegenmaßnahmen ableiten</a:t>
-            </a:r>
-          </a:p>
-          <a:p>
-            <a:pPr>
-              <a:spcBef>
-                <a:spcPts val="400"/>
-              </a:spcBef>
-            </a:pPr>
-            <a:r>
-              <a:rPr sz="1400">
-                <a:solidFill>
-                  <a:srgbClr val="003DA5"/>
-                </a:solidFill>
-                <a:latin typeface="Arial"/>
-              </a:rPr>
-              <a:t>▪  </a:t>
-            </a:r>
-            <a:r>
-              <a:rPr sz="1600">
-                <a:solidFill>
-                  <a:srgbClr val="1A1A1A"/>
-                </a:solidFill>
-                <a:latin typeface="Arial"/>
-              </a:rPr>
-              <a:t>Eine geeignete Wissenstransfer-Routine für den Teamkontext auswählen und die Wahl anhand von Transferbarrieren begründen</a:t>
-            </a:r>
-          </a:p>
-          <a:p>
-            <a:pPr>
-              <a:spcBef>
-                <a:spcPts val="400"/>
-              </a:spcBef>
-            </a:pPr>
-            <a:r>
-              <a:rPr sz="1400">
-                <a:solidFill>
-                  <a:srgbClr val="003DA5"/>
-                </a:solidFill>
-                <a:latin typeface="Arial"/>
-              </a:rPr>
-              <a:t>▪  </a:t>
-            </a:r>
-            <a:r>
-              <a:rPr sz="1600">
-                <a:solidFill>
-                  <a:srgbClr val="1A1A1A"/>
-                </a:solidFill>
-                <a:latin typeface="Arial"/>
-              </a:rPr>
-              <a:t>Den Nutzen des Teams als Community of Practice bewerten und konkrete Stärkungsschritte begründen</a:t>
             </a:r>
           </a:p>
         </p:txBody>
@@ -4238,8 +7632,8 @@
         </p:nvSpPr>
         <p:spPr>
           <a:xfrm>
-            <a:off x="365760" y="2286000"/>
-            <a:ext cx="11430000" cy="1828800"/>
+            <a:off x="365760" y="2011680"/>
+            <a:ext cx="11430000" cy="2011680"/>
           </a:xfrm>
           <a:prstGeom prst="rect">
             <a:avLst/>
@@ -4254,7 +7648,7 @@
           <a:p>
             <a:pPr algn="l"/>
             <a:r>
-              <a:rPr sz="3600" b="1">
+              <a:rPr sz="3600" b="1" i="0">
                 <a:solidFill>
                   <a:srgbClr val="FFFFFF"/>
                 </a:solidFill>
@@ -4279,7 +7673,7 @@
     <p:bg>
       <p:bgPr>
         <a:solidFill>
-          <a:srgbClr val="1A1A1A"/>
+          <a:srgbClr val="FFFFFF"/>
         </a:solidFill>
         <a:effectLst/>
       </p:bgPr>
@@ -4306,7 +7700,7 @@
             <a:avLst/>
           </a:prstGeom>
           <a:solidFill>
-            <a:srgbClr val="E05B00"/>
+            <a:srgbClr val="003DA5"/>
           </a:solidFill>
           <a:ln>
             <a:noFill/>
@@ -4342,8 +7736,8 @@
         </p:nvSpPr>
         <p:spPr>
           <a:xfrm>
-            <a:off x="365760" y="2286000"/>
-            <a:ext cx="11430000" cy="1828800"/>
+            <a:off x="228600" y="182880"/>
+            <a:ext cx="11430000" cy="320040"/>
           </a:xfrm>
           <a:prstGeom prst="rect">
             <a:avLst/>
@@ -4358,13 +7752,284 @@
           <a:p>
             <a:pPr algn="l"/>
             <a:r>
-              <a:rPr sz="3600" b="1">
-                <a:solidFill>
-                  <a:srgbClr val="FFFFFF"/>
-                </a:solidFill>
-                <a:latin typeface="Arial"/>
-              </a:rPr>
-              <a:t>Methode 2: Strukturierte Fallbesprechung</a:t>
+              <a:rPr sz="900" b="0" i="0">
+                <a:solidFill>
+                  <a:srgbClr val="556575"/>
+                </a:solidFill>
+                <a:latin typeface="Arial"/>
+              </a:rPr>
+              <a:t>M19 · 4.5 Fünf bewährte Transfermethoden im FK-Kontext</a:t>
+            </a:r>
+          </a:p>
+        </p:txBody>
+      </p:sp>
+      <p:sp>
+        <p:nvSpPr>
+          <p:cNvPr id="4" name="TextBox 3"/>
+          <p:cNvSpPr txBox="1"/>
+          <p:nvPr/>
+        </p:nvSpPr>
+        <p:spPr>
+          <a:xfrm>
+            <a:off x="365760" y="274320"/>
+            <a:ext cx="11430000" cy="777240"/>
+          </a:xfrm>
+          <a:prstGeom prst="rect">
+            <a:avLst/>
+          </a:prstGeom>
+          <a:noFill/>
+        </p:spPr>
+        <p:txBody>
+          <a:bodyPr wrap="square">
+            <a:spAutoFit/>
+          </a:bodyPr>
+          <a:lstStyle/>
+          <a:p>
+            <a:pPr algn="l"/>
+            <a:r>
+              <a:rPr sz="2200" b="1" i="0">
+                <a:solidFill>
+                  <a:srgbClr val="003DA5"/>
+                </a:solidFill>
+                <a:latin typeface="Arial"/>
+              </a:rPr>
+              <a:t>Methode 1: Tandem-Kundenbesuch</a:t>
+            </a:r>
+          </a:p>
+        </p:txBody>
+      </p:sp>
+      <p:sp>
+        <p:nvSpPr>
+          <p:cNvPr id="5" name="Rectangle 4"/>
+          <p:cNvSpPr/>
+          <p:nvPr/>
+        </p:nvSpPr>
+        <p:spPr>
+          <a:xfrm>
+            <a:off x="365760" y="1005840"/>
+            <a:ext cx="11430000" cy="27432"/>
+          </a:xfrm>
+          <a:prstGeom prst="rect">
+            <a:avLst/>
+          </a:prstGeom>
+          <a:solidFill>
+            <a:srgbClr val="D1D5DB"/>
+          </a:solidFill>
+          <a:ln>
+            <a:noFill/>
+          </a:ln>
+        </p:spPr>
+        <p:style>
+          <a:lnRef idx="1">
+            <a:schemeClr val="accent1"/>
+          </a:lnRef>
+          <a:fillRef idx="3">
+            <a:schemeClr val="accent1"/>
+          </a:fillRef>
+          <a:effectRef idx="2">
+            <a:schemeClr val="accent1"/>
+          </a:effectRef>
+          <a:fontRef idx="minor">
+            <a:schemeClr val="lt1"/>
+          </a:fontRef>
+        </p:style>
+        <p:txBody>
+          <a:bodyPr rtlCol="0" anchor="ctr"/>
+          <a:lstStyle/>
+          <a:p>
+            <a:pPr algn="ctr"/>
+          </a:p>
+        </p:txBody>
+      </p:sp>
+      <p:sp>
+        <p:nvSpPr>
+          <p:cNvPr id="6" name="TextBox 5"/>
+          <p:cNvSpPr txBox="1"/>
+          <p:nvPr/>
+        </p:nvSpPr>
+        <p:spPr>
+          <a:xfrm>
+            <a:off x="365760" y="1143000"/>
+            <a:ext cx="11430000" cy="5212080"/>
+          </a:xfrm>
+          <a:prstGeom prst="rect">
+            <a:avLst/>
+          </a:prstGeom>
+          <a:noFill/>
+        </p:spPr>
+        <p:txBody>
+          <a:bodyPr wrap="square">
+            <a:spAutoFit/>
+          </a:bodyPr>
+          <a:lstStyle/>
+          <a:p>
+            <a:pPr>
+              <a:spcBef>
+                <a:spcPts val="500"/>
+              </a:spcBef>
+            </a:pPr>
+            <a:r>
+              <a:rPr sz="1500">
+                <a:solidFill>
+                  <a:srgbClr val="003DA5"/>
+                </a:solidFill>
+                <a:latin typeface="Arial"/>
+              </a:rPr>
+              <a:t>▪  </a:t>
+            </a:r>
+            <a:r>
+              <a:rPr sz="1700" b="1">
+                <a:solidFill>
+                  <a:srgbClr val="003DA5"/>
+                </a:solidFill>
+                <a:latin typeface="Arial"/>
+              </a:rPr>
+              <a:t>Was: </a:t>
+            </a:r>
+            <a:r>
+              <a:rPr sz="1700">
+                <a:solidFill>
+                  <a:srgbClr val="1A1A1A"/>
+                </a:solidFill>
+                <a:latin typeface="Arial"/>
+              </a:rPr>
+              <a:t>Zwei Berater besuchen gemeinsam einen Kunden – einer führt, einer beobachtet.</a:t>
+            </a:r>
+          </a:p>
+          <a:p>
+            <a:pPr>
+              <a:spcBef>
+                <a:spcPts val="500"/>
+              </a:spcBef>
+            </a:pPr>
+            <a:r>
+              <a:rPr sz="1500">
+                <a:solidFill>
+                  <a:srgbClr val="003DA5"/>
+                </a:solidFill>
+                <a:latin typeface="Arial"/>
+              </a:rPr>
+              <a:t>▪  </a:t>
+            </a:r>
+            <a:r>
+              <a:rPr sz="1700" b="1">
+                <a:solidFill>
+                  <a:srgbClr val="003DA5"/>
+                </a:solidFill>
+                <a:latin typeface="Arial"/>
+              </a:rPr>
+              <a:t>Wann: </a:t>
+            </a:r>
+            <a:r>
+              <a:rPr sz="1700">
+                <a:solidFill>
+                  <a:srgbClr val="1A1A1A"/>
+                </a:solidFill>
+                <a:latin typeface="Arial"/>
+              </a:rPr>
+              <a:t>Bei speziellem Branchenwissen oder neuem Kundensegment.</a:t>
+            </a:r>
+          </a:p>
+          <a:p>
+            <a:pPr>
+              <a:spcBef>
+                <a:spcPts val="500"/>
+              </a:spcBef>
+            </a:pPr>
+            <a:r>
+              <a:rPr sz="1500">
+                <a:solidFill>
+                  <a:srgbClr val="003DA5"/>
+                </a:solidFill>
+                <a:latin typeface="Arial"/>
+              </a:rPr>
+              <a:t>▪  </a:t>
+            </a:r>
+            <a:r>
+              <a:rPr sz="1700" b="1">
+                <a:solidFill>
+                  <a:srgbClr val="003DA5"/>
+                </a:solidFill>
+                <a:latin typeface="Arial"/>
+              </a:rPr>
+              <a:t>Ablauf: </a:t>
+            </a:r>
+            <a:r>
+              <a:rPr sz="1700">
+                <a:solidFill>
+                  <a:srgbClr val="1A1A1A"/>
+                </a:solidFill>
+                <a:latin typeface="Arial"/>
+              </a:rPr>
+              <a:t>1. Kurze Vorbesprechung (10 Min.): Wer übernimmt welche Rolle? Welche Beobachtungsaufgabe hat der Gast? 2. Kundenbesuch (gemeinsam, einer führt) 3. Nachbesprechung (15 Min.):…</a:t>
+            </a:r>
+          </a:p>
+          <a:p>
+            <a:pPr>
+              <a:spcBef>
+                <a:spcPts val="500"/>
+              </a:spcBef>
+            </a:pPr>
+            <a:r>
+              <a:rPr sz="1500">
+                <a:solidFill>
+                  <a:srgbClr val="003DA5"/>
+                </a:solidFill>
+                <a:latin typeface="Arial"/>
+              </a:rPr>
+              <a:t>▪  </a:t>
+            </a:r>
+            <a:r>
+              <a:rPr sz="1700" b="1">
+                <a:solidFill>
+                  <a:srgbClr val="003DA5"/>
+                </a:solidFill>
+                <a:latin typeface="Arial"/>
+              </a:rPr>
+              <a:t>Qualitätsfaktor: </a:t>
+            </a:r>
+            <a:r>
+              <a:rPr sz="1700">
+                <a:solidFill>
+                  <a:srgbClr val="1A1A1A"/>
+                </a:solidFill>
+                <a:latin typeface="Arial"/>
+              </a:rPr>
+              <a:t>Der Beobachter hat vorab eine konkrete Beobachtungsaufgabe (z.B. „achte auf, wie der Kollege das Thema Nachfolge einführt").</a:t>
+            </a:r>
+          </a:p>
+          <a:p>
+            <a:pPr>
+              <a:spcBef>
+                <a:spcPts val="500"/>
+              </a:spcBef>
+            </a:pPr>
+            <a:r>
+              <a:rPr sz="1500">
+                <a:solidFill>
+                  <a:srgbClr val="003DA5"/>
+                </a:solidFill>
+                <a:latin typeface="Arial"/>
+              </a:rPr>
+              <a:t>▪  </a:t>
+            </a:r>
+            <a:r>
+              <a:rPr sz="1700" b="1">
+                <a:solidFill>
+                  <a:srgbClr val="003DA5"/>
+                </a:solidFill>
+                <a:latin typeface="Arial"/>
+              </a:rPr>
+              <a:t>Kundenakzeptanz sichern: </a:t>
+            </a:r>
+            <a:r>
+              <a:rPr sz="1700">
+                <a:solidFill>
+                  <a:srgbClr val="1A1A1A"/>
+                </a:solidFill>
+                <a:latin typeface="Arial"/>
+              </a:rPr>
+              <a:t>Kunden fragen regelmäßig, warum plötzlich zwei Berater kommen – das wirkt manchmal wie eine Ablösung oder wie ein Warnsignal. Klare Ansage vorab: „Mein Kollege ist Spezialist für…</a:t>
             </a:r>
           </a:p>
         </p:txBody>
@@ -4446,8 +8111,8 @@
         </p:nvSpPr>
         <p:spPr>
           <a:xfrm>
-            <a:off x="365760" y="2286000"/>
-            <a:ext cx="11430000" cy="1828800"/>
+            <a:off x="365760" y="2011680"/>
+            <a:ext cx="11430000" cy="2011680"/>
           </a:xfrm>
           <a:prstGeom prst="rect">
             <a:avLst/>
@@ -4462,13 +8127,13 @@
           <a:p>
             <a:pPr algn="l"/>
             <a:r>
-              <a:rPr sz="3600" b="1">
+              <a:rPr sz="3600" b="1" i="0">
                 <a:solidFill>
                   <a:srgbClr val="FFFFFF"/>
                 </a:solidFill>
                 <a:latin typeface="Arial"/>
               </a:rPr>
-              <a:t>Methode 3: Wissenslandkarte</a:t>
+              <a:t>Methode 2: Strukturierte Fallbesprechung</a:t>
             </a:r>
           </a:p>
         </p:txBody>
@@ -4487,7 +8152,7 @@
     <p:bg>
       <p:bgPr>
         <a:solidFill>
-          <a:srgbClr val="1A1A1A"/>
+          <a:srgbClr val="FFFFFF"/>
         </a:solidFill>
         <a:effectLst/>
       </p:bgPr>
@@ -4514,7 +8179,7 @@
             <a:avLst/>
           </a:prstGeom>
           <a:solidFill>
-            <a:srgbClr val="E05B00"/>
+            <a:srgbClr val="003DA5"/>
           </a:solidFill>
           <a:ln>
             <a:noFill/>
@@ -4550,8 +8215,8 @@
         </p:nvSpPr>
         <p:spPr>
           <a:xfrm>
-            <a:off x="365760" y="2286000"/>
-            <a:ext cx="11430000" cy="1828800"/>
+            <a:off x="228600" y="182880"/>
+            <a:ext cx="11430000" cy="320040"/>
           </a:xfrm>
           <a:prstGeom prst="rect">
             <a:avLst/>
@@ -4566,17 +8231,598 @@
           <a:p>
             <a:pPr algn="l"/>
             <a:r>
-              <a:rPr sz="3600" b="1">
-                <a:solidFill>
-                  <a:srgbClr val="FFFFFF"/>
-                </a:solidFill>
-                <a:latin typeface="Arial"/>
-              </a:rPr>
-              <a:t>Methode 4: Lunch-and-Learn (15 Minuten)</a:t>
-            </a:r>
-          </a:p>
-        </p:txBody>
-      </p:sp>
+              <a:rPr sz="900" b="0" i="0">
+                <a:solidFill>
+                  <a:srgbClr val="556575"/>
+                </a:solidFill>
+                <a:latin typeface="Arial"/>
+              </a:rPr>
+              <a:t>M19 · 4.5 Fünf bewährte Transfermethoden im FK-Kontext</a:t>
+            </a:r>
+          </a:p>
+        </p:txBody>
+      </p:sp>
+      <p:sp>
+        <p:nvSpPr>
+          <p:cNvPr id="4" name="TextBox 3"/>
+          <p:cNvSpPr txBox="1"/>
+          <p:nvPr/>
+        </p:nvSpPr>
+        <p:spPr>
+          <a:xfrm>
+            <a:off x="365760" y="274320"/>
+            <a:ext cx="11430000" cy="777240"/>
+          </a:xfrm>
+          <a:prstGeom prst="rect">
+            <a:avLst/>
+          </a:prstGeom>
+          <a:noFill/>
+        </p:spPr>
+        <p:txBody>
+          <a:bodyPr wrap="square">
+            <a:spAutoFit/>
+          </a:bodyPr>
+          <a:lstStyle/>
+          <a:p>
+            <a:pPr algn="l"/>
+            <a:r>
+              <a:rPr sz="2200" b="1" i="0">
+                <a:solidFill>
+                  <a:srgbClr val="003DA5"/>
+                </a:solidFill>
+                <a:latin typeface="Arial"/>
+              </a:rPr>
+              <a:t>Methode 2: Strukturierte Fallbesprechung</a:t>
+            </a:r>
+          </a:p>
+        </p:txBody>
+      </p:sp>
+      <p:sp>
+        <p:nvSpPr>
+          <p:cNvPr id="5" name="Rectangle 4"/>
+          <p:cNvSpPr/>
+          <p:nvPr/>
+        </p:nvSpPr>
+        <p:spPr>
+          <a:xfrm>
+            <a:off x="365760" y="1005840"/>
+            <a:ext cx="11430000" cy="27432"/>
+          </a:xfrm>
+          <a:prstGeom prst="rect">
+            <a:avLst/>
+          </a:prstGeom>
+          <a:solidFill>
+            <a:srgbClr val="D1D5DB"/>
+          </a:solidFill>
+          <a:ln>
+            <a:noFill/>
+          </a:ln>
+        </p:spPr>
+        <p:style>
+          <a:lnRef idx="1">
+            <a:schemeClr val="accent1"/>
+          </a:lnRef>
+          <a:fillRef idx="3">
+            <a:schemeClr val="accent1"/>
+          </a:fillRef>
+          <a:effectRef idx="2">
+            <a:schemeClr val="accent1"/>
+          </a:effectRef>
+          <a:fontRef idx="minor">
+            <a:schemeClr val="lt1"/>
+          </a:fontRef>
+        </p:style>
+        <p:txBody>
+          <a:bodyPr rtlCol="0" anchor="ctr"/>
+          <a:lstStyle/>
+          <a:p>
+            <a:pPr algn="ctr"/>
+          </a:p>
+        </p:txBody>
+      </p:sp>
+      <p:graphicFrame>
+        <p:nvGraphicFramePr>
+          <p:cNvPr id="6" name="Table 5"/>
+          <p:cNvGraphicFramePr>
+            <a:graphicFrameLocks noGrp="1"/>
+          </p:cNvGraphicFramePr>
+          <p:nvPr/>
+        </p:nvGraphicFramePr>
+        <p:xfrm>
+          <a:off x="365760" y="1143000"/>
+          <a:ext cx="11430000" cy="3328416"/>
+        </p:xfrm>
+        <a:graphic>
+          <a:graphicData uri="http://schemas.openxmlformats.org/drawingml/2006/table">
+            <a:tbl>
+              <a:tblPr firstRow="1" bandRow="1">
+                <a:tableStyleId>{5C22544A-7EE6-4342-B048-85BDC9FD1C3A}</a:tableStyleId>
+              </a:tblPr>
+              <a:tblGrid>
+                <a:gridCol w="3810000"/>
+                <a:gridCol w="3810000"/>
+                <a:gridCol w="3810000"/>
+              </a:tblGrid>
+              <a:tr h="475488">
+                <a:tc>
+                  <a:txBody>
+                    <a:bodyPr wrap="square"/>
+                    <a:lstStyle/>
+                    <a:p>
+                      <a:r>
+                        <a:rPr sz="1100" b="1">
+                          <a:solidFill>
+                            <a:srgbClr val="FFFFFF"/>
+                          </a:solidFill>
+                          <a:latin typeface="Arial"/>
+                        </a:rPr>
+                        <a:t>Schritt</a:t>
+                      </a:r>
+                    </a:p>
+                  </a:txBody>
+                  <a:tcPr>
+                    <a:solidFill>
+                      <a:srgbClr val="003DA5"/>
+                    </a:solidFill>
+                  </a:tcPr>
+                </a:tc>
+                <a:tc>
+                  <a:txBody>
+                    <a:bodyPr wrap="square"/>
+                    <a:lstStyle/>
+                    <a:p>
+                      <a:r>
+                        <a:rPr sz="1100" b="1">
+                          <a:solidFill>
+                            <a:srgbClr val="FFFFFF"/>
+                          </a:solidFill>
+                          <a:latin typeface="Arial"/>
+                        </a:rPr>
+                        <a:t>Zeit</a:t>
+                      </a:r>
+                    </a:p>
+                  </a:txBody>
+                  <a:tcPr>
+                    <a:solidFill>
+                      <a:srgbClr val="003DA5"/>
+                    </a:solidFill>
+                  </a:tcPr>
+                </a:tc>
+                <a:tc>
+                  <a:txBody>
+                    <a:bodyPr wrap="square"/>
+                    <a:lstStyle/>
+                    <a:p>
+                      <a:r>
+                        <a:rPr sz="1100" b="1">
+                          <a:solidFill>
+                            <a:srgbClr val="FFFFFF"/>
+                          </a:solidFill>
+                          <a:latin typeface="Arial"/>
+                        </a:rPr>
+                        <a:t>Inhalt</a:t>
+                      </a:r>
+                    </a:p>
+                  </a:txBody>
+                  <a:tcPr>
+                    <a:solidFill>
+                      <a:srgbClr val="003DA5"/>
+                    </a:solidFill>
+                  </a:tcPr>
+                </a:tc>
+              </a:tr>
+              <a:tr h="475488">
+                <a:tc>
+                  <a:txBody>
+                    <a:bodyPr wrap="square"/>
+                    <a:lstStyle/>
+                    <a:p>
+                      <a:r>
+                        <a:rPr sz="1100" b="0">
+                          <a:solidFill>
+                            <a:srgbClr val="1A1A1A"/>
+                          </a:solidFill>
+                          <a:latin typeface="Arial"/>
+                        </a:rPr>
+                        <a:t>Falldarstellung</a:t>
+                      </a:r>
+                    </a:p>
+                  </a:txBody>
+                  <a:tcPr>
+                    <a:solidFill>
+                      <a:srgbClr val="FFFFFF"/>
+                    </a:solidFill>
+                  </a:tcPr>
+                </a:tc>
+                <a:tc>
+                  <a:txBody>
+                    <a:bodyPr wrap="square"/>
+                    <a:lstStyle/>
+                    <a:p>
+                      <a:r>
+                        <a:rPr sz="1100" b="0">
+                          <a:solidFill>
+                            <a:srgbClr val="1A1A1A"/>
+                          </a:solidFill>
+                          <a:latin typeface="Arial"/>
+                        </a:rPr>
+                        <a:t>10 Min.</a:t>
+                      </a:r>
+                    </a:p>
+                  </a:txBody>
+                  <a:tcPr>
+                    <a:solidFill>
+                      <a:srgbClr val="FFFFFF"/>
+                    </a:solidFill>
+                  </a:tcPr>
+                </a:tc>
+                <a:tc>
+                  <a:txBody>
+                    <a:bodyPr wrap="square"/>
+                    <a:lstStyle/>
+                    <a:p>
+                      <a:r>
+                        <a:rPr sz="1100" b="0">
+                          <a:solidFill>
+                            <a:srgbClr val="1A1A1A"/>
+                          </a:solidFill>
+                          <a:latin typeface="Arial"/>
+                        </a:rPr>
+                        <a:t>Berater beschreibt Situation, Ziel, bisherige Schritte</a:t>
+                      </a:r>
+                    </a:p>
+                  </a:txBody>
+                  <a:tcPr>
+                    <a:solidFill>
+                      <a:srgbClr val="FFFFFF"/>
+                    </a:solidFill>
+                  </a:tcPr>
+                </a:tc>
+              </a:tr>
+              <a:tr h="475488">
+                <a:tc>
+                  <a:txBody>
+                    <a:bodyPr wrap="square"/>
+                    <a:lstStyle/>
+                    <a:p>
+                      <a:r>
+                        <a:rPr sz="1100" b="0">
+                          <a:solidFill>
+                            <a:srgbClr val="1A1A1A"/>
+                          </a:solidFill>
+                          <a:latin typeface="Arial"/>
+                        </a:rPr>
+                        <a:t>Verständnisfragen</a:t>
+                      </a:r>
+                    </a:p>
+                  </a:txBody>
+                  <a:tcPr>
+                    <a:solidFill>
+                      <a:srgbClr val="F4F6FA"/>
+                    </a:solidFill>
+                  </a:tcPr>
+                </a:tc>
+                <a:tc>
+                  <a:txBody>
+                    <a:bodyPr wrap="square"/>
+                    <a:lstStyle/>
+                    <a:p>
+                      <a:r>
+                        <a:rPr sz="1100" b="0">
+                          <a:solidFill>
+                            <a:srgbClr val="1A1A1A"/>
+                          </a:solidFill>
+                          <a:latin typeface="Arial"/>
+                        </a:rPr>
+                        <a:t>5 Min.</a:t>
+                      </a:r>
+                    </a:p>
+                  </a:txBody>
+                  <a:tcPr>
+                    <a:solidFill>
+                      <a:srgbClr val="F4F6FA"/>
+                    </a:solidFill>
+                  </a:tcPr>
+                </a:tc>
+                <a:tc>
+                  <a:txBody>
+                    <a:bodyPr wrap="square"/>
+                    <a:lstStyle/>
+                    <a:p>
+                      <a:r>
+                        <a:rPr sz="1100" b="0">
+                          <a:solidFill>
+                            <a:srgbClr val="1A1A1A"/>
+                          </a:solidFill>
+                          <a:latin typeface="Arial"/>
+                        </a:rPr>
+                        <a:t>Nur klärende Fragen – keine Ratschläge</a:t>
+                      </a:r>
+                    </a:p>
+                  </a:txBody>
+                  <a:tcPr>
+                    <a:solidFill>
+                      <a:srgbClr val="F4F6FA"/>
+                    </a:solidFill>
+                  </a:tcPr>
+                </a:tc>
+              </a:tr>
+              <a:tr h="475488">
+                <a:tc>
+                  <a:txBody>
+                    <a:bodyPr wrap="square"/>
+                    <a:lstStyle/>
+                    <a:p>
+                      <a:r>
+                        <a:rPr sz="1100" b="0">
+                          <a:solidFill>
+                            <a:srgbClr val="1A1A1A"/>
+                          </a:solidFill>
+                          <a:latin typeface="Arial"/>
+                        </a:rPr>
+                        <a:t>Stille Reflexion</a:t>
+                      </a:r>
+                    </a:p>
+                  </a:txBody>
+                  <a:tcPr>
+                    <a:solidFill>
+                      <a:srgbClr val="FFFFFF"/>
+                    </a:solidFill>
+                  </a:tcPr>
+                </a:tc>
+                <a:tc>
+                  <a:txBody>
+                    <a:bodyPr wrap="square"/>
+                    <a:lstStyle/>
+                    <a:p>
+                      <a:r>
+                        <a:rPr sz="1100" b="0">
+                          <a:solidFill>
+                            <a:srgbClr val="1A1A1A"/>
+                          </a:solidFill>
+                          <a:latin typeface="Arial"/>
+                        </a:rPr>
+                        <a:t>3 Min.</a:t>
+                      </a:r>
+                    </a:p>
+                  </a:txBody>
+                  <a:tcPr>
+                    <a:solidFill>
+                      <a:srgbClr val="FFFFFF"/>
+                    </a:solidFill>
+                  </a:tcPr>
+                </a:tc>
+                <a:tc>
+                  <a:txBody>
+                    <a:bodyPr wrap="square"/>
+                    <a:lstStyle/>
+                    <a:p>
+                      <a:r>
+                        <a:rPr sz="1100" b="0">
+                          <a:solidFill>
+                            <a:srgbClr val="1A1A1A"/>
+                          </a:solidFill>
+                          <a:latin typeface="Arial"/>
+                        </a:rPr>
+                        <a:t>Alle notieren: Was fällt mir auf? Was würde ich tun?</a:t>
+                      </a:r>
+                    </a:p>
+                  </a:txBody>
+                  <a:tcPr>
+                    <a:solidFill>
+                      <a:srgbClr val="FFFFFF"/>
+                    </a:solidFill>
+                  </a:tcPr>
+                </a:tc>
+              </a:tr>
+              <a:tr h="475488">
+                <a:tc>
+                  <a:txBody>
+                    <a:bodyPr wrap="square"/>
+                    <a:lstStyle/>
+                    <a:p>
+                      <a:r>
+                        <a:rPr sz="1100" b="0">
+                          <a:solidFill>
+                            <a:srgbClr val="1A1A1A"/>
+                          </a:solidFill>
+                          <a:latin typeface="Arial"/>
+                        </a:rPr>
+                        <a:t>Offene Diskussion</a:t>
+                      </a:r>
+                    </a:p>
+                  </a:txBody>
+                  <a:tcPr>
+                    <a:solidFill>
+                      <a:srgbClr val="F4F6FA"/>
+                    </a:solidFill>
+                  </a:tcPr>
+                </a:tc>
+                <a:tc>
+                  <a:txBody>
+                    <a:bodyPr wrap="square"/>
+                    <a:lstStyle/>
+                    <a:p>
+                      <a:r>
+                        <a:rPr sz="1100" b="0">
+                          <a:solidFill>
+                            <a:srgbClr val="1A1A1A"/>
+                          </a:solidFill>
+                          <a:latin typeface="Arial"/>
+                        </a:rPr>
+                        <a:t>15 Min.</a:t>
+                      </a:r>
+                    </a:p>
+                  </a:txBody>
+                  <a:tcPr>
+                    <a:solidFill>
+                      <a:srgbClr val="F4F6FA"/>
+                    </a:solidFill>
+                  </a:tcPr>
+                </a:tc>
+                <a:tc>
+                  <a:txBody>
+                    <a:bodyPr wrap="square"/>
+                    <a:lstStyle/>
+                    <a:p>
+                      <a:r>
+                        <a:rPr sz="1100" b="0">
+                          <a:solidFill>
+                            <a:srgbClr val="1A1A1A"/>
+                          </a:solidFill>
+                          <a:latin typeface="Arial"/>
+                        </a:rPr>
+                        <a:t>Verschiedene Perspektiven – moderiert durch Teamleiter</a:t>
+                      </a:r>
+                    </a:p>
+                  </a:txBody>
+                  <a:tcPr>
+                    <a:solidFill>
+                      <a:srgbClr val="F4F6FA"/>
+                    </a:solidFill>
+                  </a:tcPr>
+                </a:tc>
+              </a:tr>
+              <a:tr h="475488">
+                <a:tc>
+                  <a:txBody>
+                    <a:bodyPr wrap="square"/>
+                    <a:lstStyle/>
+                    <a:p>
+                      <a:r>
+                        <a:rPr sz="1100" b="0">
+                          <a:solidFill>
+                            <a:srgbClr val="1A1A1A"/>
+                          </a:solidFill>
+                          <a:latin typeface="Arial"/>
+                        </a:rPr>
+                        <a:t>Erkenntnisse</a:t>
+                      </a:r>
+                    </a:p>
+                  </a:txBody>
+                  <a:tcPr>
+                    <a:solidFill>
+                      <a:srgbClr val="FFFFFF"/>
+                    </a:solidFill>
+                  </a:tcPr>
+                </a:tc>
+                <a:tc>
+                  <a:txBody>
+                    <a:bodyPr wrap="square"/>
+                    <a:lstStyle/>
+                    <a:p>
+                      <a:r>
+                        <a:rPr sz="1100" b="0">
+                          <a:solidFill>
+                            <a:srgbClr val="1A1A1A"/>
+                          </a:solidFill>
+                          <a:latin typeface="Arial"/>
+                        </a:rPr>
+                        <a:t>7 Min.</a:t>
+                      </a:r>
+                    </a:p>
+                  </a:txBody>
+                  <a:tcPr>
+                    <a:solidFill>
+                      <a:srgbClr val="FFFFFF"/>
+                    </a:solidFill>
+                  </a:tcPr>
+                </a:tc>
+                <a:tc>
+                  <a:txBody>
+                    <a:bodyPr wrap="square"/>
+                    <a:lstStyle/>
+                    <a:p>
+                      <a:r>
+                        <a:rPr sz="1100" b="0">
+                          <a:solidFill>
+                            <a:srgbClr val="1A1A1A"/>
+                          </a:solidFill>
+                          <a:latin typeface="Arial"/>
+                        </a:rPr>
+                        <a:t>Was nehmen wir als Prinzip mit? Wer trägt es ins Team?</a:t>
+                      </a:r>
+                    </a:p>
+                  </a:txBody>
+                  <a:tcPr>
+                    <a:solidFill>
+                      <a:srgbClr val="FFFFFF"/>
+                    </a:solidFill>
+                  </a:tcPr>
+                </a:tc>
+              </a:tr>
+              <a:tr h="475488">
+                <a:tc>
+                  <a:txBody>
+                    <a:bodyPr wrap="square"/>
+                    <a:lstStyle/>
+                    <a:p>
+                      <a:r>
+                        <a:rPr sz="1100" b="0">
+                          <a:solidFill>
+                            <a:srgbClr val="1A1A1A"/>
+                          </a:solidFill>
+                          <a:latin typeface="Arial"/>
+                        </a:rPr>
+                        <a:t>Dokumentation</a:t>
+                      </a:r>
+                    </a:p>
+                  </a:txBody>
+                  <a:tcPr>
+                    <a:solidFill>
+                      <a:srgbClr val="F4F6FA"/>
+                    </a:solidFill>
+                  </a:tcPr>
+                </a:tc>
+                <a:tc>
+                  <a:txBody>
+                    <a:bodyPr wrap="square"/>
+                    <a:lstStyle/>
+                    <a:p>
+                      <a:r>
+                        <a:rPr sz="1100" b="0">
+                          <a:solidFill>
+                            <a:srgbClr val="1A1A1A"/>
+                          </a:solidFill>
+                          <a:latin typeface="Arial"/>
+                        </a:rPr>
+                        <a:t>5 Min.</a:t>
+                      </a:r>
+                    </a:p>
+                  </a:txBody>
+                  <a:tcPr>
+                    <a:solidFill>
+                      <a:srgbClr val="F4F6FA"/>
+                    </a:solidFill>
+                  </a:tcPr>
+                </a:tc>
+                <a:tc>
+                  <a:txBody>
+                    <a:bodyPr wrap="square"/>
+                    <a:lstStyle/>
+                    <a:p>
+                      <a:r>
+                        <a:rPr sz="1100" b="0">
+                          <a:solidFill>
+                            <a:srgbClr val="1A1A1A"/>
+                          </a:solidFill>
+                          <a:latin typeface="Arial"/>
+                        </a:rPr>
+                        <a:t>Kurzprotokoll in gemeinsamer Wissensablage</a:t>
+                      </a:r>
+                    </a:p>
+                  </a:txBody>
+                  <a:tcPr>
+                    <a:solidFill>
+                      <a:srgbClr val="F4F6FA"/>
+                    </a:solidFill>
+                  </a:tcPr>
+                </a:tc>
+              </a:tr>
+            </a:tbl>
+          </a:graphicData>
+        </a:graphic>
+      </p:graphicFrame>
     </p:spTree>
   </p:cSld>
   <p:clrMapOvr>
@@ -4654,8 +8900,8 @@
         </p:nvSpPr>
         <p:spPr>
           <a:xfrm>
-            <a:off x="365760" y="2286000"/>
-            <a:ext cx="11430000" cy="1828800"/>
+            <a:off x="365760" y="2011680"/>
+            <a:ext cx="11430000" cy="2011680"/>
           </a:xfrm>
           <a:prstGeom prst="rect">
             <a:avLst/>
@@ -4670,13 +8916,13 @@
           <a:p>
             <a:pPr algn="l"/>
             <a:r>
-              <a:rPr sz="3600" b="1">
+              <a:rPr sz="3600" b="1" i="0">
                 <a:solidFill>
                   <a:srgbClr val="FFFFFF"/>
                 </a:solidFill>
                 <a:latin typeface="Arial"/>
               </a:rPr>
-              <a:t>Hinweis: Hybride und standortverteilte Teams</a:t>
+              <a:t>Methode 3: Wissenslandkarte</a:t>
             </a:r>
           </a:p>
         </p:txBody>
@@ -4695,7 +8941,7 @@
     <p:bg>
       <p:bgPr>
         <a:solidFill>
-          <a:srgbClr val="1A1A1A"/>
+          <a:srgbClr val="FFFFFF"/>
         </a:solidFill>
         <a:effectLst/>
       </p:bgPr>
@@ -4722,7 +8968,7 @@
             <a:avLst/>
           </a:prstGeom>
           <a:solidFill>
-            <a:srgbClr val="E05B00"/>
+            <a:srgbClr val="003DA5"/>
           </a:solidFill>
           <a:ln>
             <a:noFill/>
@@ -4758,8 +9004,8 @@
         </p:nvSpPr>
         <p:spPr>
           <a:xfrm>
-            <a:off x="365760" y="2286000"/>
-            <a:ext cx="11430000" cy="1828800"/>
+            <a:off x="228600" y="182880"/>
+            <a:ext cx="11430000" cy="320040"/>
           </a:xfrm>
           <a:prstGeom prst="rect">
             <a:avLst/>
@@ -4774,13 +9020,318 @@
           <a:p>
             <a:pPr algn="l"/>
             <a:r>
-              <a:rPr sz="3600" b="1">
-                <a:solidFill>
-                  <a:srgbClr val="FFFFFF"/>
-                </a:solidFill>
-                <a:latin typeface="Arial"/>
-              </a:rPr>
-              <a:t>Methode 5: Reverse Mentoring</a:t>
+              <a:rPr sz="900" b="0" i="0">
+                <a:solidFill>
+                  <a:srgbClr val="556575"/>
+                </a:solidFill>
+                <a:latin typeface="Arial"/>
+              </a:rPr>
+              <a:t>M19 · 4.5 Fünf bewährte Transfermethoden im FK-Kontext</a:t>
+            </a:r>
+          </a:p>
+        </p:txBody>
+      </p:sp>
+      <p:sp>
+        <p:nvSpPr>
+          <p:cNvPr id="4" name="TextBox 3"/>
+          <p:cNvSpPr txBox="1"/>
+          <p:nvPr/>
+        </p:nvSpPr>
+        <p:spPr>
+          <a:xfrm>
+            <a:off x="365760" y="274320"/>
+            <a:ext cx="11430000" cy="777240"/>
+          </a:xfrm>
+          <a:prstGeom prst="rect">
+            <a:avLst/>
+          </a:prstGeom>
+          <a:noFill/>
+        </p:spPr>
+        <p:txBody>
+          <a:bodyPr wrap="square">
+            <a:spAutoFit/>
+          </a:bodyPr>
+          <a:lstStyle/>
+          <a:p>
+            <a:pPr algn="l"/>
+            <a:r>
+              <a:rPr sz="2200" b="1" i="0">
+                <a:solidFill>
+                  <a:srgbClr val="003DA5"/>
+                </a:solidFill>
+                <a:latin typeface="Arial"/>
+              </a:rPr>
+              <a:t>Methode 3: Wissenslandkarte</a:t>
+            </a:r>
+          </a:p>
+        </p:txBody>
+      </p:sp>
+      <p:sp>
+        <p:nvSpPr>
+          <p:cNvPr id="5" name="Rectangle 4"/>
+          <p:cNvSpPr/>
+          <p:nvPr/>
+        </p:nvSpPr>
+        <p:spPr>
+          <a:xfrm>
+            <a:off x="365760" y="1005840"/>
+            <a:ext cx="11430000" cy="27432"/>
+          </a:xfrm>
+          <a:prstGeom prst="rect">
+            <a:avLst/>
+          </a:prstGeom>
+          <a:solidFill>
+            <a:srgbClr val="D1D5DB"/>
+          </a:solidFill>
+          <a:ln>
+            <a:noFill/>
+          </a:ln>
+        </p:spPr>
+        <p:style>
+          <a:lnRef idx="1">
+            <a:schemeClr val="accent1"/>
+          </a:lnRef>
+          <a:fillRef idx="3">
+            <a:schemeClr val="accent1"/>
+          </a:fillRef>
+          <a:effectRef idx="2">
+            <a:schemeClr val="accent1"/>
+          </a:effectRef>
+          <a:fontRef idx="minor">
+            <a:schemeClr val="lt1"/>
+          </a:fontRef>
+        </p:style>
+        <p:txBody>
+          <a:bodyPr rtlCol="0" anchor="ctr"/>
+          <a:lstStyle/>
+          <a:p>
+            <a:pPr algn="ctr"/>
+          </a:p>
+        </p:txBody>
+      </p:sp>
+      <p:sp>
+        <p:nvSpPr>
+          <p:cNvPr id="6" name="TextBox 5"/>
+          <p:cNvSpPr txBox="1"/>
+          <p:nvPr/>
+        </p:nvSpPr>
+        <p:spPr>
+          <a:xfrm>
+            <a:off x="365760" y="1143000"/>
+            <a:ext cx="11430000" cy="5212080"/>
+          </a:xfrm>
+          <a:prstGeom prst="rect">
+            <a:avLst/>
+          </a:prstGeom>
+          <a:noFill/>
+        </p:spPr>
+        <p:txBody>
+          <a:bodyPr wrap="square">
+            <a:spAutoFit/>
+          </a:bodyPr>
+          <a:lstStyle/>
+          <a:p>
+            <a:pPr>
+              <a:spcBef>
+                <a:spcPts val="500"/>
+              </a:spcBef>
+            </a:pPr>
+            <a:r>
+              <a:rPr sz="1500">
+                <a:solidFill>
+                  <a:srgbClr val="003DA5"/>
+                </a:solidFill>
+                <a:latin typeface="Arial"/>
+              </a:rPr>
+              <a:t>▪  </a:t>
+            </a:r>
+            <a:r>
+              <a:rPr sz="1700" b="1">
+                <a:solidFill>
+                  <a:srgbClr val="003DA5"/>
+                </a:solidFill>
+                <a:latin typeface="Arial"/>
+              </a:rPr>
+              <a:t>Was: </a:t>
+            </a:r>
+            <a:r>
+              <a:rPr sz="1700">
+                <a:solidFill>
+                  <a:srgbClr val="1A1A1A"/>
+                </a:solidFill>
+                <a:latin typeface="Arial"/>
+              </a:rPr>
+              <a:t>Visualisierung, wer im Team über welches Spezialwissen verfügt.</a:t>
+            </a:r>
+          </a:p>
+          <a:p>
+            <a:pPr>
+              <a:spcBef>
+                <a:spcPts val="500"/>
+              </a:spcBef>
+            </a:pPr>
+            <a:r>
+              <a:rPr sz="1500">
+                <a:solidFill>
+                  <a:srgbClr val="003DA5"/>
+                </a:solidFill>
+                <a:latin typeface="Arial"/>
+              </a:rPr>
+              <a:t>▪  </a:t>
+            </a:r>
+            <a:r>
+              <a:rPr sz="1700" b="1">
+                <a:solidFill>
+                  <a:srgbClr val="003DA5"/>
+                </a:solidFill>
+                <a:latin typeface="Arial"/>
+              </a:rPr>
+              <a:t>Wann: </a:t>
+            </a:r>
+            <a:r>
+              <a:rPr sz="1700">
+                <a:solidFill>
+                  <a:srgbClr val="1A1A1A"/>
+                </a:solidFill>
+                <a:latin typeface="Arial"/>
+              </a:rPr>
+              <a:t>Einmalig erstellen, halbjährlich aktualisieren.</a:t>
+            </a:r>
+          </a:p>
+          <a:p>
+            <a:pPr>
+              <a:spcBef>
+                <a:spcPts val="500"/>
+              </a:spcBef>
+            </a:pPr>
+            <a:r>
+              <a:rPr sz="1500">
+                <a:solidFill>
+                  <a:srgbClr val="003DA5"/>
+                </a:solidFill>
+                <a:latin typeface="Arial"/>
+              </a:rPr>
+              <a:t>▪  </a:t>
+            </a:r>
+            <a:r>
+              <a:rPr sz="1700" b="1">
+                <a:solidFill>
+                  <a:srgbClr val="003DA5"/>
+                </a:solidFill>
+                <a:latin typeface="Arial"/>
+              </a:rPr>
+              <a:t>Inhalt: </a:t>
+            </a:r>
+            <a:r>
+              <a:rPr sz="1700">
+                <a:solidFill>
+                  <a:srgbClr val="1A1A1A"/>
+                </a:solidFill>
+                <a:latin typeface="Arial"/>
+              </a:rPr>
+              <a:t>Pro Berater: Branchenexpertise, Sonderwissen (z.B. Nachfolge, Landwirtschaft, Heilberufe), bevorzugte Methoden, Kontaktnetzwerk.</a:t>
+            </a:r>
+          </a:p>
+          <a:p>
+            <a:pPr>
+              <a:spcBef>
+                <a:spcPts val="500"/>
+              </a:spcBef>
+            </a:pPr>
+            <a:r>
+              <a:rPr sz="1500">
+                <a:solidFill>
+                  <a:srgbClr val="003DA5"/>
+                </a:solidFill>
+                <a:latin typeface="Arial"/>
+              </a:rPr>
+              <a:t>▪  </a:t>
+            </a:r>
+            <a:r>
+              <a:rPr sz="1700" b="1">
+                <a:solidFill>
+                  <a:srgbClr val="003DA5"/>
+                </a:solidFill>
+                <a:latin typeface="Arial"/>
+              </a:rPr>
+              <a:t>Nutzen: </a:t>
+            </a:r>
+            <a:r>
+              <a:rPr sz="1700">
+                <a:solidFill>
+                  <a:srgbClr val="1A1A1A"/>
+                </a:solidFill>
+                <a:latin typeface="Arial"/>
+              </a:rPr>
+              <a:t>Neue Berater wissen sofort, wen sie bei welchem Thema fragen sollen. Der Teamleiter erkennt Wissensinseln und -lücken.</a:t>
+            </a:r>
+          </a:p>
+          <a:p>
+            <a:pPr>
+              <a:spcBef>
+                <a:spcPts val="500"/>
+              </a:spcBef>
+            </a:pPr>
+            <a:r>
+              <a:rPr sz="1500">
+                <a:solidFill>
+                  <a:srgbClr val="003DA5"/>
+                </a:solidFill>
+                <a:latin typeface="Arial"/>
+              </a:rPr>
+              <a:t>▪  </a:t>
+            </a:r>
+            <a:r>
+              <a:rPr sz="1700" b="1">
+                <a:solidFill>
+                  <a:srgbClr val="003DA5"/>
+                </a:solidFill>
+                <a:latin typeface="Arial"/>
+              </a:rPr>
+              <a:t>Verantwortlichkeit (entscheidend): </a:t>
+            </a:r>
+            <a:r>
+              <a:rPr sz="1700">
+                <a:solidFill>
+                  <a:srgbClr val="1A1A1A"/>
+                </a:solidFill>
+                <a:latin typeface="Arial"/>
+              </a:rPr>
+              <a:t>Eine Wissenslandkarte, die niemand pflegt, ist nach 6 Monaten wertlos. Benennen Sie explizit, wer für die halbjährliche Aktualisierung zuständig ist – Teamleiter oder rotierender…</a:t>
+            </a:r>
+          </a:p>
+          <a:p>
+            <a:pPr>
+              <a:spcBef>
+                <a:spcPts val="500"/>
+              </a:spcBef>
+            </a:pPr>
+            <a:r>
+              <a:rPr sz="1500">
+                <a:solidFill>
+                  <a:srgbClr val="003DA5"/>
+                </a:solidFill>
+                <a:latin typeface="Arial"/>
+              </a:rPr>
+              <a:t>▪  </a:t>
+            </a:r>
+            <a:r>
+              <a:rPr sz="1700" b="1">
+                <a:solidFill>
+                  <a:srgbClr val="003DA5"/>
+                </a:solidFill>
+                <a:latin typeface="Arial"/>
+              </a:rPr>
+              <a:t>Medium: </a:t>
+            </a:r>
+            <a:r>
+              <a:rPr sz="1700">
+                <a:solidFill>
+                  <a:srgbClr val="1A1A1A"/>
+                </a:solidFill>
+                <a:latin typeface="Arial"/>
+              </a:rPr>
+              <a:t>Eine physische Pinnwand im Teamraum ist in der Praxis wirkungsvoller als ein SharePoint-Dokument, das niemand öffnet – sie ist sichtbar, ohne dass man sie aufrufen muss.</a:t>
             </a:r>
           </a:p>
         </p:txBody>
@@ -4862,8 +9413,8 @@
         </p:nvSpPr>
         <p:spPr>
           <a:xfrm>
-            <a:off x="365760" y="2286000"/>
-            <a:ext cx="11430000" cy="1828800"/>
+            <a:off x="365760" y="2011680"/>
+            <a:ext cx="11430000" cy="2011680"/>
           </a:xfrm>
           <a:prstGeom prst="rect">
             <a:avLst/>
@@ -4878,13 +9429,13 @@
           <a:p>
             <a:pPr algn="l"/>
             <a:r>
-              <a:rPr sz="3600" b="1">
+              <a:rPr sz="3600" b="1" i="0">
                 <a:solidFill>
                   <a:srgbClr val="FFFFFF"/>
                 </a:solidFill>
                 <a:latin typeface="Arial"/>
               </a:rPr>
-              <a:t>Arbeitsblatt 1: Wissenslandkarte – eigener Steckbrief</a:t>
+              <a:t>Methode 4: Lunch-and-Learn (15 Minuten)</a:t>
             </a:r>
           </a:p>
         </p:txBody>

--- a/public/downloads/praesentation/M19.pptx
+++ b/public/downloads/praesentation/M19.pptx
@@ -3137,13 +3137,13 @@
         </p:spPr>
         <p:txBody>
           <a:bodyPr wrap="square">
-            <a:spAutoFit/>
+            <a:normAutofit/>
           </a:bodyPr>
           <a:lstStyle/>
           <a:p>
             <a:pPr algn="l"/>
             <a:r>
-              <a:rPr sz="1600" b="1" i="0">
+              <a:rPr sz="1000" b="1" i="0">
                 <a:solidFill>
                   <a:srgbClr val="191D2E"/>
                 </a:solidFill>
@@ -3162,23 +3162,23 @@
         </p:nvSpPr>
         <p:spPr>
           <a:xfrm>
-            <a:off x="0" y="304800"/>
-            <a:ext cx="11582400" cy="279400"/>
-          </a:xfrm>
-          <a:prstGeom prst="rect">
-            <a:avLst/>
-          </a:prstGeom>
-          <a:noFill/>
-        </p:spPr>
-        <p:txBody>
-          <a:bodyPr wrap="square">
-            <a:spAutoFit/>
+            <a:off x="609600" y="304800"/>
+            <a:ext cx="10972800" cy="279400"/>
+          </a:xfrm>
+          <a:prstGeom prst="rect">
+            <a:avLst/>
+          </a:prstGeom>
+          <a:noFill/>
+        </p:spPr>
+        <p:txBody>
+          <a:bodyPr wrap="square">
+            <a:normAutofit/>
           </a:bodyPr>
           <a:lstStyle/>
           <a:p>
             <a:pPr algn="r"/>
             <a:r>
-              <a:rPr sz="1400" b="0" i="0">
+              <a:rPr sz="900" b="0" i="0">
                 <a:solidFill>
                   <a:srgbClr val="7B7FA0"/>
                 </a:solidFill>
@@ -3197,23 +3197,23 @@
         </p:nvSpPr>
         <p:spPr>
           <a:xfrm>
-            <a:off x="609600" y="3048000"/>
-            <a:ext cx="10972800" cy="2159000"/>
-          </a:xfrm>
-          <a:prstGeom prst="rect">
-            <a:avLst/>
-          </a:prstGeom>
-          <a:noFill/>
-        </p:spPr>
-        <p:txBody>
-          <a:bodyPr wrap="square">
-            <a:spAutoFit/>
+            <a:off x="609600" y="2794000"/>
+            <a:ext cx="10972800" cy="2032000"/>
+          </a:xfrm>
+          <a:prstGeom prst="rect">
+            <a:avLst/>
+          </a:prstGeom>
+          <a:noFill/>
+        </p:spPr>
+        <p:txBody>
+          <a:bodyPr wrap="square">
+            <a:normAutofit/>
           </a:bodyPr>
           <a:lstStyle/>
           <a:p>
             <a:pPr algn="l"/>
             <a:r>
-              <a:rPr sz="9600" b="0" i="0">
+              <a:rPr sz="6000" b="0" i="0">
                 <a:solidFill>
                   <a:srgbClr val="191D2E"/>
                 </a:solidFill>
@@ -3232,7 +3232,7 @@
         </p:nvSpPr>
         <p:spPr>
           <a:xfrm>
-            <a:off x="609600" y="5334000"/>
+            <a:off x="609600" y="4889500"/>
             <a:ext cx="10972800" cy="6350"/>
           </a:xfrm>
           <a:prstGeom prst="rect">
@@ -3275,23 +3275,23 @@
         </p:nvSpPr>
         <p:spPr>
           <a:xfrm>
-            <a:off x="609600" y="5461000"/>
-            <a:ext cx="5207000" cy="889000"/>
-          </a:xfrm>
-          <a:prstGeom prst="rect">
-            <a:avLst/>
-          </a:prstGeom>
-          <a:noFill/>
-        </p:spPr>
-        <p:txBody>
-          <a:bodyPr wrap="square">
-            <a:spAutoFit/>
+            <a:off x="609600" y="5016500"/>
+            <a:ext cx="5207000" cy="1143000"/>
+          </a:xfrm>
+          <a:prstGeom prst="rect">
+            <a:avLst/>
+          </a:prstGeom>
+          <a:noFill/>
+        </p:spPr>
+        <p:txBody>
+          <a:bodyPr wrap="square">
+            <a:normAutofit/>
           </a:bodyPr>
           <a:lstStyle/>
           <a:p>
             <a:pPr algn="l"/>
             <a:r>
-              <a:rPr sz="2200" b="0" i="1">
+              <a:rPr sz="1400" b="0" i="1">
                 <a:solidFill>
                   <a:srgbClr val="4D5270"/>
                 </a:solidFill>
@@ -3310,23 +3310,23 @@
         </p:nvSpPr>
         <p:spPr>
           <a:xfrm>
-            <a:off x="6032500" y="5461000"/>
-            <a:ext cx="2286000" cy="177800"/>
-          </a:xfrm>
-          <a:prstGeom prst="rect">
-            <a:avLst/>
-          </a:prstGeom>
-          <a:noFill/>
-        </p:spPr>
-        <p:txBody>
-          <a:bodyPr wrap="square">
-            <a:spAutoFit/>
+            <a:off x="6032500" y="5016500"/>
+            <a:ext cx="2540000" cy="177800"/>
+          </a:xfrm>
+          <a:prstGeom prst="rect">
+            <a:avLst/>
+          </a:prstGeom>
+          <a:noFill/>
+        </p:spPr>
+        <p:txBody>
+          <a:bodyPr wrap="square">
+            <a:normAutofit/>
           </a:bodyPr>
           <a:lstStyle/>
           <a:p>
             <a:pPr algn="l"/>
             <a:r>
-              <a:rPr sz="1200" b="0" i="0" spc="100">
+              <a:rPr sz="900" b="0" i="0">
                 <a:solidFill>
                   <a:srgbClr val="7B7FA0"/>
                 </a:solidFill>
@@ -3345,23 +3345,23 @@
         </p:nvSpPr>
         <p:spPr>
           <a:xfrm>
-            <a:off x="6032500" y="5664200"/>
-            <a:ext cx="2286000" cy="508000"/>
-          </a:xfrm>
-          <a:prstGeom prst="rect">
-            <a:avLst/>
-          </a:prstGeom>
-          <a:noFill/>
-        </p:spPr>
-        <p:txBody>
-          <a:bodyPr wrap="square">
-            <a:spAutoFit/>
+            <a:off x="6032500" y="5207000"/>
+            <a:ext cx="2540000" cy="508000"/>
+          </a:xfrm>
+          <a:prstGeom prst="rect">
+            <a:avLst/>
+          </a:prstGeom>
+          <a:noFill/>
+        </p:spPr>
+        <p:txBody>
+          <a:bodyPr wrap="square">
+            <a:normAutofit/>
           </a:bodyPr>
           <a:lstStyle/>
           <a:p>
             <a:pPr algn="l"/>
             <a:r>
-              <a:rPr sz="2200" b="0" i="0">
+              <a:rPr sz="1400" b="0" i="0">
                 <a:solidFill>
                   <a:srgbClr val="191D2E"/>
                 </a:solidFill>
@@ -3380,23 +3380,23 @@
         </p:nvSpPr>
         <p:spPr>
           <a:xfrm>
-            <a:off x="8763000" y="5461000"/>
-            <a:ext cx="2540000" cy="177800"/>
-          </a:xfrm>
-          <a:prstGeom prst="rect">
-            <a:avLst/>
-          </a:prstGeom>
-          <a:noFill/>
-        </p:spPr>
-        <p:txBody>
-          <a:bodyPr wrap="square">
-            <a:spAutoFit/>
+            <a:off x="8890000" y="5016500"/>
+            <a:ext cx="2667000" cy="177800"/>
+          </a:xfrm>
+          <a:prstGeom prst="rect">
+            <a:avLst/>
+          </a:prstGeom>
+          <a:noFill/>
+        </p:spPr>
+        <p:txBody>
+          <a:bodyPr wrap="square">
+            <a:normAutofit/>
           </a:bodyPr>
           <a:lstStyle/>
           <a:p>
             <a:pPr algn="l"/>
             <a:r>
-              <a:rPr sz="1200" b="0" i="0" spc="100">
+              <a:rPr sz="900" b="0" i="0">
                 <a:solidFill>
                   <a:srgbClr val="7B7FA0"/>
                 </a:solidFill>
@@ -3415,23 +3415,23 @@
         </p:nvSpPr>
         <p:spPr>
           <a:xfrm>
-            <a:off x="8763000" y="5664200"/>
-            <a:ext cx="2540000" cy="508000"/>
-          </a:xfrm>
-          <a:prstGeom prst="rect">
-            <a:avLst/>
-          </a:prstGeom>
-          <a:noFill/>
-        </p:spPr>
-        <p:txBody>
-          <a:bodyPr wrap="square">
-            <a:spAutoFit/>
+            <a:off x="8890000" y="5207000"/>
+            <a:ext cx="2667000" cy="508000"/>
+          </a:xfrm>
+          <a:prstGeom prst="rect">
+            <a:avLst/>
+          </a:prstGeom>
+          <a:noFill/>
+        </p:spPr>
+        <p:txBody>
+          <a:bodyPr wrap="square">
+            <a:normAutofit/>
           </a:bodyPr>
           <a:lstStyle/>
           <a:p>
             <a:pPr algn="l"/>
             <a:r>
-              <a:rPr sz="2200" b="0" i="0">
+              <a:rPr sz="1400" b="0" i="0">
                 <a:solidFill>
                   <a:srgbClr val="191D2E"/>
                 </a:solidFill>
@@ -3476,7 +3476,7 @@
         </p:nvSpPr>
         <p:spPr>
           <a:xfrm>
-            <a:off x="609600" y="304800"/>
+            <a:off x="609600" y="279400"/>
             <a:ext cx="2540000" cy="279400"/>
           </a:xfrm>
           <a:prstGeom prst="rect">
@@ -3486,13 +3486,13 @@
         </p:spPr>
         <p:txBody>
           <a:bodyPr wrap="square">
-            <a:spAutoFit/>
+            <a:normAutofit/>
           </a:bodyPr>
           <a:lstStyle/>
           <a:p>
             <a:pPr algn="l"/>
             <a:r>
-              <a:rPr sz="1600" b="1" i="0">
+              <a:rPr sz="1000" b="1" i="0">
                 <a:solidFill>
                   <a:srgbClr val="191D2E"/>
                 </a:solidFill>
@@ -3511,23 +3511,23 @@
         </p:nvSpPr>
         <p:spPr>
           <a:xfrm>
-            <a:off x="0" y="304800"/>
-            <a:ext cx="11582400" cy="279400"/>
-          </a:xfrm>
-          <a:prstGeom prst="rect">
-            <a:avLst/>
-          </a:prstGeom>
-          <a:noFill/>
-        </p:spPr>
-        <p:txBody>
-          <a:bodyPr wrap="square">
-            <a:spAutoFit/>
+            <a:off x="609600" y="279400"/>
+            <a:ext cx="10972800" cy="279400"/>
+          </a:xfrm>
+          <a:prstGeom prst="rect">
+            <a:avLst/>
+          </a:prstGeom>
+          <a:noFill/>
+        </p:spPr>
+        <p:txBody>
+          <a:bodyPr wrap="square">
+            <a:normAutofit/>
           </a:bodyPr>
           <a:lstStyle/>
           <a:p>
             <a:pPr algn="r"/>
             <a:r>
-              <a:rPr sz="1300" b="0" i="0" spc="100">
+              <a:rPr sz="900" b="0" i="0">
                 <a:solidFill>
                   <a:srgbClr val="7B7FA0"/>
                 </a:solidFill>
@@ -3546,77 +3546,42 @@
         </p:nvSpPr>
         <p:spPr>
           <a:xfrm>
-            <a:off x="0" y="6350000"/>
-            <a:ext cx="11582400" cy="228600"/>
-          </a:xfrm>
-          <a:prstGeom prst="rect">
-            <a:avLst/>
-          </a:prstGeom>
-          <a:noFill/>
-        </p:spPr>
-        <p:txBody>
-          <a:bodyPr wrap="square">
-            <a:spAutoFit/>
+            <a:off x="609600" y="6426200"/>
+            <a:ext cx="10972800" cy="228600"/>
+          </a:xfrm>
+          <a:prstGeom prst="rect">
+            <a:avLst/>
+          </a:prstGeom>
+          <a:noFill/>
+        </p:spPr>
+        <p:txBody>
+          <a:bodyPr wrap="square">
+            <a:normAutofit/>
           </a:bodyPr>
           <a:lstStyle/>
           <a:p>
             <a:pPr algn="r"/>
             <a:r>
-              <a:rPr sz="1300" b="0" i="0">
+              <a:rPr sz="900" b="0" i="0">
                 <a:solidFill>
                   <a:srgbClr val="7B7FA0"/>
                 </a:solidFill>
                 <a:latin typeface="Courier New"/>
               </a:rPr>
-              <a:t>10 / 30</a:t>
-            </a:r>
-          </a:p>
-        </p:txBody>
-      </p:sp>
-      <p:sp>
-        <p:nvSpPr>
-          <p:cNvPr id="5" name="TextBox 4"/>
-          <p:cNvSpPr txBox="1"/>
-          <p:nvPr/>
-        </p:nvSpPr>
-        <p:spPr>
-          <a:xfrm>
-            <a:off x="609600" y="889000"/>
-            <a:ext cx="10972800" cy="1397000"/>
-          </a:xfrm>
-          <a:prstGeom prst="rect">
-            <a:avLst/>
-          </a:prstGeom>
-          <a:noFill/>
-        </p:spPr>
-        <p:txBody>
-          <a:bodyPr wrap="square">
-            <a:spAutoFit/>
-          </a:bodyPr>
-          <a:lstStyle/>
-          <a:p>
-            <a:pPr algn="l"/>
-            <a:r>
-              <a:rPr sz="7200" b="0" i="0">
-                <a:solidFill>
-                  <a:srgbClr val="191D2E"/>
-                </a:solidFill>
-                <a:latin typeface="Georgia"/>
-              </a:rPr>
-              <a:t>Methode 3: Wissenslandkarte</a:t>
-            </a:r>
-          </a:p>
-        </p:txBody>
-      </p:sp>
-      <p:sp>
-        <p:nvSpPr>
-          <p:cNvPr id="6" name="Rectangle 5"/>
+              <a:t>10</a:t>
+            </a:r>
+          </a:p>
+        </p:txBody>
+      </p:sp>
+      <p:sp>
+        <p:nvSpPr>
+          <p:cNvPr id="5" name="Rectangle 4"/>
           <p:cNvSpPr/>
           <p:nvPr/>
         </p:nvSpPr>
         <p:spPr>
           <a:xfrm>
-            <a:off x="609600" y="2286000"/>
+            <a:off x="609600" y="825500"/>
             <a:ext cx="10972800" cy="6350"/>
           </a:xfrm>
           <a:prstGeom prst="rect">
@@ -3653,29 +3618,107 @@
       </p:sp>
       <p:sp>
         <p:nvSpPr>
-          <p:cNvPr id="7" name="TextBox 6"/>
-          <p:cNvSpPr txBox="1"/>
-          <p:nvPr/>
-        </p:nvSpPr>
-        <p:spPr>
-          <a:xfrm>
-            <a:off x="609600" y="2438400"/>
-            <a:ext cx="304800" cy="355600"/>
-          </a:xfrm>
-          <a:prstGeom prst="rect">
-            <a:avLst/>
-          </a:prstGeom>
-          <a:noFill/>
-        </p:spPr>
-        <p:txBody>
-          <a:bodyPr wrap="square">
-            <a:spAutoFit/>
+          <p:cNvPr id="6" name="TextBox 5"/>
+          <p:cNvSpPr txBox="1"/>
+          <p:nvPr/>
+        </p:nvSpPr>
+        <p:spPr>
+          <a:xfrm>
+            <a:off x="609600" y="920750"/>
+            <a:ext cx="10972800" cy="1778000"/>
+          </a:xfrm>
+          <a:prstGeom prst="rect">
+            <a:avLst/>
+          </a:prstGeom>
+          <a:noFill/>
+        </p:spPr>
+        <p:txBody>
+          <a:bodyPr wrap="square">
+            <a:normAutofit/>
           </a:bodyPr>
           <a:lstStyle/>
           <a:p>
             <a:pPr algn="l"/>
             <a:r>
-              <a:rPr sz="2800" b="0" i="0">
+              <a:rPr sz="3800" b="0" i="0">
+                <a:solidFill>
+                  <a:srgbClr val="191D2E"/>
+                </a:solidFill>
+                <a:latin typeface="Georgia"/>
+              </a:rPr>
+              <a:t>Methode 3: Wissenslandkarte</a:t>
+            </a:r>
+          </a:p>
+        </p:txBody>
+      </p:sp>
+      <p:sp>
+        <p:nvSpPr>
+          <p:cNvPr id="7" name="Rectangle 6"/>
+          <p:cNvSpPr/>
+          <p:nvPr/>
+        </p:nvSpPr>
+        <p:spPr>
+          <a:xfrm>
+            <a:off x="609600" y="2762250"/>
+            <a:ext cx="10972800" cy="6350"/>
+          </a:xfrm>
+          <a:prstGeom prst="rect">
+            <a:avLst/>
+          </a:prstGeom>
+          <a:solidFill>
+            <a:srgbClr val="E0E0E8"/>
+          </a:solidFill>
+          <a:ln>
+            <a:noFill/>
+          </a:ln>
+        </p:spPr>
+        <p:style>
+          <a:lnRef idx="1">
+            <a:schemeClr val="accent1"/>
+          </a:lnRef>
+          <a:fillRef idx="3">
+            <a:schemeClr val="accent1"/>
+          </a:fillRef>
+          <a:effectRef idx="2">
+            <a:schemeClr val="accent1"/>
+          </a:effectRef>
+          <a:fontRef idx="minor">
+            <a:schemeClr val="lt1"/>
+          </a:fontRef>
+        </p:style>
+        <p:txBody>
+          <a:bodyPr rtlCol="0" anchor="ctr"/>
+          <a:lstStyle/>
+          <a:p>
+            <a:pPr algn="ctr"/>
+          </a:p>
+        </p:txBody>
+      </p:sp>
+      <p:sp>
+        <p:nvSpPr>
+          <p:cNvPr id="8" name="TextBox 7"/>
+          <p:cNvSpPr txBox="1"/>
+          <p:nvPr/>
+        </p:nvSpPr>
+        <p:spPr>
+          <a:xfrm>
+            <a:off x="609600" y="2876550"/>
+            <a:ext cx="254000" cy="355600"/>
+          </a:xfrm>
+          <a:prstGeom prst="rect">
+            <a:avLst/>
+          </a:prstGeom>
+          <a:noFill/>
+        </p:spPr>
+        <p:txBody>
+          <a:bodyPr wrap="square">
+            <a:normAutofit/>
+          </a:bodyPr>
+          <a:lstStyle/>
+          <a:p>
+            <a:pPr algn="l"/>
+            <a:r>
+              <a:rPr sz="2200" b="0" i="0">
                 <a:solidFill>
                   <a:srgbClr val="1F2B56"/>
                 </a:solidFill>
@@ -3688,36 +3731,79 @@
       </p:sp>
       <p:sp>
         <p:nvSpPr>
-          <p:cNvPr id="8" name="TextBox 7"/>
-          <p:cNvSpPr txBox="1"/>
-          <p:nvPr/>
-        </p:nvSpPr>
-        <p:spPr>
-          <a:xfrm>
-            <a:off x="1016000" y="2413000"/>
-            <a:ext cx="9906000" cy="571500"/>
-          </a:xfrm>
-          <a:prstGeom prst="rect">
-            <a:avLst/>
-          </a:prstGeom>
-          <a:noFill/>
-        </p:spPr>
-        <p:txBody>
-          <a:bodyPr wrap="square">
-            <a:spAutoFit/>
+          <p:cNvPr id="9" name="TextBox 8"/>
+          <p:cNvSpPr txBox="1"/>
+          <p:nvPr/>
+        </p:nvSpPr>
+        <p:spPr>
+          <a:xfrm>
+            <a:off x="939799" y="2851150"/>
+            <a:ext cx="10642600" cy="508000"/>
+          </a:xfrm>
+          <a:prstGeom prst="rect">
+            <a:avLst/>
+          </a:prstGeom>
+          <a:noFill/>
+        </p:spPr>
+        <p:txBody>
+          <a:bodyPr wrap="square">
+            <a:normAutofit/>
           </a:bodyPr>
           <a:lstStyle/>
           <a:p>
             <a:pPr algn="l"/>
             <a:r>
-              <a:rPr sz="2600" b="0" i="0">
+              <a:rPr sz="1400" b="0" i="0">
                 <a:solidFill>
                   <a:srgbClr val="191D2E"/>
                 </a:solidFill>
                 <a:latin typeface="Georgia"/>
               </a:rPr>
-              <a:t>Was: Visualisierung, wer im Team über welches Spezialwissen verfügt. Wann: Einmalig erstellen, halbjährlich aktualisieren. Inhalt: Pro Berater: Branchenexpertise, Sonderwissen (z.B. Nachfolge,…</a:t>
-            </a:r>
+              <a:t>Was: Visualisierung, wer im Team über welches Spezialwissen verfügt. Wann: Einmalig erstellen, halbjährlich aktualisieren. Inhalt: Pro Berater: Branchenexpertise, Sonderwissen (z.B. Nachfolge, Landwirtschaft,…</a:t>
+            </a:r>
+          </a:p>
+        </p:txBody>
+      </p:sp>
+      <p:sp>
+        <p:nvSpPr>
+          <p:cNvPr id="10" name="Rectangle 9"/>
+          <p:cNvSpPr/>
+          <p:nvPr/>
+        </p:nvSpPr>
+        <p:spPr>
+          <a:xfrm>
+            <a:off x="939799" y="3333750"/>
+            <a:ext cx="10642600" cy="6350"/>
+          </a:xfrm>
+          <a:prstGeom prst="rect">
+            <a:avLst/>
+          </a:prstGeom>
+          <a:solidFill>
+            <a:srgbClr val="E0E0E8"/>
+          </a:solidFill>
+          <a:ln>
+            <a:noFill/>
+          </a:ln>
+        </p:spPr>
+        <p:style>
+          <a:lnRef idx="1">
+            <a:schemeClr val="accent1"/>
+          </a:lnRef>
+          <a:fillRef idx="3">
+            <a:schemeClr val="accent1"/>
+          </a:fillRef>
+          <a:effectRef idx="2">
+            <a:schemeClr val="accent1"/>
+          </a:effectRef>
+          <a:fontRef idx="minor">
+            <a:schemeClr val="lt1"/>
+          </a:fontRef>
+        </p:style>
+        <p:txBody>
+          <a:bodyPr rtlCol="0" anchor="ctr"/>
+          <a:lstStyle/>
+          <a:p>
+            <a:pPr algn="ctr"/>
           </a:p>
         </p:txBody>
       </p:sp>
@@ -3755,7 +3841,7 @@
         </p:nvSpPr>
         <p:spPr>
           <a:xfrm>
-            <a:off x="609600" y="304800"/>
+            <a:off x="609600" y="279400"/>
             <a:ext cx="2540000" cy="279400"/>
           </a:xfrm>
           <a:prstGeom prst="rect">
@@ -3765,13 +3851,13 @@
         </p:spPr>
         <p:txBody>
           <a:bodyPr wrap="square">
-            <a:spAutoFit/>
+            <a:normAutofit/>
           </a:bodyPr>
           <a:lstStyle/>
           <a:p>
             <a:pPr algn="l"/>
             <a:r>
-              <a:rPr sz="1600" b="1" i="0">
+              <a:rPr sz="1000" b="1" i="0">
                 <a:solidFill>
                   <a:srgbClr val="191D2E"/>
                 </a:solidFill>
@@ -3790,23 +3876,23 @@
         </p:nvSpPr>
         <p:spPr>
           <a:xfrm>
-            <a:off x="0" y="304800"/>
-            <a:ext cx="11582400" cy="279400"/>
-          </a:xfrm>
-          <a:prstGeom prst="rect">
-            <a:avLst/>
-          </a:prstGeom>
-          <a:noFill/>
-        </p:spPr>
-        <p:txBody>
-          <a:bodyPr wrap="square">
-            <a:spAutoFit/>
+            <a:off x="609600" y="279400"/>
+            <a:ext cx="10972800" cy="279400"/>
+          </a:xfrm>
+          <a:prstGeom prst="rect">
+            <a:avLst/>
+          </a:prstGeom>
+          <a:noFill/>
+        </p:spPr>
+        <p:txBody>
+          <a:bodyPr wrap="square">
+            <a:normAutofit/>
           </a:bodyPr>
           <a:lstStyle/>
           <a:p>
             <a:pPr algn="r"/>
             <a:r>
-              <a:rPr sz="1300" b="0" i="0" spc="100">
+              <a:rPr sz="900" b="0" i="0">
                 <a:solidFill>
                   <a:srgbClr val="7B7FA0"/>
                 </a:solidFill>
@@ -3825,77 +3911,42 @@
         </p:nvSpPr>
         <p:spPr>
           <a:xfrm>
-            <a:off x="0" y="6350000"/>
-            <a:ext cx="11582400" cy="228600"/>
-          </a:xfrm>
-          <a:prstGeom prst="rect">
-            <a:avLst/>
-          </a:prstGeom>
-          <a:noFill/>
-        </p:spPr>
-        <p:txBody>
-          <a:bodyPr wrap="square">
-            <a:spAutoFit/>
+            <a:off x="609600" y="6426200"/>
+            <a:ext cx="10972800" cy="228600"/>
+          </a:xfrm>
+          <a:prstGeom prst="rect">
+            <a:avLst/>
+          </a:prstGeom>
+          <a:noFill/>
+        </p:spPr>
+        <p:txBody>
+          <a:bodyPr wrap="square">
+            <a:normAutofit/>
           </a:bodyPr>
           <a:lstStyle/>
           <a:p>
             <a:pPr algn="r"/>
             <a:r>
-              <a:rPr sz="1300" b="0" i="0">
+              <a:rPr sz="900" b="0" i="0">
                 <a:solidFill>
                   <a:srgbClr val="7B7FA0"/>
                 </a:solidFill>
                 <a:latin typeface="Courier New"/>
               </a:rPr>
-              <a:t>11 / 30</a:t>
-            </a:r>
-          </a:p>
-        </p:txBody>
-      </p:sp>
-      <p:sp>
-        <p:nvSpPr>
-          <p:cNvPr id="5" name="TextBox 4"/>
-          <p:cNvSpPr txBox="1"/>
-          <p:nvPr/>
-        </p:nvSpPr>
-        <p:spPr>
-          <a:xfrm>
-            <a:off x="609600" y="889000"/>
-            <a:ext cx="10972800" cy="1397000"/>
-          </a:xfrm>
-          <a:prstGeom prst="rect">
-            <a:avLst/>
-          </a:prstGeom>
-          <a:noFill/>
-        </p:spPr>
-        <p:txBody>
-          <a:bodyPr wrap="square">
-            <a:spAutoFit/>
-          </a:bodyPr>
-          <a:lstStyle/>
-          <a:p>
-            <a:pPr algn="l"/>
-            <a:r>
-              <a:rPr sz="7200" b="0" i="0">
-                <a:solidFill>
-                  <a:srgbClr val="191D2E"/>
-                </a:solidFill>
-                <a:latin typeface="Georgia"/>
-              </a:rPr>
-              <a:t>Methode 4: Lunch-and-Learn (15 Minuten)</a:t>
-            </a:r>
-          </a:p>
-        </p:txBody>
-      </p:sp>
-      <p:sp>
-        <p:nvSpPr>
-          <p:cNvPr id="6" name="Rectangle 5"/>
+              <a:t>11</a:t>
+            </a:r>
+          </a:p>
+        </p:txBody>
+      </p:sp>
+      <p:sp>
+        <p:nvSpPr>
+          <p:cNvPr id="5" name="Rectangle 4"/>
           <p:cNvSpPr/>
           <p:nvPr/>
         </p:nvSpPr>
         <p:spPr>
           <a:xfrm>
-            <a:off x="609600" y="2286000"/>
+            <a:off x="609600" y="825500"/>
             <a:ext cx="10972800" cy="6350"/>
           </a:xfrm>
           <a:prstGeom prst="rect">
@@ -3932,29 +3983,107 @@
       </p:sp>
       <p:sp>
         <p:nvSpPr>
-          <p:cNvPr id="7" name="TextBox 6"/>
-          <p:cNvSpPr txBox="1"/>
-          <p:nvPr/>
-        </p:nvSpPr>
-        <p:spPr>
-          <a:xfrm>
-            <a:off x="609600" y="2438400"/>
-            <a:ext cx="304800" cy="355600"/>
-          </a:xfrm>
-          <a:prstGeom prst="rect">
-            <a:avLst/>
-          </a:prstGeom>
-          <a:noFill/>
-        </p:spPr>
-        <p:txBody>
-          <a:bodyPr wrap="square">
-            <a:spAutoFit/>
+          <p:cNvPr id="6" name="TextBox 5"/>
+          <p:cNvSpPr txBox="1"/>
+          <p:nvPr/>
+        </p:nvSpPr>
+        <p:spPr>
+          <a:xfrm>
+            <a:off x="609600" y="920750"/>
+            <a:ext cx="10972800" cy="1778000"/>
+          </a:xfrm>
+          <a:prstGeom prst="rect">
+            <a:avLst/>
+          </a:prstGeom>
+          <a:noFill/>
+        </p:spPr>
+        <p:txBody>
+          <a:bodyPr wrap="square">
+            <a:normAutofit/>
           </a:bodyPr>
           <a:lstStyle/>
           <a:p>
             <a:pPr algn="l"/>
             <a:r>
-              <a:rPr sz="2800" b="0" i="0">
+              <a:rPr sz="3800" b="0" i="0">
+                <a:solidFill>
+                  <a:srgbClr val="191D2E"/>
+                </a:solidFill>
+                <a:latin typeface="Georgia"/>
+              </a:rPr>
+              <a:t>Methode 4: Lunch-and-Learn (15 Minuten)</a:t>
+            </a:r>
+          </a:p>
+        </p:txBody>
+      </p:sp>
+      <p:sp>
+        <p:nvSpPr>
+          <p:cNvPr id="7" name="Rectangle 6"/>
+          <p:cNvSpPr/>
+          <p:nvPr/>
+        </p:nvSpPr>
+        <p:spPr>
+          <a:xfrm>
+            <a:off x="609600" y="2762250"/>
+            <a:ext cx="10972800" cy="6350"/>
+          </a:xfrm>
+          <a:prstGeom prst="rect">
+            <a:avLst/>
+          </a:prstGeom>
+          <a:solidFill>
+            <a:srgbClr val="E0E0E8"/>
+          </a:solidFill>
+          <a:ln>
+            <a:noFill/>
+          </a:ln>
+        </p:spPr>
+        <p:style>
+          <a:lnRef idx="1">
+            <a:schemeClr val="accent1"/>
+          </a:lnRef>
+          <a:fillRef idx="3">
+            <a:schemeClr val="accent1"/>
+          </a:fillRef>
+          <a:effectRef idx="2">
+            <a:schemeClr val="accent1"/>
+          </a:effectRef>
+          <a:fontRef idx="minor">
+            <a:schemeClr val="lt1"/>
+          </a:fontRef>
+        </p:style>
+        <p:txBody>
+          <a:bodyPr rtlCol="0" anchor="ctr"/>
+          <a:lstStyle/>
+          <a:p>
+            <a:pPr algn="ctr"/>
+          </a:p>
+        </p:txBody>
+      </p:sp>
+      <p:sp>
+        <p:nvSpPr>
+          <p:cNvPr id="8" name="TextBox 7"/>
+          <p:cNvSpPr txBox="1"/>
+          <p:nvPr/>
+        </p:nvSpPr>
+        <p:spPr>
+          <a:xfrm>
+            <a:off x="609600" y="2876550"/>
+            <a:ext cx="254000" cy="355600"/>
+          </a:xfrm>
+          <a:prstGeom prst="rect">
+            <a:avLst/>
+          </a:prstGeom>
+          <a:noFill/>
+        </p:spPr>
+        <p:txBody>
+          <a:bodyPr wrap="square">
+            <a:normAutofit/>
+          </a:bodyPr>
+          <a:lstStyle/>
+          <a:p>
+            <a:pPr algn="l"/>
+            <a:r>
+              <a:rPr sz="2200" b="0" i="0">
                 <a:solidFill>
                   <a:srgbClr val="1F2B56"/>
                 </a:solidFill>
@@ -3967,36 +4096,79 @@
       </p:sp>
       <p:sp>
         <p:nvSpPr>
-          <p:cNvPr id="8" name="TextBox 7"/>
-          <p:cNvSpPr txBox="1"/>
-          <p:nvPr/>
-        </p:nvSpPr>
-        <p:spPr>
-          <a:xfrm>
-            <a:off x="1016000" y="2413000"/>
-            <a:ext cx="9906000" cy="571500"/>
-          </a:xfrm>
-          <a:prstGeom prst="rect">
-            <a:avLst/>
-          </a:prstGeom>
-          <a:noFill/>
-        </p:spPr>
-        <p:txBody>
-          <a:bodyPr wrap="square">
-            <a:spAutoFit/>
+          <p:cNvPr id="9" name="TextBox 8"/>
+          <p:cNvSpPr txBox="1"/>
+          <p:nvPr/>
+        </p:nvSpPr>
+        <p:spPr>
+          <a:xfrm>
+            <a:off x="939799" y="2851150"/>
+            <a:ext cx="10642600" cy="508000"/>
+          </a:xfrm>
+          <a:prstGeom prst="rect">
+            <a:avLst/>
+          </a:prstGeom>
+          <a:noFill/>
+        </p:spPr>
+        <p:txBody>
+          <a:bodyPr wrap="square">
+            <a:normAutofit/>
           </a:bodyPr>
           <a:lstStyle/>
           <a:p>
             <a:pPr algn="l"/>
             <a:r>
-              <a:rPr sz="2600" b="0" i="0">
+              <a:rPr sz="1400" b="0" i="0">
                 <a:solidFill>
                   <a:srgbClr val="191D2E"/>
                 </a:solidFill>
                 <a:latin typeface="Georgia"/>
               </a:rPr>
-              <a:t>Was: Kurzes, informelles Wissensformat – ein Berater erklärt an einem konkreten Beispiel eine Technik oder ein Konzept. Wann: Spontan oder geplant, 1–2× pro Monat. Beispielthemen: „Wie ich eine…</a:t>
-            </a:r>
+              <a:t>Was: Kurzes, informelles Wissensformat – ein Berater erklärt an einem konkreten Beispiel eine Technik oder ein Konzept. Wann: Spontan oder geplant, 1–2× pro Monat. Beispielthemen: „Wie ich eine Nachfolgesituation…</a:t>
+            </a:r>
+          </a:p>
+        </p:txBody>
+      </p:sp>
+      <p:sp>
+        <p:nvSpPr>
+          <p:cNvPr id="10" name="Rectangle 9"/>
+          <p:cNvSpPr/>
+          <p:nvPr/>
+        </p:nvSpPr>
+        <p:spPr>
+          <a:xfrm>
+            <a:off x="939799" y="3333750"/>
+            <a:ext cx="10642600" cy="6350"/>
+          </a:xfrm>
+          <a:prstGeom prst="rect">
+            <a:avLst/>
+          </a:prstGeom>
+          <a:solidFill>
+            <a:srgbClr val="E0E0E8"/>
+          </a:solidFill>
+          <a:ln>
+            <a:noFill/>
+          </a:ln>
+        </p:spPr>
+        <p:style>
+          <a:lnRef idx="1">
+            <a:schemeClr val="accent1"/>
+          </a:lnRef>
+          <a:fillRef idx="3">
+            <a:schemeClr val="accent1"/>
+          </a:fillRef>
+          <a:effectRef idx="2">
+            <a:schemeClr val="accent1"/>
+          </a:effectRef>
+          <a:fontRef idx="minor">
+            <a:schemeClr val="lt1"/>
+          </a:fontRef>
+        </p:style>
+        <p:txBody>
+          <a:bodyPr rtlCol="0" anchor="ctr"/>
+          <a:lstStyle/>
+          <a:p>
+            <a:pPr algn="ctr"/>
           </a:p>
         </p:txBody>
       </p:sp>
@@ -4034,7 +4206,7 @@
         </p:nvSpPr>
         <p:spPr>
           <a:xfrm>
-            <a:off x="609600" y="304800"/>
+            <a:off x="609600" y="279400"/>
             <a:ext cx="2540000" cy="279400"/>
           </a:xfrm>
           <a:prstGeom prst="rect">
@@ -4044,13 +4216,13 @@
         </p:spPr>
         <p:txBody>
           <a:bodyPr wrap="square">
-            <a:spAutoFit/>
+            <a:normAutofit/>
           </a:bodyPr>
           <a:lstStyle/>
           <a:p>
             <a:pPr algn="l"/>
             <a:r>
-              <a:rPr sz="1600" b="1" i="0">
+              <a:rPr sz="1000" b="1" i="0">
                 <a:solidFill>
                   <a:srgbClr val="191D2E"/>
                 </a:solidFill>
@@ -4069,23 +4241,23 @@
         </p:nvSpPr>
         <p:spPr>
           <a:xfrm>
-            <a:off x="0" y="304800"/>
-            <a:ext cx="11582400" cy="279400"/>
-          </a:xfrm>
-          <a:prstGeom prst="rect">
-            <a:avLst/>
-          </a:prstGeom>
-          <a:noFill/>
-        </p:spPr>
-        <p:txBody>
-          <a:bodyPr wrap="square">
-            <a:spAutoFit/>
+            <a:off x="609600" y="279400"/>
+            <a:ext cx="10972800" cy="279400"/>
+          </a:xfrm>
+          <a:prstGeom prst="rect">
+            <a:avLst/>
+          </a:prstGeom>
+          <a:noFill/>
+        </p:spPr>
+        <p:txBody>
+          <a:bodyPr wrap="square">
+            <a:normAutofit/>
           </a:bodyPr>
           <a:lstStyle/>
           <a:p>
             <a:pPr algn="r"/>
             <a:r>
-              <a:rPr sz="1300" b="0" i="0" spc="100">
+              <a:rPr sz="900" b="0" i="0">
                 <a:solidFill>
                   <a:srgbClr val="7B7FA0"/>
                 </a:solidFill>
@@ -4104,58 +4276,101 @@
         </p:nvSpPr>
         <p:spPr>
           <a:xfrm>
-            <a:off x="0" y="6350000"/>
-            <a:ext cx="11582400" cy="228600"/>
-          </a:xfrm>
-          <a:prstGeom prst="rect">
-            <a:avLst/>
-          </a:prstGeom>
-          <a:noFill/>
-        </p:spPr>
-        <p:txBody>
-          <a:bodyPr wrap="square">
-            <a:spAutoFit/>
+            <a:off x="609600" y="6426200"/>
+            <a:ext cx="10972800" cy="228600"/>
+          </a:xfrm>
+          <a:prstGeom prst="rect">
+            <a:avLst/>
+          </a:prstGeom>
+          <a:noFill/>
+        </p:spPr>
+        <p:txBody>
+          <a:bodyPr wrap="square">
+            <a:normAutofit/>
           </a:bodyPr>
           <a:lstStyle/>
           <a:p>
             <a:pPr algn="r"/>
             <a:r>
-              <a:rPr sz="1300" b="0" i="0">
+              <a:rPr sz="900" b="0" i="0">
                 <a:solidFill>
                   <a:srgbClr val="7B7FA0"/>
                 </a:solidFill>
                 <a:latin typeface="Courier New"/>
               </a:rPr>
-              <a:t>12 / 30</a:t>
-            </a:r>
-          </a:p>
-        </p:txBody>
-      </p:sp>
-      <p:sp>
-        <p:nvSpPr>
-          <p:cNvPr id="5" name="TextBox 4"/>
-          <p:cNvSpPr txBox="1"/>
-          <p:nvPr/>
-        </p:nvSpPr>
-        <p:spPr>
-          <a:xfrm>
-            <a:off x="609600" y="1016000"/>
-            <a:ext cx="4953000" cy="2032000"/>
-          </a:xfrm>
-          <a:prstGeom prst="rect">
-            <a:avLst/>
-          </a:prstGeom>
-          <a:noFill/>
-        </p:spPr>
-        <p:txBody>
-          <a:bodyPr wrap="square">
-            <a:spAutoFit/>
+              <a:t>12</a:t>
+            </a:r>
+          </a:p>
+        </p:txBody>
+      </p:sp>
+      <p:sp>
+        <p:nvSpPr>
+          <p:cNvPr id="5" name="Rectangle 4"/>
+          <p:cNvSpPr/>
+          <p:nvPr/>
+        </p:nvSpPr>
+        <p:spPr>
+          <a:xfrm>
+            <a:off x="609600" y="825500"/>
+            <a:ext cx="10972800" cy="6350"/>
+          </a:xfrm>
+          <a:prstGeom prst="rect">
+            <a:avLst/>
+          </a:prstGeom>
+          <a:solidFill>
+            <a:srgbClr val="191D2E"/>
+          </a:solidFill>
+          <a:ln>
+            <a:noFill/>
+          </a:ln>
+        </p:spPr>
+        <p:style>
+          <a:lnRef idx="1">
+            <a:schemeClr val="accent1"/>
+          </a:lnRef>
+          <a:fillRef idx="3">
+            <a:schemeClr val="accent1"/>
+          </a:fillRef>
+          <a:effectRef idx="2">
+            <a:schemeClr val="accent1"/>
+          </a:effectRef>
+          <a:fontRef idx="minor">
+            <a:schemeClr val="lt1"/>
+          </a:fontRef>
+        </p:style>
+        <p:txBody>
+          <a:bodyPr rtlCol="0" anchor="ctr"/>
+          <a:lstStyle/>
+          <a:p>
+            <a:pPr algn="ctr"/>
+          </a:p>
+        </p:txBody>
+      </p:sp>
+      <p:sp>
+        <p:nvSpPr>
+          <p:cNvPr id="6" name="TextBox 5"/>
+          <p:cNvSpPr txBox="1"/>
+          <p:nvPr/>
+        </p:nvSpPr>
+        <p:spPr>
+          <a:xfrm>
+            <a:off x="609600" y="920750"/>
+            <a:ext cx="4826000" cy="1778000"/>
+          </a:xfrm>
+          <a:prstGeom prst="rect">
+            <a:avLst/>
+          </a:prstGeom>
+          <a:noFill/>
+        </p:spPr>
+        <p:txBody>
+          <a:bodyPr wrap="square">
+            <a:normAutofit/>
           </a:bodyPr>
           <a:lstStyle/>
           <a:p>
             <a:pPr algn="l"/>
             <a:r>
-              <a:rPr sz="6000" b="0" i="0">
+              <a:rPr sz="3800" b="0" i="0">
                 <a:solidFill>
                   <a:srgbClr val="191D2E"/>
                 </a:solidFill>
@@ -4168,29 +4383,29 @@
       </p:sp>
       <p:sp>
         <p:nvSpPr>
-          <p:cNvPr id="6" name="TextBox 5"/>
-          <p:cNvSpPr txBox="1"/>
-          <p:nvPr/>
-        </p:nvSpPr>
-        <p:spPr>
-          <a:xfrm>
-            <a:off x="609600" y="3175000"/>
-            <a:ext cx="4953000" cy="1270000"/>
-          </a:xfrm>
-          <a:prstGeom prst="rect">
-            <a:avLst/>
-          </a:prstGeom>
-          <a:noFill/>
-        </p:spPr>
-        <p:txBody>
-          <a:bodyPr wrap="square">
-            <a:spAutoFit/>
+          <p:cNvPr id="7" name="TextBox 6"/>
+          <p:cNvSpPr txBox="1"/>
+          <p:nvPr/>
+        </p:nvSpPr>
+        <p:spPr>
+          <a:xfrm>
+            <a:off x="609600" y="2825750"/>
+            <a:ext cx="4826000" cy="1016000"/>
+          </a:xfrm>
+          <a:prstGeom prst="rect">
+            <a:avLst/>
+          </a:prstGeom>
+          <a:noFill/>
+        </p:spPr>
+        <p:txBody>
+          <a:bodyPr wrap="square">
+            <a:normAutofit/>
           </a:bodyPr>
           <a:lstStyle/>
           <a:p>
             <a:pPr algn="l"/>
             <a:r>
-              <a:rPr sz="2000" b="0" i="0">
+              <a:rPr sz="1400" b="0" i="0">
                 <a:solidFill>
                   <a:srgbClr val="4D5270"/>
                 </a:solidFill>
@@ -4203,15 +4418,15 @@
       </p:sp>
       <p:graphicFrame>
         <p:nvGraphicFramePr>
-          <p:cNvPr id="7" name="Table 6"/>
+          <p:cNvPr id="8" name="Table 7"/>
           <p:cNvGraphicFramePr>
             <a:graphicFrameLocks noGrp="1"/>
           </p:cNvGraphicFramePr>
           <p:nvPr/>
         </p:nvGraphicFramePr>
         <p:xfrm>
-          <a:off x="6096000" y="1016000"/>
-          <a:ext cx="6502400" cy="2222500"/>
+          <a:off x="5715000" y="920750"/>
+          <a:ext cx="5867400" cy="1905000"/>
         </p:xfrm>
         <a:graphic>
           <a:graphicData uri="http://schemas.openxmlformats.org/drawingml/2006/table">
@@ -4220,18 +4435,18 @@
                 <a:tableStyleId>{5C22544A-7EE6-4342-B048-85BDC9FD1C3A}</a:tableStyleId>
               </a:tblPr>
               <a:tblGrid>
-                <a:gridCol w="2167466"/>
-                <a:gridCol w="2167466"/>
-                <a:gridCol w="2167468"/>
+                <a:gridCol w="1955800"/>
+                <a:gridCol w="1955800"/>
+                <a:gridCol w="1955800"/>
               </a:tblGrid>
-              <a:tr h="444500">
+              <a:tr h="381000">
                 <a:tc>
                   <a:txBody>
                     <a:bodyPr wrap="square"/>
                     <a:lstStyle/>
                     <a:p>
                       <a:r>
-                        <a:rPr sz="1400" b="1">
+                        <a:rPr sz="1000" b="1">
                           <a:solidFill>
                             <a:srgbClr val="F8F8FA"/>
                           </a:solidFill>
@@ -4253,7 +4468,7 @@
                     <a:lstStyle/>
                     <a:p>
                       <a:r>
-                        <a:rPr sz="1400" b="1">
+                        <a:rPr sz="1000" b="1">
                           <a:solidFill>
                             <a:srgbClr val="F8F8FA"/>
                           </a:solidFill>
@@ -4275,7 +4490,7 @@
                     <a:lstStyle/>
                     <a:p>
                       <a:r>
-                        <a:rPr sz="1400" b="1">
+                        <a:rPr sz="1000" b="1">
                           <a:solidFill>
                             <a:srgbClr val="F8F8FA"/>
                           </a:solidFill>
@@ -4292,14 +4507,14 @@
                   </a:tcPr>
                 </a:tc>
               </a:tr>
-              <a:tr h="444500">
+              <a:tr h="381000">
                 <a:tc>
                   <a:txBody>
                     <a:bodyPr wrap="square"/>
                     <a:lstStyle/>
                     <a:p>
                       <a:r>
-                        <a:rPr sz="1600" b="0">
+                        <a:rPr sz="1000" b="0">
                           <a:solidFill>
                             <a:srgbClr val="191D2E"/>
                           </a:solidFill>
@@ -4321,7 +4536,7 @@
                     <a:lstStyle/>
                     <a:p>
                       <a:r>
-                        <a:rPr sz="1600" b="0">
+                        <a:rPr sz="1000" b="0">
                           <a:solidFill>
                             <a:srgbClr val="191D2E"/>
                           </a:solidFill>
@@ -4343,7 +4558,7 @@
                     <a:lstStyle/>
                     <a:p>
                       <a:r>
-                        <a:rPr sz="1600" b="0">
+                        <a:rPr sz="1000" b="0">
                           <a:solidFill>
                             <a:srgbClr val="191D2E"/>
                           </a:solidFill>
@@ -4360,14 +4575,14 @@
                   </a:tcPr>
                 </a:tc>
               </a:tr>
-              <a:tr h="444500">
+              <a:tr h="381000">
                 <a:tc>
                   <a:txBody>
                     <a:bodyPr wrap="square"/>
                     <a:lstStyle/>
                     <a:p>
                       <a:r>
-                        <a:rPr sz="1600" b="0">
+                        <a:rPr sz="1000" b="0">
                           <a:solidFill>
                             <a:srgbClr val="191D2E"/>
                           </a:solidFill>
@@ -4389,7 +4604,7 @@
                     <a:lstStyle/>
                     <a:p>
                       <a:r>
-                        <a:rPr sz="1600" b="0">
+                        <a:rPr sz="1000" b="0">
                           <a:solidFill>
                             <a:srgbClr val="191D2E"/>
                           </a:solidFill>
@@ -4411,7 +4626,7 @@
                     <a:lstStyle/>
                     <a:p>
                       <a:r>
-                        <a:rPr sz="1600" b="0">
+                        <a:rPr sz="1000" b="0">
                           <a:solidFill>
                             <a:srgbClr val="191D2E"/>
                           </a:solidFill>
@@ -4428,14 +4643,14 @@
                   </a:tcPr>
                 </a:tc>
               </a:tr>
-              <a:tr h="444500">
+              <a:tr h="381000">
                 <a:tc>
                   <a:txBody>
                     <a:bodyPr wrap="square"/>
                     <a:lstStyle/>
                     <a:p>
                       <a:r>
-                        <a:rPr sz="1600" b="0">
+                        <a:rPr sz="1000" b="0">
                           <a:solidFill>
                             <a:srgbClr val="191D2E"/>
                           </a:solidFill>
@@ -4457,7 +4672,7 @@
                     <a:lstStyle/>
                     <a:p>
                       <a:r>
-                        <a:rPr sz="1600" b="0">
+                        <a:rPr sz="1000" b="0">
                           <a:solidFill>
                             <a:srgbClr val="191D2E"/>
                           </a:solidFill>
@@ -4479,7 +4694,7 @@
                     <a:lstStyle/>
                     <a:p>
                       <a:r>
-                        <a:rPr sz="1600" b="0">
+                        <a:rPr sz="1000" b="0">
                           <a:solidFill>
                             <a:srgbClr val="191D2E"/>
                           </a:solidFill>
@@ -4496,14 +4711,14 @@
                   </a:tcPr>
                 </a:tc>
               </a:tr>
-              <a:tr h="444500">
+              <a:tr h="381000">
                 <a:tc>
                   <a:txBody>
                     <a:bodyPr wrap="square"/>
                     <a:lstStyle/>
                     <a:p>
                       <a:r>
-                        <a:rPr sz="1600" b="0">
+                        <a:rPr sz="1000" b="0">
                           <a:solidFill>
                             <a:srgbClr val="191D2E"/>
                           </a:solidFill>
@@ -4525,7 +4740,7 @@
                     <a:lstStyle/>
                     <a:p>
                       <a:r>
-                        <a:rPr sz="1600" b="0">
+                        <a:rPr sz="1000" b="0">
                           <a:solidFill>
                             <a:srgbClr val="191D2E"/>
                           </a:solidFill>
@@ -4547,7 +4762,7 @@
                     <a:lstStyle/>
                     <a:p>
                       <a:r>
-                        <a:rPr sz="1600" b="0">
+                        <a:rPr sz="1000" b="0">
                           <a:solidFill>
                             <a:srgbClr val="191D2E"/>
                           </a:solidFill>
@@ -4602,7 +4817,7 @@
         </p:nvSpPr>
         <p:spPr>
           <a:xfrm>
-            <a:off x="609600" y="304800"/>
+            <a:off x="609600" y="279400"/>
             <a:ext cx="2540000" cy="279400"/>
           </a:xfrm>
           <a:prstGeom prst="rect">
@@ -4612,13 +4827,13 @@
         </p:spPr>
         <p:txBody>
           <a:bodyPr wrap="square">
-            <a:spAutoFit/>
+            <a:normAutofit/>
           </a:bodyPr>
           <a:lstStyle/>
           <a:p>
             <a:pPr algn="l"/>
             <a:r>
-              <a:rPr sz="1600" b="1" i="0">
+              <a:rPr sz="1000" b="1" i="0">
                 <a:solidFill>
                   <a:srgbClr val="191D2E"/>
                 </a:solidFill>
@@ -4637,23 +4852,23 @@
         </p:nvSpPr>
         <p:spPr>
           <a:xfrm>
-            <a:off x="0" y="304800"/>
-            <a:ext cx="11582400" cy="279400"/>
-          </a:xfrm>
-          <a:prstGeom prst="rect">
-            <a:avLst/>
-          </a:prstGeom>
-          <a:noFill/>
-        </p:spPr>
-        <p:txBody>
-          <a:bodyPr wrap="square">
-            <a:spAutoFit/>
+            <a:off x="609600" y="279400"/>
+            <a:ext cx="10972800" cy="279400"/>
+          </a:xfrm>
+          <a:prstGeom prst="rect">
+            <a:avLst/>
+          </a:prstGeom>
+          <a:noFill/>
+        </p:spPr>
+        <p:txBody>
+          <a:bodyPr wrap="square">
+            <a:normAutofit/>
           </a:bodyPr>
           <a:lstStyle/>
           <a:p>
             <a:pPr algn="r"/>
             <a:r>
-              <a:rPr sz="1300" b="0" i="0" spc="100">
+              <a:rPr sz="900" b="0" i="0">
                 <a:solidFill>
                   <a:srgbClr val="7B7FA0"/>
                 </a:solidFill>
@@ -4672,77 +4887,42 @@
         </p:nvSpPr>
         <p:spPr>
           <a:xfrm>
-            <a:off x="0" y="6350000"/>
-            <a:ext cx="11582400" cy="228600"/>
-          </a:xfrm>
-          <a:prstGeom prst="rect">
-            <a:avLst/>
-          </a:prstGeom>
-          <a:noFill/>
-        </p:spPr>
-        <p:txBody>
-          <a:bodyPr wrap="square">
-            <a:spAutoFit/>
+            <a:off x="609600" y="6426200"/>
+            <a:ext cx="10972800" cy="228600"/>
+          </a:xfrm>
+          <a:prstGeom prst="rect">
+            <a:avLst/>
+          </a:prstGeom>
+          <a:noFill/>
+        </p:spPr>
+        <p:txBody>
+          <a:bodyPr wrap="square">
+            <a:normAutofit/>
           </a:bodyPr>
           <a:lstStyle/>
           <a:p>
             <a:pPr algn="r"/>
             <a:r>
-              <a:rPr sz="1300" b="0" i="0">
+              <a:rPr sz="900" b="0" i="0">
                 <a:solidFill>
                   <a:srgbClr val="7B7FA0"/>
                 </a:solidFill>
                 <a:latin typeface="Courier New"/>
               </a:rPr>
-              <a:t>13 / 30</a:t>
-            </a:r>
-          </a:p>
-        </p:txBody>
-      </p:sp>
-      <p:sp>
-        <p:nvSpPr>
-          <p:cNvPr id="5" name="TextBox 4"/>
-          <p:cNvSpPr txBox="1"/>
-          <p:nvPr/>
-        </p:nvSpPr>
-        <p:spPr>
-          <a:xfrm>
-            <a:off x="609600" y="889000"/>
-            <a:ext cx="10972800" cy="1397000"/>
-          </a:xfrm>
-          <a:prstGeom prst="rect">
-            <a:avLst/>
-          </a:prstGeom>
-          <a:noFill/>
-        </p:spPr>
-        <p:txBody>
-          <a:bodyPr wrap="square">
-            <a:spAutoFit/>
-          </a:bodyPr>
-          <a:lstStyle/>
-          <a:p>
-            <a:pPr algn="l"/>
-            <a:r>
-              <a:rPr sz="7200" b="0" i="0">
-                <a:solidFill>
-                  <a:srgbClr val="191D2E"/>
-                </a:solidFill>
-                <a:latin typeface="Georgia"/>
-              </a:rPr>
-              <a:t>Methode 5: Reverse Mentoring</a:t>
-            </a:r>
-          </a:p>
-        </p:txBody>
-      </p:sp>
-      <p:sp>
-        <p:nvSpPr>
-          <p:cNvPr id="6" name="Rectangle 5"/>
+              <a:t>13</a:t>
+            </a:r>
+          </a:p>
+        </p:txBody>
+      </p:sp>
+      <p:sp>
+        <p:nvSpPr>
+          <p:cNvPr id="5" name="Rectangle 4"/>
           <p:cNvSpPr/>
           <p:nvPr/>
         </p:nvSpPr>
         <p:spPr>
           <a:xfrm>
-            <a:off x="609600" y="2286000"/>
+            <a:off x="609600" y="825500"/>
             <a:ext cx="10972800" cy="6350"/>
           </a:xfrm>
           <a:prstGeom prst="rect">
@@ -4779,29 +4959,107 @@
       </p:sp>
       <p:sp>
         <p:nvSpPr>
-          <p:cNvPr id="7" name="TextBox 6"/>
-          <p:cNvSpPr txBox="1"/>
-          <p:nvPr/>
-        </p:nvSpPr>
-        <p:spPr>
-          <a:xfrm>
-            <a:off x="609600" y="2438400"/>
-            <a:ext cx="304800" cy="355600"/>
-          </a:xfrm>
-          <a:prstGeom prst="rect">
-            <a:avLst/>
-          </a:prstGeom>
-          <a:noFill/>
-        </p:spPr>
-        <p:txBody>
-          <a:bodyPr wrap="square">
-            <a:spAutoFit/>
+          <p:cNvPr id="6" name="TextBox 5"/>
+          <p:cNvSpPr txBox="1"/>
+          <p:nvPr/>
+        </p:nvSpPr>
+        <p:spPr>
+          <a:xfrm>
+            <a:off x="609600" y="920750"/>
+            <a:ext cx="10972800" cy="1778000"/>
+          </a:xfrm>
+          <a:prstGeom prst="rect">
+            <a:avLst/>
+          </a:prstGeom>
+          <a:noFill/>
+        </p:spPr>
+        <p:txBody>
+          <a:bodyPr wrap="square">
+            <a:normAutofit/>
           </a:bodyPr>
           <a:lstStyle/>
           <a:p>
             <a:pPr algn="l"/>
             <a:r>
-              <a:rPr sz="2800" b="0" i="0">
+              <a:rPr sz="3800" b="0" i="0">
+                <a:solidFill>
+                  <a:srgbClr val="191D2E"/>
+                </a:solidFill>
+                <a:latin typeface="Georgia"/>
+              </a:rPr>
+              <a:t>Methode 5: Reverse Mentoring</a:t>
+            </a:r>
+          </a:p>
+        </p:txBody>
+      </p:sp>
+      <p:sp>
+        <p:nvSpPr>
+          <p:cNvPr id="7" name="Rectangle 6"/>
+          <p:cNvSpPr/>
+          <p:nvPr/>
+        </p:nvSpPr>
+        <p:spPr>
+          <a:xfrm>
+            <a:off x="609600" y="2762250"/>
+            <a:ext cx="10972800" cy="6350"/>
+          </a:xfrm>
+          <a:prstGeom prst="rect">
+            <a:avLst/>
+          </a:prstGeom>
+          <a:solidFill>
+            <a:srgbClr val="E0E0E8"/>
+          </a:solidFill>
+          <a:ln>
+            <a:noFill/>
+          </a:ln>
+        </p:spPr>
+        <p:style>
+          <a:lnRef idx="1">
+            <a:schemeClr val="accent1"/>
+          </a:lnRef>
+          <a:fillRef idx="3">
+            <a:schemeClr val="accent1"/>
+          </a:fillRef>
+          <a:effectRef idx="2">
+            <a:schemeClr val="accent1"/>
+          </a:effectRef>
+          <a:fontRef idx="minor">
+            <a:schemeClr val="lt1"/>
+          </a:fontRef>
+        </p:style>
+        <p:txBody>
+          <a:bodyPr rtlCol="0" anchor="ctr"/>
+          <a:lstStyle/>
+          <a:p>
+            <a:pPr algn="ctr"/>
+          </a:p>
+        </p:txBody>
+      </p:sp>
+      <p:sp>
+        <p:nvSpPr>
+          <p:cNvPr id="8" name="TextBox 7"/>
+          <p:cNvSpPr txBox="1"/>
+          <p:nvPr/>
+        </p:nvSpPr>
+        <p:spPr>
+          <a:xfrm>
+            <a:off x="609600" y="2876550"/>
+            <a:ext cx="254000" cy="355600"/>
+          </a:xfrm>
+          <a:prstGeom prst="rect">
+            <a:avLst/>
+          </a:prstGeom>
+          <a:noFill/>
+        </p:spPr>
+        <p:txBody>
+          <a:bodyPr wrap="square">
+            <a:normAutofit/>
+          </a:bodyPr>
+          <a:lstStyle/>
+          <a:p>
+            <a:pPr algn="l"/>
+            <a:r>
+              <a:rPr sz="2200" b="0" i="0">
                 <a:solidFill>
                   <a:srgbClr val="1F2B56"/>
                 </a:solidFill>
@@ -4814,36 +5072,79 @@
       </p:sp>
       <p:sp>
         <p:nvSpPr>
-          <p:cNvPr id="8" name="TextBox 7"/>
-          <p:cNvSpPr txBox="1"/>
-          <p:nvPr/>
-        </p:nvSpPr>
-        <p:spPr>
-          <a:xfrm>
-            <a:off x="1016000" y="2413000"/>
-            <a:ext cx="9906000" cy="571500"/>
-          </a:xfrm>
-          <a:prstGeom prst="rect">
-            <a:avLst/>
-          </a:prstGeom>
-          <a:noFill/>
-        </p:spPr>
-        <p:txBody>
-          <a:bodyPr wrap="square">
-            <a:spAutoFit/>
+          <p:cNvPr id="9" name="TextBox 8"/>
+          <p:cNvSpPr txBox="1"/>
+          <p:nvPr/>
+        </p:nvSpPr>
+        <p:spPr>
+          <a:xfrm>
+            <a:off x="939799" y="2851150"/>
+            <a:ext cx="10642600" cy="508000"/>
+          </a:xfrm>
+          <a:prstGeom prst="rect">
+            <a:avLst/>
+          </a:prstGeom>
+          <a:noFill/>
+        </p:spPr>
+        <p:txBody>
+          <a:bodyPr wrap="square">
+            <a:normAutofit/>
           </a:bodyPr>
           <a:lstStyle/>
           <a:p>
             <a:pPr algn="l"/>
             <a:r>
-              <a:rPr sz="2600" b="0" i="0">
+              <a:rPr sz="1400" b="0" i="0">
                 <a:solidFill>
                   <a:srgbClr val="191D2E"/>
                 </a:solidFill>
                 <a:latin typeface="Georgia"/>
               </a:rPr>
-              <a:t>Was: Jüngere/neuere Berater unterweisen erfahrene Berater in Digitalthemen oder neuen Systemfunktionen. Wann: Bei Einführung neuer Tools (z.B. agree-Updates, CRM-Erweiterungen). Nutzen: Durchbricht…</a:t>
-            </a:r>
+              <a:t>Was: Jüngere/neuere Berater unterweisen erfahrene Berater in Digitalthemen oder neuen Systemfunktionen. Wann: Bei Einführung neuer Tools (z.B. agree-Updates, CRM-Erweiterungen). Nutzen: Durchbricht die Hierarchie als…</a:t>
+            </a:r>
+          </a:p>
+        </p:txBody>
+      </p:sp>
+      <p:sp>
+        <p:nvSpPr>
+          <p:cNvPr id="10" name="Rectangle 9"/>
+          <p:cNvSpPr/>
+          <p:nvPr/>
+        </p:nvSpPr>
+        <p:spPr>
+          <a:xfrm>
+            <a:off x="939799" y="3333750"/>
+            <a:ext cx="10642600" cy="6350"/>
+          </a:xfrm>
+          <a:prstGeom prst="rect">
+            <a:avLst/>
+          </a:prstGeom>
+          <a:solidFill>
+            <a:srgbClr val="E0E0E8"/>
+          </a:solidFill>
+          <a:ln>
+            <a:noFill/>
+          </a:ln>
+        </p:spPr>
+        <p:style>
+          <a:lnRef idx="1">
+            <a:schemeClr val="accent1"/>
+          </a:lnRef>
+          <a:fillRef idx="3">
+            <a:schemeClr val="accent1"/>
+          </a:fillRef>
+          <a:effectRef idx="2">
+            <a:schemeClr val="accent1"/>
+          </a:effectRef>
+          <a:fontRef idx="minor">
+            <a:schemeClr val="lt1"/>
+          </a:fontRef>
+        </p:style>
+        <p:txBody>
+          <a:bodyPr rtlCol="0" anchor="ctr"/>
+          <a:lstStyle/>
+          <a:p>
+            <a:pPr algn="ctr"/>
           </a:p>
         </p:txBody>
       </p:sp>
@@ -4881,7 +5182,7 @@
         </p:nvSpPr>
         <p:spPr>
           <a:xfrm>
-            <a:off x="609600" y="304800"/>
+            <a:off x="609600" y="279400"/>
             <a:ext cx="2540000" cy="279400"/>
           </a:xfrm>
           <a:prstGeom prst="rect">
@@ -4891,13 +5192,13 @@
         </p:spPr>
         <p:txBody>
           <a:bodyPr wrap="square">
-            <a:spAutoFit/>
+            <a:normAutofit/>
           </a:bodyPr>
           <a:lstStyle/>
           <a:p>
             <a:pPr algn="l"/>
             <a:r>
-              <a:rPr sz="1600" b="1" i="0">
+              <a:rPr sz="1000" b="1" i="0">
                 <a:solidFill>
                   <a:srgbClr val="F8F8FA"/>
                 </a:solidFill>
@@ -4916,25 +5217,25 @@
         </p:nvSpPr>
         <p:spPr>
           <a:xfrm>
-            <a:off x="0" y="304800"/>
-            <a:ext cx="11582400" cy="279400"/>
-          </a:xfrm>
-          <a:prstGeom prst="rect">
-            <a:avLst/>
-          </a:prstGeom>
-          <a:noFill/>
-        </p:spPr>
-        <p:txBody>
-          <a:bodyPr wrap="square">
-            <a:spAutoFit/>
+            <a:off x="609600" y="279400"/>
+            <a:ext cx="10972800" cy="279400"/>
+          </a:xfrm>
+          <a:prstGeom prst="rect">
+            <a:avLst/>
+          </a:prstGeom>
+          <a:noFill/>
+        </p:spPr>
+        <p:txBody>
+          <a:bodyPr wrap="square">
+            <a:normAutofit/>
           </a:bodyPr>
           <a:lstStyle/>
           <a:p>
             <a:pPr algn="r"/>
             <a:r>
-              <a:rPr sz="1300" b="0" i="0" spc="100">
-                <a:solidFill>
-                  <a:srgbClr val="F8F8FA"/>
+              <a:rPr sz="900" b="0" i="0">
+                <a:solidFill>
+                  <a:srgbClr val="7B7FA0"/>
                 </a:solidFill>
                 <a:latin typeface="Courier New"/>
               </a:rPr>
@@ -4951,29 +5252,29 @@
         </p:nvSpPr>
         <p:spPr>
           <a:xfrm>
-            <a:off x="0" y="6350000"/>
-            <a:ext cx="11582400" cy="228600"/>
-          </a:xfrm>
-          <a:prstGeom prst="rect">
-            <a:avLst/>
-          </a:prstGeom>
-          <a:noFill/>
-        </p:spPr>
-        <p:txBody>
-          <a:bodyPr wrap="square">
-            <a:spAutoFit/>
+            <a:off x="609600" y="6426200"/>
+            <a:ext cx="10972800" cy="228600"/>
+          </a:xfrm>
+          <a:prstGeom prst="rect">
+            <a:avLst/>
+          </a:prstGeom>
+          <a:noFill/>
+        </p:spPr>
+        <p:txBody>
+          <a:bodyPr wrap="square">
+            <a:normAutofit/>
           </a:bodyPr>
           <a:lstStyle/>
           <a:p>
             <a:pPr algn="r"/>
             <a:r>
-              <a:rPr sz="1300" b="0" i="0">
-                <a:solidFill>
-                  <a:srgbClr val="606070"/>
+              <a:rPr sz="900" b="0" i="0">
+                <a:solidFill>
+                  <a:srgbClr val="7B7FA0"/>
                 </a:solidFill>
                 <a:latin typeface="Courier New"/>
               </a:rPr>
-              <a:t>14 / 30</a:t>
+              <a:t>14</a:t>
             </a:r>
           </a:p>
         </p:txBody>
@@ -4986,23 +5287,23 @@
         </p:nvSpPr>
         <p:spPr>
           <a:xfrm>
-            <a:off x="609600" y="825500"/>
-            <a:ext cx="5715000" cy="4953000"/>
-          </a:xfrm>
-          <a:prstGeom prst="rect">
-            <a:avLst/>
-          </a:prstGeom>
-          <a:noFill/>
-        </p:spPr>
-        <p:txBody>
-          <a:bodyPr wrap="square">
-            <a:spAutoFit/>
+            <a:off x="609600" y="635000"/>
+            <a:ext cx="5461000" cy="5461000"/>
+          </a:xfrm>
+          <a:prstGeom prst="rect">
+            <a:avLst/>
+          </a:prstGeom>
+          <a:noFill/>
+        </p:spPr>
+        <p:txBody>
+          <a:bodyPr wrap="square">
+            <a:normAutofit/>
           </a:bodyPr>
           <a:lstStyle/>
           <a:p>
             <a:pPr algn="l"/>
             <a:r>
-              <a:rPr sz="40000" b="0" i="1">
+              <a:rPr sz="28000" b="0" i="1">
                 <a:solidFill>
                   <a:srgbClr val="D9BF7A"/>
                 </a:solidFill>
@@ -5021,58 +5322,23 @@
         </p:nvSpPr>
         <p:spPr>
           <a:xfrm>
-            <a:off x="6985000" y="3683000"/>
-            <a:ext cx="4597400" cy="228600"/>
-          </a:xfrm>
-          <a:prstGeom prst="rect">
-            <a:avLst/>
-          </a:prstGeom>
-          <a:noFill/>
-        </p:spPr>
-        <p:txBody>
-          <a:bodyPr wrap="square">
-            <a:spAutoFit/>
+            <a:off x="6731000" y="4064000"/>
+            <a:ext cx="4851400" cy="1778000"/>
+          </a:xfrm>
+          <a:prstGeom prst="rect">
+            <a:avLst/>
+          </a:prstGeom>
+          <a:noFill/>
+        </p:spPr>
+        <p:txBody>
+          <a:bodyPr wrap="square">
+            <a:normAutofit/>
           </a:bodyPr>
           <a:lstStyle/>
           <a:p>
             <a:pPr algn="r"/>
             <a:r>
-              <a:rPr sz="1400" b="0" i="0">
-                <a:solidFill>
-                  <a:srgbClr val="7B7FA0"/>
-                </a:solidFill>
-                <a:latin typeface="Courier New"/>
-              </a:rPr>
-              <a:t>4.6 TYPISCHE TRANSFERBARRIEREN UND GEGENMASSNAHMEN</a:t>
-            </a:r>
-          </a:p>
-        </p:txBody>
-      </p:sp>
-      <p:sp>
-        <p:nvSpPr>
-          <p:cNvPr id="7" name="TextBox 6"/>
-          <p:cNvSpPr txBox="1"/>
-          <p:nvPr/>
-        </p:nvSpPr>
-        <p:spPr>
-          <a:xfrm>
-            <a:off x="6985000" y="4000500"/>
-            <a:ext cx="4597400" cy="1524000"/>
-          </a:xfrm>
-          <a:prstGeom prst="rect">
-            <a:avLst/>
-          </a:prstGeom>
-          <a:noFill/>
-        </p:spPr>
-        <p:txBody>
-          <a:bodyPr wrap="square">
-            <a:spAutoFit/>
-          </a:bodyPr>
-          <a:lstStyle/>
-          <a:p>
-            <a:pPr algn="r"/>
-            <a:r>
-              <a:rPr sz="7600" b="0" i="0">
+              <a:rPr sz="3800" b="0" i="0">
                 <a:solidFill>
                   <a:srgbClr val="F8F8FA"/>
                 </a:solidFill>
@@ -5117,7 +5383,7 @@
         </p:nvSpPr>
         <p:spPr>
           <a:xfrm>
-            <a:off x="609600" y="304800"/>
+            <a:off x="609600" y="279400"/>
             <a:ext cx="2540000" cy="279400"/>
           </a:xfrm>
           <a:prstGeom prst="rect">
@@ -5127,13 +5393,13 @@
         </p:spPr>
         <p:txBody>
           <a:bodyPr wrap="square">
-            <a:spAutoFit/>
+            <a:normAutofit/>
           </a:bodyPr>
           <a:lstStyle/>
           <a:p>
             <a:pPr algn="l"/>
             <a:r>
-              <a:rPr sz="1600" b="1" i="0">
+              <a:rPr sz="1000" b="1" i="0">
                 <a:solidFill>
                   <a:srgbClr val="F8F8FA"/>
                 </a:solidFill>
@@ -5152,25 +5418,25 @@
         </p:nvSpPr>
         <p:spPr>
           <a:xfrm>
-            <a:off x="0" y="304800"/>
-            <a:ext cx="11582400" cy="279400"/>
-          </a:xfrm>
-          <a:prstGeom prst="rect">
-            <a:avLst/>
-          </a:prstGeom>
-          <a:noFill/>
-        </p:spPr>
-        <p:txBody>
-          <a:bodyPr wrap="square">
-            <a:spAutoFit/>
+            <a:off x="609600" y="279400"/>
+            <a:ext cx="10972800" cy="279400"/>
+          </a:xfrm>
+          <a:prstGeom prst="rect">
+            <a:avLst/>
+          </a:prstGeom>
+          <a:noFill/>
+        </p:spPr>
+        <p:txBody>
+          <a:bodyPr wrap="square">
+            <a:normAutofit/>
           </a:bodyPr>
           <a:lstStyle/>
           <a:p>
             <a:pPr algn="r"/>
             <a:r>
-              <a:rPr sz="1300" b="0" i="0" spc="100">
-                <a:solidFill>
-                  <a:srgbClr val="F8F8FA"/>
+              <a:rPr sz="900" b="0" i="0">
+                <a:solidFill>
+                  <a:srgbClr val="7B7FA0"/>
                 </a:solidFill>
                 <a:latin typeface="Courier New"/>
               </a:rPr>
@@ -5187,29 +5453,29 @@
         </p:nvSpPr>
         <p:spPr>
           <a:xfrm>
-            <a:off x="0" y="6350000"/>
-            <a:ext cx="11582400" cy="228600"/>
-          </a:xfrm>
-          <a:prstGeom prst="rect">
-            <a:avLst/>
-          </a:prstGeom>
-          <a:noFill/>
-        </p:spPr>
-        <p:txBody>
-          <a:bodyPr wrap="square">
-            <a:spAutoFit/>
+            <a:off x="609600" y="6426200"/>
+            <a:ext cx="10972800" cy="228600"/>
+          </a:xfrm>
+          <a:prstGeom prst="rect">
+            <a:avLst/>
+          </a:prstGeom>
+          <a:noFill/>
+        </p:spPr>
+        <p:txBody>
+          <a:bodyPr wrap="square">
+            <a:normAutofit/>
           </a:bodyPr>
           <a:lstStyle/>
           <a:p>
             <a:pPr algn="r"/>
             <a:r>
-              <a:rPr sz="1300" b="0" i="0">
-                <a:solidFill>
-                  <a:srgbClr val="606070"/>
+              <a:rPr sz="900" b="0" i="0">
+                <a:solidFill>
+                  <a:srgbClr val="7B7FA0"/>
                 </a:solidFill>
                 <a:latin typeface="Courier New"/>
               </a:rPr>
-              <a:t>15 / 30</a:t>
+              <a:t>15</a:t>
             </a:r>
           </a:p>
         </p:txBody>
@@ -5222,23 +5488,23 @@
         </p:nvSpPr>
         <p:spPr>
           <a:xfrm>
-            <a:off x="609600" y="825500"/>
-            <a:ext cx="5715000" cy="4953000"/>
-          </a:xfrm>
-          <a:prstGeom prst="rect">
-            <a:avLst/>
-          </a:prstGeom>
-          <a:noFill/>
-        </p:spPr>
-        <p:txBody>
-          <a:bodyPr wrap="square">
-            <a:spAutoFit/>
+            <a:off x="609600" y="635000"/>
+            <a:ext cx="5461000" cy="5461000"/>
+          </a:xfrm>
+          <a:prstGeom prst="rect">
+            <a:avLst/>
+          </a:prstGeom>
+          <a:noFill/>
+        </p:spPr>
+        <p:txBody>
+          <a:bodyPr wrap="square">
+            <a:normAutofit/>
           </a:bodyPr>
           <a:lstStyle/>
           <a:p>
             <a:pPr algn="l"/>
             <a:r>
-              <a:rPr sz="40000" b="0" i="1">
+              <a:rPr sz="28000" b="0" i="1">
                 <a:solidFill>
                   <a:srgbClr val="D9BF7A"/>
                 </a:solidFill>
@@ -5257,58 +5523,23 @@
         </p:nvSpPr>
         <p:spPr>
           <a:xfrm>
-            <a:off x="6985000" y="3683000"/>
-            <a:ext cx="4597400" cy="228600"/>
-          </a:xfrm>
-          <a:prstGeom prst="rect">
-            <a:avLst/>
-          </a:prstGeom>
-          <a:noFill/>
-        </p:spPr>
-        <p:txBody>
-          <a:bodyPr wrap="square">
-            <a:spAutoFit/>
+            <a:off x="6731000" y="4064000"/>
+            <a:ext cx="4851400" cy="1778000"/>
+          </a:xfrm>
+          <a:prstGeom prst="rect">
+            <a:avLst/>
+          </a:prstGeom>
+          <a:noFill/>
+        </p:spPr>
+        <p:txBody>
+          <a:bodyPr wrap="square">
+            <a:normAutofit/>
           </a:bodyPr>
           <a:lstStyle/>
           <a:p>
             <a:pPr algn="r"/>
             <a:r>
-              <a:rPr sz="1400" b="0" i="0">
-                <a:solidFill>
-                  <a:srgbClr val="7B7FA0"/>
-                </a:solidFill>
-                <a:latin typeface="Courier New"/>
-              </a:rPr>
-              <a:t>4.7 PRAXISCASE: TEAM OSTBAYERN</a:t>
-            </a:r>
-          </a:p>
-        </p:txBody>
-      </p:sp>
-      <p:sp>
-        <p:nvSpPr>
-          <p:cNvPr id="7" name="TextBox 6"/>
-          <p:cNvSpPr txBox="1"/>
-          <p:nvPr/>
-        </p:nvSpPr>
-        <p:spPr>
-          <a:xfrm>
-            <a:off x="6985000" y="4000500"/>
-            <a:ext cx="4597400" cy="1524000"/>
-          </a:xfrm>
-          <a:prstGeom prst="rect">
-            <a:avLst/>
-          </a:prstGeom>
-          <a:noFill/>
-        </p:spPr>
-        <p:txBody>
-          <a:bodyPr wrap="square">
-            <a:spAutoFit/>
-          </a:bodyPr>
-          <a:lstStyle/>
-          <a:p>
-            <a:pPr algn="r"/>
-            <a:r>
-              <a:rPr sz="7600" b="0" i="0">
+              <a:rPr sz="3800" b="0" i="0">
                 <a:solidFill>
                   <a:srgbClr val="F8F8FA"/>
                 </a:solidFill>
@@ -5353,7 +5584,7 @@
         </p:nvSpPr>
         <p:spPr>
           <a:xfrm>
-            <a:off x="609600" y="304800"/>
+            <a:off x="609600" y="279400"/>
             <a:ext cx="2540000" cy="279400"/>
           </a:xfrm>
           <a:prstGeom prst="rect">
@@ -5363,13 +5594,13 @@
         </p:spPr>
         <p:txBody>
           <a:bodyPr wrap="square">
-            <a:spAutoFit/>
+            <a:normAutofit/>
           </a:bodyPr>
           <a:lstStyle/>
           <a:p>
             <a:pPr algn="l"/>
             <a:r>
-              <a:rPr sz="1600" b="1" i="0">
+              <a:rPr sz="1000" b="1" i="0">
                 <a:solidFill>
                   <a:srgbClr val="F8F8FA"/>
                 </a:solidFill>
@@ -5388,198 +5619,163 @@
         </p:nvSpPr>
         <p:spPr>
           <a:xfrm>
-            <a:off x="0" y="304800"/>
-            <a:ext cx="11582400" cy="279400"/>
-          </a:xfrm>
-          <a:prstGeom prst="rect">
-            <a:avLst/>
-          </a:prstGeom>
-          <a:noFill/>
-        </p:spPr>
-        <p:txBody>
-          <a:bodyPr wrap="square">
-            <a:spAutoFit/>
+            <a:off x="609600" y="279400"/>
+            <a:ext cx="10972800" cy="279400"/>
+          </a:xfrm>
+          <a:prstGeom prst="rect">
+            <a:avLst/>
+          </a:prstGeom>
+          <a:noFill/>
+        </p:spPr>
+        <p:txBody>
+          <a:bodyPr wrap="square">
+            <a:normAutofit/>
           </a:bodyPr>
           <a:lstStyle/>
           <a:p>
             <a:pPr algn="r"/>
             <a:r>
-              <a:rPr sz="1300" b="0" i="0" spc="100">
+              <a:rPr sz="900" b="0" i="0">
+                <a:solidFill>
+                  <a:srgbClr val="7B7FA0"/>
+                </a:solidFill>
+                <a:latin typeface="Courier New"/>
+              </a:rPr>
+              <a:t>4.8 ARBEITSBLÄTTER</a:t>
+            </a:r>
+          </a:p>
+        </p:txBody>
+      </p:sp>
+      <p:sp>
+        <p:nvSpPr>
+          <p:cNvPr id="4" name="TextBox 3"/>
+          <p:cNvSpPr txBox="1"/>
+          <p:nvPr/>
+        </p:nvSpPr>
+        <p:spPr>
+          <a:xfrm>
+            <a:off x="609600" y="6426200"/>
+            <a:ext cx="10972800" cy="228600"/>
+          </a:xfrm>
+          <a:prstGeom prst="rect">
+            <a:avLst/>
+          </a:prstGeom>
+          <a:noFill/>
+        </p:spPr>
+        <p:txBody>
+          <a:bodyPr wrap="square">
+            <a:normAutofit/>
+          </a:bodyPr>
+          <a:lstStyle/>
+          <a:p>
+            <a:pPr algn="r"/>
+            <a:r>
+              <a:rPr sz="900" b="0" i="0">
+                <a:solidFill>
+                  <a:srgbClr val="7B7FA0"/>
+                </a:solidFill>
+                <a:latin typeface="Courier New"/>
+              </a:rPr>
+              <a:t>16</a:t>
+            </a:r>
+          </a:p>
+        </p:txBody>
+      </p:sp>
+      <p:sp>
+        <p:nvSpPr>
+          <p:cNvPr id="5" name="TextBox 4"/>
+          <p:cNvSpPr txBox="1"/>
+          <p:nvPr/>
+        </p:nvSpPr>
+        <p:spPr>
+          <a:xfrm>
+            <a:off x="609600" y="635000"/>
+            <a:ext cx="5461000" cy="5461000"/>
+          </a:xfrm>
+          <a:prstGeom prst="rect">
+            <a:avLst/>
+          </a:prstGeom>
+          <a:noFill/>
+        </p:spPr>
+        <p:txBody>
+          <a:bodyPr wrap="square">
+            <a:normAutofit/>
+          </a:bodyPr>
+          <a:lstStyle/>
+          <a:p>
+            <a:pPr algn="l"/>
+            <a:r>
+              <a:rPr sz="28000" b="0" i="1">
+                <a:solidFill>
+                  <a:srgbClr val="D9BF7A"/>
+                </a:solidFill>
+                <a:latin typeface="Georgia"/>
+              </a:rPr>
+              <a:t>VIII.</a:t>
+            </a:r>
+          </a:p>
+        </p:txBody>
+      </p:sp>
+      <p:sp>
+        <p:nvSpPr>
+          <p:cNvPr id="6" name="TextBox 5"/>
+          <p:cNvSpPr txBox="1"/>
+          <p:nvPr/>
+        </p:nvSpPr>
+        <p:spPr>
+          <a:xfrm>
+            <a:off x="6731000" y="4064000"/>
+            <a:ext cx="4851400" cy="1778000"/>
+          </a:xfrm>
+          <a:prstGeom prst="rect">
+            <a:avLst/>
+          </a:prstGeom>
+          <a:noFill/>
+        </p:spPr>
+        <p:txBody>
+          <a:bodyPr wrap="square">
+            <a:normAutofit/>
+          </a:bodyPr>
+          <a:lstStyle/>
+          <a:p>
+            <a:pPr algn="r"/>
+            <a:r>
+              <a:rPr sz="3800" b="0" i="0">
                 <a:solidFill>
                   <a:srgbClr val="F8F8FA"/>
                 </a:solidFill>
-                <a:latin typeface="Courier New"/>
-              </a:rPr>
-              <a:t>4.8 ARBEITSBLÄTTER</a:t>
-            </a:r>
-          </a:p>
-        </p:txBody>
-      </p:sp>
-      <p:sp>
-        <p:nvSpPr>
-          <p:cNvPr id="4" name="TextBox 3"/>
-          <p:cNvSpPr txBox="1"/>
-          <p:nvPr/>
-        </p:nvSpPr>
-        <p:spPr>
-          <a:xfrm>
-            <a:off x="0" y="6350000"/>
-            <a:ext cx="11582400" cy="228600"/>
-          </a:xfrm>
-          <a:prstGeom prst="rect">
-            <a:avLst/>
-          </a:prstGeom>
-          <a:noFill/>
-        </p:spPr>
-        <p:txBody>
-          <a:bodyPr wrap="square">
-            <a:spAutoFit/>
+                <a:latin typeface="Georgia"/>
+              </a:rPr>
+              <a:t>4.8 Arbeitsblätter</a:t>
+            </a:r>
+          </a:p>
+        </p:txBody>
+      </p:sp>
+      <p:sp>
+        <p:nvSpPr>
+          <p:cNvPr id="7" name="TextBox 6"/>
+          <p:cNvSpPr txBox="1"/>
+          <p:nvPr/>
+        </p:nvSpPr>
+        <p:spPr>
+          <a:xfrm>
+            <a:off x="6731000" y="5842000"/>
+            <a:ext cx="4851400" cy="635000"/>
+          </a:xfrm>
+          <a:prstGeom prst="rect">
+            <a:avLst/>
+          </a:prstGeom>
+          <a:noFill/>
+        </p:spPr>
+        <p:txBody>
+          <a:bodyPr wrap="square">
+            <a:normAutofit/>
           </a:bodyPr>
           <a:lstStyle/>
           <a:p>
             <a:pPr algn="r"/>
             <a:r>
-              <a:rPr sz="1300" b="0" i="0">
-                <a:solidFill>
-                  <a:srgbClr val="606070"/>
-                </a:solidFill>
-                <a:latin typeface="Courier New"/>
-              </a:rPr>
-              <a:t>16 / 30</a:t>
-            </a:r>
-          </a:p>
-        </p:txBody>
-      </p:sp>
-      <p:sp>
-        <p:nvSpPr>
-          <p:cNvPr id="5" name="TextBox 4"/>
-          <p:cNvSpPr txBox="1"/>
-          <p:nvPr/>
-        </p:nvSpPr>
-        <p:spPr>
-          <a:xfrm>
-            <a:off x="609600" y="825500"/>
-            <a:ext cx="5715000" cy="4953000"/>
-          </a:xfrm>
-          <a:prstGeom prst="rect">
-            <a:avLst/>
-          </a:prstGeom>
-          <a:noFill/>
-        </p:spPr>
-        <p:txBody>
-          <a:bodyPr wrap="square">
-            <a:spAutoFit/>
-          </a:bodyPr>
-          <a:lstStyle/>
-          <a:p>
-            <a:pPr algn="l"/>
-            <a:r>
-              <a:rPr sz="40000" b="0" i="1">
-                <a:solidFill>
-                  <a:srgbClr val="D9BF7A"/>
-                </a:solidFill>
-                <a:latin typeface="Georgia"/>
-              </a:rPr>
-              <a:t>VIII.</a:t>
-            </a:r>
-          </a:p>
-        </p:txBody>
-      </p:sp>
-      <p:sp>
-        <p:nvSpPr>
-          <p:cNvPr id="6" name="TextBox 5"/>
-          <p:cNvSpPr txBox="1"/>
-          <p:nvPr/>
-        </p:nvSpPr>
-        <p:spPr>
-          <a:xfrm>
-            <a:off x="6985000" y="3683000"/>
-            <a:ext cx="4597400" cy="228600"/>
-          </a:xfrm>
-          <a:prstGeom prst="rect">
-            <a:avLst/>
-          </a:prstGeom>
-          <a:noFill/>
-        </p:spPr>
-        <p:txBody>
-          <a:bodyPr wrap="square">
-            <a:spAutoFit/>
-          </a:bodyPr>
-          <a:lstStyle/>
-          <a:p>
-            <a:pPr algn="r"/>
-            <a:r>
-              <a:rPr sz="1400" b="0" i="0">
-                <a:solidFill>
-                  <a:srgbClr val="7B7FA0"/>
-                </a:solidFill>
-                <a:latin typeface="Courier New"/>
-              </a:rPr>
-              <a:t>4.8 ARBEITSBLÄTTER</a:t>
-            </a:r>
-          </a:p>
-        </p:txBody>
-      </p:sp>
-      <p:sp>
-        <p:nvSpPr>
-          <p:cNvPr id="7" name="TextBox 6"/>
-          <p:cNvSpPr txBox="1"/>
-          <p:nvPr/>
-        </p:nvSpPr>
-        <p:spPr>
-          <a:xfrm>
-            <a:off x="6985000" y="4000500"/>
-            <a:ext cx="4597400" cy="1524000"/>
-          </a:xfrm>
-          <a:prstGeom prst="rect">
-            <a:avLst/>
-          </a:prstGeom>
-          <a:noFill/>
-        </p:spPr>
-        <p:txBody>
-          <a:bodyPr wrap="square">
-            <a:spAutoFit/>
-          </a:bodyPr>
-          <a:lstStyle/>
-          <a:p>
-            <a:pPr algn="r"/>
-            <a:r>
-              <a:rPr sz="7600" b="0" i="0">
-                <a:solidFill>
-                  <a:srgbClr val="F8F8FA"/>
-                </a:solidFill>
-                <a:latin typeface="Georgia"/>
-              </a:rPr>
-              <a:t>4.8 Arbeitsblätter</a:t>
-            </a:r>
-          </a:p>
-        </p:txBody>
-      </p:sp>
-      <p:sp>
-        <p:nvSpPr>
-          <p:cNvPr id="8" name="TextBox 7"/>
-          <p:cNvSpPr txBox="1"/>
-          <p:nvPr/>
-        </p:nvSpPr>
-        <p:spPr>
-          <a:xfrm>
-            <a:off x="6985000" y="5524500"/>
-            <a:ext cx="4597400" cy="635000"/>
-          </a:xfrm>
-          <a:prstGeom prst="rect">
-            <a:avLst/>
-          </a:prstGeom>
-          <a:noFill/>
-        </p:spPr>
-        <p:txBody>
-          <a:bodyPr wrap="square">
-            <a:spAutoFit/>
-          </a:bodyPr>
-          <a:lstStyle/>
-          <a:p>
-            <a:pPr algn="r"/>
-            <a:r>
-              <a:rPr sz="2000" b="0" i="1">
+              <a:rPr sz="1400" b="0" i="1">
                 <a:solidFill>
                   <a:srgbClr val="7B7FA0"/>
                 </a:solidFill>
@@ -5624,7 +5820,7 @@
         </p:nvSpPr>
         <p:spPr>
           <a:xfrm>
-            <a:off x="609600" y="304800"/>
+            <a:off x="609600" y="279400"/>
             <a:ext cx="2540000" cy="279400"/>
           </a:xfrm>
           <a:prstGeom prst="rect">
@@ -5634,13 +5830,13 @@
         </p:spPr>
         <p:txBody>
           <a:bodyPr wrap="square">
-            <a:spAutoFit/>
+            <a:normAutofit/>
           </a:bodyPr>
           <a:lstStyle/>
           <a:p>
             <a:pPr algn="l"/>
             <a:r>
-              <a:rPr sz="1600" b="1" i="0">
+              <a:rPr sz="1000" b="1" i="0">
                 <a:solidFill>
                   <a:srgbClr val="191D2E"/>
                 </a:solidFill>
@@ -5659,23 +5855,23 @@
         </p:nvSpPr>
         <p:spPr>
           <a:xfrm>
-            <a:off x="0" y="304800"/>
-            <a:ext cx="11582400" cy="279400"/>
-          </a:xfrm>
-          <a:prstGeom prst="rect">
-            <a:avLst/>
-          </a:prstGeom>
-          <a:noFill/>
-        </p:spPr>
-        <p:txBody>
-          <a:bodyPr wrap="square">
-            <a:spAutoFit/>
+            <a:off x="609600" y="279400"/>
+            <a:ext cx="10972800" cy="279400"/>
+          </a:xfrm>
+          <a:prstGeom prst="rect">
+            <a:avLst/>
+          </a:prstGeom>
+          <a:noFill/>
+        </p:spPr>
+        <p:txBody>
+          <a:bodyPr wrap="square">
+            <a:normAutofit/>
           </a:bodyPr>
           <a:lstStyle/>
           <a:p>
             <a:pPr algn="r"/>
             <a:r>
-              <a:rPr sz="1300" b="0" i="0" spc="100">
+              <a:rPr sz="900" b="0" i="0">
                 <a:solidFill>
                   <a:srgbClr val="7B7FA0"/>
                 </a:solidFill>
@@ -5694,58 +5890,101 @@
         </p:nvSpPr>
         <p:spPr>
           <a:xfrm>
-            <a:off x="0" y="6350000"/>
-            <a:ext cx="11582400" cy="228600"/>
-          </a:xfrm>
-          <a:prstGeom prst="rect">
-            <a:avLst/>
-          </a:prstGeom>
-          <a:noFill/>
-        </p:spPr>
-        <p:txBody>
-          <a:bodyPr wrap="square">
-            <a:spAutoFit/>
+            <a:off x="609600" y="6426200"/>
+            <a:ext cx="10972800" cy="228600"/>
+          </a:xfrm>
+          <a:prstGeom prst="rect">
+            <a:avLst/>
+          </a:prstGeom>
+          <a:noFill/>
+        </p:spPr>
+        <p:txBody>
+          <a:bodyPr wrap="square">
+            <a:normAutofit/>
           </a:bodyPr>
           <a:lstStyle/>
           <a:p>
             <a:pPr algn="r"/>
             <a:r>
-              <a:rPr sz="1300" b="0" i="0">
+              <a:rPr sz="900" b="0" i="0">
                 <a:solidFill>
                   <a:srgbClr val="7B7FA0"/>
                 </a:solidFill>
                 <a:latin typeface="Courier New"/>
               </a:rPr>
-              <a:t>17 / 30</a:t>
-            </a:r>
-          </a:p>
-        </p:txBody>
-      </p:sp>
-      <p:sp>
-        <p:nvSpPr>
-          <p:cNvPr id="5" name="TextBox 4"/>
-          <p:cNvSpPr txBox="1"/>
-          <p:nvPr/>
-        </p:nvSpPr>
-        <p:spPr>
-          <a:xfrm>
-            <a:off x="609600" y="1016000"/>
-            <a:ext cx="4953000" cy="2032000"/>
-          </a:xfrm>
-          <a:prstGeom prst="rect">
-            <a:avLst/>
-          </a:prstGeom>
-          <a:noFill/>
-        </p:spPr>
-        <p:txBody>
-          <a:bodyPr wrap="square">
-            <a:spAutoFit/>
+              <a:t>17</a:t>
+            </a:r>
+          </a:p>
+        </p:txBody>
+      </p:sp>
+      <p:sp>
+        <p:nvSpPr>
+          <p:cNvPr id="5" name="Rectangle 4"/>
+          <p:cNvSpPr/>
+          <p:nvPr/>
+        </p:nvSpPr>
+        <p:spPr>
+          <a:xfrm>
+            <a:off x="609600" y="825500"/>
+            <a:ext cx="10972800" cy="6350"/>
+          </a:xfrm>
+          <a:prstGeom prst="rect">
+            <a:avLst/>
+          </a:prstGeom>
+          <a:solidFill>
+            <a:srgbClr val="191D2E"/>
+          </a:solidFill>
+          <a:ln>
+            <a:noFill/>
+          </a:ln>
+        </p:spPr>
+        <p:style>
+          <a:lnRef idx="1">
+            <a:schemeClr val="accent1"/>
+          </a:lnRef>
+          <a:fillRef idx="3">
+            <a:schemeClr val="accent1"/>
+          </a:fillRef>
+          <a:effectRef idx="2">
+            <a:schemeClr val="accent1"/>
+          </a:effectRef>
+          <a:fontRef idx="minor">
+            <a:schemeClr val="lt1"/>
+          </a:fontRef>
+        </p:style>
+        <p:txBody>
+          <a:bodyPr rtlCol="0" anchor="ctr"/>
+          <a:lstStyle/>
+          <a:p>
+            <a:pPr algn="ctr"/>
+          </a:p>
+        </p:txBody>
+      </p:sp>
+      <p:sp>
+        <p:nvSpPr>
+          <p:cNvPr id="6" name="TextBox 5"/>
+          <p:cNvSpPr txBox="1"/>
+          <p:nvPr/>
+        </p:nvSpPr>
+        <p:spPr>
+          <a:xfrm>
+            <a:off x="609600" y="920750"/>
+            <a:ext cx="4826000" cy="1778000"/>
+          </a:xfrm>
+          <a:prstGeom prst="rect">
+            <a:avLst/>
+          </a:prstGeom>
+          <a:noFill/>
+        </p:spPr>
+        <p:txBody>
+          <a:bodyPr wrap="square">
+            <a:normAutofit/>
           </a:bodyPr>
           <a:lstStyle/>
           <a:p>
             <a:pPr algn="l"/>
             <a:r>
-              <a:rPr sz="6000" b="0" i="0">
+              <a:rPr sz="3800" b="0" i="0">
                 <a:solidFill>
                   <a:srgbClr val="191D2E"/>
                 </a:solidFill>
@@ -5758,15 +5997,15 @@
       </p:sp>
       <p:graphicFrame>
         <p:nvGraphicFramePr>
-          <p:cNvPr id="6" name="Table 5"/>
+          <p:cNvPr id="7" name="Table 6"/>
           <p:cNvGraphicFramePr>
             <a:graphicFrameLocks noGrp="1"/>
           </p:cNvGraphicFramePr>
           <p:nvPr/>
         </p:nvGraphicFramePr>
         <p:xfrm>
-          <a:off x="6096000" y="1016000"/>
-          <a:ext cx="6502400" cy="2667000"/>
+          <a:off x="5715000" y="920750"/>
+          <a:ext cx="5867400" cy="2286000"/>
         </p:xfrm>
         <a:graphic>
           <a:graphicData uri="http://schemas.openxmlformats.org/drawingml/2006/table">
@@ -5775,17 +6014,17 @@
                 <a:tableStyleId>{5C22544A-7EE6-4342-B048-85BDC9FD1C3A}</a:tableStyleId>
               </a:tblPr>
               <a:tblGrid>
-                <a:gridCol w="3251200"/>
-                <a:gridCol w="3251200"/>
+                <a:gridCol w="2933700"/>
+                <a:gridCol w="2933700"/>
               </a:tblGrid>
-              <a:tr h="444500">
+              <a:tr h="381000">
                 <a:tc>
                   <a:txBody>
                     <a:bodyPr wrap="square"/>
                     <a:lstStyle/>
                     <a:p>
                       <a:r>
-                        <a:rPr sz="1400" b="1">
+                        <a:rPr sz="1000" b="1">
                           <a:solidFill>
                             <a:srgbClr val="F8F8FA"/>
                           </a:solidFill>
@@ -5807,7 +6046,7 @@
                     <a:lstStyle/>
                     <a:p>
                       <a:r>
-                        <a:rPr sz="1400" b="1">
+                        <a:rPr sz="1000" b="1">
                           <a:solidFill>
                             <a:srgbClr val="F8F8FA"/>
                           </a:solidFill>
@@ -5824,14 +6063,14 @@
                   </a:tcPr>
                 </a:tc>
               </a:tr>
-              <a:tr h="444500">
+              <a:tr h="381000">
                 <a:tc>
                   <a:txBody>
                     <a:bodyPr wrap="square"/>
                     <a:lstStyle/>
                     <a:p>
                       <a:r>
-                        <a:rPr sz="1600" b="0">
+                        <a:rPr sz="1000" b="0">
                           <a:solidFill>
                             <a:srgbClr val="191D2E"/>
                           </a:solidFill>
@@ -5853,7 +6092,7 @@
                     <a:lstStyle/>
                     <a:p>
                       <a:r>
-                        <a:rPr sz="1600" b="0">
+                        <a:rPr sz="1000" b="0">
                           <a:solidFill>
                             <a:srgbClr val="191D2E"/>
                           </a:solidFill>
@@ -5870,14 +6109,14 @@
                   </a:tcPr>
                 </a:tc>
               </a:tr>
-              <a:tr h="444500">
+              <a:tr h="381000">
                 <a:tc>
                   <a:txBody>
                     <a:bodyPr wrap="square"/>
                     <a:lstStyle/>
                     <a:p>
                       <a:r>
-                        <a:rPr sz="1600" b="0">
+                        <a:rPr sz="1000" b="0">
                           <a:solidFill>
                             <a:srgbClr val="191D2E"/>
                           </a:solidFill>
@@ -5899,7 +6138,7 @@
                     <a:lstStyle/>
                     <a:p>
                       <a:r>
-                        <a:rPr sz="1600" b="0">
+                        <a:rPr sz="1000" b="0">
                           <a:solidFill>
                             <a:srgbClr val="191D2E"/>
                           </a:solidFill>
@@ -5916,14 +6155,14 @@
                   </a:tcPr>
                 </a:tc>
               </a:tr>
-              <a:tr h="444500">
+              <a:tr h="381000">
                 <a:tc>
                   <a:txBody>
                     <a:bodyPr wrap="square"/>
                     <a:lstStyle/>
                     <a:p>
                       <a:r>
-                        <a:rPr sz="1600" b="0">
+                        <a:rPr sz="1000" b="0">
                           <a:solidFill>
                             <a:srgbClr val="191D2E"/>
                           </a:solidFill>
@@ -5945,7 +6184,7 @@
                     <a:lstStyle/>
                     <a:p>
                       <a:r>
-                        <a:rPr sz="1600" b="0">
+                        <a:rPr sz="1000" b="0">
                           <a:solidFill>
                             <a:srgbClr val="191D2E"/>
                           </a:solidFill>
@@ -5962,14 +6201,14 @@
                   </a:tcPr>
                 </a:tc>
               </a:tr>
-              <a:tr h="444500">
+              <a:tr h="381000">
                 <a:tc>
                   <a:txBody>
                     <a:bodyPr wrap="square"/>
                     <a:lstStyle/>
                     <a:p>
                       <a:r>
-                        <a:rPr sz="1600" b="0">
+                        <a:rPr sz="1000" b="0">
                           <a:solidFill>
                             <a:srgbClr val="191D2E"/>
                           </a:solidFill>
@@ -5991,7 +6230,7 @@
                     <a:lstStyle/>
                     <a:p>
                       <a:r>
-                        <a:rPr sz="1600" b="0">
+                        <a:rPr sz="1000" b="0">
                           <a:solidFill>
                             <a:srgbClr val="191D2E"/>
                           </a:solidFill>
@@ -6008,14 +6247,14 @@
                   </a:tcPr>
                 </a:tc>
               </a:tr>
-              <a:tr h="444500">
+              <a:tr h="381000">
                 <a:tc>
                   <a:txBody>
                     <a:bodyPr wrap="square"/>
                     <a:lstStyle/>
                     <a:p>
                       <a:r>
-                        <a:rPr sz="1600" b="0">
+                        <a:rPr sz="1000" b="0">
                           <a:solidFill>
                             <a:srgbClr val="191D2E"/>
                           </a:solidFill>
@@ -6037,7 +6276,7 @@
                     <a:lstStyle/>
                     <a:p>
                       <a:r>
-                        <a:rPr sz="1600" b="0">
+                        <a:rPr sz="1000" b="0">
                           <a:solidFill>
                             <a:srgbClr val="191D2E"/>
                           </a:solidFill>
@@ -6092,7 +6331,7 @@
         </p:nvSpPr>
         <p:spPr>
           <a:xfrm>
-            <a:off x="609600" y="304800"/>
+            <a:off x="609600" y="279400"/>
             <a:ext cx="2540000" cy="279400"/>
           </a:xfrm>
           <a:prstGeom prst="rect">
@@ -6102,13 +6341,13 @@
         </p:spPr>
         <p:txBody>
           <a:bodyPr wrap="square">
-            <a:spAutoFit/>
+            <a:normAutofit/>
           </a:bodyPr>
           <a:lstStyle/>
           <a:p>
             <a:pPr algn="l"/>
             <a:r>
-              <a:rPr sz="1600" b="1" i="0">
+              <a:rPr sz="1000" b="1" i="0">
                 <a:solidFill>
                   <a:srgbClr val="191D2E"/>
                 </a:solidFill>
@@ -6127,23 +6366,23 @@
         </p:nvSpPr>
         <p:spPr>
           <a:xfrm>
-            <a:off x="0" y="304800"/>
-            <a:ext cx="11582400" cy="279400"/>
-          </a:xfrm>
-          <a:prstGeom prst="rect">
-            <a:avLst/>
-          </a:prstGeom>
-          <a:noFill/>
-        </p:spPr>
-        <p:txBody>
-          <a:bodyPr wrap="square">
-            <a:spAutoFit/>
+            <a:off x="609600" y="279400"/>
+            <a:ext cx="10972800" cy="279400"/>
+          </a:xfrm>
+          <a:prstGeom prst="rect">
+            <a:avLst/>
+          </a:prstGeom>
+          <a:noFill/>
+        </p:spPr>
+        <p:txBody>
+          <a:bodyPr wrap="square">
+            <a:normAutofit/>
           </a:bodyPr>
           <a:lstStyle/>
           <a:p>
             <a:pPr algn="r"/>
             <a:r>
-              <a:rPr sz="1300" b="0" i="0" spc="100">
+              <a:rPr sz="900" b="0" i="0">
                 <a:solidFill>
                   <a:srgbClr val="7B7FA0"/>
                 </a:solidFill>
@@ -6162,58 +6401,101 @@
         </p:nvSpPr>
         <p:spPr>
           <a:xfrm>
-            <a:off x="0" y="6350000"/>
-            <a:ext cx="11582400" cy="228600"/>
-          </a:xfrm>
-          <a:prstGeom prst="rect">
-            <a:avLst/>
-          </a:prstGeom>
-          <a:noFill/>
-        </p:spPr>
-        <p:txBody>
-          <a:bodyPr wrap="square">
-            <a:spAutoFit/>
+            <a:off x="609600" y="6426200"/>
+            <a:ext cx="10972800" cy="228600"/>
+          </a:xfrm>
+          <a:prstGeom prst="rect">
+            <a:avLst/>
+          </a:prstGeom>
+          <a:noFill/>
+        </p:spPr>
+        <p:txBody>
+          <a:bodyPr wrap="square">
+            <a:normAutofit/>
           </a:bodyPr>
           <a:lstStyle/>
           <a:p>
             <a:pPr algn="r"/>
             <a:r>
-              <a:rPr sz="1300" b="0" i="0">
+              <a:rPr sz="900" b="0" i="0">
                 <a:solidFill>
                   <a:srgbClr val="7B7FA0"/>
                 </a:solidFill>
                 <a:latin typeface="Courier New"/>
               </a:rPr>
-              <a:t>18 / 30</a:t>
-            </a:r>
-          </a:p>
-        </p:txBody>
-      </p:sp>
-      <p:sp>
-        <p:nvSpPr>
-          <p:cNvPr id="5" name="TextBox 4"/>
-          <p:cNvSpPr txBox="1"/>
-          <p:nvPr/>
-        </p:nvSpPr>
-        <p:spPr>
-          <a:xfrm>
-            <a:off x="609600" y="1016000"/>
-            <a:ext cx="4953000" cy="2032000"/>
-          </a:xfrm>
-          <a:prstGeom prst="rect">
-            <a:avLst/>
-          </a:prstGeom>
-          <a:noFill/>
-        </p:spPr>
-        <p:txBody>
-          <a:bodyPr wrap="square">
-            <a:spAutoFit/>
+              <a:t>18</a:t>
+            </a:r>
+          </a:p>
+        </p:txBody>
+      </p:sp>
+      <p:sp>
+        <p:nvSpPr>
+          <p:cNvPr id="5" name="Rectangle 4"/>
+          <p:cNvSpPr/>
+          <p:nvPr/>
+        </p:nvSpPr>
+        <p:spPr>
+          <a:xfrm>
+            <a:off x="609600" y="825500"/>
+            <a:ext cx="10972800" cy="6350"/>
+          </a:xfrm>
+          <a:prstGeom prst="rect">
+            <a:avLst/>
+          </a:prstGeom>
+          <a:solidFill>
+            <a:srgbClr val="191D2E"/>
+          </a:solidFill>
+          <a:ln>
+            <a:noFill/>
+          </a:ln>
+        </p:spPr>
+        <p:style>
+          <a:lnRef idx="1">
+            <a:schemeClr val="accent1"/>
+          </a:lnRef>
+          <a:fillRef idx="3">
+            <a:schemeClr val="accent1"/>
+          </a:fillRef>
+          <a:effectRef idx="2">
+            <a:schemeClr val="accent1"/>
+          </a:effectRef>
+          <a:fontRef idx="minor">
+            <a:schemeClr val="lt1"/>
+          </a:fontRef>
+        </p:style>
+        <p:txBody>
+          <a:bodyPr rtlCol="0" anchor="ctr"/>
+          <a:lstStyle/>
+          <a:p>
+            <a:pPr algn="ctr"/>
+          </a:p>
+        </p:txBody>
+      </p:sp>
+      <p:sp>
+        <p:nvSpPr>
+          <p:cNvPr id="6" name="TextBox 5"/>
+          <p:cNvSpPr txBox="1"/>
+          <p:nvPr/>
+        </p:nvSpPr>
+        <p:spPr>
+          <a:xfrm>
+            <a:off x="609600" y="920750"/>
+            <a:ext cx="4826000" cy="1778000"/>
+          </a:xfrm>
+          <a:prstGeom prst="rect">
+            <a:avLst/>
+          </a:prstGeom>
+          <a:noFill/>
+        </p:spPr>
+        <p:txBody>
+          <a:bodyPr wrap="square">
+            <a:normAutofit/>
           </a:bodyPr>
           <a:lstStyle/>
           <a:p>
             <a:pPr algn="l"/>
             <a:r>
-              <a:rPr sz="6000" b="0" i="0">
+              <a:rPr sz="3800" b="0" i="0">
                 <a:solidFill>
                   <a:srgbClr val="191D2E"/>
                 </a:solidFill>
@@ -6226,29 +6508,29 @@
       </p:sp>
       <p:sp>
         <p:nvSpPr>
-          <p:cNvPr id="6" name="TextBox 5"/>
-          <p:cNvSpPr txBox="1"/>
-          <p:nvPr/>
-        </p:nvSpPr>
-        <p:spPr>
-          <a:xfrm>
-            <a:off x="609600" y="3175000"/>
-            <a:ext cx="4953000" cy="1270000"/>
-          </a:xfrm>
-          <a:prstGeom prst="rect">
-            <a:avLst/>
-          </a:prstGeom>
-          <a:noFill/>
-        </p:spPr>
-        <p:txBody>
-          <a:bodyPr wrap="square">
-            <a:spAutoFit/>
+          <p:cNvPr id="7" name="TextBox 6"/>
+          <p:cNvSpPr txBox="1"/>
+          <p:nvPr/>
+        </p:nvSpPr>
+        <p:spPr>
+          <a:xfrm>
+            <a:off x="609600" y="2825750"/>
+            <a:ext cx="4826000" cy="1016000"/>
+          </a:xfrm>
+          <a:prstGeom prst="rect">
+            <a:avLst/>
+          </a:prstGeom>
+          <a:noFill/>
+        </p:spPr>
+        <p:txBody>
+          <a:bodyPr wrap="square">
+            <a:normAutofit/>
           </a:bodyPr>
           <a:lstStyle/>
           <a:p>
             <a:pPr algn="l"/>
             <a:r>
-              <a:rPr sz="2000" b="0" i="0">
+              <a:rPr sz="1400" b="0" i="0">
                 <a:solidFill>
                   <a:srgbClr val="4D5270"/>
                 </a:solidFill>
@@ -6261,15 +6543,15 @@
       </p:sp>
       <p:graphicFrame>
         <p:nvGraphicFramePr>
-          <p:cNvPr id="7" name="Table 6"/>
+          <p:cNvPr id="8" name="Table 7"/>
           <p:cNvGraphicFramePr>
             <a:graphicFrameLocks noGrp="1"/>
           </p:cNvGraphicFramePr>
           <p:nvPr/>
         </p:nvGraphicFramePr>
         <p:xfrm>
-          <a:off x="6096000" y="1016000"/>
-          <a:ext cx="6502400" cy="2667000"/>
+          <a:off x="5715000" y="920750"/>
+          <a:ext cx="5867400" cy="2286000"/>
         </p:xfrm>
         <a:graphic>
           <a:graphicData uri="http://schemas.openxmlformats.org/drawingml/2006/table">
@@ -6278,17 +6560,17 @@
                 <a:tableStyleId>{5C22544A-7EE6-4342-B048-85BDC9FD1C3A}</a:tableStyleId>
               </a:tblPr>
               <a:tblGrid>
-                <a:gridCol w="3251200"/>
-                <a:gridCol w="3251200"/>
+                <a:gridCol w="2933700"/>
+                <a:gridCol w="2933700"/>
               </a:tblGrid>
-              <a:tr h="444500">
+              <a:tr h="381000">
                 <a:tc>
                   <a:txBody>
                     <a:bodyPr wrap="square"/>
                     <a:lstStyle/>
                     <a:p>
                       <a:r>
-                        <a:rPr sz="1400" b="1">
+                        <a:rPr sz="1000" b="1">
                           <a:solidFill>
                             <a:srgbClr val="F8F8FA"/>
                           </a:solidFill>
@@ -6310,7 +6592,7 @@
                     <a:lstStyle/>
                     <a:p>
                       <a:r>
-                        <a:rPr sz="1400" b="1">
+                        <a:rPr sz="1000" b="1">
                           <a:solidFill>
                             <a:srgbClr val="F8F8FA"/>
                           </a:solidFill>
@@ -6327,14 +6609,14 @@
                   </a:tcPr>
                 </a:tc>
               </a:tr>
-              <a:tr h="444500">
+              <a:tr h="381000">
                 <a:tc>
                   <a:txBody>
                     <a:bodyPr wrap="square"/>
                     <a:lstStyle/>
                     <a:p>
                       <a:r>
-                        <a:rPr sz="1600" b="0">
+                        <a:rPr sz="1000" b="0">
                           <a:solidFill>
                             <a:srgbClr val="191D2E"/>
                           </a:solidFill>
@@ -6356,7 +6638,7 @@
                     <a:lstStyle/>
                     <a:p>
                       <a:r>
-                        <a:rPr sz="1600" b="0">
+                        <a:rPr sz="1000" b="0">
                           <a:solidFill>
                             <a:srgbClr val="191D2E"/>
                           </a:solidFill>
@@ -6373,14 +6655,14 @@
                   </a:tcPr>
                 </a:tc>
               </a:tr>
-              <a:tr h="444500">
+              <a:tr h="381000">
                 <a:tc>
                   <a:txBody>
                     <a:bodyPr wrap="square"/>
                     <a:lstStyle/>
                     <a:p>
                       <a:r>
-                        <a:rPr sz="1600" b="0">
+                        <a:rPr sz="1000" b="0">
                           <a:solidFill>
                             <a:srgbClr val="191D2E"/>
                           </a:solidFill>
@@ -6402,7 +6684,7 @@
                     <a:lstStyle/>
                     <a:p>
                       <a:r>
-                        <a:rPr sz="1600" b="0">
+                        <a:rPr sz="1000" b="0">
                           <a:solidFill>
                             <a:srgbClr val="191D2E"/>
                           </a:solidFill>
@@ -6419,14 +6701,14 @@
                   </a:tcPr>
                 </a:tc>
               </a:tr>
-              <a:tr h="444500">
+              <a:tr h="381000">
                 <a:tc>
                   <a:txBody>
                     <a:bodyPr wrap="square"/>
                     <a:lstStyle/>
                     <a:p>
                       <a:r>
-                        <a:rPr sz="1600" b="0">
+                        <a:rPr sz="1000" b="0">
                           <a:solidFill>
                             <a:srgbClr val="191D2E"/>
                           </a:solidFill>
@@ -6448,7 +6730,7 @@
                     <a:lstStyle/>
                     <a:p>
                       <a:r>
-                        <a:rPr sz="1600" b="0">
+                        <a:rPr sz="1000" b="0">
                           <a:solidFill>
                             <a:srgbClr val="191D2E"/>
                           </a:solidFill>
@@ -6465,14 +6747,14 @@
                   </a:tcPr>
                 </a:tc>
               </a:tr>
-              <a:tr h="444500">
+              <a:tr h="381000">
                 <a:tc>
                   <a:txBody>
                     <a:bodyPr wrap="square"/>
                     <a:lstStyle/>
                     <a:p>
                       <a:r>
-                        <a:rPr sz="1600" b="0">
+                        <a:rPr sz="1000" b="0">
                           <a:solidFill>
                             <a:srgbClr val="191D2E"/>
                           </a:solidFill>
@@ -6494,7 +6776,7 @@
                     <a:lstStyle/>
                     <a:p>
                       <a:r>
-                        <a:rPr sz="1600" b="0">
+                        <a:rPr sz="1000" b="0">
                           <a:solidFill>
                             <a:srgbClr val="191D2E"/>
                           </a:solidFill>
@@ -6511,14 +6793,14 @@
                   </a:tcPr>
                 </a:tc>
               </a:tr>
-              <a:tr h="444500">
+              <a:tr h="381000">
                 <a:tc>
                   <a:txBody>
                     <a:bodyPr wrap="square"/>
                     <a:lstStyle/>
                     <a:p>
                       <a:r>
-                        <a:rPr sz="1600" b="0">
+                        <a:rPr sz="1000" b="0">
                           <a:solidFill>
                             <a:srgbClr val="191D2E"/>
                           </a:solidFill>
@@ -6540,7 +6822,7 @@
                     <a:lstStyle/>
                     <a:p>
                       <a:r>
-                        <a:rPr sz="1600" b="0">
+                        <a:rPr sz="1000" b="0">
                           <a:solidFill>
                             <a:srgbClr val="191D2E"/>
                           </a:solidFill>
@@ -6595,7 +6877,7 @@
         </p:nvSpPr>
         <p:spPr>
           <a:xfrm>
-            <a:off x="609600" y="304800"/>
+            <a:off x="609600" y="279400"/>
             <a:ext cx="2540000" cy="279400"/>
           </a:xfrm>
           <a:prstGeom prst="rect">
@@ -6605,13 +6887,13 @@
         </p:spPr>
         <p:txBody>
           <a:bodyPr wrap="square">
-            <a:spAutoFit/>
+            <a:normAutofit/>
           </a:bodyPr>
           <a:lstStyle/>
           <a:p>
             <a:pPr algn="l"/>
             <a:r>
-              <a:rPr sz="1600" b="1" i="0">
+              <a:rPr sz="1000" b="1" i="0">
                 <a:solidFill>
                   <a:srgbClr val="191D2E"/>
                 </a:solidFill>
@@ -6630,23 +6912,23 @@
         </p:nvSpPr>
         <p:spPr>
           <a:xfrm>
-            <a:off x="0" y="304800"/>
-            <a:ext cx="11582400" cy="279400"/>
-          </a:xfrm>
-          <a:prstGeom prst="rect">
-            <a:avLst/>
-          </a:prstGeom>
-          <a:noFill/>
-        </p:spPr>
-        <p:txBody>
-          <a:bodyPr wrap="square">
-            <a:spAutoFit/>
+            <a:off x="609600" y="279400"/>
+            <a:ext cx="10972800" cy="279400"/>
+          </a:xfrm>
+          <a:prstGeom prst="rect">
+            <a:avLst/>
+          </a:prstGeom>
+          <a:noFill/>
+        </p:spPr>
+        <p:txBody>
+          <a:bodyPr wrap="square">
+            <a:normAutofit/>
           </a:bodyPr>
           <a:lstStyle/>
           <a:p>
             <a:pPr algn="r"/>
             <a:r>
-              <a:rPr sz="1300" b="0" i="0" spc="100">
+              <a:rPr sz="900" b="0" i="0">
                 <a:solidFill>
                   <a:srgbClr val="7B7FA0"/>
                 </a:solidFill>
@@ -6665,58 +6947,101 @@
         </p:nvSpPr>
         <p:spPr>
           <a:xfrm>
-            <a:off x="0" y="6350000"/>
-            <a:ext cx="11582400" cy="228600"/>
-          </a:xfrm>
-          <a:prstGeom prst="rect">
-            <a:avLst/>
-          </a:prstGeom>
-          <a:noFill/>
-        </p:spPr>
-        <p:txBody>
-          <a:bodyPr wrap="square">
-            <a:spAutoFit/>
+            <a:off x="609600" y="6426200"/>
+            <a:ext cx="10972800" cy="228600"/>
+          </a:xfrm>
+          <a:prstGeom prst="rect">
+            <a:avLst/>
+          </a:prstGeom>
+          <a:noFill/>
+        </p:spPr>
+        <p:txBody>
+          <a:bodyPr wrap="square">
+            <a:normAutofit/>
           </a:bodyPr>
           <a:lstStyle/>
           <a:p>
             <a:pPr algn="r"/>
             <a:r>
-              <a:rPr sz="1300" b="0" i="0">
+              <a:rPr sz="900" b="0" i="0">
                 <a:solidFill>
                   <a:srgbClr val="7B7FA0"/>
                 </a:solidFill>
                 <a:latin typeface="Courier New"/>
               </a:rPr>
-              <a:t>19 / 30</a:t>
-            </a:r>
-          </a:p>
-        </p:txBody>
-      </p:sp>
-      <p:sp>
-        <p:nvSpPr>
-          <p:cNvPr id="5" name="TextBox 4"/>
-          <p:cNvSpPr txBox="1"/>
-          <p:nvPr/>
-        </p:nvSpPr>
-        <p:spPr>
-          <a:xfrm>
-            <a:off x="609600" y="1016000"/>
-            <a:ext cx="4953000" cy="2032000"/>
-          </a:xfrm>
-          <a:prstGeom prst="rect">
-            <a:avLst/>
-          </a:prstGeom>
-          <a:noFill/>
-        </p:spPr>
-        <p:txBody>
-          <a:bodyPr wrap="square">
-            <a:spAutoFit/>
+              <a:t>19</a:t>
+            </a:r>
+          </a:p>
+        </p:txBody>
+      </p:sp>
+      <p:sp>
+        <p:nvSpPr>
+          <p:cNvPr id="5" name="Rectangle 4"/>
+          <p:cNvSpPr/>
+          <p:nvPr/>
+        </p:nvSpPr>
+        <p:spPr>
+          <a:xfrm>
+            <a:off x="609600" y="825500"/>
+            <a:ext cx="10972800" cy="6350"/>
+          </a:xfrm>
+          <a:prstGeom prst="rect">
+            <a:avLst/>
+          </a:prstGeom>
+          <a:solidFill>
+            <a:srgbClr val="191D2E"/>
+          </a:solidFill>
+          <a:ln>
+            <a:noFill/>
+          </a:ln>
+        </p:spPr>
+        <p:style>
+          <a:lnRef idx="1">
+            <a:schemeClr val="accent1"/>
+          </a:lnRef>
+          <a:fillRef idx="3">
+            <a:schemeClr val="accent1"/>
+          </a:fillRef>
+          <a:effectRef idx="2">
+            <a:schemeClr val="accent1"/>
+          </a:effectRef>
+          <a:fontRef idx="minor">
+            <a:schemeClr val="lt1"/>
+          </a:fontRef>
+        </p:style>
+        <p:txBody>
+          <a:bodyPr rtlCol="0" anchor="ctr"/>
+          <a:lstStyle/>
+          <a:p>
+            <a:pPr algn="ctr"/>
+          </a:p>
+        </p:txBody>
+      </p:sp>
+      <p:sp>
+        <p:nvSpPr>
+          <p:cNvPr id="6" name="TextBox 5"/>
+          <p:cNvSpPr txBox="1"/>
+          <p:nvPr/>
+        </p:nvSpPr>
+        <p:spPr>
+          <a:xfrm>
+            <a:off x="609600" y="920750"/>
+            <a:ext cx="4826000" cy="1778000"/>
+          </a:xfrm>
+          <a:prstGeom prst="rect">
+            <a:avLst/>
+          </a:prstGeom>
+          <a:noFill/>
+        </p:spPr>
+        <p:txBody>
+          <a:bodyPr wrap="square">
+            <a:normAutofit/>
           </a:bodyPr>
           <a:lstStyle/>
           <a:p>
             <a:pPr algn="l"/>
             <a:r>
-              <a:rPr sz="6000" b="0" i="0">
+              <a:rPr sz="3800" b="0" i="0">
                 <a:solidFill>
                   <a:srgbClr val="191D2E"/>
                 </a:solidFill>
@@ -6729,29 +7054,29 @@
       </p:sp>
       <p:sp>
         <p:nvSpPr>
-          <p:cNvPr id="6" name="TextBox 5"/>
-          <p:cNvSpPr txBox="1"/>
-          <p:nvPr/>
-        </p:nvSpPr>
-        <p:spPr>
-          <a:xfrm>
-            <a:off x="609600" y="3175000"/>
-            <a:ext cx="4953000" cy="1270000"/>
-          </a:xfrm>
-          <a:prstGeom prst="rect">
-            <a:avLst/>
-          </a:prstGeom>
-          <a:noFill/>
-        </p:spPr>
-        <p:txBody>
-          <a:bodyPr wrap="square">
-            <a:spAutoFit/>
+          <p:cNvPr id="7" name="TextBox 6"/>
+          <p:cNvSpPr txBox="1"/>
+          <p:nvPr/>
+        </p:nvSpPr>
+        <p:spPr>
+          <a:xfrm>
+            <a:off x="609600" y="2825750"/>
+            <a:ext cx="4826000" cy="1016000"/>
+          </a:xfrm>
+          <a:prstGeom prst="rect">
+            <a:avLst/>
+          </a:prstGeom>
+          <a:noFill/>
+        </p:spPr>
+        <p:txBody>
+          <a:bodyPr wrap="square">
+            <a:normAutofit/>
           </a:bodyPr>
           <a:lstStyle/>
           <a:p>
             <a:pPr algn="l"/>
             <a:r>
-              <a:rPr sz="2000" b="0" i="0">
+              <a:rPr sz="1400" b="0" i="0">
                 <a:solidFill>
                   <a:srgbClr val="4D5270"/>
                 </a:solidFill>
@@ -6764,15 +7089,15 @@
       </p:sp>
       <p:graphicFrame>
         <p:nvGraphicFramePr>
-          <p:cNvPr id="7" name="Table 6"/>
+          <p:cNvPr id="8" name="Table 7"/>
           <p:cNvGraphicFramePr>
             <a:graphicFrameLocks noGrp="1"/>
           </p:cNvGraphicFramePr>
           <p:nvPr/>
         </p:nvGraphicFramePr>
         <p:xfrm>
-          <a:off x="6096000" y="1016000"/>
-          <a:ext cx="6502400" cy="2667000"/>
+          <a:off x="5715000" y="920750"/>
+          <a:ext cx="5867400" cy="2286000"/>
         </p:xfrm>
         <a:graphic>
           <a:graphicData uri="http://schemas.openxmlformats.org/drawingml/2006/table">
@@ -6781,20 +7106,20 @@
                 <a:tableStyleId>{5C22544A-7EE6-4342-B048-85BDC9FD1C3A}</a:tableStyleId>
               </a:tblPr>
               <a:tblGrid>
-                <a:gridCol w="1300480"/>
-                <a:gridCol w="1300480"/>
-                <a:gridCol w="1300480"/>
-                <a:gridCol w="1300480"/>
-                <a:gridCol w="1300480"/>
+                <a:gridCol w="1173480"/>
+                <a:gridCol w="1173480"/>
+                <a:gridCol w="1173480"/>
+                <a:gridCol w="1173480"/>
+                <a:gridCol w="1173480"/>
               </a:tblGrid>
-              <a:tr h="444500">
+              <a:tr h="381000">
                 <a:tc>
                   <a:txBody>
                     <a:bodyPr wrap="square"/>
                     <a:lstStyle/>
                     <a:p>
                       <a:r>
-                        <a:rPr sz="1400" b="1">
+                        <a:rPr sz="1000" b="1">
                           <a:solidFill>
                             <a:srgbClr val="F8F8FA"/>
                           </a:solidFill>
@@ -6816,7 +7141,7 @@
                     <a:lstStyle/>
                     <a:p>
                       <a:r>
-                        <a:rPr sz="1400" b="1">
+                        <a:rPr sz="1000" b="1">
                           <a:solidFill>
                             <a:srgbClr val="F8F8FA"/>
                           </a:solidFill>
@@ -6838,7 +7163,7 @@
                     <a:lstStyle/>
                     <a:p>
                       <a:r>
-                        <a:rPr sz="1400" b="1">
+                        <a:rPr sz="1000" b="1">
                           <a:solidFill>
                             <a:srgbClr val="F8F8FA"/>
                           </a:solidFill>
@@ -6860,7 +7185,7 @@
                     <a:lstStyle/>
                     <a:p>
                       <a:r>
-                        <a:rPr sz="1400" b="1">
+                        <a:rPr sz="1000" b="1">
                           <a:solidFill>
                             <a:srgbClr val="F8F8FA"/>
                           </a:solidFill>
@@ -6882,7 +7207,7 @@
                     <a:lstStyle/>
                     <a:p>
                       <a:r>
-                        <a:rPr sz="1400" b="1">
+                        <a:rPr sz="1000" b="1">
                           <a:solidFill>
                             <a:srgbClr val="F8F8FA"/>
                           </a:solidFill>
@@ -6899,14 +7224,14 @@
                   </a:tcPr>
                 </a:tc>
               </a:tr>
-              <a:tr h="444500">
+              <a:tr h="381000">
                 <a:tc>
                   <a:txBody>
                     <a:bodyPr wrap="square"/>
                     <a:lstStyle/>
                     <a:p>
                       <a:r>
-                        <a:rPr sz="1600" b="0">
+                        <a:rPr sz="1000" b="0">
                           <a:solidFill>
                             <a:srgbClr val="191D2E"/>
                           </a:solidFill>
@@ -6928,7 +7253,7 @@
                     <a:lstStyle/>
                     <a:p>
                       <a:r>
-                        <a:rPr sz="1600" b="0">
+                        <a:rPr sz="1000" b="0">
                           <a:solidFill>
                             <a:srgbClr val="191D2E"/>
                           </a:solidFill>
@@ -6950,7 +7275,7 @@
                     <a:lstStyle/>
                     <a:p>
                       <a:r>
-                        <a:rPr sz="1600" b="0">
+                        <a:rPr sz="1000" b="0">
                           <a:solidFill>
                             <a:srgbClr val="191D2E"/>
                           </a:solidFill>
@@ -6972,7 +7297,7 @@
                     <a:lstStyle/>
                     <a:p>
                       <a:r>
-                        <a:rPr sz="1600" b="0">
+                        <a:rPr sz="1000" b="0">
                           <a:solidFill>
                             <a:srgbClr val="191D2E"/>
                           </a:solidFill>
@@ -6994,7 +7319,7 @@
                     <a:lstStyle/>
                     <a:p>
                       <a:r>
-                        <a:rPr sz="1600" b="0">
+                        <a:rPr sz="1000" b="0">
                           <a:solidFill>
                             <a:srgbClr val="191D2E"/>
                           </a:solidFill>
@@ -7011,14 +7336,14 @@
                   </a:tcPr>
                 </a:tc>
               </a:tr>
-              <a:tr h="444500">
+              <a:tr h="381000">
                 <a:tc>
                   <a:txBody>
                     <a:bodyPr wrap="square"/>
                     <a:lstStyle/>
                     <a:p>
                       <a:r>
-                        <a:rPr sz="1600" b="0">
+                        <a:rPr sz="1000" b="0">
                           <a:solidFill>
                             <a:srgbClr val="191D2E"/>
                           </a:solidFill>
@@ -7040,7 +7365,7 @@
                     <a:lstStyle/>
                     <a:p>
                       <a:r>
-                        <a:rPr sz="1600" b="0">
+                        <a:rPr sz="1000" b="0">
                           <a:solidFill>
                             <a:srgbClr val="191D2E"/>
                           </a:solidFill>
@@ -7062,7 +7387,7 @@
                     <a:lstStyle/>
                     <a:p>
                       <a:r>
-                        <a:rPr sz="1600" b="0">
+                        <a:rPr sz="1000" b="0">
                           <a:solidFill>
                             <a:srgbClr val="191D2E"/>
                           </a:solidFill>
@@ -7084,7 +7409,7 @@
                     <a:lstStyle/>
                     <a:p>
                       <a:r>
-                        <a:rPr sz="1600" b="0">
+                        <a:rPr sz="1000" b="0">
                           <a:solidFill>
                             <a:srgbClr val="191D2E"/>
                           </a:solidFill>
@@ -7106,7 +7431,7 @@
                     <a:lstStyle/>
                     <a:p>
                       <a:r>
-                        <a:rPr sz="1600" b="0">
+                        <a:rPr sz="1000" b="0">
                           <a:solidFill>
                             <a:srgbClr val="191D2E"/>
                           </a:solidFill>
@@ -7123,14 +7448,14 @@
                   </a:tcPr>
                 </a:tc>
               </a:tr>
-              <a:tr h="444500">
+              <a:tr h="381000">
                 <a:tc>
                   <a:txBody>
                     <a:bodyPr wrap="square"/>
                     <a:lstStyle/>
                     <a:p>
                       <a:r>
-                        <a:rPr sz="1600" b="0">
+                        <a:rPr sz="1000" b="0">
                           <a:solidFill>
                             <a:srgbClr val="191D2E"/>
                           </a:solidFill>
@@ -7152,7 +7477,7 @@
                     <a:lstStyle/>
                     <a:p>
                       <a:r>
-                        <a:rPr sz="1600" b="0">
+                        <a:rPr sz="1000" b="0">
                           <a:solidFill>
                             <a:srgbClr val="191D2E"/>
                           </a:solidFill>
@@ -7174,7 +7499,7 @@
                     <a:lstStyle/>
                     <a:p>
                       <a:r>
-                        <a:rPr sz="1600" b="0">
+                        <a:rPr sz="1000" b="0">
                           <a:solidFill>
                             <a:srgbClr val="191D2E"/>
                           </a:solidFill>
@@ -7196,7 +7521,7 @@
                     <a:lstStyle/>
                     <a:p>
                       <a:r>
-                        <a:rPr sz="1600" b="0">
+                        <a:rPr sz="1000" b="0">
                           <a:solidFill>
                             <a:srgbClr val="191D2E"/>
                           </a:solidFill>
@@ -7218,7 +7543,7 @@
                     <a:lstStyle/>
                     <a:p>
                       <a:r>
-                        <a:rPr sz="1600" b="0">
+                        <a:rPr sz="1000" b="0">
                           <a:solidFill>
                             <a:srgbClr val="191D2E"/>
                           </a:solidFill>
@@ -7235,14 +7560,14 @@
                   </a:tcPr>
                 </a:tc>
               </a:tr>
-              <a:tr h="444500">
+              <a:tr h="381000">
                 <a:tc>
                   <a:txBody>
                     <a:bodyPr wrap="square"/>
                     <a:lstStyle/>
                     <a:p>
                       <a:r>
-                        <a:rPr sz="1600" b="0">
+                        <a:rPr sz="1000" b="0">
                           <a:solidFill>
                             <a:srgbClr val="191D2E"/>
                           </a:solidFill>
@@ -7264,7 +7589,7 @@
                     <a:lstStyle/>
                     <a:p>
                       <a:r>
-                        <a:rPr sz="1600" b="0">
+                        <a:rPr sz="1000" b="0">
                           <a:solidFill>
                             <a:srgbClr val="191D2E"/>
                           </a:solidFill>
@@ -7286,7 +7611,7 @@
                     <a:lstStyle/>
                     <a:p>
                       <a:r>
-                        <a:rPr sz="1600" b="0">
+                        <a:rPr sz="1000" b="0">
                           <a:solidFill>
                             <a:srgbClr val="191D2E"/>
                           </a:solidFill>
@@ -7308,7 +7633,7 @@
                     <a:lstStyle/>
                     <a:p>
                       <a:r>
-                        <a:rPr sz="1600" b="0">
+                        <a:rPr sz="1000" b="0">
                           <a:solidFill>
                             <a:srgbClr val="191D2E"/>
                           </a:solidFill>
@@ -7330,7 +7655,7 @@
                     <a:lstStyle/>
                     <a:p>
                       <a:r>
-                        <a:rPr sz="1600" b="0">
+                        <a:rPr sz="1000" b="0">
                           <a:solidFill>
                             <a:srgbClr val="191D2E"/>
                           </a:solidFill>
@@ -7347,14 +7672,14 @@
                   </a:tcPr>
                 </a:tc>
               </a:tr>
-              <a:tr h="444500">
+              <a:tr h="381000">
                 <a:tc>
                   <a:txBody>
                     <a:bodyPr wrap="square"/>
                     <a:lstStyle/>
                     <a:p>
                       <a:r>
-                        <a:rPr sz="1600" b="0">
+                        <a:rPr sz="1000" b="0">
                           <a:solidFill>
                             <a:srgbClr val="191D2E"/>
                           </a:solidFill>
@@ -7376,7 +7701,7 @@
                     <a:lstStyle/>
                     <a:p>
                       <a:r>
-                        <a:rPr sz="1600" b="0">
+                        <a:rPr sz="1000" b="0">
                           <a:solidFill>
                             <a:srgbClr val="191D2E"/>
                           </a:solidFill>
@@ -7398,7 +7723,7 @@
                     <a:lstStyle/>
                     <a:p>
                       <a:r>
-                        <a:rPr sz="1600" b="0">
+                        <a:rPr sz="1000" b="0">
                           <a:solidFill>
                             <a:srgbClr val="191D2E"/>
                           </a:solidFill>
@@ -7420,7 +7745,7 @@
                     <a:lstStyle/>
                     <a:p>
                       <a:r>
-                        <a:rPr sz="1600" b="0">
+                        <a:rPr sz="1000" b="0">
                           <a:solidFill>
                             <a:srgbClr val="191D2E"/>
                           </a:solidFill>
@@ -7442,7 +7767,7 @@
                     <a:lstStyle/>
                     <a:p>
                       <a:r>
-                        <a:rPr sz="1600" b="0">
+                        <a:rPr sz="1000" b="0">
                           <a:solidFill>
                             <a:srgbClr val="191D2E"/>
                           </a:solidFill>
@@ -7497,7 +7822,7 @@
         </p:nvSpPr>
         <p:spPr>
           <a:xfrm>
-            <a:off x="609600" y="304800"/>
+            <a:off x="609600" y="279400"/>
             <a:ext cx="2540000" cy="279400"/>
           </a:xfrm>
           <a:prstGeom prst="rect">
@@ -7507,13 +7832,13 @@
         </p:spPr>
         <p:txBody>
           <a:bodyPr wrap="square">
-            <a:spAutoFit/>
+            <a:normAutofit/>
           </a:bodyPr>
           <a:lstStyle/>
           <a:p>
             <a:pPr algn="l"/>
             <a:r>
-              <a:rPr sz="1600" b="1" i="0">
+              <a:rPr sz="1000" b="1" i="0">
                 <a:solidFill>
                   <a:srgbClr val="191D2E"/>
                 </a:solidFill>
@@ -7532,23 +7857,23 @@
         </p:nvSpPr>
         <p:spPr>
           <a:xfrm>
-            <a:off x="0" y="304800"/>
-            <a:ext cx="11582400" cy="279400"/>
-          </a:xfrm>
-          <a:prstGeom prst="rect">
-            <a:avLst/>
-          </a:prstGeom>
-          <a:noFill/>
-        </p:spPr>
-        <p:txBody>
-          <a:bodyPr wrap="square">
-            <a:spAutoFit/>
+            <a:off x="609600" y="279400"/>
+            <a:ext cx="10972800" cy="279400"/>
+          </a:xfrm>
+          <a:prstGeom prst="rect">
+            <a:avLst/>
+          </a:prstGeom>
+          <a:noFill/>
+        </p:spPr>
+        <p:txBody>
+          <a:bodyPr wrap="square">
+            <a:normAutofit/>
           </a:bodyPr>
           <a:lstStyle/>
           <a:p>
             <a:pPr algn="r"/>
             <a:r>
-              <a:rPr sz="1300" b="0" i="0" spc="100">
+              <a:rPr sz="900" b="0" i="0">
                 <a:solidFill>
                   <a:srgbClr val="7B7FA0"/>
                 </a:solidFill>
@@ -7567,112 +7892,42 @@
         </p:nvSpPr>
         <p:spPr>
           <a:xfrm>
-            <a:off x="609600" y="6350000"/>
-            <a:ext cx="5080000" cy="228600"/>
-          </a:xfrm>
-          <a:prstGeom prst="rect">
-            <a:avLst/>
-          </a:prstGeom>
-          <a:noFill/>
-        </p:spPr>
-        <p:txBody>
-          <a:bodyPr wrap="square">
-            <a:spAutoFit/>
-          </a:bodyPr>
-          <a:lstStyle/>
-          <a:p>
-            <a:pPr algn="l"/>
-            <a:r>
-              <a:rPr sz="1300" b="0" i="0">
+            <a:off x="609600" y="6426200"/>
+            <a:ext cx="10972800" cy="228600"/>
+          </a:xfrm>
+          <a:prstGeom prst="rect">
+            <a:avLst/>
+          </a:prstGeom>
+          <a:noFill/>
+        </p:spPr>
+        <p:txBody>
+          <a:bodyPr wrap="square">
+            <a:normAutofit/>
+          </a:bodyPr>
+          <a:lstStyle/>
+          <a:p>
+            <a:pPr algn="r"/>
+            <a:r>
+              <a:rPr sz="900" b="0" i="0">
                 <a:solidFill>
                   <a:srgbClr val="7B7FA0"/>
                 </a:solidFill>
                 <a:latin typeface="Courier New"/>
               </a:rPr>
-              <a:t>v0.4</a:t>
-            </a:r>
-          </a:p>
-        </p:txBody>
-      </p:sp>
-      <p:sp>
-        <p:nvSpPr>
-          <p:cNvPr id="5" name="TextBox 4"/>
-          <p:cNvSpPr txBox="1"/>
-          <p:nvPr/>
-        </p:nvSpPr>
-        <p:spPr>
-          <a:xfrm>
-            <a:off x="0" y="6350000"/>
-            <a:ext cx="11582400" cy="228600"/>
-          </a:xfrm>
-          <a:prstGeom prst="rect">
-            <a:avLst/>
-          </a:prstGeom>
-          <a:noFill/>
-        </p:spPr>
-        <p:txBody>
-          <a:bodyPr wrap="square">
-            <a:spAutoFit/>
-          </a:bodyPr>
-          <a:lstStyle/>
-          <a:p>
-            <a:pPr algn="r"/>
-            <a:r>
-              <a:rPr sz="1300" b="0" i="0">
-                <a:solidFill>
-                  <a:srgbClr val="7B7FA0"/>
-                </a:solidFill>
-                <a:latin typeface="Courier New"/>
-              </a:rPr>
-              <a:t>02 / 30</a:t>
-            </a:r>
-          </a:p>
-        </p:txBody>
-      </p:sp>
-      <p:sp>
-        <p:nvSpPr>
-          <p:cNvPr id="6" name="TextBox 5"/>
-          <p:cNvSpPr txBox="1"/>
-          <p:nvPr/>
-        </p:nvSpPr>
-        <p:spPr>
-          <a:xfrm>
-            <a:off x="609600" y="1270000"/>
-            <a:ext cx="3683000" cy="1270000"/>
-          </a:xfrm>
-          <a:prstGeom prst="rect">
-            <a:avLst/>
-          </a:prstGeom>
-          <a:noFill/>
-        </p:spPr>
-        <p:txBody>
-          <a:bodyPr wrap="square">
-            <a:spAutoFit/>
-          </a:bodyPr>
-          <a:lstStyle/>
-          <a:p>
-            <a:pPr algn="l"/>
-            <a:r>
-              <a:rPr sz="8800" b="0" i="1">
-                <a:solidFill>
-                  <a:srgbClr val="1F2B56"/>
-                </a:solidFill>
-                <a:latin typeface="Georgia"/>
-              </a:rPr>
-              <a:t>Inhalt.</a:t>
-            </a:r>
-          </a:p>
-        </p:txBody>
-      </p:sp>
-      <p:sp>
-        <p:nvSpPr>
-          <p:cNvPr id="7" name="Rectangle 6"/>
+              <a:t>02</a:t>
+            </a:r>
+          </a:p>
+        </p:txBody>
+      </p:sp>
+      <p:sp>
+        <p:nvSpPr>
+          <p:cNvPr id="5" name="Rectangle 4"/>
           <p:cNvSpPr/>
           <p:nvPr/>
         </p:nvSpPr>
         <p:spPr>
           <a:xfrm>
-            <a:off x="609600" y="1333500"/>
+            <a:off x="609600" y="825500"/>
             <a:ext cx="10972800" cy="6350"/>
           </a:xfrm>
           <a:prstGeom prst="rect">
@@ -7709,14 +7964,49 @@
       </p:sp>
       <p:sp>
         <p:nvSpPr>
-          <p:cNvPr id="8" name="Rectangle 7"/>
+          <p:cNvPr id="6" name="TextBox 5"/>
+          <p:cNvSpPr txBox="1"/>
+          <p:nvPr/>
+        </p:nvSpPr>
+        <p:spPr>
+          <a:xfrm>
+            <a:off x="609600" y="920750"/>
+            <a:ext cx="3175000" cy="1651000"/>
+          </a:xfrm>
+          <a:prstGeom prst="rect">
+            <a:avLst/>
+          </a:prstGeom>
+          <a:noFill/>
+        </p:spPr>
+        <p:txBody>
+          <a:bodyPr wrap="square">
+            <a:normAutofit/>
+          </a:bodyPr>
+          <a:lstStyle/>
+          <a:p>
+            <a:pPr algn="l"/>
+            <a:r>
+              <a:rPr sz="4800" b="0" i="1">
+                <a:solidFill>
+                  <a:srgbClr val="1F2B56"/>
+                </a:solidFill>
+                <a:latin typeface="Georgia"/>
+              </a:rPr>
+              <a:t>Inhalt.</a:t>
+            </a:r>
+          </a:p>
+        </p:txBody>
+      </p:sp>
+      <p:sp>
+        <p:nvSpPr>
+          <p:cNvPr id="7" name="Rectangle 6"/>
           <p:cNvSpPr/>
           <p:nvPr/>
         </p:nvSpPr>
         <p:spPr>
           <a:xfrm>
-            <a:off x="4572000" y="1333500"/>
-            <a:ext cx="7010400" cy="6350"/>
+            <a:off x="4064000" y="889000"/>
+            <a:ext cx="7518399" cy="6350"/>
           </a:xfrm>
           <a:prstGeom prst="rect">
             <a:avLst/>
@@ -7752,69 +8042,69 @@
       </p:sp>
       <p:sp>
         <p:nvSpPr>
+          <p:cNvPr id="8" name="TextBox 7"/>
+          <p:cNvSpPr txBox="1"/>
+          <p:nvPr/>
+        </p:nvSpPr>
+        <p:spPr>
+          <a:xfrm>
+            <a:off x="4064000" y="927100"/>
+            <a:ext cx="508000" cy="647700"/>
+          </a:xfrm>
+          <a:prstGeom prst="rect">
+            <a:avLst/>
+          </a:prstGeom>
+          <a:noFill/>
+        </p:spPr>
+        <p:txBody>
+          <a:bodyPr wrap="square">
+            <a:normAutofit/>
+          </a:bodyPr>
+          <a:lstStyle/>
+          <a:p>
+            <a:pPr algn="l"/>
+            <a:r>
+              <a:rPr sz="2600" b="0" i="1">
+                <a:solidFill>
+                  <a:srgbClr val="1F2B56"/>
+                </a:solidFill>
+                <a:latin typeface="Georgia"/>
+              </a:rPr>
+              <a:t>I.</a:t>
+            </a:r>
+          </a:p>
+        </p:txBody>
+      </p:sp>
+      <p:sp>
+        <p:nvSpPr>
           <p:cNvPr id="9" name="TextBox 8"/>
           <p:cNvSpPr txBox="1"/>
           <p:nvPr/>
         </p:nvSpPr>
         <p:spPr>
           <a:xfrm>
-            <a:off x="4572000" y="1384300"/>
-            <a:ext cx="571500" cy="711200"/>
-          </a:xfrm>
-          <a:prstGeom prst="rect">
-            <a:avLst/>
-          </a:prstGeom>
-          <a:noFill/>
-        </p:spPr>
-        <p:txBody>
-          <a:bodyPr wrap="square">
-            <a:spAutoFit/>
+            <a:off x="4699000" y="952500"/>
+            <a:ext cx="6858000" cy="622300"/>
+          </a:xfrm>
+          <a:prstGeom prst="rect">
+            <a:avLst/>
+          </a:prstGeom>
+          <a:noFill/>
+        </p:spPr>
+        <p:txBody>
+          <a:bodyPr wrap="square">
+            <a:normAutofit/>
           </a:bodyPr>
           <a:lstStyle/>
           <a:p>
             <a:pPr algn="l"/>
             <a:r>
-              <a:rPr sz="4000" b="0" i="1">
-                <a:solidFill>
-                  <a:srgbClr val="1F2B56"/>
+              <a:rPr sz="1400" b="0" i="0">
+                <a:solidFill>
+                  <a:srgbClr val="191D2E"/>
                 </a:solidFill>
                 <a:latin typeface="Georgia"/>
               </a:rPr>
-              <a:t>I.</a:t>
-            </a:r>
-          </a:p>
-        </p:txBody>
-      </p:sp>
-      <p:sp>
-        <p:nvSpPr>
-          <p:cNvPr id="10" name="TextBox 9"/>
-          <p:cNvSpPr txBox="1"/>
-          <p:nvPr/>
-        </p:nvSpPr>
-        <p:spPr>
-          <a:xfrm>
-            <a:off x="5270500" y="1409700"/>
-            <a:ext cx="6223000" cy="711200"/>
-          </a:xfrm>
-          <a:prstGeom prst="rect">
-            <a:avLst/>
-          </a:prstGeom>
-          <a:noFill/>
-        </p:spPr>
-        <p:txBody>
-          <a:bodyPr wrap="square">
-            <a:spAutoFit/>
-          </a:bodyPr>
-          <a:lstStyle/>
-          <a:p>
-            <a:pPr algn="l"/>
-            <a:r>
-              <a:rPr sz="2200" b="0" i="0">
-                <a:solidFill>
-                  <a:srgbClr val="191D2E"/>
-                </a:solidFill>
-                <a:latin typeface="Georgia"/>
-              </a:rPr>
               <a:t>Explizites von implizitem Wissen unterscheiden und ungenutzte Transferbereiche identifizieren</a:t>
             </a:r>
           </a:p>
@@ -7822,14 +8112,14 @@
       </p:sp>
       <p:sp>
         <p:nvSpPr>
-          <p:cNvPr id="11" name="Rectangle 10"/>
+          <p:cNvPr id="10" name="Rectangle 9"/>
           <p:cNvSpPr/>
           <p:nvPr/>
         </p:nvSpPr>
         <p:spPr>
           <a:xfrm>
-            <a:off x="4572000" y="2095499"/>
-            <a:ext cx="7010400" cy="6350"/>
+            <a:off x="4064000" y="1574800"/>
+            <a:ext cx="7518399" cy="6350"/>
           </a:xfrm>
           <a:prstGeom prst="rect">
             <a:avLst/>
@@ -7865,69 +8155,69 @@
       </p:sp>
       <p:sp>
         <p:nvSpPr>
+          <p:cNvPr id="11" name="TextBox 10"/>
+          <p:cNvSpPr txBox="1"/>
+          <p:nvPr/>
+        </p:nvSpPr>
+        <p:spPr>
+          <a:xfrm>
+            <a:off x="4064000" y="1612900"/>
+            <a:ext cx="508000" cy="647700"/>
+          </a:xfrm>
+          <a:prstGeom prst="rect">
+            <a:avLst/>
+          </a:prstGeom>
+          <a:noFill/>
+        </p:spPr>
+        <p:txBody>
+          <a:bodyPr wrap="square">
+            <a:normAutofit/>
+          </a:bodyPr>
+          <a:lstStyle/>
+          <a:p>
+            <a:pPr algn="l"/>
+            <a:r>
+              <a:rPr sz="2600" b="0" i="1">
+                <a:solidFill>
+                  <a:srgbClr val="1F2B56"/>
+                </a:solidFill>
+                <a:latin typeface="Georgia"/>
+              </a:rPr>
+              <a:t>II.</a:t>
+            </a:r>
+          </a:p>
+        </p:txBody>
+      </p:sp>
+      <p:sp>
+        <p:nvSpPr>
           <p:cNvPr id="12" name="TextBox 11"/>
           <p:cNvSpPr txBox="1"/>
           <p:nvPr/>
         </p:nvSpPr>
         <p:spPr>
           <a:xfrm>
-            <a:off x="4572000" y="2146300"/>
-            <a:ext cx="571500" cy="711200"/>
-          </a:xfrm>
-          <a:prstGeom prst="rect">
-            <a:avLst/>
-          </a:prstGeom>
-          <a:noFill/>
-        </p:spPr>
-        <p:txBody>
-          <a:bodyPr wrap="square">
-            <a:spAutoFit/>
+            <a:off x="4699000" y="1638300"/>
+            <a:ext cx="6858000" cy="622300"/>
+          </a:xfrm>
+          <a:prstGeom prst="rect">
+            <a:avLst/>
+          </a:prstGeom>
+          <a:noFill/>
+        </p:spPr>
+        <p:txBody>
+          <a:bodyPr wrap="square">
+            <a:normAutofit/>
           </a:bodyPr>
           <a:lstStyle/>
           <a:p>
             <a:pPr algn="l"/>
             <a:r>
-              <a:rPr sz="4000" b="0" i="1">
-                <a:solidFill>
-                  <a:srgbClr val="1F2B56"/>
+              <a:rPr sz="1400" b="0" i="0">
+                <a:solidFill>
+                  <a:srgbClr val="191D2E"/>
                 </a:solidFill>
                 <a:latin typeface="Georgia"/>
               </a:rPr>
-              <a:t>II.</a:t>
-            </a:r>
-          </a:p>
-        </p:txBody>
-      </p:sp>
-      <p:sp>
-        <p:nvSpPr>
-          <p:cNvPr id="13" name="TextBox 12"/>
-          <p:cNvSpPr txBox="1"/>
-          <p:nvPr/>
-        </p:nvSpPr>
-        <p:spPr>
-          <a:xfrm>
-            <a:off x="5270500" y="2171700"/>
-            <a:ext cx="6223000" cy="711200"/>
-          </a:xfrm>
-          <a:prstGeom prst="rect">
-            <a:avLst/>
-          </a:prstGeom>
-          <a:noFill/>
-        </p:spPr>
-        <p:txBody>
-          <a:bodyPr wrap="square">
-            <a:spAutoFit/>
-          </a:bodyPr>
-          <a:lstStyle/>
-          <a:p>
-            <a:pPr algn="l"/>
-            <a:r>
-              <a:rPr sz="2200" b="0" i="0">
-                <a:solidFill>
-                  <a:srgbClr val="191D2E"/>
-                </a:solidFill>
-                <a:latin typeface="Georgia"/>
-              </a:rPr>
               <a:t>Mindestens zwei Wissenstransfer-Methoden auf den eigenen Teamkontext anwenden</a:t>
             </a:r>
           </a:p>
@@ -7935,14 +8225,14 @@
       </p:sp>
       <p:sp>
         <p:nvSpPr>
-          <p:cNvPr id="14" name="Rectangle 13"/>
+          <p:cNvPr id="13" name="Rectangle 12"/>
           <p:cNvSpPr/>
           <p:nvPr/>
         </p:nvSpPr>
         <p:spPr>
           <a:xfrm>
-            <a:off x="4572000" y="2857500"/>
-            <a:ext cx="7010400" cy="6350"/>
+            <a:off x="4064000" y="2260600"/>
+            <a:ext cx="7518399" cy="6350"/>
           </a:xfrm>
           <a:prstGeom prst="rect">
             <a:avLst/>
@@ -7978,69 +8268,69 @@
       </p:sp>
       <p:sp>
         <p:nvSpPr>
+          <p:cNvPr id="14" name="TextBox 13"/>
+          <p:cNvSpPr txBox="1"/>
+          <p:nvPr/>
+        </p:nvSpPr>
+        <p:spPr>
+          <a:xfrm>
+            <a:off x="4064000" y="2298700"/>
+            <a:ext cx="508000" cy="647700"/>
+          </a:xfrm>
+          <a:prstGeom prst="rect">
+            <a:avLst/>
+          </a:prstGeom>
+          <a:noFill/>
+        </p:spPr>
+        <p:txBody>
+          <a:bodyPr wrap="square">
+            <a:normAutofit/>
+          </a:bodyPr>
+          <a:lstStyle/>
+          <a:p>
+            <a:pPr algn="l"/>
+            <a:r>
+              <a:rPr sz="2600" b="0" i="1">
+                <a:solidFill>
+                  <a:srgbClr val="1F2B56"/>
+                </a:solidFill>
+                <a:latin typeface="Georgia"/>
+              </a:rPr>
+              <a:t>III.</a:t>
+            </a:r>
+          </a:p>
+        </p:txBody>
+      </p:sp>
+      <p:sp>
+        <p:nvSpPr>
           <p:cNvPr id="15" name="TextBox 14"/>
           <p:cNvSpPr txBox="1"/>
           <p:nvPr/>
         </p:nvSpPr>
         <p:spPr>
           <a:xfrm>
-            <a:off x="4572000" y="2908300"/>
-            <a:ext cx="571500" cy="711200"/>
-          </a:xfrm>
-          <a:prstGeom prst="rect">
-            <a:avLst/>
-          </a:prstGeom>
-          <a:noFill/>
-        </p:spPr>
-        <p:txBody>
-          <a:bodyPr wrap="square">
-            <a:spAutoFit/>
+            <a:off x="4699000" y="2324100"/>
+            <a:ext cx="6858000" cy="622300"/>
+          </a:xfrm>
+          <a:prstGeom prst="rect">
+            <a:avLst/>
+          </a:prstGeom>
+          <a:noFill/>
+        </p:spPr>
+        <p:txBody>
+          <a:bodyPr wrap="square">
+            <a:normAutofit/>
           </a:bodyPr>
           <a:lstStyle/>
           <a:p>
             <a:pPr algn="l"/>
             <a:r>
-              <a:rPr sz="4000" b="0" i="1">
-                <a:solidFill>
-                  <a:srgbClr val="1F2B56"/>
+              <a:rPr sz="1400" b="0" i="0">
+                <a:solidFill>
+                  <a:srgbClr val="191D2E"/>
                 </a:solidFill>
                 <a:latin typeface="Georgia"/>
               </a:rPr>
-              <a:t>III.</a:t>
-            </a:r>
-          </a:p>
-        </p:txBody>
-      </p:sp>
-      <p:sp>
-        <p:nvSpPr>
-          <p:cNvPr id="16" name="TextBox 15"/>
-          <p:cNvSpPr txBox="1"/>
-          <p:nvPr/>
-        </p:nvSpPr>
-        <p:spPr>
-          <a:xfrm>
-            <a:off x="5270500" y="2933700"/>
-            <a:ext cx="6223000" cy="711200"/>
-          </a:xfrm>
-          <a:prstGeom prst="rect">
-            <a:avLst/>
-          </a:prstGeom>
-          <a:noFill/>
-        </p:spPr>
-        <p:txBody>
-          <a:bodyPr wrap="square">
-            <a:spAutoFit/>
-          </a:bodyPr>
-          <a:lstStyle/>
-          <a:p>
-            <a:pPr algn="l"/>
-            <a:r>
-              <a:rPr sz="2200" b="0" i="0">
-                <a:solidFill>
-                  <a:srgbClr val="191D2E"/>
-                </a:solidFill>
-                <a:latin typeface="Georgia"/>
-              </a:rPr>
               <a:t>Typische Transferbarrieren analysieren und Gegenmaßnahmen ableiten</a:t>
             </a:r>
           </a:p>
@@ -8048,14 +8338,14 @@
       </p:sp>
       <p:sp>
         <p:nvSpPr>
-          <p:cNvPr id="17" name="Rectangle 16"/>
+          <p:cNvPr id="16" name="Rectangle 15"/>
           <p:cNvSpPr/>
           <p:nvPr/>
         </p:nvSpPr>
         <p:spPr>
           <a:xfrm>
-            <a:off x="4572000" y="3619500"/>
-            <a:ext cx="7010400" cy="6350"/>
+            <a:off x="4064000" y="2946400"/>
+            <a:ext cx="7518399" cy="6350"/>
           </a:xfrm>
           <a:prstGeom prst="rect">
             <a:avLst/>
@@ -8091,69 +8381,69 @@
       </p:sp>
       <p:sp>
         <p:nvSpPr>
+          <p:cNvPr id="17" name="TextBox 16"/>
+          <p:cNvSpPr txBox="1"/>
+          <p:nvPr/>
+        </p:nvSpPr>
+        <p:spPr>
+          <a:xfrm>
+            <a:off x="4064000" y="2984500"/>
+            <a:ext cx="508000" cy="647700"/>
+          </a:xfrm>
+          <a:prstGeom prst="rect">
+            <a:avLst/>
+          </a:prstGeom>
+          <a:noFill/>
+        </p:spPr>
+        <p:txBody>
+          <a:bodyPr wrap="square">
+            <a:normAutofit/>
+          </a:bodyPr>
+          <a:lstStyle/>
+          <a:p>
+            <a:pPr algn="l"/>
+            <a:r>
+              <a:rPr sz="2600" b="0" i="1">
+                <a:solidFill>
+                  <a:srgbClr val="1F2B56"/>
+                </a:solidFill>
+                <a:latin typeface="Georgia"/>
+              </a:rPr>
+              <a:t>IV.</a:t>
+            </a:r>
+          </a:p>
+        </p:txBody>
+      </p:sp>
+      <p:sp>
+        <p:nvSpPr>
           <p:cNvPr id="18" name="TextBox 17"/>
           <p:cNvSpPr txBox="1"/>
           <p:nvPr/>
         </p:nvSpPr>
         <p:spPr>
           <a:xfrm>
-            <a:off x="4572000" y="3670300"/>
-            <a:ext cx="571500" cy="711200"/>
-          </a:xfrm>
-          <a:prstGeom prst="rect">
-            <a:avLst/>
-          </a:prstGeom>
-          <a:noFill/>
-        </p:spPr>
-        <p:txBody>
-          <a:bodyPr wrap="square">
-            <a:spAutoFit/>
+            <a:off x="4699000" y="3009900"/>
+            <a:ext cx="6858000" cy="622300"/>
+          </a:xfrm>
+          <a:prstGeom prst="rect">
+            <a:avLst/>
+          </a:prstGeom>
+          <a:noFill/>
+        </p:spPr>
+        <p:txBody>
+          <a:bodyPr wrap="square">
+            <a:normAutofit/>
           </a:bodyPr>
           <a:lstStyle/>
           <a:p>
             <a:pPr algn="l"/>
             <a:r>
-              <a:rPr sz="4000" b="0" i="1">
-                <a:solidFill>
-                  <a:srgbClr val="1F2B56"/>
+              <a:rPr sz="1400" b="0" i="0">
+                <a:solidFill>
+                  <a:srgbClr val="191D2E"/>
                 </a:solidFill>
                 <a:latin typeface="Georgia"/>
               </a:rPr>
-              <a:t>IV.</a:t>
-            </a:r>
-          </a:p>
-        </p:txBody>
-      </p:sp>
-      <p:sp>
-        <p:nvSpPr>
-          <p:cNvPr id="19" name="TextBox 18"/>
-          <p:cNvSpPr txBox="1"/>
-          <p:nvPr/>
-        </p:nvSpPr>
-        <p:spPr>
-          <a:xfrm>
-            <a:off x="5270500" y="3695700"/>
-            <a:ext cx="6223000" cy="711200"/>
-          </a:xfrm>
-          <a:prstGeom prst="rect">
-            <a:avLst/>
-          </a:prstGeom>
-          <a:noFill/>
-        </p:spPr>
-        <p:txBody>
-          <a:bodyPr wrap="square">
-            <a:spAutoFit/>
-          </a:bodyPr>
-          <a:lstStyle/>
-          <a:p>
-            <a:pPr algn="l"/>
-            <a:r>
-              <a:rPr sz="2200" b="0" i="0">
-                <a:solidFill>
-                  <a:srgbClr val="191D2E"/>
-                </a:solidFill>
-                <a:latin typeface="Georgia"/>
-              </a:rPr>
               <a:t>Eine geeignete Wissenstransfer-Routine für den Teamkontext auswählen und die Wahl anhand von Transferbarrieren begründen</a:t>
             </a:r>
           </a:p>
@@ -8161,14 +8451,14 @@
       </p:sp>
       <p:sp>
         <p:nvSpPr>
-          <p:cNvPr id="20" name="Rectangle 19"/>
+          <p:cNvPr id="19" name="Rectangle 18"/>
           <p:cNvSpPr/>
           <p:nvPr/>
         </p:nvSpPr>
         <p:spPr>
           <a:xfrm>
-            <a:off x="4572000" y="4381500"/>
-            <a:ext cx="7010400" cy="6350"/>
+            <a:off x="4064000" y="3632200"/>
+            <a:ext cx="7518399" cy="6350"/>
           </a:xfrm>
           <a:prstGeom prst="rect">
             <a:avLst/>
@@ -8204,64 +8494,64 @@
       </p:sp>
       <p:sp>
         <p:nvSpPr>
+          <p:cNvPr id="20" name="TextBox 19"/>
+          <p:cNvSpPr txBox="1"/>
+          <p:nvPr/>
+        </p:nvSpPr>
+        <p:spPr>
+          <a:xfrm>
+            <a:off x="4064000" y="3670300"/>
+            <a:ext cx="508000" cy="647700"/>
+          </a:xfrm>
+          <a:prstGeom prst="rect">
+            <a:avLst/>
+          </a:prstGeom>
+          <a:noFill/>
+        </p:spPr>
+        <p:txBody>
+          <a:bodyPr wrap="square">
+            <a:normAutofit/>
+          </a:bodyPr>
+          <a:lstStyle/>
+          <a:p>
+            <a:pPr algn="l"/>
+            <a:r>
+              <a:rPr sz="2600" b="0" i="1">
+                <a:solidFill>
+                  <a:srgbClr val="1F2B56"/>
+                </a:solidFill>
+                <a:latin typeface="Georgia"/>
+              </a:rPr>
+              <a:t>V.</a:t>
+            </a:r>
+          </a:p>
+        </p:txBody>
+      </p:sp>
+      <p:sp>
+        <p:nvSpPr>
           <p:cNvPr id="21" name="TextBox 20"/>
           <p:cNvSpPr txBox="1"/>
           <p:nvPr/>
         </p:nvSpPr>
         <p:spPr>
           <a:xfrm>
-            <a:off x="4572000" y="4432300"/>
-            <a:ext cx="571500" cy="711200"/>
-          </a:xfrm>
-          <a:prstGeom prst="rect">
-            <a:avLst/>
-          </a:prstGeom>
-          <a:noFill/>
-        </p:spPr>
-        <p:txBody>
-          <a:bodyPr wrap="square">
-            <a:spAutoFit/>
+            <a:off x="4699000" y="3695700"/>
+            <a:ext cx="6858000" cy="622300"/>
+          </a:xfrm>
+          <a:prstGeom prst="rect">
+            <a:avLst/>
+          </a:prstGeom>
+          <a:noFill/>
+        </p:spPr>
+        <p:txBody>
+          <a:bodyPr wrap="square">
+            <a:normAutofit/>
           </a:bodyPr>
           <a:lstStyle/>
           <a:p>
             <a:pPr algn="l"/>
             <a:r>
-              <a:rPr sz="4000" b="0" i="1">
-                <a:solidFill>
-                  <a:srgbClr val="1F2B56"/>
-                </a:solidFill>
-                <a:latin typeface="Georgia"/>
-              </a:rPr>
-              <a:t>V.</a:t>
-            </a:r>
-          </a:p>
-        </p:txBody>
-      </p:sp>
-      <p:sp>
-        <p:nvSpPr>
-          <p:cNvPr id="22" name="TextBox 21"/>
-          <p:cNvSpPr txBox="1"/>
-          <p:nvPr/>
-        </p:nvSpPr>
-        <p:spPr>
-          <a:xfrm>
-            <a:off x="5270500" y="4457700"/>
-            <a:ext cx="6223000" cy="711200"/>
-          </a:xfrm>
-          <a:prstGeom prst="rect">
-            <a:avLst/>
-          </a:prstGeom>
-          <a:noFill/>
-        </p:spPr>
-        <p:txBody>
-          <a:bodyPr wrap="square">
-            <a:spAutoFit/>
-          </a:bodyPr>
-          <a:lstStyle/>
-          <a:p>
-            <a:pPr algn="l"/>
-            <a:r>
-              <a:rPr sz="2200" b="0" i="0">
+              <a:rPr sz="1400" b="0" i="0">
                 <a:solidFill>
                   <a:srgbClr val="191D2E"/>
                 </a:solidFill>
@@ -8306,7 +8596,7 @@
         </p:nvSpPr>
         <p:spPr>
           <a:xfrm>
-            <a:off x="609600" y="304800"/>
+            <a:off x="609600" y="279400"/>
             <a:ext cx="2540000" cy="279400"/>
           </a:xfrm>
           <a:prstGeom prst="rect">
@@ -8316,13 +8606,13 @@
         </p:spPr>
         <p:txBody>
           <a:bodyPr wrap="square">
-            <a:spAutoFit/>
+            <a:normAutofit/>
           </a:bodyPr>
           <a:lstStyle/>
           <a:p>
             <a:pPr algn="l"/>
             <a:r>
-              <a:rPr sz="1600" b="1" i="0">
+              <a:rPr sz="1000" b="1" i="0">
                 <a:solidFill>
                   <a:srgbClr val="F8F8FA"/>
                 </a:solidFill>
@@ -8341,25 +8631,25 @@
         </p:nvSpPr>
         <p:spPr>
           <a:xfrm>
-            <a:off x="0" y="304800"/>
-            <a:ext cx="11582400" cy="279400"/>
-          </a:xfrm>
-          <a:prstGeom prst="rect">
-            <a:avLst/>
-          </a:prstGeom>
-          <a:noFill/>
-        </p:spPr>
-        <p:txBody>
-          <a:bodyPr wrap="square">
-            <a:spAutoFit/>
+            <a:off x="609600" y="279400"/>
+            <a:ext cx="10972800" cy="279400"/>
+          </a:xfrm>
+          <a:prstGeom prst="rect">
+            <a:avLst/>
+          </a:prstGeom>
+          <a:noFill/>
+        </p:spPr>
+        <p:txBody>
+          <a:bodyPr wrap="square">
+            <a:normAutofit/>
           </a:bodyPr>
           <a:lstStyle/>
           <a:p>
             <a:pPr algn="r"/>
             <a:r>
-              <a:rPr sz="1300" b="0" i="0" spc="100">
-                <a:solidFill>
-                  <a:srgbClr val="F8F8FA"/>
+              <a:rPr sz="900" b="0" i="0">
+                <a:solidFill>
+                  <a:srgbClr val="7B7FA0"/>
                 </a:solidFill>
                 <a:latin typeface="Courier New"/>
               </a:rPr>
@@ -8376,29 +8666,29 @@
         </p:nvSpPr>
         <p:spPr>
           <a:xfrm>
-            <a:off x="0" y="6350000"/>
-            <a:ext cx="11582400" cy="228600"/>
-          </a:xfrm>
-          <a:prstGeom prst="rect">
-            <a:avLst/>
-          </a:prstGeom>
-          <a:noFill/>
-        </p:spPr>
-        <p:txBody>
-          <a:bodyPr wrap="square">
-            <a:spAutoFit/>
+            <a:off x="609600" y="6426200"/>
+            <a:ext cx="10972800" cy="228600"/>
+          </a:xfrm>
+          <a:prstGeom prst="rect">
+            <a:avLst/>
+          </a:prstGeom>
+          <a:noFill/>
+        </p:spPr>
+        <p:txBody>
+          <a:bodyPr wrap="square">
+            <a:normAutofit/>
           </a:bodyPr>
           <a:lstStyle/>
           <a:p>
             <a:pPr algn="r"/>
             <a:r>
-              <a:rPr sz="1300" b="0" i="0">
-                <a:solidFill>
-                  <a:srgbClr val="606070"/>
+              <a:rPr sz="900" b="0" i="0">
+                <a:solidFill>
+                  <a:srgbClr val="7B7FA0"/>
                 </a:solidFill>
                 <a:latin typeface="Courier New"/>
               </a:rPr>
-              <a:t>20 / 30</a:t>
+              <a:t>20</a:t>
             </a:r>
           </a:p>
         </p:txBody>
@@ -8411,23 +8701,23 @@
         </p:nvSpPr>
         <p:spPr>
           <a:xfrm>
-            <a:off x="609600" y="825500"/>
-            <a:ext cx="5715000" cy="4953000"/>
-          </a:xfrm>
-          <a:prstGeom prst="rect">
-            <a:avLst/>
-          </a:prstGeom>
-          <a:noFill/>
-        </p:spPr>
-        <p:txBody>
-          <a:bodyPr wrap="square">
-            <a:spAutoFit/>
+            <a:off x="609600" y="635000"/>
+            <a:ext cx="5461000" cy="5461000"/>
+          </a:xfrm>
+          <a:prstGeom prst="rect">
+            <a:avLst/>
+          </a:prstGeom>
+          <a:noFill/>
+        </p:spPr>
+        <p:txBody>
+          <a:bodyPr wrap="square">
+            <a:normAutofit/>
           </a:bodyPr>
           <a:lstStyle/>
           <a:p>
             <a:pPr algn="l"/>
             <a:r>
-              <a:rPr sz="40000" b="0" i="1">
+              <a:rPr sz="28000" b="0" i="1">
                 <a:solidFill>
                   <a:srgbClr val="D9BF7A"/>
                 </a:solidFill>
@@ -8446,58 +8736,23 @@
         </p:nvSpPr>
         <p:spPr>
           <a:xfrm>
-            <a:off x="6985000" y="3683000"/>
-            <a:ext cx="4597400" cy="228600"/>
-          </a:xfrm>
-          <a:prstGeom prst="rect">
-            <a:avLst/>
-          </a:prstGeom>
-          <a:noFill/>
-        </p:spPr>
-        <p:txBody>
-          <a:bodyPr wrap="square">
-            <a:spAutoFit/>
+            <a:off x="6731000" y="4064000"/>
+            <a:ext cx="4851400" cy="1778000"/>
+          </a:xfrm>
+          <a:prstGeom prst="rect">
+            <a:avLst/>
+          </a:prstGeom>
+          <a:noFill/>
+        </p:spPr>
+        <p:txBody>
+          <a:bodyPr wrap="square">
+            <a:normAutofit/>
           </a:bodyPr>
           <a:lstStyle/>
           <a:p>
             <a:pPr algn="r"/>
             <a:r>
-              <a:rPr sz="1400" b="0" i="0">
-                <a:solidFill>
-                  <a:srgbClr val="7B7FA0"/>
-                </a:solidFill>
-                <a:latin typeface="Courier New"/>
-              </a:rPr>
-              <a:t>PRAXISTRANSFER</a:t>
-            </a:r>
-          </a:p>
-        </p:txBody>
-      </p:sp>
-      <p:sp>
-        <p:nvSpPr>
-          <p:cNvPr id="7" name="TextBox 6"/>
-          <p:cNvSpPr txBox="1"/>
-          <p:nvPr/>
-        </p:nvSpPr>
-        <p:spPr>
-          <a:xfrm>
-            <a:off x="6985000" y="4000500"/>
-            <a:ext cx="4597400" cy="1524000"/>
-          </a:xfrm>
-          <a:prstGeom prst="rect">
-            <a:avLst/>
-          </a:prstGeom>
-          <a:noFill/>
-        </p:spPr>
-        <p:txBody>
-          <a:bodyPr wrap="square">
-            <a:spAutoFit/>
-          </a:bodyPr>
-          <a:lstStyle/>
-          <a:p>
-            <a:pPr algn="r"/>
-            <a:r>
-              <a:rPr sz="7600" b="0" i="0">
+              <a:rPr sz="3800" b="0" i="0">
                 <a:solidFill>
                   <a:srgbClr val="F8F8FA"/>
                 </a:solidFill>
@@ -8542,7 +8797,7 @@
         </p:nvSpPr>
         <p:spPr>
           <a:xfrm>
-            <a:off x="609600" y="304800"/>
+            <a:off x="609600" y="279400"/>
             <a:ext cx="2540000" cy="279400"/>
           </a:xfrm>
           <a:prstGeom prst="rect">
@@ -8552,13 +8807,13 @@
         </p:spPr>
         <p:txBody>
           <a:bodyPr wrap="square">
-            <a:spAutoFit/>
+            <a:normAutofit/>
           </a:bodyPr>
           <a:lstStyle/>
           <a:p>
             <a:pPr algn="l"/>
             <a:r>
-              <a:rPr sz="1600" b="1" i="0">
+              <a:rPr sz="1000" b="1" i="0">
                 <a:solidFill>
                   <a:srgbClr val="F8F8FA"/>
                 </a:solidFill>
@@ -8577,25 +8832,25 @@
         </p:nvSpPr>
         <p:spPr>
           <a:xfrm>
-            <a:off x="0" y="304800"/>
-            <a:ext cx="11582400" cy="279400"/>
-          </a:xfrm>
-          <a:prstGeom prst="rect">
-            <a:avLst/>
-          </a:prstGeom>
-          <a:noFill/>
-        </p:spPr>
-        <p:txBody>
-          <a:bodyPr wrap="square">
-            <a:spAutoFit/>
+            <a:off x="609600" y="279400"/>
+            <a:ext cx="10972800" cy="279400"/>
+          </a:xfrm>
+          <a:prstGeom prst="rect">
+            <a:avLst/>
+          </a:prstGeom>
+          <a:noFill/>
+        </p:spPr>
+        <p:txBody>
+          <a:bodyPr wrap="square">
+            <a:normAutofit/>
           </a:bodyPr>
           <a:lstStyle/>
           <a:p>
             <a:pPr algn="r"/>
             <a:r>
-              <a:rPr sz="1300" b="0" i="0" spc="100">
-                <a:solidFill>
-                  <a:srgbClr val="F8F8FA"/>
+              <a:rPr sz="900" b="0" i="0">
+                <a:solidFill>
+                  <a:srgbClr val="7B7FA0"/>
                 </a:solidFill>
                 <a:latin typeface="Courier New"/>
               </a:rPr>
@@ -8612,29 +8867,29 @@
         </p:nvSpPr>
         <p:spPr>
           <a:xfrm>
-            <a:off x="0" y="6350000"/>
-            <a:ext cx="11582400" cy="228600"/>
-          </a:xfrm>
-          <a:prstGeom prst="rect">
-            <a:avLst/>
-          </a:prstGeom>
-          <a:noFill/>
-        </p:spPr>
-        <p:txBody>
-          <a:bodyPr wrap="square">
-            <a:spAutoFit/>
+            <a:off x="609600" y="6426200"/>
+            <a:ext cx="10972800" cy="228600"/>
+          </a:xfrm>
+          <a:prstGeom prst="rect">
+            <a:avLst/>
+          </a:prstGeom>
+          <a:noFill/>
+        </p:spPr>
+        <p:txBody>
+          <a:bodyPr wrap="square">
+            <a:normAutofit/>
           </a:bodyPr>
           <a:lstStyle/>
           <a:p>
             <a:pPr algn="r"/>
             <a:r>
-              <a:rPr sz="1300" b="0" i="0">
-                <a:solidFill>
-                  <a:srgbClr val="606070"/>
+              <a:rPr sz="900" b="0" i="0">
+                <a:solidFill>
+                  <a:srgbClr val="7B7FA0"/>
                 </a:solidFill>
                 <a:latin typeface="Courier New"/>
               </a:rPr>
-              <a:t>21 / 30</a:t>
+              <a:t>21</a:t>
             </a:r>
           </a:p>
         </p:txBody>
@@ -8647,23 +8902,23 @@
         </p:nvSpPr>
         <p:spPr>
           <a:xfrm>
-            <a:off x="609600" y="825500"/>
-            <a:ext cx="5715000" cy="4953000"/>
-          </a:xfrm>
-          <a:prstGeom prst="rect">
-            <a:avLst/>
-          </a:prstGeom>
-          <a:noFill/>
-        </p:spPr>
-        <p:txBody>
-          <a:bodyPr wrap="square">
-            <a:spAutoFit/>
+            <a:off x="609600" y="635000"/>
+            <a:ext cx="5461000" cy="5461000"/>
+          </a:xfrm>
+          <a:prstGeom prst="rect">
+            <a:avLst/>
+          </a:prstGeom>
+          <a:noFill/>
+        </p:spPr>
+        <p:txBody>
+          <a:bodyPr wrap="square">
+            <a:normAutofit/>
           </a:bodyPr>
           <a:lstStyle/>
           <a:p>
             <a:pPr algn="l"/>
             <a:r>
-              <a:rPr sz="40000" b="0" i="1">
+              <a:rPr sz="28000" b="0" i="1">
                 <a:solidFill>
                   <a:srgbClr val="D9BF7A"/>
                 </a:solidFill>
@@ -8682,58 +8937,23 @@
         </p:nvSpPr>
         <p:spPr>
           <a:xfrm>
-            <a:off x="6985000" y="3683000"/>
-            <a:ext cx="4597400" cy="228600"/>
-          </a:xfrm>
-          <a:prstGeom prst="rect">
-            <a:avLst/>
-          </a:prstGeom>
-          <a:noFill/>
-        </p:spPr>
-        <p:txBody>
-          <a:bodyPr wrap="square">
-            <a:spAutoFit/>
+            <a:off x="6731000" y="4064000"/>
+            <a:ext cx="4851400" cy="1778000"/>
+          </a:xfrm>
+          <a:prstGeom prst="rect">
+            <a:avLst/>
+          </a:prstGeom>
+          <a:noFill/>
+        </p:spPr>
+        <p:txBody>
+          <a:bodyPr wrap="square">
+            <a:normAutofit/>
           </a:bodyPr>
           <a:lstStyle/>
           <a:p>
             <a:pPr algn="r"/>
             <a:r>
-              <a:rPr sz="1400" b="0" i="0">
-                <a:solidFill>
-                  <a:srgbClr val="7B7FA0"/>
-                </a:solidFill>
-                <a:latin typeface="Courier New"/>
-              </a:rPr>
-              <a:t>5.2 SELBSTCHECK NACH 4 WOCHEN</a:t>
-            </a:r>
-          </a:p>
-        </p:txBody>
-      </p:sp>
-      <p:sp>
-        <p:nvSpPr>
-          <p:cNvPr id="7" name="TextBox 6"/>
-          <p:cNvSpPr txBox="1"/>
-          <p:nvPr/>
-        </p:nvSpPr>
-        <p:spPr>
-          <a:xfrm>
-            <a:off x="6985000" y="4000500"/>
-            <a:ext cx="4597400" cy="1524000"/>
-          </a:xfrm>
-          <a:prstGeom prst="rect">
-            <a:avLst/>
-          </a:prstGeom>
-          <a:noFill/>
-        </p:spPr>
-        <p:txBody>
-          <a:bodyPr wrap="square">
-            <a:spAutoFit/>
-          </a:bodyPr>
-          <a:lstStyle/>
-          <a:p>
-            <a:pPr algn="r"/>
-            <a:r>
-              <a:rPr sz="7600" b="0" i="0">
+              <a:rPr sz="3800" b="0" i="0">
                 <a:solidFill>
                   <a:srgbClr val="F8F8FA"/>
                 </a:solidFill>
@@ -8778,7 +8998,7 @@
         </p:nvSpPr>
         <p:spPr>
           <a:xfrm>
-            <a:off x="609600" y="304800"/>
+            <a:off x="609600" y="279400"/>
             <a:ext cx="2540000" cy="279400"/>
           </a:xfrm>
           <a:prstGeom prst="rect">
@@ -8788,13 +9008,13 @@
         </p:spPr>
         <p:txBody>
           <a:bodyPr wrap="square">
-            <a:spAutoFit/>
+            <a:normAutofit/>
           </a:bodyPr>
           <a:lstStyle/>
           <a:p>
             <a:pPr algn="l"/>
             <a:r>
-              <a:rPr sz="1600" b="1" i="0">
+              <a:rPr sz="1000" b="1" i="0">
                 <a:solidFill>
                   <a:srgbClr val="F8F8FA"/>
                 </a:solidFill>
@@ -8813,25 +9033,25 @@
         </p:nvSpPr>
         <p:spPr>
           <a:xfrm>
-            <a:off x="0" y="304800"/>
-            <a:ext cx="11582400" cy="279400"/>
-          </a:xfrm>
-          <a:prstGeom prst="rect">
-            <a:avLst/>
-          </a:prstGeom>
-          <a:noFill/>
-        </p:spPr>
-        <p:txBody>
-          <a:bodyPr wrap="square">
-            <a:spAutoFit/>
+            <a:off x="609600" y="279400"/>
+            <a:ext cx="10972800" cy="279400"/>
+          </a:xfrm>
+          <a:prstGeom prst="rect">
+            <a:avLst/>
+          </a:prstGeom>
+          <a:noFill/>
+        </p:spPr>
+        <p:txBody>
+          <a:bodyPr wrap="square">
+            <a:normAutofit/>
           </a:bodyPr>
           <a:lstStyle/>
           <a:p>
             <a:pPr algn="r"/>
             <a:r>
-              <a:rPr sz="1300" b="0" i="0" spc="100">
-                <a:solidFill>
-                  <a:srgbClr val="F8F8FA"/>
+              <a:rPr sz="900" b="0" i="0">
+                <a:solidFill>
+                  <a:srgbClr val="7B7FA0"/>
                 </a:solidFill>
                 <a:latin typeface="Courier New"/>
               </a:rPr>
@@ -8848,29 +9068,29 @@
         </p:nvSpPr>
         <p:spPr>
           <a:xfrm>
-            <a:off x="0" y="6350000"/>
-            <a:ext cx="11582400" cy="228600"/>
-          </a:xfrm>
-          <a:prstGeom prst="rect">
-            <a:avLst/>
-          </a:prstGeom>
-          <a:noFill/>
-        </p:spPr>
-        <p:txBody>
-          <a:bodyPr wrap="square">
-            <a:spAutoFit/>
+            <a:off x="609600" y="6426200"/>
+            <a:ext cx="10972800" cy="228600"/>
+          </a:xfrm>
+          <a:prstGeom prst="rect">
+            <a:avLst/>
+          </a:prstGeom>
+          <a:noFill/>
+        </p:spPr>
+        <p:txBody>
+          <a:bodyPr wrap="square">
+            <a:normAutofit/>
           </a:bodyPr>
           <a:lstStyle/>
           <a:p>
             <a:pPr algn="r"/>
             <a:r>
-              <a:rPr sz="1300" b="0" i="0">
-                <a:solidFill>
-                  <a:srgbClr val="606070"/>
+              <a:rPr sz="900" b="0" i="0">
+                <a:solidFill>
+                  <a:srgbClr val="7B7FA0"/>
                 </a:solidFill>
                 <a:latin typeface="Courier New"/>
               </a:rPr>
-              <a:t>22 / 30</a:t>
+              <a:t>22</a:t>
             </a:r>
           </a:p>
         </p:txBody>
@@ -8883,23 +9103,23 @@
         </p:nvSpPr>
         <p:spPr>
           <a:xfrm>
-            <a:off x="609600" y="825500"/>
-            <a:ext cx="5715000" cy="4953000"/>
-          </a:xfrm>
-          <a:prstGeom prst="rect">
-            <a:avLst/>
-          </a:prstGeom>
-          <a:noFill/>
-        </p:spPr>
-        <p:txBody>
-          <a:bodyPr wrap="square">
-            <a:spAutoFit/>
+            <a:off x="609600" y="635000"/>
+            <a:ext cx="5461000" cy="5461000"/>
+          </a:xfrm>
+          <a:prstGeom prst="rect">
+            <a:avLst/>
+          </a:prstGeom>
+          <a:noFill/>
+        </p:spPr>
+        <p:txBody>
+          <a:bodyPr wrap="square">
+            <a:normAutofit/>
           </a:bodyPr>
           <a:lstStyle/>
           <a:p>
             <a:pPr algn="l"/>
             <a:r>
-              <a:rPr sz="40000" b="0" i="1">
+              <a:rPr sz="28000" b="0" i="1">
                 <a:solidFill>
                   <a:srgbClr val="D9BF7A"/>
                 </a:solidFill>
@@ -8918,58 +9138,23 @@
         </p:nvSpPr>
         <p:spPr>
           <a:xfrm>
-            <a:off x="6985000" y="3683000"/>
-            <a:ext cx="4597400" cy="228600"/>
-          </a:xfrm>
-          <a:prstGeom prst="rect">
-            <a:avLst/>
-          </a:prstGeom>
-          <a:noFill/>
-        </p:spPr>
-        <p:txBody>
-          <a:bodyPr wrap="square">
-            <a:spAutoFit/>
+            <a:off x="6731000" y="4064000"/>
+            <a:ext cx="4851400" cy="1778000"/>
+          </a:xfrm>
+          <a:prstGeom prst="rect">
+            <a:avLst/>
+          </a:prstGeom>
+          <a:noFill/>
+        </p:spPr>
+        <p:txBody>
+          <a:bodyPr wrap="square">
+            <a:normAutofit/>
           </a:bodyPr>
           <a:lstStyle/>
           <a:p>
             <a:pPr algn="r"/>
             <a:r>
-              <a:rPr sz="1400" b="0" i="0">
-                <a:solidFill>
-                  <a:srgbClr val="7B7FA0"/>
-                </a:solidFill>
-                <a:latin typeface="Courier New"/>
-              </a:rPr>
-              <a:t>5.3 VERTIEFUNGSLITERATUR</a:t>
-            </a:r>
-          </a:p>
-        </p:txBody>
-      </p:sp>
-      <p:sp>
-        <p:nvSpPr>
-          <p:cNvPr id="7" name="TextBox 6"/>
-          <p:cNvSpPr txBox="1"/>
-          <p:nvPr/>
-        </p:nvSpPr>
-        <p:spPr>
-          <a:xfrm>
-            <a:off x="6985000" y="4000500"/>
-            <a:ext cx="4597400" cy="1524000"/>
-          </a:xfrm>
-          <a:prstGeom prst="rect">
-            <a:avLst/>
-          </a:prstGeom>
-          <a:noFill/>
-        </p:spPr>
-        <p:txBody>
-          <a:bodyPr wrap="square">
-            <a:spAutoFit/>
-          </a:bodyPr>
-          <a:lstStyle/>
-          <a:p>
-            <a:pPr algn="r"/>
-            <a:r>
-              <a:rPr sz="7600" b="0" i="0">
+              <a:rPr sz="3800" b="0" i="0">
                 <a:solidFill>
                   <a:srgbClr val="F8F8FA"/>
                 </a:solidFill>
@@ -9014,7 +9199,7 @@
         </p:nvSpPr>
         <p:spPr>
           <a:xfrm>
-            <a:off x="609600" y="304800"/>
+            <a:off x="609600" y="279400"/>
             <a:ext cx="2540000" cy="279400"/>
           </a:xfrm>
           <a:prstGeom prst="rect">
@@ -9024,13 +9209,13 @@
         </p:spPr>
         <p:txBody>
           <a:bodyPr wrap="square">
-            <a:spAutoFit/>
+            <a:normAutofit/>
           </a:bodyPr>
           <a:lstStyle/>
           <a:p>
             <a:pPr algn="l"/>
             <a:r>
-              <a:rPr sz="1600" b="1" i="0">
+              <a:rPr sz="1000" b="1" i="0">
                 <a:solidFill>
                   <a:srgbClr val="F8F8FA"/>
                 </a:solidFill>
@@ -9049,457 +9234,134 @@
         </p:nvSpPr>
         <p:spPr>
           <a:xfrm>
-            <a:off x="0" y="304800"/>
-            <a:ext cx="11582400" cy="279400"/>
-          </a:xfrm>
-          <a:prstGeom prst="rect">
-            <a:avLst/>
-          </a:prstGeom>
-          <a:noFill/>
-        </p:spPr>
-        <p:txBody>
-          <a:bodyPr wrap="square">
-            <a:spAutoFit/>
+            <a:off x="609600" y="279400"/>
+            <a:ext cx="10972800" cy="279400"/>
+          </a:xfrm>
+          <a:prstGeom prst="rect">
+            <a:avLst/>
+          </a:prstGeom>
+          <a:noFill/>
+        </p:spPr>
+        <p:txBody>
+          <a:bodyPr wrap="square">
+            <a:normAutofit/>
           </a:bodyPr>
           <a:lstStyle/>
           <a:p>
             <a:pPr algn="r"/>
             <a:r>
-              <a:rPr sz="1300" b="0" i="0" spc="100">
+              <a:rPr sz="900" b="0" i="0">
+                <a:solidFill>
+                  <a:srgbClr val="7B7FA0"/>
+                </a:solidFill>
+                <a:latin typeface="Courier New"/>
+              </a:rPr>
+              <a:t>QUELLEN</a:t>
+            </a:r>
+          </a:p>
+        </p:txBody>
+      </p:sp>
+      <p:sp>
+        <p:nvSpPr>
+          <p:cNvPr id="4" name="TextBox 3"/>
+          <p:cNvSpPr txBox="1"/>
+          <p:nvPr/>
+        </p:nvSpPr>
+        <p:spPr>
+          <a:xfrm>
+            <a:off x="609600" y="6426200"/>
+            <a:ext cx="10972800" cy="228600"/>
+          </a:xfrm>
+          <a:prstGeom prst="rect">
+            <a:avLst/>
+          </a:prstGeom>
+          <a:noFill/>
+        </p:spPr>
+        <p:txBody>
+          <a:bodyPr wrap="square">
+            <a:normAutofit/>
+          </a:bodyPr>
+          <a:lstStyle/>
+          <a:p>
+            <a:pPr algn="r"/>
+            <a:r>
+              <a:rPr sz="900" b="0" i="0">
+                <a:solidFill>
+                  <a:srgbClr val="7B7FA0"/>
+                </a:solidFill>
+                <a:latin typeface="Courier New"/>
+              </a:rPr>
+              <a:t>23</a:t>
+            </a:r>
+          </a:p>
+        </p:txBody>
+      </p:sp>
+      <p:sp>
+        <p:nvSpPr>
+          <p:cNvPr id="5" name="TextBox 4"/>
+          <p:cNvSpPr txBox="1"/>
+          <p:nvPr/>
+        </p:nvSpPr>
+        <p:spPr>
+          <a:xfrm>
+            <a:off x="609600" y="635000"/>
+            <a:ext cx="5461000" cy="5461000"/>
+          </a:xfrm>
+          <a:prstGeom prst="rect">
+            <a:avLst/>
+          </a:prstGeom>
+          <a:noFill/>
+        </p:spPr>
+        <p:txBody>
+          <a:bodyPr wrap="square">
+            <a:normAutofit/>
+          </a:bodyPr>
+          <a:lstStyle/>
+          <a:p>
+            <a:pPr algn="l"/>
+            <a:r>
+              <a:rPr sz="28000" b="0" i="1">
+                <a:solidFill>
+                  <a:srgbClr val="D9BF7A"/>
+                </a:solidFill>
+                <a:latin typeface="Georgia"/>
+              </a:rPr>
+              <a:t>12.</a:t>
+            </a:r>
+          </a:p>
+        </p:txBody>
+      </p:sp>
+      <p:sp>
+        <p:nvSpPr>
+          <p:cNvPr id="6" name="TextBox 5"/>
+          <p:cNvSpPr txBox="1"/>
+          <p:nvPr/>
+        </p:nvSpPr>
+        <p:spPr>
+          <a:xfrm>
+            <a:off x="6731000" y="4064000"/>
+            <a:ext cx="4851400" cy="1778000"/>
+          </a:xfrm>
+          <a:prstGeom prst="rect">
+            <a:avLst/>
+          </a:prstGeom>
+          <a:noFill/>
+        </p:spPr>
+        <p:txBody>
+          <a:bodyPr wrap="square">
+            <a:normAutofit/>
+          </a:bodyPr>
+          <a:lstStyle/>
+          <a:p>
+            <a:pPr algn="r"/>
+            <a:r>
+              <a:rPr sz="3800" b="0" i="0">
                 <a:solidFill>
                   <a:srgbClr val="F8F8FA"/>
                 </a:solidFill>
-                <a:latin typeface="Courier New"/>
-              </a:rPr>
-              <a:t>QUELLENAPPARAT</a:t>
-            </a:r>
-          </a:p>
-        </p:txBody>
-      </p:sp>
-      <p:sp>
-        <p:nvSpPr>
-          <p:cNvPr id="4" name="TextBox 3"/>
-          <p:cNvSpPr txBox="1"/>
-          <p:nvPr/>
-        </p:nvSpPr>
-        <p:spPr>
-          <a:xfrm>
-            <a:off x="0" y="6350000"/>
-            <a:ext cx="11582400" cy="228600"/>
-          </a:xfrm>
-          <a:prstGeom prst="rect">
-            <a:avLst/>
-          </a:prstGeom>
-          <a:noFill/>
-        </p:spPr>
-        <p:txBody>
-          <a:bodyPr wrap="square">
-            <a:spAutoFit/>
-          </a:bodyPr>
-          <a:lstStyle/>
-          <a:p>
-            <a:pPr algn="r"/>
-            <a:r>
-              <a:rPr sz="1300" b="0" i="0">
-                <a:solidFill>
-                  <a:srgbClr val="606070"/>
-                </a:solidFill>
-                <a:latin typeface="Courier New"/>
-              </a:rPr>
-              <a:t>23 / 30</a:t>
-            </a:r>
-          </a:p>
-        </p:txBody>
-      </p:sp>
-      <p:sp>
-        <p:nvSpPr>
-          <p:cNvPr id="5" name="TextBox 4"/>
-          <p:cNvSpPr txBox="1"/>
-          <p:nvPr/>
-        </p:nvSpPr>
-        <p:spPr>
-          <a:xfrm>
-            <a:off x="609600" y="889000"/>
-            <a:ext cx="5080000" cy="228600"/>
-          </a:xfrm>
-          <a:prstGeom prst="rect">
-            <a:avLst/>
-          </a:prstGeom>
-          <a:noFill/>
-        </p:spPr>
-        <p:txBody>
-          <a:bodyPr wrap="square">
-            <a:spAutoFit/>
-          </a:bodyPr>
-          <a:lstStyle/>
-          <a:p>
-            <a:pPr algn="l"/>
-            <a:r>
-              <a:rPr sz="1400" b="0" i="0" spc="100">
-                <a:solidFill>
-                  <a:srgbClr val="7B7FA0"/>
-                </a:solidFill>
-                <a:latin typeface="Courier New"/>
-              </a:rPr>
-              <a:t>QUELLENAPPARAT</a:t>
-            </a:r>
-          </a:p>
-        </p:txBody>
-      </p:sp>
-      <p:sp>
-        <p:nvSpPr>
-          <p:cNvPr id="6" name="TextBox 5"/>
-          <p:cNvSpPr txBox="1"/>
-          <p:nvPr/>
-        </p:nvSpPr>
-        <p:spPr>
-          <a:xfrm>
-            <a:off x="609600" y="1174750"/>
-            <a:ext cx="10972800" cy="1016000"/>
-          </a:xfrm>
-          <a:prstGeom prst="rect">
-            <a:avLst/>
-          </a:prstGeom>
-          <a:noFill/>
-        </p:spPr>
-        <p:txBody>
-          <a:bodyPr wrap="square">
-            <a:spAutoFit/>
-          </a:bodyPr>
-          <a:lstStyle/>
-          <a:p>
-            <a:pPr algn="l"/>
-            <a:r>
-              <a:rPr sz="7200" b="0" i="0">
-                <a:solidFill>
-                  <a:srgbClr val="F8F8FA"/>
-                </a:solidFill>
                 <a:latin typeface="Georgia"/>
               </a:rPr>
-              <a:t>Quellen­apparat.</a:t>
-            </a:r>
-          </a:p>
-        </p:txBody>
-      </p:sp>
-      <p:sp>
-        <p:nvSpPr>
-          <p:cNvPr id="7" name="Rectangle 6"/>
-          <p:cNvSpPr/>
-          <p:nvPr/>
-        </p:nvSpPr>
-        <p:spPr>
-          <a:xfrm>
-            <a:off x="609600" y="2286000"/>
-            <a:ext cx="10972800" cy="6350"/>
-          </a:xfrm>
-          <a:prstGeom prst="rect">
-            <a:avLst/>
-          </a:prstGeom>
-          <a:solidFill>
-            <a:srgbClr val="404870"/>
-          </a:solidFill>
-          <a:ln>
-            <a:noFill/>
-          </a:ln>
-        </p:spPr>
-        <p:style>
-          <a:lnRef idx="1">
-            <a:schemeClr val="accent1"/>
-          </a:lnRef>
-          <a:fillRef idx="3">
-            <a:schemeClr val="accent1"/>
-          </a:fillRef>
-          <a:effectRef idx="2">
-            <a:schemeClr val="accent1"/>
-          </a:effectRef>
-          <a:fontRef idx="minor">
-            <a:schemeClr val="lt1"/>
-          </a:fontRef>
-        </p:style>
-        <p:txBody>
-          <a:bodyPr rtlCol="0" anchor="ctr"/>
-          <a:lstStyle/>
-          <a:p>
-            <a:pPr algn="ctr"/>
-          </a:p>
-        </p:txBody>
-      </p:sp>
-      <p:sp>
-        <p:nvSpPr>
-          <p:cNvPr id="8" name="TextBox 7"/>
-          <p:cNvSpPr txBox="1"/>
-          <p:nvPr/>
-        </p:nvSpPr>
-        <p:spPr>
-          <a:xfrm>
-            <a:off x="609600" y="2413000"/>
-            <a:ext cx="5080000" cy="457200"/>
-          </a:xfrm>
-          <a:prstGeom prst="rect">
-            <a:avLst/>
-          </a:prstGeom>
-          <a:noFill/>
-        </p:spPr>
-        <p:txBody>
-          <a:bodyPr wrap="square">
-            <a:spAutoFit/>
-          </a:bodyPr>
-          <a:lstStyle/>
-          <a:p>
-            <a:pPr algn="l"/>
-            <a:r>
-              <a:rPr sz="1400" b="0" i="0">
-                <a:solidFill>
-                  <a:srgbClr val="C0C4D8"/>
-                </a:solidFill>
-                <a:latin typeface="Courier New"/>
-              </a:rPr>
-              <a:t>(Alle Quellen im APA-7-Format)</a:t>
-            </a:r>
-          </a:p>
-        </p:txBody>
-      </p:sp>
-      <p:sp>
-        <p:nvSpPr>
-          <p:cNvPr id="9" name="TextBox 8"/>
-          <p:cNvSpPr txBox="1"/>
-          <p:nvPr/>
-        </p:nvSpPr>
-        <p:spPr>
-          <a:xfrm>
-            <a:off x="609600" y="2921000"/>
-            <a:ext cx="5080000" cy="457200"/>
-          </a:xfrm>
-          <a:prstGeom prst="rect">
-            <a:avLst/>
-          </a:prstGeom>
-          <a:noFill/>
-        </p:spPr>
-        <p:txBody>
-          <a:bodyPr wrap="square">
-            <a:spAutoFit/>
-          </a:bodyPr>
-          <a:lstStyle/>
-          <a:p>
-            <a:pPr algn="l"/>
-            <a:r>
-              <a:rPr sz="1400" b="0" i="0">
-                <a:solidFill>
-                  <a:srgbClr val="C0C4D8"/>
-                </a:solidFill>
-                <a:latin typeface="Courier New"/>
-              </a:rPr>
-              <a:t>Anderson, L.W. &amp; Krathwohl, D.R. (Hrsg.). (2001). A taxonomy for learning, teaching, and assessing: A revision of Bloom's educational objectives. Longman.</a:t>
-            </a:r>
-          </a:p>
-        </p:txBody>
-      </p:sp>
-      <p:sp>
-        <p:nvSpPr>
-          <p:cNvPr id="10" name="TextBox 9"/>
-          <p:cNvSpPr txBox="1"/>
-          <p:nvPr/>
-        </p:nvSpPr>
-        <p:spPr>
-          <a:xfrm>
-            <a:off x="609600" y="3429000"/>
-            <a:ext cx="5080000" cy="457200"/>
-          </a:xfrm>
-          <a:prstGeom prst="rect">
-            <a:avLst/>
-          </a:prstGeom>
-          <a:noFill/>
-        </p:spPr>
-        <p:txBody>
-          <a:bodyPr wrap="square">
-            <a:spAutoFit/>
-          </a:bodyPr>
-          <a:lstStyle/>
-          <a:p>
-            <a:pPr algn="l"/>
-            <a:r>
-              <a:rPr sz="1400" b="0" i="0">
-                <a:solidFill>
-                  <a:srgbClr val="C0C4D8"/>
-                </a:solidFill>
-                <a:latin typeface="Courier New"/>
-              </a:rPr>
-              <a:t>Dreyfus, H.L. &amp; Dreyfus, S.E. (1980). A five-stage model of the mental activities involved in directed skill acquisition (ORC 80-2). University of California, Berkeley, Operations Research Center.</a:t>
-            </a:r>
-          </a:p>
-        </p:txBody>
-      </p:sp>
-      <p:sp>
-        <p:nvSpPr>
-          <p:cNvPr id="11" name="TextBox 10"/>
-          <p:cNvSpPr txBox="1"/>
-          <p:nvPr/>
-        </p:nvSpPr>
-        <p:spPr>
-          <a:xfrm>
-            <a:off x="609600" y="3937000"/>
-            <a:ext cx="5080000" cy="457200"/>
-          </a:xfrm>
-          <a:prstGeom prst="rect">
-            <a:avLst/>
-          </a:prstGeom>
-          <a:noFill/>
-        </p:spPr>
-        <p:txBody>
-          <a:bodyPr wrap="square">
-            <a:spAutoFit/>
-          </a:bodyPr>
-          <a:lstStyle/>
-          <a:p>
-            <a:pPr algn="l"/>
-            <a:r>
-              <a:rPr sz="1400" b="0" i="0">
-                <a:solidFill>
-                  <a:srgbClr val="C0C4D8"/>
-                </a:solidFill>
-                <a:latin typeface="Courier New"/>
-              </a:rPr>
-              <a:t>Kirkpatrick, D.L. (1994). Evaluating Training Programs: The Four Levels. Berrett-Koehler.</a:t>
-            </a:r>
-          </a:p>
-        </p:txBody>
-      </p:sp>
-      <p:sp>
-        <p:nvSpPr>
-          <p:cNvPr id="12" name="TextBox 11"/>
-          <p:cNvSpPr txBox="1"/>
-          <p:nvPr/>
-        </p:nvSpPr>
-        <p:spPr>
-          <a:xfrm>
-            <a:off x="609600" y="4445000"/>
-            <a:ext cx="5080000" cy="457200"/>
-          </a:xfrm>
-          <a:prstGeom prst="rect">
-            <a:avLst/>
-          </a:prstGeom>
-          <a:noFill/>
-        </p:spPr>
-        <p:txBody>
-          <a:bodyPr wrap="square">
-            <a:spAutoFit/>
-          </a:bodyPr>
-          <a:lstStyle/>
-          <a:p>
-            <a:pPr algn="l"/>
-            <a:r>
-              <a:rPr sz="1400" b="0" i="0">
-                <a:solidFill>
-                  <a:srgbClr val="C0C4D8"/>
-                </a:solidFill>
-                <a:latin typeface="Courier New"/>
-              </a:rPr>
-              <a:t>Kolb, D.A. (1984). Experiential learning: Experience as the source of learning and development. Prentice Hall.</a:t>
-            </a:r>
-          </a:p>
-        </p:txBody>
-      </p:sp>
-      <p:sp>
-        <p:nvSpPr>
-          <p:cNvPr id="13" name="TextBox 12"/>
-          <p:cNvSpPr txBox="1"/>
-          <p:nvPr/>
-        </p:nvSpPr>
-        <p:spPr>
-          <a:xfrm>
-            <a:off x="6096000" y="2413000"/>
-            <a:ext cx="5080000" cy="457200"/>
-          </a:xfrm>
-          <a:prstGeom prst="rect">
-            <a:avLst/>
-          </a:prstGeom>
-          <a:noFill/>
-        </p:spPr>
-        <p:txBody>
-          <a:bodyPr wrap="square">
-            <a:spAutoFit/>
-          </a:bodyPr>
-          <a:lstStyle/>
-          <a:p>
-            <a:pPr algn="l"/>
-            <a:r>
-              <a:rPr sz="1400" b="0" i="0">
-                <a:solidFill>
-                  <a:srgbClr val="C0C4D8"/>
-                </a:solidFill>
-                <a:latin typeface="Courier New"/>
-              </a:rPr>
-              <a:t>Nonaka, I. &amp; Takeuchi, H. (1995). The knowledge-creating company: How Japanese companies create the dynamics of innovation. Oxford University Press.</a:t>
-            </a:r>
-          </a:p>
-        </p:txBody>
-      </p:sp>
-      <p:sp>
-        <p:nvSpPr>
-          <p:cNvPr id="14" name="TextBox 13"/>
-          <p:cNvSpPr txBox="1"/>
-          <p:nvPr/>
-        </p:nvSpPr>
-        <p:spPr>
-          <a:xfrm>
-            <a:off x="6096000" y="2921000"/>
-            <a:ext cx="5080000" cy="457200"/>
-          </a:xfrm>
-          <a:prstGeom prst="rect">
-            <a:avLst/>
-          </a:prstGeom>
-          <a:noFill/>
-        </p:spPr>
-        <p:txBody>
-          <a:bodyPr wrap="square">
-            <a:spAutoFit/>
-          </a:bodyPr>
-          <a:lstStyle/>
-          <a:p>
-            <a:pPr algn="l"/>
-            <a:r>
-              <a:rPr sz="1400" b="0" i="0">
-                <a:solidFill>
-                  <a:srgbClr val="C0C4D8"/>
-                </a:solidFill>
-                <a:latin typeface="Courier New"/>
-              </a:rPr>
-              <a:t>Reinmann-Rothmeier, G. &amp; Mandl, H. (2000). Wissensmanagement in der Vernetzung: Konzepte und Erfahrungen. Unterrichtswissenschaft, 28(3), 228–248.</a:t>
-            </a:r>
-          </a:p>
-        </p:txBody>
-      </p:sp>
-      <p:sp>
-        <p:nvSpPr>
-          <p:cNvPr id="15" name="TextBox 14"/>
-          <p:cNvSpPr txBox="1"/>
-          <p:nvPr/>
-        </p:nvSpPr>
-        <p:spPr>
-          <a:xfrm>
-            <a:off x="6096000" y="3429000"/>
-            <a:ext cx="5080000" cy="457200"/>
-          </a:xfrm>
-          <a:prstGeom prst="rect">
-            <a:avLst/>
-          </a:prstGeom>
-          <a:noFill/>
-        </p:spPr>
-        <p:txBody>
-          <a:bodyPr wrap="square">
-            <a:spAutoFit/>
-          </a:bodyPr>
-          <a:lstStyle/>
-          <a:p>
-            <a:pPr algn="l"/>
-            <a:r>
-              <a:rPr sz="1400" b="0" i="0">
-                <a:solidFill>
-                  <a:srgbClr val="C0C4D8"/>
-                </a:solidFill>
-                <a:latin typeface="Courier New"/>
-              </a:rPr>
-              <a:t>Wenger, E. (1998). Communities of practice: Learning, meaning, and identity. Cambridge University Press.</a:t>
+              <a:t>Quellen</a:t>
             </a:r>
           </a:p>
         </p:txBody>
@@ -9538,23 +9400,23 @@
         </p:nvSpPr>
         <p:spPr>
           <a:xfrm>
-            <a:off x="609600" y="508000"/>
-            <a:ext cx="3175000" cy="304800"/>
-          </a:xfrm>
-          <a:prstGeom prst="rect">
-            <a:avLst/>
-          </a:prstGeom>
-          <a:noFill/>
-        </p:spPr>
-        <p:txBody>
-          <a:bodyPr wrap="square">
-            <a:spAutoFit/>
+            <a:off x="609600" y="457200"/>
+            <a:ext cx="3175000" cy="279400"/>
+          </a:xfrm>
+          <a:prstGeom prst="rect">
+            <a:avLst/>
+          </a:prstGeom>
+          <a:noFill/>
+        </p:spPr>
+        <p:txBody>
+          <a:bodyPr wrap="square">
+            <a:normAutofit/>
           </a:bodyPr>
           <a:lstStyle/>
           <a:p>
             <a:pPr algn="l"/>
             <a:r>
-              <a:rPr sz="1800" b="1" i="0">
+              <a:rPr sz="1000" b="1" i="0">
                 <a:solidFill>
                   <a:srgbClr val="191D2E"/>
                 </a:solidFill>
@@ -9573,23 +9435,23 @@
         </p:nvSpPr>
         <p:spPr>
           <a:xfrm>
-            <a:off x="0" y="546100"/>
-            <a:ext cx="11582400" cy="254000"/>
-          </a:xfrm>
-          <a:prstGeom prst="rect">
-            <a:avLst/>
-          </a:prstGeom>
-          <a:noFill/>
-        </p:spPr>
-        <p:txBody>
-          <a:bodyPr wrap="square">
-            <a:spAutoFit/>
+            <a:off x="609600" y="457200"/>
+            <a:ext cx="10972800" cy="279400"/>
+          </a:xfrm>
+          <a:prstGeom prst="rect">
+            <a:avLst/>
+          </a:prstGeom>
+          <a:noFill/>
+        </p:spPr>
+        <p:txBody>
+          <a:bodyPr wrap="square">
+            <a:normAutofit/>
           </a:bodyPr>
           <a:lstStyle/>
           <a:p>
             <a:pPr algn="r"/>
             <a:r>
-              <a:rPr sz="1400" b="0" i="0">
+              <a:rPr sz="900" b="0" i="0">
                 <a:solidFill>
                   <a:srgbClr val="7B7FA0"/>
                 </a:solidFill>
@@ -9609,22 +9471,22 @@
         <p:spPr>
           <a:xfrm>
             <a:off x="609600" y="1143000"/>
-            <a:ext cx="10972800" cy="3683000"/>
-          </a:xfrm>
-          <a:prstGeom prst="rect">
-            <a:avLst/>
-          </a:prstGeom>
-          <a:noFill/>
-        </p:spPr>
-        <p:txBody>
-          <a:bodyPr wrap="square">
-            <a:spAutoFit/>
+            <a:ext cx="10972800" cy="3556000"/>
+          </a:xfrm>
+          <a:prstGeom prst="rect">
+            <a:avLst/>
+          </a:prstGeom>
+          <a:noFill/>
+        </p:spPr>
+        <p:txBody>
+          <a:bodyPr wrap="square">
+            <a:normAutofit/>
           </a:bodyPr>
           <a:lstStyle/>
           <a:p>
             <a:pPr algn="l"/>
             <a:r>
-              <a:rPr sz="18000" b="0" i="0">
+              <a:rPr sz="9600" b="0" i="0">
                 <a:solidFill>
                   <a:srgbClr val="191D2E"/>
                 </a:solidFill>
@@ -9644,7 +9506,7 @@
         </p:nvSpPr>
         <p:spPr>
           <a:xfrm>
-            <a:off x="609600" y="5143500"/>
+            <a:off x="609600" y="4826000"/>
             <a:ext cx="10972800" cy="6350"/>
           </a:xfrm>
           <a:prstGeom prst="rect">
@@ -9687,29 +9549,29 @@
         </p:nvSpPr>
         <p:spPr>
           <a:xfrm>
-            <a:off x="609600" y="5270500"/>
-            <a:ext cx="5715000" cy="1016000"/>
-          </a:xfrm>
-          <a:prstGeom prst="rect">
-            <a:avLst/>
-          </a:prstGeom>
-          <a:noFill/>
-        </p:spPr>
-        <p:txBody>
-          <a:bodyPr wrap="square">
-            <a:spAutoFit/>
+            <a:off x="609600" y="4953000"/>
+            <a:ext cx="5715000" cy="1143000"/>
+          </a:xfrm>
+          <a:prstGeom prst="rect">
+            <a:avLst/>
+          </a:prstGeom>
+          <a:noFill/>
+        </p:spPr>
+        <p:txBody>
+          <a:bodyPr wrap="square">
+            <a:normAutofit/>
           </a:bodyPr>
           <a:lstStyle/>
           <a:p>
             <a:pPr algn="l"/>
             <a:r>
-              <a:rPr sz="2200" b="0" i="1">
+              <a:rPr sz="1400" b="0" i="1">
                 <a:solidFill>
                   <a:srgbClr val="191D2E"/>
                 </a:solidFill>
                 <a:latin typeface="Georgia"/>
               </a:rPr>
-              <a:t>Das vollständige Modul «Wissenstransfer im Team» ist auf FKB Campus verfügbar — 5 Lernziele, Praxisfall und Quellenapparat.</a:t>
+              <a:t>Modul «Wissenstransfer im Team» auf FKB Campus — 5 Lernziele, Praxisfall und Quellenapparat.</a:t>
             </a:r>
           </a:p>
         </p:txBody>
@@ -9722,23 +9584,23 @@
         </p:nvSpPr>
         <p:spPr>
           <a:xfrm>
-            <a:off x="6667500" y="5270500"/>
-            <a:ext cx="2413000" cy="203200"/>
-          </a:xfrm>
-          <a:prstGeom prst="rect">
-            <a:avLst/>
-          </a:prstGeom>
-          <a:noFill/>
-        </p:spPr>
-        <p:txBody>
-          <a:bodyPr wrap="square">
-            <a:spAutoFit/>
+            <a:off x="6731000" y="4953000"/>
+            <a:ext cx="2413000" cy="177800"/>
+          </a:xfrm>
+          <a:prstGeom prst="rect">
+            <a:avLst/>
+          </a:prstGeom>
+          <a:noFill/>
+        </p:spPr>
+        <p:txBody>
+          <a:bodyPr wrap="square">
+            <a:normAutofit/>
           </a:bodyPr>
           <a:lstStyle/>
           <a:p>
             <a:pPr algn="l"/>
             <a:r>
-              <a:rPr sz="1300" b="0" i="0" spc="100">
+              <a:rPr sz="900" b="0" i="0">
                 <a:solidFill>
                   <a:srgbClr val="7B7FA0"/>
                 </a:solidFill>
@@ -9757,7 +9619,7 @@
         </p:nvSpPr>
         <p:spPr>
           <a:xfrm>
-            <a:off x="6667500" y="5499100"/>
+            <a:off x="6731000" y="5156200"/>
             <a:ext cx="2413000" cy="381000"/>
           </a:xfrm>
           <a:prstGeom prst="rect">
@@ -9767,13 +9629,13 @@
         </p:spPr>
         <p:txBody>
           <a:bodyPr wrap="square">
-            <a:spAutoFit/>
+            <a:normAutofit/>
           </a:bodyPr>
           <a:lstStyle/>
           <a:p>
             <a:pPr algn="l"/>
             <a:r>
-              <a:rPr sz="2000" b="0" i="0">
+              <a:rPr sz="1400" b="0" i="0">
                 <a:solidFill>
                   <a:srgbClr val="191D2E"/>
                 </a:solidFill>
@@ -9792,23 +9654,23 @@
         </p:nvSpPr>
         <p:spPr>
           <a:xfrm>
-            <a:off x="9398000" y="5270500"/>
-            <a:ext cx="2184400" cy="203200"/>
-          </a:xfrm>
-          <a:prstGeom prst="rect">
-            <a:avLst/>
-          </a:prstGeom>
-          <a:noFill/>
-        </p:spPr>
-        <p:txBody>
-          <a:bodyPr wrap="square">
-            <a:spAutoFit/>
+            <a:off x="9398000" y="4953000"/>
+            <a:ext cx="2184400" cy="177800"/>
+          </a:xfrm>
+          <a:prstGeom prst="rect">
+            <a:avLst/>
+          </a:prstGeom>
+          <a:noFill/>
+        </p:spPr>
+        <p:txBody>
+          <a:bodyPr wrap="square">
+            <a:normAutofit/>
           </a:bodyPr>
           <a:lstStyle/>
           <a:p>
             <a:pPr algn="l"/>
             <a:r>
-              <a:rPr sz="1300" b="0" i="0" spc="100">
+              <a:rPr sz="900" b="0" i="0">
                 <a:solidFill>
                   <a:srgbClr val="7B7FA0"/>
                 </a:solidFill>
@@ -9827,7 +9689,7 @@
         </p:nvSpPr>
         <p:spPr>
           <a:xfrm>
-            <a:off x="9398000" y="5499100"/>
+            <a:off x="9398000" y="5156200"/>
             <a:ext cx="2184400" cy="381000"/>
           </a:xfrm>
           <a:prstGeom prst="rect">
@@ -9837,13 +9699,13 @@
         </p:spPr>
         <p:txBody>
           <a:bodyPr wrap="square">
-            <a:spAutoFit/>
+            <a:normAutofit/>
           </a:bodyPr>
           <a:lstStyle/>
           <a:p>
             <a:pPr algn="l"/>
             <a:r>
-              <a:rPr sz="2000" b="0" i="0">
+              <a:rPr sz="1400" b="0" i="0">
                 <a:solidFill>
                   <a:srgbClr val="191D2E"/>
                 </a:solidFill>
@@ -9888,7 +9750,7 @@
         </p:nvSpPr>
         <p:spPr>
           <a:xfrm>
-            <a:off x="609600" y="304800"/>
+            <a:off x="609600" y="279400"/>
             <a:ext cx="2540000" cy="279400"/>
           </a:xfrm>
           <a:prstGeom prst="rect">
@@ -9898,13 +9760,13 @@
         </p:spPr>
         <p:txBody>
           <a:bodyPr wrap="square">
-            <a:spAutoFit/>
+            <a:normAutofit/>
           </a:bodyPr>
           <a:lstStyle/>
           <a:p>
             <a:pPr algn="l"/>
             <a:r>
-              <a:rPr sz="1600" b="1" i="0">
+              <a:rPr sz="1000" b="1" i="0">
                 <a:solidFill>
                   <a:srgbClr val="F8F8FA"/>
                 </a:solidFill>
@@ -9923,25 +9785,25 @@
         </p:nvSpPr>
         <p:spPr>
           <a:xfrm>
-            <a:off x="0" y="304800"/>
-            <a:ext cx="11582400" cy="279400"/>
-          </a:xfrm>
-          <a:prstGeom prst="rect">
-            <a:avLst/>
-          </a:prstGeom>
-          <a:noFill/>
-        </p:spPr>
-        <p:txBody>
-          <a:bodyPr wrap="square">
-            <a:spAutoFit/>
+            <a:off x="609600" y="279400"/>
+            <a:ext cx="10972800" cy="279400"/>
+          </a:xfrm>
+          <a:prstGeom prst="rect">
+            <a:avLst/>
+          </a:prstGeom>
+          <a:noFill/>
+        </p:spPr>
+        <p:txBody>
+          <a:bodyPr wrap="square">
+            <a:normAutofit/>
           </a:bodyPr>
           <a:lstStyle/>
           <a:p>
             <a:pPr algn="r"/>
             <a:r>
-              <a:rPr sz="1300" b="0" i="0" spc="100">
-                <a:solidFill>
-                  <a:srgbClr val="F8F8FA"/>
+              <a:rPr sz="900" b="0" i="0">
+                <a:solidFill>
+                  <a:srgbClr val="7B7FA0"/>
                 </a:solidFill>
                 <a:latin typeface="Courier New"/>
               </a:rPr>
@@ -9958,29 +9820,29 @@
         </p:nvSpPr>
         <p:spPr>
           <a:xfrm>
-            <a:off x="0" y="6350000"/>
-            <a:ext cx="11582400" cy="228600"/>
-          </a:xfrm>
-          <a:prstGeom prst="rect">
-            <a:avLst/>
-          </a:prstGeom>
-          <a:noFill/>
-        </p:spPr>
-        <p:txBody>
-          <a:bodyPr wrap="square">
-            <a:spAutoFit/>
+            <a:off x="609600" y="6426200"/>
+            <a:ext cx="10972800" cy="228600"/>
+          </a:xfrm>
+          <a:prstGeom prst="rect">
+            <a:avLst/>
+          </a:prstGeom>
+          <a:noFill/>
+        </p:spPr>
+        <p:txBody>
+          <a:bodyPr wrap="square">
+            <a:normAutofit/>
           </a:bodyPr>
           <a:lstStyle/>
           <a:p>
             <a:pPr algn="r"/>
             <a:r>
-              <a:rPr sz="1300" b="0" i="0">
-                <a:solidFill>
-                  <a:srgbClr val="606070"/>
+              <a:rPr sz="900" b="0" i="0">
+                <a:solidFill>
+                  <a:srgbClr val="7B7FA0"/>
                 </a:solidFill>
                 <a:latin typeface="Courier New"/>
               </a:rPr>
-              <a:t>03 / 30</a:t>
+              <a:t>03</a:t>
             </a:r>
           </a:p>
         </p:txBody>
@@ -9993,23 +9855,23 @@
         </p:nvSpPr>
         <p:spPr>
           <a:xfrm>
-            <a:off x="609600" y="825500"/>
-            <a:ext cx="5715000" cy="4953000"/>
-          </a:xfrm>
-          <a:prstGeom prst="rect">
-            <a:avLst/>
-          </a:prstGeom>
-          <a:noFill/>
-        </p:spPr>
-        <p:txBody>
-          <a:bodyPr wrap="square">
-            <a:spAutoFit/>
+            <a:off x="609600" y="635000"/>
+            <a:ext cx="5461000" cy="5461000"/>
+          </a:xfrm>
+          <a:prstGeom prst="rect">
+            <a:avLst/>
+          </a:prstGeom>
+          <a:noFill/>
+        </p:spPr>
+        <p:txBody>
+          <a:bodyPr wrap="square">
+            <a:normAutofit/>
           </a:bodyPr>
           <a:lstStyle/>
           <a:p>
             <a:pPr algn="l"/>
             <a:r>
-              <a:rPr sz="40000" b="0" i="1">
+              <a:rPr sz="28000" b="0" i="1">
                 <a:solidFill>
                   <a:srgbClr val="D9BF7A"/>
                 </a:solidFill>
@@ -10028,58 +9890,23 @@
         </p:nvSpPr>
         <p:spPr>
           <a:xfrm>
-            <a:off x="6985000" y="3683000"/>
-            <a:ext cx="4597400" cy="228600"/>
-          </a:xfrm>
-          <a:prstGeom prst="rect">
-            <a:avLst/>
-          </a:prstGeom>
-          <a:noFill/>
-        </p:spPr>
-        <p:txBody>
-          <a:bodyPr wrap="square">
-            <a:spAutoFit/>
+            <a:off x="6731000" y="4064000"/>
+            <a:ext cx="4851400" cy="1778000"/>
+          </a:xfrm>
+          <a:prstGeom prst="rect">
+            <a:avLst/>
+          </a:prstGeom>
+          <a:noFill/>
+        </p:spPr>
+        <p:txBody>
+          <a:bodyPr wrap="square">
+            <a:normAutofit/>
           </a:bodyPr>
           <a:lstStyle/>
           <a:p>
             <a:pPr algn="r"/>
             <a:r>
-              <a:rPr sz="1400" b="0" i="0">
-                <a:solidFill>
-                  <a:srgbClr val="7B7FA0"/>
-                </a:solidFill>
-                <a:latin typeface="Courier New"/>
-              </a:rPr>
-              <a:t>MODULINHALTE</a:t>
-            </a:r>
-          </a:p>
-        </p:txBody>
-      </p:sp>
-      <p:sp>
-        <p:nvSpPr>
-          <p:cNvPr id="7" name="TextBox 6"/>
-          <p:cNvSpPr txBox="1"/>
-          <p:nvPr/>
-        </p:nvSpPr>
-        <p:spPr>
-          <a:xfrm>
-            <a:off x="6985000" y="4000500"/>
-            <a:ext cx="4597400" cy="1524000"/>
-          </a:xfrm>
-          <a:prstGeom prst="rect">
-            <a:avLst/>
-          </a:prstGeom>
-          <a:noFill/>
-        </p:spPr>
-        <p:txBody>
-          <a:bodyPr wrap="square">
-            <a:spAutoFit/>
-          </a:bodyPr>
-          <a:lstStyle/>
-          <a:p>
-            <a:pPr algn="r"/>
-            <a:r>
-              <a:rPr sz="7600" b="0" i="0">
+              <a:rPr sz="3800" b="0" i="0">
                 <a:solidFill>
                   <a:srgbClr val="F8F8FA"/>
                 </a:solidFill>
@@ -10124,7 +9951,7 @@
         </p:nvSpPr>
         <p:spPr>
           <a:xfrm>
-            <a:off x="609600" y="304800"/>
+            <a:off x="609600" y="279400"/>
             <a:ext cx="2540000" cy="279400"/>
           </a:xfrm>
           <a:prstGeom prst="rect">
@@ -10134,13 +9961,13 @@
         </p:spPr>
         <p:txBody>
           <a:bodyPr wrap="square">
-            <a:spAutoFit/>
+            <a:normAutofit/>
           </a:bodyPr>
           <a:lstStyle/>
           <a:p>
             <a:pPr algn="l"/>
             <a:r>
-              <a:rPr sz="1600" b="1" i="0">
+              <a:rPr sz="1000" b="1" i="0">
                 <a:solidFill>
                   <a:srgbClr val="F8F8FA"/>
                 </a:solidFill>
@@ -10159,25 +9986,25 @@
         </p:nvSpPr>
         <p:spPr>
           <a:xfrm>
-            <a:off x="0" y="304800"/>
-            <a:ext cx="11582400" cy="279400"/>
-          </a:xfrm>
-          <a:prstGeom prst="rect">
-            <a:avLst/>
-          </a:prstGeom>
-          <a:noFill/>
-        </p:spPr>
-        <p:txBody>
-          <a:bodyPr wrap="square">
-            <a:spAutoFit/>
+            <a:off x="609600" y="279400"/>
+            <a:ext cx="10972800" cy="279400"/>
+          </a:xfrm>
+          <a:prstGeom prst="rect">
+            <a:avLst/>
+          </a:prstGeom>
+          <a:noFill/>
+        </p:spPr>
+        <p:txBody>
+          <a:bodyPr wrap="square">
+            <a:normAutofit/>
           </a:bodyPr>
           <a:lstStyle/>
           <a:p>
             <a:pPr algn="r"/>
             <a:r>
-              <a:rPr sz="1300" b="0" i="0" spc="100">
-                <a:solidFill>
-                  <a:srgbClr val="F8F8FA"/>
+              <a:rPr sz="900" b="0" i="0">
+                <a:solidFill>
+                  <a:srgbClr val="7B7FA0"/>
                 </a:solidFill>
                 <a:latin typeface="Courier New"/>
               </a:rPr>
@@ -10194,29 +10021,29 @@
         </p:nvSpPr>
         <p:spPr>
           <a:xfrm>
-            <a:off x="0" y="6350000"/>
-            <a:ext cx="11582400" cy="228600"/>
-          </a:xfrm>
-          <a:prstGeom prst="rect">
-            <a:avLst/>
-          </a:prstGeom>
-          <a:noFill/>
-        </p:spPr>
-        <p:txBody>
-          <a:bodyPr wrap="square">
-            <a:spAutoFit/>
+            <a:off x="609600" y="6426200"/>
+            <a:ext cx="10972800" cy="228600"/>
+          </a:xfrm>
+          <a:prstGeom prst="rect">
+            <a:avLst/>
+          </a:prstGeom>
+          <a:noFill/>
+        </p:spPr>
+        <p:txBody>
+          <a:bodyPr wrap="square">
+            <a:normAutofit/>
           </a:bodyPr>
           <a:lstStyle/>
           <a:p>
             <a:pPr algn="r"/>
             <a:r>
-              <a:rPr sz="1300" b="0" i="0">
-                <a:solidFill>
-                  <a:srgbClr val="606070"/>
+              <a:rPr sz="900" b="0" i="0">
+                <a:solidFill>
+                  <a:srgbClr val="7B7FA0"/>
                 </a:solidFill>
                 <a:latin typeface="Courier New"/>
               </a:rPr>
-              <a:t>04 / 30</a:t>
+              <a:t>04</a:t>
             </a:r>
           </a:p>
         </p:txBody>
@@ -10229,23 +10056,23 @@
         </p:nvSpPr>
         <p:spPr>
           <a:xfrm>
-            <a:off x="609600" y="825500"/>
-            <a:ext cx="5715000" cy="4953000"/>
-          </a:xfrm>
-          <a:prstGeom prst="rect">
-            <a:avLst/>
-          </a:prstGeom>
-          <a:noFill/>
-        </p:spPr>
-        <p:txBody>
-          <a:bodyPr wrap="square">
-            <a:spAutoFit/>
+            <a:off x="609600" y="635000"/>
+            <a:ext cx="5461000" cy="5461000"/>
+          </a:xfrm>
+          <a:prstGeom prst="rect">
+            <a:avLst/>
+          </a:prstGeom>
+          <a:noFill/>
+        </p:spPr>
+        <p:txBody>
+          <a:bodyPr wrap="square">
+            <a:normAutofit/>
           </a:bodyPr>
           <a:lstStyle/>
           <a:p>
             <a:pPr algn="l"/>
             <a:r>
-              <a:rPr sz="40000" b="0" i="1">
+              <a:rPr sz="28000" b="0" i="1">
                 <a:solidFill>
                   <a:srgbClr val="D9BF7A"/>
                 </a:solidFill>
@@ -10264,58 +10091,23 @@
         </p:nvSpPr>
         <p:spPr>
           <a:xfrm>
-            <a:off x="6985000" y="3683000"/>
-            <a:ext cx="4597400" cy="228600"/>
-          </a:xfrm>
-          <a:prstGeom prst="rect">
-            <a:avLst/>
-          </a:prstGeom>
-          <a:noFill/>
-        </p:spPr>
-        <p:txBody>
-          <a:bodyPr wrap="square">
-            <a:spAutoFit/>
+            <a:off x="6731000" y="4064000"/>
+            <a:ext cx="4851400" cy="1778000"/>
+          </a:xfrm>
+          <a:prstGeom prst="rect">
+            <a:avLst/>
+          </a:prstGeom>
+          <a:noFill/>
+        </p:spPr>
+        <p:txBody>
+          <a:bodyPr wrap="square">
+            <a:normAutofit/>
           </a:bodyPr>
           <a:lstStyle/>
           <a:p>
             <a:pPr algn="r"/>
             <a:r>
-              <a:rPr sz="1400" b="0" i="0">
-                <a:solidFill>
-                  <a:srgbClr val="7B7FA0"/>
-                </a:solidFill>
-                <a:latin typeface="Courier New"/>
-              </a:rPr>
-              <a:t>4.2 DAS SECI-MODELL: WIE WISSEN IM TEAM ENTSTEHT</a:t>
-            </a:r>
-          </a:p>
-        </p:txBody>
-      </p:sp>
-      <p:sp>
-        <p:nvSpPr>
-          <p:cNvPr id="7" name="TextBox 6"/>
-          <p:cNvSpPr txBox="1"/>
-          <p:nvPr/>
-        </p:nvSpPr>
-        <p:spPr>
-          <a:xfrm>
-            <a:off x="6985000" y="4000500"/>
-            <a:ext cx="4597400" cy="1524000"/>
-          </a:xfrm>
-          <a:prstGeom prst="rect">
-            <a:avLst/>
-          </a:prstGeom>
-          <a:noFill/>
-        </p:spPr>
-        <p:txBody>
-          <a:bodyPr wrap="square">
-            <a:spAutoFit/>
-          </a:bodyPr>
-          <a:lstStyle/>
-          <a:p>
-            <a:pPr algn="r"/>
-            <a:r>
-              <a:rPr sz="7600" b="0" i="0">
+              <a:rPr sz="3800" b="0" i="0">
                 <a:solidFill>
                   <a:srgbClr val="F8F8FA"/>
                 </a:solidFill>
@@ -10360,7 +10152,7 @@
         </p:nvSpPr>
         <p:spPr>
           <a:xfrm>
-            <a:off x="609600" y="304800"/>
+            <a:off x="609600" y="279400"/>
             <a:ext cx="2540000" cy="279400"/>
           </a:xfrm>
           <a:prstGeom prst="rect">
@@ -10370,13 +10162,13 @@
         </p:spPr>
         <p:txBody>
           <a:bodyPr wrap="square">
-            <a:spAutoFit/>
+            <a:normAutofit/>
           </a:bodyPr>
           <a:lstStyle/>
           <a:p>
             <a:pPr algn="l"/>
             <a:r>
-              <a:rPr sz="1600" b="1" i="0">
+              <a:rPr sz="1000" b="1" i="0">
                 <a:solidFill>
                   <a:srgbClr val="F8F8FA"/>
                 </a:solidFill>
@@ -10395,25 +10187,25 @@
         </p:nvSpPr>
         <p:spPr>
           <a:xfrm>
-            <a:off x="0" y="304800"/>
-            <a:ext cx="11582400" cy="279400"/>
-          </a:xfrm>
-          <a:prstGeom prst="rect">
-            <a:avLst/>
-          </a:prstGeom>
-          <a:noFill/>
-        </p:spPr>
-        <p:txBody>
-          <a:bodyPr wrap="square">
-            <a:spAutoFit/>
+            <a:off x="609600" y="279400"/>
+            <a:ext cx="10972800" cy="279400"/>
+          </a:xfrm>
+          <a:prstGeom prst="rect">
+            <a:avLst/>
+          </a:prstGeom>
+          <a:noFill/>
+        </p:spPr>
+        <p:txBody>
+          <a:bodyPr wrap="square">
+            <a:normAutofit/>
           </a:bodyPr>
           <a:lstStyle/>
           <a:p>
             <a:pPr algn="r"/>
             <a:r>
-              <a:rPr sz="1300" b="0" i="0" spc="100">
-                <a:solidFill>
-                  <a:srgbClr val="F8F8FA"/>
+              <a:rPr sz="900" b="0" i="0">
+                <a:solidFill>
+                  <a:srgbClr val="7B7FA0"/>
                 </a:solidFill>
                 <a:latin typeface="Courier New"/>
               </a:rPr>
@@ -10430,29 +10222,29 @@
         </p:nvSpPr>
         <p:spPr>
           <a:xfrm>
-            <a:off x="0" y="6350000"/>
-            <a:ext cx="11582400" cy="228600"/>
-          </a:xfrm>
-          <a:prstGeom prst="rect">
-            <a:avLst/>
-          </a:prstGeom>
-          <a:noFill/>
-        </p:spPr>
-        <p:txBody>
-          <a:bodyPr wrap="square">
-            <a:spAutoFit/>
+            <a:off x="609600" y="6426200"/>
+            <a:ext cx="10972800" cy="228600"/>
+          </a:xfrm>
+          <a:prstGeom prst="rect">
+            <a:avLst/>
+          </a:prstGeom>
+          <a:noFill/>
+        </p:spPr>
+        <p:txBody>
+          <a:bodyPr wrap="square">
+            <a:normAutofit/>
           </a:bodyPr>
           <a:lstStyle/>
           <a:p>
             <a:pPr algn="r"/>
             <a:r>
-              <a:rPr sz="1300" b="0" i="0">
-                <a:solidFill>
-                  <a:srgbClr val="606070"/>
+              <a:rPr sz="900" b="0" i="0">
+                <a:solidFill>
+                  <a:srgbClr val="7B7FA0"/>
                 </a:solidFill>
                 <a:latin typeface="Courier New"/>
               </a:rPr>
-              <a:t>05 / 30</a:t>
+              <a:t>05</a:t>
             </a:r>
           </a:p>
         </p:txBody>
@@ -10465,23 +10257,23 @@
         </p:nvSpPr>
         <p:spPr>
           <a:xfrm>
-            <a:off x="609600" y="825500"/>
-            <a:ext cx="5715000" cy="4953000"/>
-          </a:xfrm>
-          <a:prstGeom prst="rect">
-            <a:avLst/>
-          </a:prstGeom>
-          <a:noFill/>
-        </p:spPr>
-        <p:txBody>
-          <a:bodyPr wrap="square">
-            <a:spAutoFit/>
+            <a:off x="609600" y="635000"/>
+            <a:ext cx="5461000" cy="5461000"/>
+          </a:xfrm>
+          <a:prstGeom prst="rect">
+            <a:avLst/>
+          </a:prstGeom>
+          <a:noFill/>
+        </p:spPr>
+        <p:txBody>
+          <a:bodyPr wrap="square">
+            <a:normAutofit/>
           </a:bodyPr>
           <a:lstStyle/>
           <a:p>
             <a:pPr algn="l"/>
             <a:r>
-              <a:rPr sz="40000" b="0" i="1">
+              <a:rPr sz="28000" b="0" i="1">
                 <a:solidFill>
                   <a:srgbClr val="D9BF7A"/>
                 </a:solidFill>
@@ -10500,58 +10292,23 @@
         </p:nvSpPr>
         <p:spPr>
           <a:xfrm>
-            <a:off x="6985000" y="3683000"/>
-            <a:ext cx="4597400" cy="228600"/>
-          </a:xfrm>
-          <a:prstGeom prst="rect">
-            <a:avLst/>
-          </a:prstGeom>
-          <a:noFill/>
-        </p:spPr>
-        <p:txBody>
-          <a:bodyPr wrap="square">
-            <a:spAutoFit/>
+            <a:off x="6731000" y="4064000"/>
+            <a:ext cx="4851400" cy="1778000"/>
+          </a:xfrm>
+          <a:prstGeom prst="rect">
+            <a:avLst/>
+          </a:prstGeom>
+          <a:noFill/>
+        </p:spPr>
+        <p:txBody>
+          <a:bodyPr wrap="square">
+            <a:normAutofit/>
           </a:bodyPr>
           <a:lstStyle/>
           <a:p>
             <a:pPr algn="r"/>
             <a:r>
-              <a:rPr sz="1400" b="0" i="0">
-                <a:solidFill>
-                  <a:srgbClr val="7B7FA0"/>
-                </a:solidFill>
-                <a:latin typeface="Courier New"/>
-              </a:rPr>
-              <a:t>4.3 COMMUNITIES OF PRACTICE: DAS TEAM ALS LERNGEMEINSCHAFT</a:t>
-            </a:r>
-          </a:p>
-        </p:txBody>
-      </p:sp>
-      <p:sp>
-        <p:nvSpPr>
-          <p:cNvPr id="7" name="TextBox 6"/>
-          <p:cNvSpPr txBox="1"/>
-          <p:nvPr/>
-        </p:nvSpPr>
-        <p:spPr>
-          <a:xfrm>
-            <a:off x="6985000" y="4000500"/>
-            <a:ext cx="4597400" cy="1524000"/>
-          </a:xfrm>
-          <a:prstGeom prst="rect">
-            <a:avLst/>
-          </a:prstGeom>
-          <a:noFill/>
-        </p:spPr>
-        <p:txBody>
-          <a:bodyPr wrap="square">
-            <a:spAutoFit/>
-          </a:bodyPr>
-          <a:lstStyle/>
-          <a:p>
-            <a:pPr algn="r"/>
-            <a:r>
-              <a:rPr sz="7600" b="0" i="0">
+              <a:rPr sz="3800" b="0" i="0">
                 <a:solidFill>
                   <a:srgbClr val="F8F8FA"/>
                 </a:solidFill>
@@ -10596,7 +10353,7 @@
         </p:nvSpPr>
         <p:spPr>
           <a:xfrm>
-            <a:off x="609600" y="304800"/>
+            <a:off x="609600" y="279400"/>
             <a:ext cx="2540000" cy="279400"/>
           </a:xfrm>
           <a:prstGeom prst="rect">
@@ -10606,13 +10363,13 @@
         </p:spPr>
         <p:txBody>
           <a:bodyPr wrap="square">
-            <a:spAutoFit/>
+            <a:normAutofit/>
           </a:bodyPr>
           <a:lstStyle/>
           <a:p>
             <a:pPr algn="l"/>
             <a:r>
-              <a:rPr sz="1600" b="1" i="0">
+              <a:rPr sz="1000" b="1" i="0">
                 <a:solidFill>
                   <a:srgbClr val="F8F8FA"/>
                 </a:solidFill>
@@ -10631,25 +10388,25 @@
         </p:nvSpPr>
         <p:spPr>
           <a:xfrm>
-            <a:off x="0" y="304800"/>
-            <a:ext cx="11582400" cy="279400"/>
-          </a:xfrm>
-          <a:prstGeom prst="rect">
-            <a:avLst/>
-          </a:prstGeom>
-          <a:noFill/>
-        </p:spPr>
-        <p:txBody>
-          <a:bodyPr wrap="square">
-            <a:spAutoFit/>
+            <a:off x="609600" y="279400"/>
+            <a:ext cx="10972800" cy="279400"/>
+          </a:xfrm>
+          <a:prstGeom prst="rect">
+            <a:avLst/>
+          </a:prstGeom>
+          <a:noFill/>
+        </p:spPr>
+        <p:txBody>
+          <a:bodyPr wrap="square">
+            <a:normAutofit/>
           </a:bodyPr>
           <a:lstStyle/>
           <a:p>
             <a:pPr algn="r"/>
             <a:r>
-              <a:rPr sz="1300" b="0" i="0" spc="100">
-                <a:solidFill>
-                  <a:srgbClr val="F8F8FA"/>
+              <a:rPr sz="900" b="0" i="0">
+                <a:solidFill>
+                  <a:srgbClr val="7B7FA0"/>
                 </a:solidFill>
                 <a:latin typeface="Courier New"/>
               </a:rPr>
@@ -10666,29 +10423,29 @@
         </p:nvSpPr>
         <p:spPr>
           <a:xfrm>
-            <a:off x="0" y="6350000"/>
-            <a:ext cx="11582400" cy="228600"/>
-          </a:xfrm>
-          <a:prstGeom prst="rect">
-            <a:avLst/>
-          </a:prstGeom>
-          <a:noFill/>
-        </p:spPr>
-        <p:txBody>
-          <a:bodyPr wrap="square">
-            <a:spAutoFit/>
+            <a:off x="609600" y="6426200"/>
+            <a:ext cx="10972800" cy="228600"/>
+          </a:xfrm>
+          <a:prstGeom prst="rect">
+            <a:avLst/>
+          </a:prstGeom>
+          <a:noFill/>
+        </p:spPr>
+        <p:txBody>
+          <a:bodyPr wrap="square">
+            <a:normAutofit/>
           </a:bodyPr>
           <a:lstStyle/>
           <a:p>
             <a:pPr algn="r"/>
             <a:r>
-              <a:rPr sz="1300" b="0" i="0">
-                <a:solidFill>
-                  <a:srgbClr val="606070"/>
+              <a:rPr sz="900" b="0" i="0">
+                <a:solidFill>
+                  <a:srgbClr val="7B7FA0"/>
                 </a:solidFill>
                 <a:latin typeface="Courier New"/>
               </a:rPr>
-              <a:t>06 / 30</a:t>
+              <a:t>06</a:t>
             </a:r>
           </a:p>
         </p:txBody>
@@ -10701,23 +10458,23 @@
         </p:nvSpPr>
         <p:spPr>
           <a:xfrm>
-            <a:off x="609600" y="825500"/>
-            <a:ext cx="5715000" cy="4953000"/>
-          </a:xfrm>
-          <a:prstGeom prst="rect">
-            <a:avLst/>
-          </a:prstGeom>
-          <a:noFill/>
-        </p:spPr>
-        <p:txBody>
-          <a:bodyPr wrap="square">
-            <a:spAutoFit/>
+            <a:off x="609600" y="635000"/>
+            <a:ext cx="5461000" cy="5461000"/>
+          </a:xfrm>
+          <a:prstGeom prst="rect">
+            <a:avLst/>
+          </a:prstGeom>
+          <a:noFill/>
+        </p:spPr>
+        <p:txBody>
+          <a:bodyPr wrap="square">
+            <a:normAutofit/>
           </a:bodyPr>
           <a:lstStyle/>
           <a:p>
             <a:pPr algn="l"/>
             <a:r>
-              <a:rPr sz="40000" b="0" i="1">
+              <a:rPr sz="28000" b="0" i="1">
                 <a:solidFill>
                   <a:srgbClr val="D9BF7A"/>
                 </a:solidFill>
@@ -10736,58 +10493,23 @@
         </p:nvSpPr>
         <p:spPr>
           <a:xfrm>
-            <a:off x="6985000" y="3683000"/>
-            <a:ext cx="4597400" cy="228600"/>
-          </a:xfrm>
-          <a:prstGeom prst="rect">
-            <a:avLst/>
-          </a:prstGeom>
-          <a:noFill/>
-        </p:spPr>
-        <p:txBody>
-          <a:bodyPr wrap="square">
-            <a:spAutoFit/>
+            <a:off x="6731000" y="4064000"/>
+            <a:ext cx="4851400" cy="1778000"/>
+          </a:xfrm>
+          <a:prstGeom prst="rect">
+            <a:avLst/>
+          </a:prstGeom>
+          <a:noFill/>
+        </p:spPr>
+        <p:txBody>
+          <a:bodyPr wrap="square">
+            <a:normAutofit/>
           </a:bodyPr>
           <a:lstStyle/>
           <a:p>
             <a:pPr algn="r"/>
             <a:r>
-              <a:rPr sz="1400" b="0" i="0">
-                <a:solidFill>
-                  <a:srgbClr val="7B7FA0"/>
-                </a:solidFill>
-                <a:latin typeface="Courier New"/>
-              </a:rPr>
-              <a:t>4.4 KOLBS LERNZYKLUS: WIE ERFAHRUNG ZU WISSEN WIRD</a:t>
-            </a:r>
-          </a:p>
-        </p:txBody>
-      </p:sp>
-      <p:sp>
-        <p:nvSpPr>
-          <p:cNvPr id="7" name="TextBox 6"/>
-          <p:cNvSpPr txBox="1"/>
-          <p:nvPr/>
-        </p:nvSpPr>
-        <p:spPr>
-          <a:xfrm>
-            <a:off x="6985000" y="4000500"/>
-            <a:ext cx="4597400" cy="1524000"/>
-          </a:xfrm>
-          <a:prstGeom prst="rect">
-            <a:avLst/>
-          </a:prstGeom>
-          <a:noFill/>
-        </p:spPr>
-        <p:txBody>
-          <a:bodyPr wrap="square">
-            <a:spAutoFit/>
-          </a:bodyPr>
-          <a:lstStyle/>
-          <a:p>
-            <a:pPr algn="r"/>
-            <a:r>
-              <a:rPr sz="7600" b="0" i="0">
+              <a:rPr sz="3800" b="0" i="0">
                 <a:solidFill>
                   <a:srgbClr val="F8F8FA"/>
                 </a:solidFill>
@@ -10832,7 +10554,7 @@
         </p:nvSpPr>
         <p:spPr>
           <a:xfrm>
-            <a:off x="609600" y="304800"/>
+            <a:off x="609600" y="279400"/>
             <a:ext cx="2540000" cy="279400"/>
           </a:xfrm>
           <a:prstGeom prst="rect">
@@ -10842,13 +10564,13 @@
         </p:spPr>
         <p:txBody>
           <a:bodyPr wrap="square">
-            <a:spAutoFit/>
+            <a:normAutofit/>
           </a:bodyPr>
           <a:lstStyle/>
           <a:p>
             <a:pPr algn="l"/>
             <a:r>
-              <a:rPr sz="1600" b="1" i="0">
+              <a:rPr sz="1000" b="1" i="0">
                 <a:solidFill>
                   <a:srgbClr val="F8F8FA"/>
                 </a:solidFill>
@@ -10867,198 +10589,163 @@
         </p:nvSpPr>
         <p:spPr>
           <a:xfrm>
-            <a:off x="0" y="304800"/>
-            <a:ext cx="11582400" cy="279400"/>
-          </a:xfrm>
-          <a:prstGeom prst="rect">
-            <a:avLst/>
-          </a:prstGeom>
-          <a:noFill/>
-        </p:spPr>
-        <p:txBody>
-          <a:bodyPr wrap="square">
-            <a:spAutoFit/>
+            <a:off x="609600" y="279400"/>
+            <a:ext cx="10972800" cy="279400"/>
+          </a:xfrm>
+          <a:prstGeom prst="rect">
+            <a:avLst/>
+          </a:prstGeom>
+          <a:noFill/>
+        </p:spPr>
+        <p:txBody>
+          <a:bodyPr wrap="square">
+            <a:normAutofit/>
           </a:bodyPr>
           <a:lstStyle/>
           <a:p>
             <a:pPr algn="r"/>
             <a:r>
-              <a:rPr sz="1300" b="0" i="0" spc="100">
+              <a:rPr sz="900" b="0" i="0">
+                <a:solidFill>
+                  <a:srgbClr val="7B7FA0"/>
+                </a:solidFill>
+                <a:latin typeface="Courier New"/>
+              </a:rPr>
+              <a:t>4.5 FÜNF BEWÄHRTE TRANSFERMETHODEN IM FK-KONTEXT</a:t>
+            </a:r>
+          </a:p>
+        </p:txBody>
+      </p:sp>
+      <p:sp>
+        <p:nvSpPr>
+          <p:cNvPr id="4" name="TextBox 3"/>
+          <p:cNvSpPr txBox="1"/>
+          <p:nvPr/>
+        </p:nvSpPr>
+        <p:spPr>
+          <a:xfrm>
+            <a:off x="609600" y="6426200"/>
+            <a:ext cx="10972800" cy="228600"/>
+          </a:xfrm>
+          <a:prstGeom prst="rect">
+            <a:avLst/>
+          </a:prstGeom>
+          <a:noFill/>
+        </p:spPr>
+        <p:txBody>
+          <a:bodyPr wrap="square">
+            <a:normAutofit/>
+          </a:bodyPr>
+          <a:lstStyle/>
+          <a:p>
+            <a:pPr algn="r"/>
+            <a:r>
+              <a:rPr sz="900" b="0" i="0">
+                <a:solidFill>
+                  <a:srgbClr val="7B7FA0"/>
+                </a:solidFill>
+                <a:latin typeface="Courier New"/>
+              </a:rPr>
+              <a:t>07</a:t>
+            </a:r>
+          </a:p>
+        </p:txBody>
+      </p:sp>
+      <p:sp>
+        <p:nvSpPr>
+          <p:cNvPr id="5" name="TextBox 4"/>
+          <p:cNvSpPr txBox="1"/>
+          <p:nvPr/>
+        </p:nvSpPr>
+        <p:spPr>
+          <a:xfrm>
+            <a:off x="609600" y="635000"/>
+            <a:ext cx="5461000" cy="5461000"/>
+          </a:xfrm>
+          <a:prstGeom prst="rect">
+            <a:avLst/>
+          </a:prstGeom>
+          <a:noFill/>
+        </p:spPr>
+        <p:txBody>
+          <a:bodyPr wrap="square">
+            <a:normAutofit/>
+          </a:bodyPr>
+          <a:lstStyle/>
+          <a:p>
+            <a:pPr algn="l"/>
+            <a:r>
+              <a:rPr sz="28000" b="0" i="1">
+                <a:solidFill>
+                  <a:srgbClr val="D9BF7A"/>
+                </a:solidFill>
+                <a:latin typeface="Georgia"/>
+              </a:rPr>
+              <a:t>V.</a:t>
+            </a:r>
+          </a:p>
+        </p:txBody>
+      </p:sp>
+      <p:sp>
+        <p:nvSpPr>
+          <p:cNvPr id="6" name="TextBox 5"/>
+          <p:cNvSpPr txBox="1"/>
+          <p:nvPr/>
+        </p:nvSpPr>
+        <p:spPr>
+          <a:xfrm>
+            <a:off x="6731000" y="4064000"/>
+            <a:ext cx="4851400" cy="1778000"/>
+          </a:xfrm>
+          <a:prstGeom prst="rect">
+            <a:avLst/>
+          </a:prstGeom>
+          <a:noFill/>
+        </p:spPr>
+        <p:txBody>
+          <a:bodyPr wrap="square">
+            <a:normAutofit/>
+          </a:bodyPr>
+          <a:lstStyle/>
+          <a:p>
+            <a:pPr algn="r"/>
+            <a:r>
+              <a:rPr sz="3800" b="0" i="0">
                 <a:solidFill>
                   <a:srgbClr val="F8F8FA"/>
                 </a:solidFill>
-                <a:latin typeface="Courier New"/>
-              </a:rPr>
-              <a:t>4.5 FÜNF BEWÄHRTE TRANSFERMETHODEN IM FK-KONTEXT</a:t>
-            </a:r>
-          </a:p>
-        </p:txBody>
-      </p:sp>
-      <p:sp>
-        <p:nvSpPr>
-          <p:cNvPr id="4" name="TextBox 3"/>
-          <p:cNvSpPr txBox="1"/>
-          <p:nvPr/>
-        </p:nvSpPr>
-        <p:spPr>
-          <a:xfrm>
-            <a:off x="0" y="6350000"/>
-            <a:ext cx="11582400" cy="228600"/>
-          </a:xfrm>
-          <a:prstGeom prst="rect">
-            <a:avLst/>
-          </a:prstGeom>
-          <a:noFill/>
-        </p:spPr>
-        <p:txBody>
-          <a:bodyPr wrap="square">
-            <a:spAutoFit/>
+                <a:latin typeface="Georgia"/>
+              </a:rPr>
+              <a:t>4.5 Fünf bewährte Transfermethoden im FK-Kontext</a:t>
+            </a:r>
+          </a:p>
+        </p:txBody>
+      </p:sp>
+      <p:sp>
+        <p:nvSpPr>
+          <p:cNvPr id="7" name="TextBox 6"/>
+          <p:cNvSpPr txBox="1"/>
+          <p:nvPr/>
+        </p:nvSpPr>
+        <p:spPr>
+          <a:xfrm>
+            <a:off x="6731000" y="5842000"/>
+            <a:ext cx="4851400" cy="635000"/>
+          </a:xfrm>
+          <a:prstGeom prst="rect">
+            <a:avLst/>
+          </a:prstGeom>
+          <a:noFill/>
+        </p:spPr>
+        <p:txBody>
+          <a:bodyPr wrap="square">
+            <a:normAutofit/>
           </a:bodyPr>
           <a:lstStyle/>
           <a:p>
             <a:pPr algn="r"/>
             <a:r>
-              <a:rPr sz="1300" b="0" i="0">
-                <a:solidFill>
-                  <a:srgbClr val="606070"/>
-                </a:solidFill>
-                <a:latin typeface="Courier New"/>
-              </a:rPr>
-              <a:t>07 / 30</a:t>
-            </a:r>
-          </a:p>
-        </p:txBody>
-      </p:sp>
-      <p:sp>
-        <p:nvSpPr>
-          <p:cNvPr id="5" name="TextBox 4"/>
-          <p:cNvSpPr txBox="1"/>
-          <p:nvPr/>
-        </p:nvSpPr>
-        <p:spPr>
-          <a:xfrm>
-            <a:off x="609600" y="825500"/>
-            <a:ext cx="5715000" cy="4953000"/>
-          </a:xfrm>
-          <a:prstGeom prst="rect">
-            <a:avLst/>
-          </a:prstGeom>
-          <a:noFill/>
-        </p:spPr>
-        <p:txBody>
-          <a:bodyPr wrap="square">
-            <a:spAutoFit/>
-          </a:bodyPr>
-          <a:lstStyle/>
-          <a:p>
-            <a:pPr algn="l"/>
-            <a:r>
-              <a:rPr sz="40000" b="0" i="1">
-                <a:solidFill>
-                  <a:srgbClr val="D9BF7A"/>
-                </a:solidFill>
-                <a:latin typeface="Georgia"/>
-              </a:rPr>
-              <a:t>V.</a:t>
-            </a:r>
-          </a:p>
-        </p:txBody>
-      </p:sp>
-      <p:sp>
-        <p:nvSpPr>
-          <p:cNvPr id="6" name="TextBox 5"/>
-          <p:cNvSpPr txBox="1"/>
-          <p:nvPr/>
-        </p:nvSpPr>
-        <p:spPr>
-          <a:xfrm>
-            <a:off x="6985000" y="3683000"/>
-            <a:ext cx="4597400" cy="228600"/>
-          </a:xfrm>
-          <a:prstGeom prst="rect">
-            <a:avLst/>
-          </a:prstGeom>
-          <a:noFill/>
-        </p:spPr>
-        <p:txBody>
-          <a:bodyPr wrap="square">
-            <a:spAutoFit/>
-          </a:bodyPr>
-          <a:lstStyle/>
-          <a:p>
-            <a:pPr algn="r"/>
-            <a:r>
-              <a:rPr sz="1400" b="0" i="0">
-                <a:solidFill>
-                  <a:srgbClr val="7B7FA0"/>
-                </a:solidFill>
-                <a:latin typeface="Courier New"/>
-              </a:rPr>
-              <a:t>4.5 FÜNF BEWÄHRTE TRANSFERMETHODEN IM FK-KONTEXT</a:t>
-            </a:r>
-          </a:p>
-        </p:txBody>
-      </p:sp>
-      <p:sp>
-        <p:nvSpPr>
-          <p:cNvPr id="7" name="TextBox 6"/>
-          <p:cNvSpPr txBox="1"/>
-          <p:nvPr/>
-        </p:nvSpPr>
-        <p:spPr>
-          <a:xfrm>
-            <a:off x="6985000" y="4000500"/>
-            <a:ext cx="4597400" cy="1524000"/>
-          </a:xfrm>
-          <a:prstGeom prst="rect">
-            <a:avLst/>
-          </a:prstGeom>
-          <a:noFill/>
-        </p:spPr>
-        <p:txBody>
-          <a:bodyPr wrap="square">
-            <a:spAutoFit/>
-          </a:bodyPr>
-          <a:lstStyle/>
-          <a:p>
-            <a:pPr algn="r"/>
-            <a:r>
-              <a:rPr sz="7600" b="0" i="0">
-                <a:solidFill>
-                  <a:srgbClr val="F8F8FA"/>
-                </a:solidFill>
-                <a:latin typeface="Georgia"/>
-              </a:rPr>
-              <a:t>4.5 Fünf bewährte Transfermethoden im FK-Kontext</a:t>
-            </a:r>
-          </a:p>
-        </p:txBody>
-      </p:sp>
-      <p:sp>
-        <p:nvSpPr>
-          <p:cNvPr id="8" name="TextBox 7"/>
-          <p:cNvSpPr txBox="1"/>
-          <p:nvPr/>
-        </p:nvSpPr>
-        <p:spPr>
-          <a:xfrm>
-            <a:off x="6985000" y="5524500"/>
-            <a:ext cx="4597400" cy="635000"/>
-          </a:xfrm>
-          <a:prstGeom prst="rect">
-            <a:avLst/>
-          </a:prstGeom>
-          <a:noFill/>
-        </p:spPr>
-        <p:txBody>
-          <a:bodyPr wrap="square">
-            <a:spAutoFit/>
-          </a:bodyPr>
-          <a:lstStyle/>
-          <a:p>
-            <a:pPr algn="r"/>
-            <a:r>
-              <a:rPr sz="2000" b="0" i="1">
+              <a:rPr sz="1400" b="0" i="1">
                 <a:solidFill>
                   <a:srgbClr val="7B7FA0"/>
                 </a:solidFill>
@@ -11103,7 +10790,7 @@
         </p:nvSpPr>
         <p:spPr>
           <a:xfrm>
-            <a:off x="609600" y="304800"/>
+            <a:off x="609600" y="279400"/>
             <a:ext cx="2540000" cy="279400"/>
           </a:xfrm>
           <a:prstGeom prst="rect">
@@ -11113,13 +10800,13 @@
         </p:spPr>
         <p:txBody>
           <a:bodyPr wrap="square">
-            <a:spAutoFit/>
+            <a:normAutofit/>
           </a:bodyPr>
           <a:lstStyle/>
           <a:p>
             <a:pPr algn="l"/>
             <a:r>
-              <a:rPr sz="1600" b="1" i="0">
+              <a:rPr sz="1000" b="1" i="0">
                 <a:solidFill>
                   <a:srgbClr val="191D2E"/>
                 </a:solidFill>
@@ -11138,23 +10825,23 @@
         </p:nvSpPr>
         <p:spPr>
           <a:xfrm>
-            <a:off x="0" y="304800"/>
-            <a:ext cx="11582400" cy="279400"/>
-          </a:xfrm>
-          <a:prstGeom prst="rect">
-            <a:avLst/>
-          </a:prstGeom>
-          <a:noFill/>
-        </p:spPr>
-        <p:txBody>
-          <a:bodyPr wrap="square">
-            <a:spAutoFit/>
+            <a:off x="609600" y="279400"/>
+            <a:ext cx="10972800" cy="279400"/>
+          </a:xfrm>
+          <a:prstGeom prst="rect">
+            <a:avLst/>
+          </a:prstGeom>
+          <a:noFill/>
+        </p:spPr>
+        <p:txBody>
+          <a:bodyPr wrap="square">
+            <a:normAutofit/>
           </a:bodyPr>
           <a:lstStyle/>
           <a:p>
             <a:pPr algn="r"/>
             <a:r>
-              <a:rPr sz="1300" b="0" i="0" spc="100">
+              <a:rPr sz="900" b="0" i="0">
                 <a:solidFill>
                   <a:srgbClr val="7B7FA0"/>
                 </a:solidFill>
@@ -11173,77 +10860,42 @@
         </p:nvSpPr>
         <p:spPr>
           <a:xfrm>
-            <a:off x="0" y="6350000"/>
-            <a:ext cx="11582400" cy="228600"/>
-          </a:xfrm>
-          <a:prstGeom prst="rect">
-            <a:avLst/>
-          </a:prstGeom>
-          <a:noFill/>
-        </p:spPr>
-        <p:txBody>
-          <a:bodyPr wrap="square">
-            <a:spAutoFit/>
+            <a:off x="609600" y="6426200"/>
+            <a:ext cx="10972800" cy="228600"/>
+          </a:xfrm>
+          <a:prstGeom prst="rect">
+            <a:avLst/>
+          </a:prstGeom>
+          <a:noFill/>
+        </p:spPr>
+        <p:txBody>
+          <a:bodyPr wrap="square">
+            <a:normAutofit/>
           </a:bodyPr>
           <a:lstStyle/>
           <a:p>
             <a:pPr algn="r"/>
             <a:r>
-              <a:rPr sz="1300" b="0" i="0">
+              <a:rPr sz="900" b="0" i="0">
                 <a:solidFill>
                   <a:srgbClr val="7B7FA0"/>
                 </a:solidFill>
                 <a:latin typeface="Courier New"/>
               </a:rPr>
-              <a:t>08 / 30</a:t>
-            </a:r>
-          </a:p>
-        </p:txBody>
-      </p:sp>
-      <p:sp>
-        <p:nvSpPr>
-          <p:cNvPr id="5" name="TextBox 4"/>
-          <p:cNvSpPr txBox="1"/>
-          <p:nvPr/>
-        </p:nvSpPr>
-        <p:spPr>
-          <a:xfrm>
-            <a:off x="609600" y="889000"/>
-            <a:ext cx="10972800" cy="1397000"/>
-          </a:xfrm>
-          <a:prstGeom prst="rect">
-            <a:avLst/>
-          </a:prstGeom>
-          <a:noFill/>
-        </p:spPr>
-        <p:txBody>
-          <a:bodyPr wrap="square">
-            <a:spAutoFit/>
-          </a:bodyPr>
-          <a:lstStyle/>
-          <a:p>
-            <a:pPr algn="l"/>
-            <a:r>
-              <a:rPr sz="7200" b="0" i="0">
-                <a:solidFill>
-                  <a:srgbClr val="191D2E"/>
-                </a:solidFill>
-                <a:latin typeface="Georgia"/>
-              </a:rPr>
-              <a:t>Methode 1: Tandem-Kundenbesuch</a:t>
-            </a:r>
-          </a:p>
-        </p:txBody>
-      </p:sp>
-      <p:sp>
-        <p:nvSpPr>
-          <p:cNvPr id="6" name="Rectangle 5"/>
+              <a:t>08</a:t>
+            </a:r>
+          </a:p>
+        </p:txBody>
+      </p:sp>
+      <p:sp>
+        <p:nvSpPr>
+          <p:cNvPr id="5" name="Rectangle 4"/>
           <p:cNvSpPr/>
           <p:nvPr/>
         </p:nvSpPr>
         <p:spPr>
           <a:xfrm>
-            <a:off x="609600" y="2286000"/>
+            <a:off x="609600" y="825500"/>
             <a:ext cx="10972800" cy="6350"/>
           </a:xfrm>
           <a:prstGeom prst="rect">
@@ -11280,29 +10932,107 @@
       </p:sp>
       <p:sp>
         <p:nvSpPr>
-          <p:cNvPr id="7" name="TextBox 6"/>
-          <p:cNvSpPr txBox="1"/>
-          <p:nvPr/>
-        </p:nvSpPr>
-        <p:spPr>
-          <a:xfrm>
-            <a:off x="609600" y="2438400"/>
-            <a:ext cx="304800" cy="355600"/>
-          </a:xfrm>
-          <a:prstGeom prst="rect">
-            <a:avLst/>
-          </a:prstGeom>
-          <a:noFill/>
-        </p:spPr>
-        <p:txBody>
-          <a:bodyPr wrap="square">
-            <a:spAutoFit/>
+          <p:cNvPr id="6" name="TextBox 5"/>
+          <p:cNvSpPr txBox="1"/>
+          <p:nvPr/>
+        </p:nvSpPr>
+        <p:spPr>
+          <a:xfrm>
+            <a:off x="609600" y="920750"/>
+            <a:ext cx="10972800" cy="1778000"/>
+          </a:xfrm>
+          <a:prstGeom prst="rect">
+            <a:avLst/>
+          </a:prstGeom>
+          <a:noFill/>
+        </p:spPr>
+        <p:txBody>
+          <a:bodyPr wrap="square">
+            <a:normAutofit/>
           </a:bodyPr>
           <a:lstStyle/>
           <a:p>
             <a:pPr algn="l"/>
             <a:r>
-              <a:rPr sz="2800" b="0" i="0">
+              <a:rPr sz="3800" b="0" i="0">
+                <a:solidFill>
+                  <a:srgbClr val="191D2E"/>
+                </a:solidFill>
+                <a:latin typeface="Georgia"/>
+              </a:rPr>
+              <a:t>Methode 1: Tandem-Kundenbesuch</a:t>
+            </a:r>
+          </a:p>
+        </p:txBody>
+      </p:sp>
+      <p:sp>
+        <p:nvSpPr>
+          <p:cNvPr id="7" name="Rectangle 6"/>
+          <p:cNvSpPr/>
+          <p:nvPr/>
+        </p:nvSpPr>
+        <p:spPr>
+          <a:xfrm>
+            <a:off x="609600" y="2762250"/>
+            <a:ext cx="10972800" cy="6350"/>
+          </a:xfrm>
+          <a:prstGeom prst="rect">
+            <a:avLst/>
+          </a:prstGeom>
+          <a:solidFill>
+            <a:srgbClr val="E0E0E8"/>
+          </a:solidFill>
+          <a:ln>
+            <a:noFill/>
+          </a:ln>
+        </p:spPr>
+        <p:style>
+          <a:lnRef idx="1">
+            <a:schemeClr val="accent1"/>
+          </a:lnRef>
+          <a:fillRef idx="3">
+            <a:schemeClr val="accent1"/>
+          </a:fillRef>
+          <a:effectRef idx="2">
+            <a:schemeClr val="accent1"/>
+          </a:effectRef>
+          <a:fontRef idx="minor">
+            <a:schemeClr val="lt1"/>
+          </a:fontRef>
+        </p:style>
+        <p:txBody>
+          <a:bodyPr rtlCol="0" anchor="ctr"/>
+          <a:lstStyle/>
+          <a:p>
+            <a:pPr algn="ctr"/>
+          </a:p>
+        </p:txBody>
+      </p:sp>
+      <p:sp>
+        <p:nvSpPr>
+          <p:cNvPr id="8" name="TextBox 7"/>
+          <p:cNvSpPr txBox="1"/>
+          <p:nvPr/>
+        </p:nvSpPr>
+        <p:spPr>
+          <a:xfrm>
+            <a:off x="609600" y="2876550"/>
+            <a:ext cx="254000" cy="355600"/>
+          </a:xfrm>
+          <a:prstGeom prst="rect">
+            <a:avLst/>
+          </a:prstGeom>
+          <a:noFill/>
+        </p:spPr>
+        <p:txBody>
+          <a:bodyPr wrap="square">
+            <a:normAutofit/>
+          </a:bodyPr>
+          <a:lstStyle/>
+          <a:p>
+            <a:pPr algn="l"/>
+            <a:r>
+              <a:rPr sz="2200" b="0" i="0">
                 <a:solidFill>
                   <a:srgbClr val="1F2B56"/>
                 </a:solidFill>
@@ -11315,64 +11045,107 @@
       </p:sp>
       <p:sp>
         <p:nvSpPr>
-          <p:cNvPr id="8" name="TextBox 7"/>
-          <p:cNvSpPr txBox="1"/>
-          <p:nvPr/>
-        </p:nvSpPr>
-        <p:spPr>
-          <a:xfrm>
-            <a:off x="1016000" y="2413000"/>
-            <a:ext cx="9906000" cy="571500"/>
-          </a:xfrm>
-          <a:prstGeom prst="rect">
-            <a:avLst/>
-          </a:prstGeom>
-          <a:noFill/>
-        </p:spPr>
-        <p:txBody>
-          <a:bodyPr wrap="square">
-            <a:spAutoFit/>
+          <p:cNvPr id="9" name="TextBox 8"/>
+          <p:cNvSpPr txBox="1"/>
+          <p:nvPr/>
+        </p:nvSpPr>
+        <p:spPr>
+          <a:xfrm>
+            <a:off x="939799" y="2851150"/>
+            <a:ext cx="10642600" cy="508000"/>
+          </a:xfrm>
+          <a:prstGeom prst="rect">
+            <a:avLst/>
+          </a:prstGeom>
+          <a:noFill/>
+        </p:spPr>
+        <p:txBody>
+          <a:bodyPr wrap="square">
+            <a:normAutofit/>
           </a:bodyPr>
           <a:lstStyle/>
           <a:p>
             <a:pPr algn="l"/>
             <a:r>
-              <a:rPr sz="2600" b="0" i="0">
+              <a:rPr sz="1400" b="0" i="0">
                 <a:solidFill>
                   <a:srgbClr val="191D2E"/>
                 </a:solidFill>
                 <a:latin typeface="Georgia"/>
               </a:rPr>
-              <a:t>Was: Zwei Berater besuchen gemeinsam einen Kunden – einer führt, einer beobachtet. Wann: Bei speziellem Branchenwissen oder neuem Kundensegment. Ablauf: 1. Kurze Vorbesprechung (10 Min.): Wer…</a:t>
-            </a:r>
-          </a:p>
-        </p:txBody>
-      </p:sp>
-      <p:sp>
-        <p:nvSpPr>
-          <p:cNvPr id="9" name="TextBox 8"/>
-          <p:cNvSpPr txBox="1"/>
-          <p:nvPr/>
-        </p:nvSpPr>
-        <p:spPr>
-          <a:xfrm>
-            <a:off x="609600" y="3073400"/>
-            <a:ext cx="304800" cy="355600"/>
-          </a:xfrm>
-          <a:prstGeom prst="rect">
-            <a:avLst/>
-          </a:prstGeom>
-          <a:noFill/>
-        </p:spPr>
-        <p:txBody>
-          <a:bodyPr wrap="square">
-            <a:spAutoFit/>
+              <a:t>Was: Zwei Berater besuchen gemeinsam einen Kunden – einer führt, einer beobachtet. Wann: Bei speziellem Branchenwissen oder neuem Kundensegment. Ablauf: 1. Kurze Vorbesprechung (10 Min.): Wer übernimmt welche Rolle?…</a:t>
+            </a:r>
+          </a:p>
+        </p:txBody>
+      </p:sp>
+      <p:sp>
+        <p:nvSpPr>
+          <p:cNvPr id="10" name="Rectangle 9"/>
+          <p:cNvSpPr/>
+          <p:nvPr/>
+        </p:nvSpPr>
+        <p:spPr>
+          <a:xfrm>
+            <a:off x="939799" y="3333750"/>
+            <a:ext cx="10642600" cy="6350"/>
+          </a:xfrm>
+          <a:prstGeom prst="rect">
+            <a:avLst/>
+          </a:prstGeom>
+          <a:solidFill>
+            <a:srgbClr val="E0E0E8"/>
+          </a:solidFill>
+          <a:ln>
+            <a:noFill/>
+          </a:ln>
+        </p:spPr>
+        <p:style>
+          <a:lnRef idx="1">
+            <a:schemeClr val="accent1"/>
+          </a:lnRef>
+          <a:fillRef idx="3">
+            <a:schemeClr val="accent1"/>
+          </a:fillRef>
+          <a:effectRef idx="2">
+            <a:schemeClr val="accent1"/>
+          </a:effectRef>
+          <a:fontRef idx="minor">
+            <a:schemeClr val="lt1"/>
+          </a:fontRef>
+        </p:style>
+        <p:txBody>
+          <a:bodyPr rtlCol="0" anchor="ctr"/>
+          <a:lstStyle/>
+          <a:p>
+            <a:pPr algn="ctr"/>
+          </a:p>
+        </p:txBody>
+      </p:sp>
+      <p:sp>
+        <p:nvSpPr>
+          <p:cNvPr id="11" name="TextBox 10"/>
+          <p:cNvSpPr txBox="1"/>
+          <p:nvPr/>
+        </p:nvSpPr>
+        <p:spPr>
+          <a:xfrm>
+            <a:off x="609600" y="3409950"/>
+            <a:ext cx="254000" cy="355600"/>
+          </a:xfrm>
+          <a:prstGeom prst="rect">
+            <a:avLst/>
+          </a:prstGeom>
+          <a:noFill/>
+        </p:spPr>
+        <p:txBody>
+          <a:bodyPr wrap="square">
+            <a:normAutofit/>
           </a:bodyPr>
           <a:lstStyle/>
           <a:p>
             <a:pPr algn="l"/>
             <a:r>
-              <a:rPr sz="2800" b="0" i="0">
+              <a:rPr sz="2200" b="0" i="0">
                 <a:solidFill>
                   <a:srgbClr val="1F2B56"/>
                 </a:solidFill>
@@ -11385,29 +11158,29 @@
       </p:sp>
       <p:sp>
         <p:nvSpPr>
-          <p:cNvPr id="10" name="TextBox 9"/>
-          <p:cNvSpPr txBox="1"/>
-          <p:nvPr/>
-        </p:nvSpPr>
-        <p:spPr>
-          <a:xfrm>
-            <a:off x="1016000" y="3048000"/>
-            <a:ext cx="9906000" cy="571500"/>
-          </a:xfrm>
-          <a:prstGeom prst="rect">
-            <a:avLst/>
-          </a:prstGeom>
-          <a:noFill/>
-        </p:spPr>
-        <p:txBody>
-          <a:bodyPr wrap="square">
-            <a:spAutoFit/>
+          <p:cNvPr id="12" name="TextBox 11"/>
+          <p:cNvSpPr txBox="1"/>
+          <p:nvPr/>
+        </p:nvSpPr>
+        <p:spPr>
+          <a:xfrm>
+            <a:off x="939799" y="3384550"/>
+            <a:ext cx="10642600" cy="508000"/>
+          </a:xfrm>
+          <a:prstGeom prst="rect">
+            <a:avLst/>
+          </a:prstGeom>
+          <a:noFill/>
+        </p:spPr>
+        <p:txBody>
+          <a:bodyPr wrap="square">
+            <a:normAutofit/>
           </a:bodyPr>
           <a:lstStyle/>
           <a:p>
             <a:pPr algn="l"/>
             <a:r>
-              <a:rPr sz="2600" b="0" i="0">
+              <a:rPr sz="1400" b="0" i="0">
                 <a:solidFill>
                   <a:srgbClr val="191D2E"/>
                 </a:solidFill>
@@ -11420,29 +11193,72 @@
       </p:sp>
       <p:sp>
         <p:nvSpPr>
-          <p:cNvPr id="11" name="TextBox 10"/>
-          <p:cNvSpPr txBox="1"/>
-          <p:nvPr/>
-        </p:nvSpPr>
-        <p:spPr>
-          <a:xfrm>
-            <a:off x="609600" y="3708400"/>
-            <a:ext cx="304800" cy="355600"/>
-          </a:xfrm>
-          <a:prstGeom prst="rect">
-            <a:avLst/>
-          </a:prstGeom>
-          <a:noFill/>
-        </p:spPr>
-        <p:txBody>
-          <a:bodyPr wrap="square">
-            <a:spAutoFit/>
+          <p:cNvPr id="13" name="Rectangle 12"/>
+          <p:cNvSpPr/>
+          <p:nvPr/>
+        </p:nvSpPr>
+        <p:spPr>
+          <a:xfrm>
+            <a:off x="939799" y="3867150"/>
+            <a:ext cx="10642600" cy="6350"/>
+          </a:xfrm>
+          <a:prstGeom prst="rect">
+            <a:avLst/>
+          </a:prstGeom>
+          <a:solidFill>
+            <a:srgbClr val="E0E0E8"/>
+          </a:solidFill>
+          <a:ln>
+            <a:noFill/>
+          </a:ln>
+        </p:spPr>
+        <p:style>
+          <a:lnRef idx="1">
+            <a:schemeClr val="accent1"/>
+          </a:lnRef>
+          <a:fillRef idx="3">
+            <a:schemeClr val="accent1"/>
+          </a:fillRef>
+          <a:effectRef idx="2">
+            <a:schemeClr val="accent1"/>
+          </a:effectRef>
+          <a:fontRef idx="minor">
+            <a:schemeClr val="lt1"/>
+          </a:fontRef>
+        </p:style>
+        <p:txBody>
+          <a:bodyPr rtlCol="0" anchor="ctr"/>
+          <a:lstStyle/>
+          <a:p>
+            <a:pPr algn="ctr"/>
+          </a:p>
+        </p:txBody>
+      </p:sp>
+      <p:sp>
+        <p:nvSpPr>
+          <p:cNvPr id="14" name="TextBox 13"/>
+          <p:cNvSpPr txBox="1"/>
+          <p:nvPr/>
+        </p:nvSpPr>
+        <p:spPr>
+          <a:xfrm>
+            <a:off x="609600" y="3943350"/>
+            <a:ext cx="254000" cy="355600"/>
+          </a:xfrm>
+          <a:prstGeom prst="rect">
+            <a:avLst/>
+          </a:prstGeom>
+          <a:noFill/>
+        </p:spPr>
+        <p:txBody>
+          <a:bodyPr wrap="square">
+            <a:normAutofit/>
           </a:bodyPr>
           <a:lstStyle/>
           <a:p>
             <a:pPr algn="l"/>
             <a:r>
-              <a:rPr sz="2800" b="0" i="0">
+              <a:rPr sz="2200" b="0" i="0">
                 <a:solidFill>
                   <a:srgbClr val="1F2B56"/>
                 </a:solidFill>
@@ -11455,36 +11271,79 @@
       </p:sp>
       <p:sp>
         <p:nvSpPr>
-          <p:cNvPr id="12" name="TextBox 11"/>
-          <p:cNvSpPr txBox="1"/>
-          <p:nvPr/>
-        </p:nvSpPr>
-        <p:spPr>
-          <a:xfrm>
-            <a:off x="1016000" y="3683000"/>
-            <a:ext cx="9906000" cy="571500"/>
-          </a:xfrm>
-          <a:prstGeom prst="rect">
-            <a:avLst/>
-          </a:prstGeom>
-          <a:noFill/>
-        </p:spPr>
-        <p:txBody>
-          <a:bodyPr wrap="square">
-            <a:spAutoFit/>
+          <p:cNvPr id="15" name="TextBox 14"/>
+          <p:cNvSpPr txBox="1"/>
+          <p:nvPr/>
+        </p:nvSpPr>
+        <p:spPr>
+          <a:xfrm>
+            <a:off x="939799" y="3917950"/>
+            <a:ext cx="10642600" cy="508000"/>
+          </a:xfrm>
+          <a:prstGeom prst="rect">
+            <a:avLst/>
+          </a:prstGeom>
+          <a:noFill/>
+        </p:spPr>
+        <p:txBody>
+          <a:bodyPr wrap="square">
+            <a:normAutofit/>
           </a:bodyPr>
           <a:lstStyle/>
           <a:p>
             <a:pPr algn="l"/>
             <a:r>
-              <a:rPr sz="2600" b="0" i="0">
+              <a:rPr sz="1400" b="0" i="0">
                 <a:solidFill>
                   <a:srgbClr val="191D2E"/>
                 </a:solidFill>
                 <a:latin typeface="Georgia"/>
               </a:rPr>
-              <a:t>&gt; Kundenakzeptanz sichern: Kunden fragen regelmäßig, warum plötzlich zwei Berater kommen – das wirkt manchmal wie eine Ablösung oder wie ein Warnsignal. Klare Ansage vorab: „Mein Kollege ist…</a:t>
-            </a:r>
+              <a:t>&gt; Kundenakzeptanz sichern: Kunden fragen regelmäßig, warum plötzlich zwei Berater kommen – das wirkt manchmal wie eine Ablösung oder wie ein Warnsignal. Klare Ansage vorab: „Mein Kollege ist Spezialist für [Thema] und…</a:t>
+            </a:r>
+          </a:p>
+        </p:txBody>
+      </p:sp>
+      <p:sp>
+        <p:nvSpPr>
+          <p:cNvPr id="16" name="Rectangle 15"/>
+          <p:cNvSpPr/>
+          <p:nvPr/>
+        </p:nvSpPr>
+        <p:spPr>
+          <a:xfrm>
+            <a:off x="939799" y="4400550"/>
+            <a:ext cx="10642600" cy="6350"/>
+          </a:xfrm>
+          <a:prstGeom prst="rect">
+            <a:avLst/>
+          </a:prstGeom>
+          <a:solidFill>
+            <a:srgbClr val="E0E0E8"/>
+          </a:solidFill>
+          <a:ln>
+            <a:noFill/>
+          </a:ln>
+        </p:spPr>
+        <p:style>
+          <a:lnRef idx="1">
+            <a:schemeClr val="accent1"/>
+          </a:lnRef>
+          <a:fillRef idx="3">
+            <a:schemeClr val="accent1"/>
+          </a:fillRef>
+          <a:effectRef idx="2">
+            <a:schemeClr val="accent1"/>
+          </a:effectRef>
+          <a:fontRef idx="minor">
+            <a:schemeClr val="lt1"/>
+          </a:fontRef>
+        </p:style>
+        <p:txBody>
+          <a:bodyPr rtlCol="0" anchor="ctr"/>
+          <a:lstStyle/>
+          <a:p>
+            <a:pPr algn="ctr"/>
           </a:p>
         </p:txBody>
       </p:sp>
@@ -11522,7 +11381,7 @@
         </p:nvSpPr>
         <p:spPr>
           <a:xfrm>
-            <a:off x="609600" y="304800"/>
+            <a:off x="609600" y="279400"/>
             <a:ext cx="2540000" cy="279400"/>
           </a:xfrm>
           <a:prstGeom prst="rect">
@@ -11532,13 +11391,13 @@
         </p:spPr>
         <p:txBody>
           <a:bodyPr wrap="square">
-            <a:spAutoFit/>
+            <a:normAutofit/>
           </a:bodyPr>
           <a:lstStyle/>
           <a:p>
             <a:pPr algn="l"/>
             <a:r>
-              <a:rPr sz="1600" b="1" i="0">
+              <a:rPr sz="1000" b="1" i="0">
                 <a:solidFill>
                   <a:srgbClr val="191D2E"/>
                 </a:solidFill>
@@ -11557,23 +11416,23 @@
         </p:nvSpPr>
         <p:spPr>
           <a:xfrm>
-            <a:off x="0" y="304800"/>
-            <a:ext cx="11582400" cy="279400"/>
-          </a:xfrm>
-          <a:prstGeom prst="rect">
-            <a:avLst/>
-          </a:prstGeom>
-          <a:noFill/>
-        </p:spPr>
-        <p:txBody>
-          <a:bodyPr wrap="square">
-            <a:spAutoFit/>
+            <a:off x="609600" y="279400"/>
+            <a:ext cx="10972800" cy="279400"/>
+          </a:xfrm>
+          <a:prstGeom prst="rect">
+            <a:avLst/>
+          </a:prstGeom>
+          <a:noFill/>
+        </p:spPr>
+        <p:txBody>
+          <a:bodyPr wrap="square">
+            <a:normAutofit/>
           </a:bodyPr>
           <a:lstStyle/>
           <a:p>
             <a:pPr algn="r"/>
             <a:r>
-              <a:rPr sz="1300" b="0" i="0" spc="100">
+              <a:rPr sz="900" b="0" i="0">
                 <a:solidFill>
                   <a:srgbClr val="7B7FA0"/>
                 </a:solidFill>
@@ -11592,58 +11451,101 @@
         </p:nvSpPr>
         <p:spPr>
           <a:xfrm>
-            <a:off x="0" y="6350000"/>
-            <a:ext cx="11582400" cy="228600"/>
-          </a:xfrm>
-          <a:prstGeom prst="rect">
-            <a:avLst/>
-          </a:prstGeom>
-          <a:noFill/>
-        </p:spPr>
-        <p:txBody>
-          <a:bodyPr wrap="square">
-            <a:spAutoFit/>
+            <a:off x="609600" y="6426200"/>
+            <a:ext cx="10972800" cy="228600"/>
+          </a:xfrm>
+          <a:prstGeom prst="rect">
+            <a:avLst/>
+          </a:prstGeom>
+          <a:noFill/>
+        </p:spPr>
+        <p:txBody>
+          <a:bodyPr wrap="square">
+            <a:normAutofit/>
           </a:bodyPr>
           <a:lstStyle/>
           <a:p>
             <a:pPr algn="r"/>
             <a:r>
-              <a:rPr sz="1300" b="0" i="0">
+              <a:rPr sz="900" b="0" i="0">
                 <a:solidFill>
                   <a:srgbClr val="7B7FA0"/>
                 </a:solidFill>
                 <a:latin typeface="Courier New"/>
               </a:rPr>
-              <a:t>09 / 30</a:t>
-            </a:r>
-          </a:p>
-        </p:txBody>
-      </p:sp>
-      <p:sp>
-        <p:nvSpPr>
-          <p:cNvPr id="5" name="TextBox 4"/>
-          <p:cNvSpPr txBox="1"/>
-          <p:nvPr/>
-        </p:nvSpPr>
-        <p:spPr>
-          <a:xfrm>
-            <a:off x="609600" y="1016000"/>
-            <a:ext cx="4953000" cy="2032000"/>
-          </a:xfrm>
-          <a:prstGeom prst="rect">
-            <a:avLst/>
-          </a:prstGeom>
-          <a:noFill/>
-        </p:spPr>
-        <p:txBody>
-          <a:bodyPr wrap="square">
-            <a:spAutoFit/>
+              <a:t>09</a:t>
+            </a:r>
+          </a:p>
+        </p:txBody>
+      </p:sp>
+      <p:sp>
+        <p:nvSpPr>
+          <p:cNvPr id="5" name="Rectangle 4"/>
+          <p:cNvSpPr/>
+          <p:nvPr/>
+        </p:nvSpPr>
+        <p:spPr>
+          <a:xfrm>
+            <a:off x="609600" y="825500"/>
+            <a:ext cx="10972800" cy="6350"/>
+          </a:xfrm>
+          <a:prstGeom prst="rect">
+            <a:avLst/>
+          </a:prstGeom>
+          <a:solidFill>
+            <a:srgbClr val="191D2E"/>
+          </a:solidFill>
+          <a:ln>
+            <a:noFill/>
+          </a:ln>
+        </p:spPr>
+        <p:style>
+          <a:lnRef idx="1">
+            <a:schemeClr val="accent1"/>
+          </a:lnRef>
+          <a:fillRef idx="3">
+            <a:schemeClr val="accent1"/>
+          </a:fillRef>
+          <a:effectRef idx="2">
+            <a:schemeClr val="accent1"/>
+          </a:effectRef>
+          <a:fontRef idx="minor">
+            <a:schemeClr val="lt1"/>
+          </a:fontRef>
+        </p:style>
+        <p:txBody>
+          <a:bodyPr rtlCol="0" anchor="ctr"/>
+          <a:lstStyle/>
+          <a:p>
+            <a:pPr algn="ctr"/>
+          </a:p>
+        </p:txBody>
+      </p:sp>
+      <p:sp>
+        <p:nvSpPr>
+          <p:cNvPr id="6" name="TextBox 5"/>
+          <p:cNvSpPr txBox="1"/>
+          <p:nvPr/>
+        </p:nvSpPr>
+        <p:spPr>
+          <a:xfrm>
+            <a:off x="609600" y="920750"/>
+            <a:ext cx="4826000" cy="1778000"/>
+          </a:xfrm>
+          <a:prstGeom prst="rect">
+            <a:avLst/>
+          </a:prstGeom>
+          <a:noFill/>
+        </p:spPr>
+        <p:txBody>
+          <a:bodyPr wrap="square">
+            <a:normAutofit/>
           </a:bodyPr>
           <a:lstStyle/>
           <a:p>
             <a:pPr algn="l"/>
             <a:r>
-              <a:rPr sz="6000" b="0" i="0">
+              <a:rPr sz="3800" b="0" i="0">
                 <a:solidFill>
                   <a:srgbClr val="191D2E"/>
                 </a:solidFill>
@@ -11656,50 +11558,50 @@
       </p:sp>
       <p:sp>
         <p:nvSpPr>
-          <p:cNvPr id="6" name="TextBox 5"/>
-          <p:cNvSpPr txBox="1"/>
-          <p:nvPr/>
-        </p:nvSpPr>
-        <p:spPr>
-          <a:xfrm>
-            <a:off x="609600" y="3175000"/>
-            <a:ext cx="4953000" cy="1270000"/>
-          </a:xfrm>
-          <a:prstGeom prst="rect">
-            <a:avLst/>
-          </a:prstGeom>
-          <a:noFill/>
-        </p:spPr>
-        <p:txBody>
-          <a:bodyPr wrap="square">
-            <a:spAutoFit/>
+          <p:cNvPr id="7" name="TextBox 6"/>
+          <p:cNvSpPr txBox="1"/>
+          <p:nvPr/>
+        </p:nvSpPr>
+        <p:spPr>
+          <a:xfrm>
+            <a:off x="609600" y="2825750"/>
+            <a:ext cx="4826000" cy="1016000"/>
+          </a:xfrm>
+          <a:prstGeom prst="rect">
+            <a:avLst/>
+          </a:prstGeom>
+          <a:noFill/>
+        </p:spPr>
+        <p:txBody>
+          <a:bodyPr wrap="square">
+            <a:normAutofit/>
           </a:bodyPr>
           <a:lstStyle/>
           <a:p>
             <a:pPr algn="l"/>
             <a:r>
-              <a:rPr sz="2000" b="0" i="0">
+              <a:rPr sz="1400" b="0" i="0">
                 <a:solidFill>
                   <a:srgbClr val="4D5270"/>
                 </a:solidFill>
                 <a:latin typeface="Georgia"/>
               </a:rPr>
-              <a:t>Was: 45-minütiges Team-Format, in dem ein Berater einen aktuellen Fall vorstellt und das Team kollektiv reflektiert. Wann: Monatlich – als eigener, geschützter Termin, nicht als Anhang der regulären T</a:t>
+              <a:t>Was: 45-minütiges Team-Format, in dem ein Berater einen aktuellen Fall vorstellt und das Team kollektiv reflektiert. Wann: Monatlich – als eigener, geschützter Termin, nicht als An</a:t>
             </a:r>
           </a:p>
         </p:txBody>
       </p:sp>
       <p:graphicFrame>
         <p:nvGraphicFramePr>
-          <p:cNvPr id="7" name="Table 6"/>
+          <p:cNvPr id="8" name="Table 7"/>
           <p:cNvGraphicFramePr>
             <a:graphicFrameLocks noGrp="1"/>
           </p:cNvGraphicFramePr>
           <p:nvPr/>
         </p:nvGraphicFramePr>
         <p:xfrm>
-          <a:off x="6096000" y="1016000"/>
-          <a:ext cx="6502400" cy="3111500"/>
+          <a:off x="5715000" y="920750"/>
+          <a:ext cx="5867400" cy="2667000"/>
         </p:xfrm>
         <a:graphic>
           <a:graphicData uri="http://schemas.openxmlformats.org/drawingml/2006/table">
@@ -11708,18 +11610,18 @@
                 <a:tableStyleId>{5C22544A-7EE6-4342-B048-85BDC9FD1C3A}</a:tableStyleId>
               </a:tblPr>
               <a:tblGrid>
-                <a:gridCol w="2167466"/>
-                <a:gridCol w="2167466"/>
-                <a:gridCol w="2167468"/>
+                <a:gridCol w="1955800"/>
+                <a:gridCol w="1955800"/>
+                <a:gridCol w="1955800"/>
               </a:tblGrid>
-              <a:tr h="444500">
+              <a:tr h="381000">
                 <a:tc>
                   <a:txBody>
                     <a:bodyPr wrap="square"/>
                     <a:lstStyle/>
                     <a:p>
                       <a:r>
-                        <a:rPr sz="1400" b="1">
+                        <a:rPr sz="1000" b="1">
                           <a:solidFill>
                             <a:srgbClr val="F8F8FA"/>
                           </a:solidFill>
@@ -11741,7 +11643,7 @@
                     <a:lstStyle/>
                     <a:p>
                       <a:r>
-                        <a:rPr sz="1400" b="1">
+                        <a:rPr sz="1000" b="1">
                           <a:solidFill>
                             <a:srgbClr val="F8F8FA"/>
                           </a:solidFill>
@@ -11763,7 +11665,7 @@
                     <a:lstStyle/>
                     <a:p>
                       <a:r>
-                        <a:rPr sz="1400" b="1">
+                        <a:rPr sz="1000" b="1">
                           <a:solidFill>
                             <a:srgbClr val="F8F8FA"/>
                           </a:solidFill>
@@ -11780,14 +11682,14 @@
                   </a:tcPr>
                 </a:tc>
               </a:tr>
-              <a:tr h="444500">
+              <a:tr h="381000">
                 <a:tc>
                   <a:txBody>
                     <a:bodyPr wrap="square"/>
                     <a:lstStyle/>
                     <a:p>
                       <a:r>
-                        <a:rPr sz="1600" b="0">
+                        <a:rPr sz="1000" b="0">
                           <a:solidFill>
                             <a:srgbClr val="191D2E"/>
                           </a:solidFill>
@@ -11809,7 +11711,7 @@
                     <a:lstStyle/>
                     <a:p>
                       <a:r>
-                        <a:rPr sz="1600" b="0">
+                        <a:rPr sz="1000" b="0">
                           <a:solidFill>
                             <a:srgbClr val="191D2E"/>
                           </a:solidFill>
@@ -11831,7 +11733,7 @@
                     <a:lstStyle/>
                     <a:p>
                       <a:r>
-                        <a:rPr sz="1600" b="0">
+                        <a:rPr sz="1000" b="0">
                           <a:solidFill>
                             <a:srgbClr val="191D2E"/>
                           </a:solidFill>
@@ -11848,14 +11750,14 @@
                   </a:tcPr>
                 </a:tc>
               </a:tr>
-              <a:tr h="444500">
+              <a:tr h="381000">
                 <a:tc>
                   <a:txBody>
                     <a:bodyPr wrap="square"/>
                     <a:lstStyle/>
                     <a:p>
                       <a:r>
-                        <a:rPr sz="1600" b="0">
+                        <a:rPr sz="1000" b="0">
                           <a:solidFill>
                             <a:srgbClr val="191D2E"/>
                           </a:solidFill>
@@ -11877,7 +11779,7 @@
                     <a:lstStyle/>
                     <a:p>
                       <a:r>
-                        <a:rPr sz="1600" b="0">
+                        <a:rPr sz="1000" b="0">
                           <a:solidFill>
                             <a:srgbClr val="191D2E"/>
                           </a:solidFill>
@@ -11899,7 +11801,7 @@
                     <a:lstStyle/>
                     <a:p>
                       <a:r>
-                        <a:rPr sz="1600" b="0">
+                        <a:rPr sz="1000" b="0">
                           <a:solidFill>
                             <a:srgbClr val="191D2E"/>
                           </a:solidFill>
@@ -11916,14 +11818,14 @@
                   </a:tcPr>
                 </a:tc>
               </a:tr>
-              <a:tr h="444500">
+              <a:tr h="381000">
                 <a:tc>
                   <a:txBody>
                     <a:bodyPr wrap="square"/>
                     <a:lstStyle/>
                     <a:p>
                       <a:r>
-                        <a:rPr sz="1600" b="0">
+                        <a:rPr sz="1000" b="0">
                           <a:solidFill>
                             <a:srgbClr val="191D2E"/>
                           </a:solidFill>
@@ -11945,7 +11847,7 @@
                     <a:lstStyle/>
                     <a:p>
                       <a:r>
-                        <a:rPr sz="1600" b="0">
+                        <a:rPr sz="1000" b="0">
                           <a:solidFill>
                             <a:srgbClr val="191D2E"/>
                           </a:solidFill>
@@ -11967,7 +11869,7 @@
                     <a:lstStyle/>
                     <a:p>
                       <a:r>
-                        <a:rPr sz="1600" b="0">
+                        <a:rPr sz="1000" b="0">
                           <a:solidFill>
                             <a:srgbClr val="191D2E"/>
                           </a:solidFill>
@@ -11984,14 +11886,14 @@
                   </a:tcPr>
                 </a:tc>
               </a:tr>
-              <a:tr h="444500">
+              <a:tr h="381000">
                 <a:tc>
                   <a:txBody>
                     <a:bodyPr wrap="square"/>
                     <a:lstStyle/>
                     <a:p>
                       <a:r>
-                        <a:rPr sz="1600" b="0">
+                        <a:rPr sz="1000" b="0">
                           <a:solidFill>
                             <a:srgbClr val="191D2E"/>
                           </a:solidFill>
@@ -12013,7 +11915,7 @@
                     <a:lstStyle/>
                     <a:p>
                       <a:r>
-                        <a:rPr sz="1600" b="0">
+                        <a:rPr sz="1000" b="0">
                           <a:solidFill>
                             <a:srgbClr val="191D2E"/>
                           </a:solidFill>
@@ -12035,7 +11937,7 @@
                     <a:lstStyle/>
                     <a:p>
                       <a:r>
-                        <a:rPr sz="1600" b="0">
+                        <a:rPr sz="1000" b="0">
                           <a:solidFill>
                             <a:srgbClr val="191D2E"/>
                           </a:solidFill>
@@ -12052,14 +11954,14 @@
                   </a:tcPr>
                 </a:tc>
               </a:tr>
-              <a:tr h="444500">
+              <a:tr h="381000">
                 <a:tc>
                   <a:txBody>
                     <a:bodyPr wrap="square"/>
                     <a:lstStyle/>
                     <a:p>
                       <a:r>
-                        <a:rPr sz="1600" b="0">
+                        <a:rPr sz="1000" b="0">
                           <a:solidFill>
                             <a:srgbClr val="191D2E"/>
                           </a:solidFill>
@@ -12081,7 +11983,7 @@
                     <a:lstStyle/>
                     <a:p>
                       <a:r>
-                        <a:rPr sz="1600" b="0">
+                        <a:rPr sz="1000" b="0">
                           <a:solidFill>
                             <a:srgbClr val="191D2E"/>
                           </a:solidFill>
@@ -12103,7 +12005,7 @@
                     <a:lstStyle/>
                     <a:p>
                       <a:r>
-                        <a:rPr sz="1600" b="0">
+                        <a:rPr sz="1000" b="0">
                           <a:solidFill>
                             <a:srgbClr val="191D2E"/>
                           </a:solidFill>
@@ -12120,14 +12022,14 @@
                   </a:tcPr>
                 </a:tc>
               </a:tr>
-              <a:tr h="444500">
+              <a:tr h="381000">
                 <a:tc>
                   <a:txBody>
                     <a:bodyPr wrap="square"/>
                     <a:lstStyle/>
                     <a:p>
                       <a:r>
-                        <a:rPr sz="1600" b="0">
+                        <a:rPr sz="1000" b="0">
                           <a:solidFill>
                             <a:srgbClr val="191D2E"/>
                           </a:solidFill>
@@ -12149,7 +12051,7 @@
                     <a:lstStyle/>
                     <a:p>
                       <a:r>
-                        <a:rPr sz="1600" b="0">
+                        <a:rPr sz="1000" b="0">
                           <a:solidFill>
                             <a:srgbClr val="191D2E"/>
                           </a:solidFill>
@@ -12171,7 +12073,7 @@
                     <a:lstStyle/>
                     <a:p>
                       <a:r>
-                        <a:rPr sz="1600" b="0">
+                        <a:rPr sz="1000" b="0">
                           <a:solidFill>
                             <a:srgbClr val="191D2E"/>
                           </a:solidFill>

--- a/public/downloads/praesentation/M19.pptx
+++ b/public/downloads/praesentation/M19.pptx
@@ -4458,7 +4458,7 @@
                   </a:txBody>
                   <a:tcPr>
                     <a:solidFill>
-                      <a:srgbClr val="191D2E"/>
+                      <a:srgbClr val="1F2B56"/>
                     </a:solidFill>
                   </a:tcPr>
                 </a:tc>
@@ -4480,7 +4480,7 @@
                   </a:txBody>
                   <a:tcPr>
                     <a:solidFill>
-                      <a:srgbClr val="191D2E"/>
+                      <a:srgbClr val="1F2B56"/>
                     </a:solidFill>
                   </a:tcPr>
                 </a:tc>
@@ -4502,7 +4502,7 @@
                   </a:txBody>
                   <a:tcPr>
                     <a:solidFill>
-                      <a:srgbClr val="191D2E"/>
+                      <a:srgbClr val="1F2B56"/>
                     </a:solidFill>
                   </a:tcPr>
                 </a:tc>
@@ -5162,7 +5162,7 @@
     <p:bg>
       <p:bgPr>
         <a:solidFill>
-          <a:srgbClr val="191D2E"/>
+          <a:srgbClr val="1F2B56"/>
         </a:solidFill>
         <a:effectLst/>
       </p:bgPr>
@@ -5363,7 +5363,7 @@
     <p:bg>
       <p:bgPr>
         <a:solidFill>
-          <a:srgbClr val="191D2E"/>
+          <a:srgbClr val="1F2B56"/>
         </a:solidFill>
         <a:effectLst/>
       </p:bgPr>
@@ -5564,7 +5564,7 @@
     <p:bg>
       <p:bgPr>
         <a:solidFill>
-          <a:srgbClr val="191D2E"/>
+          <a:srgbClr val="1F2B56"/>
         </a:solidFill>
         <a:effectLst/>
       </p:bgPr>
@@ -6036,7 +6036,7 @@
                   </a:txBody>
                   <a:tcPr>
                     <a:solidFill>
-                      <a:srgbClr val="191D2E"/>
+                      <a:srgbClr val="1F2B56"/>
                     </a:solidFill>
                   </a:tcPr>
                 </a:tc>
@@ -6058,7 +6058,7 @@
                   </a:txBody>
                   <a:tcPr>
                     <a:solidFill>
-                      <a:srgbClr val="191D2E"/>
+                      <a:srgbClr val="1F2B56"/>
                     </a:solidFill>
                   </a:tcPr>
                 </a:tc>
@@ -6582,7 +6582,7 @@
                   </a:txBody>
                   <a:tcPr>
                     <a:solidFill>
-                      <a:srgbClr val="191D2E"/>
+                      <a:srgbClr val="1F2B56"/>
                     </a:solidFill>
                   </a:tcPr>
                 </a:tc>
@@ -6604,7 +6604,7 @@
                   </a:txBody>
                   <a:tcPr>
                     <a:solidFill>
-                      <a:srgbClr val="191D2E"/>
+                      <a:srgbClr val="1F2B56"/>
                     </a:solidFill>
                   </a:tcPr>
                 </a:tc>
@@ -7131,7 +7131,7 @@
                   </a:txBody>
                   <a:tcPr>
                     <a:solidFill>
-                      <a:srgbClr val="191D2E"/>
+                      <a:srgbClr val="1F2B56"/>
                     </a:solidFill>
                   </a:tcPr>
                 </a:tc>
@@ -7153,7 +7153,7 @@
                   </a:txBody>
                   <a:tcPr>
                     <a:solidFill>
-                      <a:srgbClr val="191D2E"/>
+                      <a:srgbClr val="1F2B56"/>
                     </a:solidFill>
                   </a:tcPr>
                 </a:tc>
@@ -7175,7 +7175,7 @@
                   </a:txBody>
                   <a:tcPr>
                     <a:solidFill>
-                      <a:srgbClr val="191D2E"/>
+                      <a:srgbClr val="1F2B56"/>
                     </a:solidFill>
                   </a:tcPr>
                 </a:tc>
@@ -7197,7 +7197,7 @@
                   </a:txBody>
                   <a:tcPr>
                     <a:solidFill>
-                      <a:srgbClr val="191D2E"/>
+                      <a:srgbClr val="1F2B56"/>
                     </a:solidFill>
                   </a:tcPr>
                 </a:tc>
@@ -7219,7 +7219,7 @@
                   </a:txBody>
                   <a:tcPr>
                     <a:solidFill>
-                      <a:srgbClr val="191D2E"/>
+                      <a:srgbClr val="1F2B56"/>
                     </a:solidFill>
                   </a:tcPr>
                 </a:tc>
@@ -8048,29 +8048,29 @@
         </p:nvSpPr>
         <p:spPr>
           <a:xfrm>
-            <a:off x="4064000" y="927100"/>
-            <a:ext cx="508000" cy="647700"/>
-          </a:xfrm>
-          <a:prstGeom prst="rect">
-            <a:avLst/>
-          </a:prstGeom>
-          <a:noFill/>
-        </p:spPr>
-        <p:txBody>
-          <a:bodyPr wrap="square">
+            <a:off x="4064000" y="939799"/>
+            <a:ext cx="762000" cy="647700"/>
+          </a:xfrm>
+          <a:prstGeom prst="rect">
+            <a:avLst/>
+          </a:prstGeom>
+          <a:noFill/>
+        </p:spPr>
+        <p:txBody>
+          <a:bodyPr wrap="none">
             <a:normAutofit/>
           </a:bodyPr>
           <a:lstStyle/>
           <a:p>
             <a:pPr algn="l"/>
             <a:r>
-              <a:rPr sz="2600" b="0" i="1">
+              <a:rPr sz="2400" b="0" i="1">
                 <a:solidFill>
                   <a:srgbClr val="1F2B56"/>
                 </a:solidFill>
                 <a:latin typeface="Georgia"/>
               </a:rPr>
-              <a:t>I.</a:t>
+              <a:t>I</a:t>
             </a:r>
           </a:p>
         </p:txBody>
@@ -8083,8 +8083,8 @@
         </p:nvSpPr>
         <p:spPr>
           <a:xfrm>
-            <a:off x="4699000" y="952500"/>
-            <a:ext cx="6858000" cy="622300"/>
+            <a:off x="4953000" y="952500"/>
+            <a:ext cx="6629400" cy="635000"/>
           </a:xfrm>
           <a:prstGeom prst="rect">
             <a:avLst/>
@@ -8118,7 +8118,7 @@
         </p:nvSpPr>
         <p:spPr>
           <a:xfrm>
-            <a:off x="4064000" y="1574800"/>
+            <a:off x="4064000" y="1587500"/>
             <a:ext cx="7518399" cy="6350"/>
           </a:xfrm>
           <a:prstGeom prst="rect">
@@ -8161,29 +8161,29 @@
         </p:nvSpPr>
         <p:spPr>
           <a:xfrm>
-            <a:off x="4064000" y="1612900"/>
-            <a:ext cx="508000" cy="647700"/>
-          </a:xfrm>
-          <a:prstGeom prst="rect">
-            <a:avLst/>
-          </a:prstGeom>
-          <a:noFill/>
-        </p:spPr>
-        <p:txBody>
-          <a:bodyPr wrap="square">
+            <a:off x="4064000" y="1638300"/>
+            <a:ext cx="762000" cy="647700"/>
+          </a:xfrm>
+          <a:prstGeom prst="rect">
+            <a:avLst/>
+          </a:prstGeom>
+          <a:noFill/>
+        </p:spPr>
+        <p:txBody>
+          <a:bodyPr wrap="none">
             <a:normAutofit/>
           </a:bodyPr>
           <a:lstStyle/>
           <a:p>
             <a:pPr algn="l"/>
             <a:r>
-              <a:rPr sz="2600" b="0" i="1">
+              <a:rPr sz="2400" b="0" i="1">
                 <a:solidFill>
                   <a:srgbClr val="1F2B56"/>
                 </a:solidFill>
                 <a:latin typeface="Georgia"/>
               </a:rPr>
-              <a:t>II.</a:t>
+              <a:t>II</a:t>
             </a:r>
           </a:p>
         </p:txBody>
@@ -8196,8 +8196,8 @@
         </p:nvSpPr>
         <p:spPr>
           <a:xfrm>
-            <a:off x="4699000" y="1638300"/>
-            <a:ext cx="6858000" cy="622300"/>
+            <a:off x="4953000" y="1651000"/>
+            <a:ext cx="6629400" cy="635000"/>
           </a:xfrm>
           <a:prstGeom prst="rect">
             <a:avLst/>
@@ -8231,7 +8231,7 @@
         </p:nvSpPr>
         <p:spPr>
           <a:xfrm>
-            <a:off x="4064000" y="2260600"/>
+            <a:off x="4064000" y="2286000"/>
             <a:ext cx="7518399" cy="6350"/>
           </a:xfrm>
           <a:prstGeom prst="rect">
@@ -8274,29 +8274,29 @@
         </p:nvSpPr>
         <p:spPr>
           <a:xfrm>
-            <a:off x="4064000" y="2298700"/>
-            <a:ext cx="508000" cy="647700"/>
-          </a:xfrm>
-          <a:prstGeom prst="rect">
-            <a:avLst/>
-          </a:prstGeom>
-          <a:noFill/>
-        </p:spPr>
-        <p:txBody>
-          <a:bodyPr wrap="square">
+            <a:off x="4064000" y="2336800"/>
+            <a:ext cx="762000" cy="647700"/>
+          </a:xfrm>
+          <a:prstGeom prst="rect">
+            <a:avLst/>
+          </a:prstGeom>
+          <a:noFill/>
+        </p:spPr>
+        <p:txBody>
+          <a:bodyPr wrap="none">
             <a:normAutofit/>
           </a:bodyPr>
           <a:lstStyle/>
           <a:p>
             <a:pPr algn="l"/>
             <a:r>
-              <a:rPr sz="2600" b="0" i="1">
+              <a:rPr sz="2400" b="0" i="1">
                 <a:solidFill>
                   <a:srgbClr val="1F2B56"/>
                 </a:solidFill>
                 <a:latin typeface="Georgia"/>
               </a:rPr>
-              <a:t>III.</a:t>
+              <a:t>III</a:t>
             </a:r>
           </a:p>
         </p:txBody>
@@ -8309,8 +8309,8 @@
         </p:nvSpPr>
         <p:spPr>
           <a:xfrm>
-            <a:off x="4699000" y="2324100"/>
-            <a:ext cx="6858000" cy="622300"/>
+            <a:off x="4953000" y="2349500"/>
+            <a:ext cx="6629400" cy="635000"/>
           </a:xfrm>
           <a:prstGeom prst="rect">
             <a:avLst/>
@@ -8344,7 +8344,7 @@
         </p:nvSpPr>
         <p:spPr>
           <a:xfrm>
-            <a:off x="4064000" y="2946400"/>
+            <a:off x="4064000" y="2984500"/>
             <a:ext cx="7518399" cy="6350"/>
           </a:xfrm>
           <a:prstGeom prst="rect">
@@ -8387,29 +8387,29 @@
         </p:nvSpPr>
         <p:spPr>
           <a:xfrm>
-            <a:off x="4064000" y="2984500"/>
-            <a:ext cx="508000" cy="647700"/>
-          </a:xfrm>
-          <a:prstGeom prst="rect">
-            <a:avLst/>
-          </a:prstGeom>
-          <a:noFill/>
-        </p:spPr>
-        <p:txBody>
-          <a:bodyPr wrap="square">
+            <a:off x="4064000" y="3035300"/>
+            <a:ext cx="762000" cy="647700"/>
+          </a:xfrm>
+          <a:prstGeom prst="rect">
+            <a:avLst/>
+          </a:prstGeom>
+          <a:noFill/>
+        </p:spPr>
+        <p:txBody>
+          <a:bodyPr wrap="none">
             <a:normAutofit/>
           </a:bodyPr>
           <a:lstStyle/>
           <a:p>
             <a:pPr algn="l"/>
             <a:r>
-              <a:rPr sz="2600" b="0" i="1">
+              <a:rPr sz="2400" b="0" i="1">
                 <a:solidFill>
                   <a:srgbClr val="1F2B56"/>
                 </a:solidFill>
                 <a:latin typeface="Georgia"/>
               </a:rPr>
-              <a:t>IV.</a:t>
+              <a:t>IV</a:t>
             </a:r>
           </a:p>
         </p:txBody>
@@ -8422,8 +8422,8 @@
         </p:nvSpPr>
         <p:spPr>
           <a:xfrm>
-            <a:off x="4699000" y="3009900"/>
-            <a:ext cx="6858000" cy="622300"/>
+            <a:off x="4953000" y="3048000"/>
+            <a:ext cx="6629400" cy="635000"/>
           </a:xfrm>
           <a:prstGeom prst="rect">
             <a:avLst/>
@@ -8457,7 +8457,7 @@
         </p:nvSpPr>
         <p:spPr>
           <a:xfrm>
-            <a:off x="4064000" y="3632200"/>
+            <a:off x="4064000" y="3683000"/>
             <a:ext cx="7518399" cy="6350"/>
           </a:xfrm>
           <a:prstGeom prst="rect">
@@ -8500,29 +8500,29 @@
         </p:nvSpPr>
         <p:spPr>
           <a:xfrm>
-            <a:off x="4064000" y="3670300"/>
-            <a:ext cx="508000" cy="647700"/>
-          </a:xfrm>
-          <a:prstGeom prst="rect">
-            <a:avLst/>
-          </a:prstGeom>
-          <a:noFill/>
-        </p:spPr>
-        <p:txBody>
-          <a:bodyPr wrap="square">
+            <a:off x="4064000" y="3733799"/>
+            <a:ext cx="762000" cy="647700"/>
+          </a:xfrm>
+          <a:prstGeom prst="rect">
+            <a:avLst/>
+          </a:prstGeom>
+          <a:noFill/>
+        </p:spPr>
+        <p:txBody>
+          <a:bodyPr wrap="none">
             <a:normAutofit/>
           </a:bodyPr>
           <a:lstStyle/>
           <a:p>
             <a:pPr algn="l"/>
             <a:r>
-              <a:rPr sz="2600" b="0" i="1">
+              <a:rPr sz="2400" b="0" i="1">
                 <a:solidFill>
                   <a:srgbClr val="1F2B56"/>
                 </a:solidFill>
                 <a:latin typeface="Georgia"/>
               </a:rPr>
-              <a:t>V.</a:t>
+              <a:t>V</a:t>
             </a:r>
           </a:p>
         </p:txBody>
@@ -8535,8 +8535,8 @@
         </p:nvSpPr>
         <p:spPr>
           <a:xfrm>
-            <a:off x="4699000" y="3695700"/>
-            <a:ext cx="6858000" cy="622300"/>
+            <a:off x="4953000" y="3746500"/>
+            <a:ext cx="6629400" cy="635000"/>
           </a:xfrm>
           <a:prstGeom prst="rect">
             <a:avLst/>
@@ -8576,7 +8576,7 @@
     <p:bg>
       <p:bgPr>
         <a:solidFill>
-          <a:srgbClr val="191D2E"/>
+          <a:srgbClr val="1F2B56"/>
         </a:solidFill>
         <a:effectLst/>
       </p:bgPr>
@@ -8777,7 +8777,7 @@
     <p:bg>
       <p:bgPr>
         <a:solidFill>
-          <a:srgbClr val="191D2E"/>
+          <a:srgbClr val="1F2B56"/>
         </a:solidFill>
         <a:effectLst/>
       </p:bgPr>
@@ -8978,7 +8978,7 @@
     <p:bg>
       <p:bgPr>
         <a:solidFill>
-          <a:srgbClr val="191D2E"/>
+          <a:srgbClr val="1F2B56"/>
         </a:solidFill>
         <a:effectLst/>
       </p:bgPr>
@@ -9179,7 +9179,7 @@
     <p:bg>
       <p:bgPr>
         <a:solidFill>
-          <a:srgbClr val="191D2E"/>
+          <a:srgbClr val="1F2B56"/>
         </a:solidFill>
         <a:effectLst/>
       </p:bgPr>
@@ -9730,7 +9730,7 @@
     <p:bg>
       <p:bgPr>
         <a:solidFill>
-          <a:srgbClr val="191D2E"/>
+          <a:srgbClr val="1F2B56"/>
         </a:solidFill>
         <a:effectLst/>
       </p:bgPr>
@@ -9931,7 +9931,7 @@
     <p:bg>
       <p:bgPr>
         <a:solidFill>
-          <a:srgbClr val="191D2E"/>
+          <a:srgbClr val="1F2B56"/>
         </a:solidFill>
         <a:effectLst/>
       </p:bgPr>
@@ -10132,7 +10132,7 @@
     <p:bg>
       <p:bgPr>
         <a:solidFill>
-          <a:srgbClr val="191D2E"/>
+          <a:srgbClr val="1F2B56"/>
         </a:solidFill>
         <a:effectLst/>
       </p:bgPr>
@@ -10333,7 +10333,7 @@
     <p:bg>
       <p:bgPr>
         <a:solidFill>
-          <a:srgbClr val="191D2E"/>
+          <a:srgbClr val="1F2B56"/>
         </a:solidFill>
         <a:effectLst/>
       </p:bgPr>
@@ -10534,7 +10534,7 @@
     <p:bg>
       <p:bgPr>
         <a:solidFill>
-          <a:srgbClr val="191D2E"/>
+          <a:srgbClr val="1F2B56"/>
         </a:solidFill>
         <a:effectLst/>
       </p:bgPr>
@@ -11633,7 +11633,7 @@
                   </a:txBody>
                   <a:tcPr>
                     <a:solidFill>
-                      <a:srgbClr val="191D2E"/>
+                      <a:srgbClr val="1F2B56"/>
                     </a:solidFill>
                   </a:tcPr>
                 </a:tc>
@@ -11655,7 +11655,7 @@
                   </a:txBody>
                   <a:tcPr>
                     <a:solidFill>
-                      <a:srgbClr val="191D2E"/>
+                      <a:srgbClr val="1F2B56"/>
                     </a:solidFill>
                   </a:tcPr>
                 </a:tc>
@@ -11677,7 +11677,7 @@
                   </a:txBody>
                   <a:tcPr>
                     <a:solidFill>
-                      <a:srgbClr val="191D2E"/>
+                      <a:srgbClr val="1F2B56"/>
                     </a:solidFill>
                   </a:tcPr>
                 </a:tc>

--- a/public/downloads/praesentation/M19.pptx
+++ b/public/downloads/praesentation/M19.pptx
@@ -17,8 +17,9 @@
     <p:sldId id="265" r:id="rId16"/>
     <p:sldId id="266" r:id="rId17"/>
     <p:sldId id="267" r:id="rId18"/>
+    <p:sldId id="268" r:id="rId19"/>
   </p:sldIdLst>
-  <p:sldSz cx="12191695" cy="6858000" type="screen4x3"/>
+  <p:sldSz cx="12188952" cy="6858000" type="screen4x3"/>
   <p:notesSz cx="6858000" cy="9144000"/>
   <p:defaultTextStyle>
     <a:defPPr>
@@ -3092,14 +3093,6 @@
 <file path=ppt/slides/slide1.xml><?xml version="1.0" encoding="utf-8"?>
 <p:sld xmlns:a="http://schemas.openxmlformats.org/drawingml/2006/main" xmlns:p="http://schemas.openxmlformats.org/presentationml/2006/main" xmlns:r="http://schemas.openxmlformats.org/officeDocument/2006/relationships">
   <p:cSld>
-    <p:bg>
-      <p:bgPr>
-        <a:solidFill>
-          <a:srgbClr val="F8F8FA"/>
-        </a:solidFill>
-        <a:effectLst/>
-      </p:bgPr>
-    </p:bg>
     <p:spTree>
       <p:nvGrpSpPr>
         <p:cNvPr id="1" name=""/>
@@ -3109,125 +3102,20 @@
       <p:grpSpPr/>
       <p:sp>
         <p:nvSpPr>
-          <p:cNvPr id="2" name="TextBox 1"/>
-          <p:cNvSpPr txBox="1"/>
-          <p:nvPr/>
-        </p:nvSpPr>
-        <p:spPr>
-          <a:xfrm>
-            <a:off x="609600" y="304800"/>
-            <a:ext cx="3175000" cy="279400"/>
-          </a:xfrm>
-          <a:prstGeom prst="rect">
-            <a:avLst/>
-          </a:prstGeom>
-          <a:noFill/>
-        </p:spPr>
-        <p:txBody>
-          <a:bodyPr wrap="square">
-            <a:normAutofit/>
-          </a:bodyPr>
-          <a:lstStyle/>
-          <a:p>
-            <a:pPr algn="l"/>
-            <a:r>
-              <a:rPr sz="1000" b="1" i="0">
-                <a:solidFill>
-                  <a:srgbClr val="191D2E"/>
-                </a:solidFill>
-                <a:latin typeface="Arial"/>
-              </a:rPr>
-              <a:t>FKB  Campus</a:t>
-            </a:r>
-          </a:p>
-        </p:txBody>
-      </p:sp>
-      <p:sp>
-        <p:nvSpPr>
-          <p:cNvPr id="3" name="TextBox 2"/>
-          <p:cNvSpPr txBox="1"/>
-          <p:nvPr/>
-        </p:nvSpPr>
-        <p:spPr>
-          <a:xfrm>
-            <a:off x="609600" y="304800"/>
-            <a:ext cx="10972800" cy="279400"/>
-          </a:xfrm>
-          <a:prstGeom prst="rect">
-            <a:avLst/>
-          </a:prstGeom>
-          <a:noFill/>
-        </p:spPr>
-        <p:txBody>
-          <a:bodyPr wrap="square">
-            <a:normAutofit/>
-          </a:bodyPr>
-          <a:lstStyle/>
-          <a:p>
-            <a:pPr algn="r"/>
-            <a:r>
-              <a:rPr sz="900" b="0" i="0">
-                <a:solidFill>
-                  <a:srgbClr val="7B7FA0"/>
-                </a:solidFill>
-                <a:latin typeface="Courier New"/>
-              </a:rPr>
-              <a:t>M19  ·  v0.4</a:t>
-            </a:r>
-          </a:p>
-        </p:txBody>
-      </p:sp>
-      <p:sp>
-        <p:nvSpPr>
-          <p:cNvPr id="4" name="TextBox 3"/>
-          <p:cNvSpPr txBox="1"/>
-          <p:nvPr/>
-        </p:nvSpPr>
-        <p:spPr>
-          <a:xfrm>
-            <a:off x="609600" y="2794000"/>
-            <a:ext cx="10972800" cy="2032000"/>
-          </a:xfrm>
-          <a:prstGeom prst="rect">
-            <a:avLst/>
-          </a:prstGeom>
-          <a:noFill/>
-        </p:spPr>
-        <p:txBody>
-          <a:bodyPr wrap="square">
-            <a:normAutofit/>
-          </a:bodyPr>
-          <a:lstStyle/>
-          <a:p>
-            <a:pPr algn="l"/>
-            <a:r>
-              <a:rPr sz="6000" b="0" i="0">
-                <a:solidFill>
-                  <a:srgbClr val="191D2E"/>
-                </a:solidFill>
-                <a:latin typeface="Georgia"/>
-              </a:rPr>
-              <a:t>Wissenstransfer im Team</a:t>
-            </a:r>
-          </a:p>
-        </p:txBody>
-      </p:sp>
-      <p:sp>
-        <p:nvSpPr>
-          <p:cNvPr id="5" name="Rectangle 4"/>
+          <p:cNvPr id="2" name="Rectangle 1"/>
           <p:cNvSpPr/>
           <p:nvPr/>
         </p:nvSpPr>
         <p:spPr>
           <a:xfrm>
-            <a:off x="609600" y="4889500"/>
-            <a:ext cx="10972800" cy="6350"/>
+            <a:off x="0" y="0"/>
+            <a:ext cx="12188952" cy="6858000"/>
           </a:xfrm>
           <a:prstGeom prst="rect">
             <a:avLst/>
           </a:prstGeom>
           <a:solidFill>
-            <a:srgbClr val="191D2E"/>
+            <a:srgbClr val="1F2C56"/>
           </a:solidFill>
           <a:ln>
             <a:noFill/>
@@ -3257,14 +3145,57 @@
       </p:sp>
       <p:sp>
         <p:nvSpPr>
-          <p:cNvPr id="6" name="TextBox 5"/>
+          <p:cNvPr id="3" name="Rectangle 2"/>
+          <p:cNvSpPr/>
+          <p:nvPr/>
+        </p:nvSpPr>
+        <p:spPr>
+          <a:xfrm>
+            <a:off x="0" y="0"/>
+            <a:ext cx="12188952" cy="54864"/>
+          </a:xfrm>
+          <a:prstGeom prst="rect">
+            <a:avLst/>
+          </a:prstGeom>
+          <a:solidFill>
+            <a:srgbClr val="D9C089"/>
+          </a:solidFill>
+          <a:ln>
+            <a:noFill/>
+          </a:ln>
+        </p:spPr>
+        <p:style>
+          <a:lnRef idx="1">
+            <a:schemeClr val="accent1"/>
+          </a:lnRef>
+          <a:fillRef idx="3">
+            <a:schemeClr val="accent1"/>
+          </a:fillRef>
+          <a:effectRef idx="2">
+            <a:schemeClr val="accent1"/>
+          </a:effectRef>
+          <a:fontRef idx="minor">
+            <a:schemeClr val="lt1"/>
+          </a:fontRef>
+        </p:style>
+        <p:txBody>
+          <a:bodyPr rtlCol="0" anchor="ctr"/>
+          <a:lstStyle/>
+          <a:p>
+            <a:pPr algn="ctr"/>
+          </a:p>
+        </p:txBody>
+      </p:sp>
+      <p:sp>
+        <p:nvSpPr>
+          <p:cNvPr id="4" name="TextBox 3"/>
           <p:cNvSpPr txBox="1"/>
           <p:nvPr/>
         </p:nvSpPr>
         <p:spPr>
           <a:xfrm>
-            <a:off x="609600" y="5016500"/>
-            <a:ext cx="5207000" cy="1143000"/>
+            <a:off x="685800" y="201168"/>
+            <a:ext cx="10817352" cy="256032"/>
           </a:xfrm>
           <a:prstGeom prst="rect">
             <a:avLst/>
@@ -3272,21 +3203,99 @@
           <a:noFill/>
         </p:spPr>
         <p:txBody>
+          <a:bodyPr wrap="none">
+            <a:spAutoFit/>
+          </a:bodyPr>
+          <a:lstStyle/>
+          <a:p>
+            <a:pPr algn="l"/>
+            <a:r>
+              <a:rPr sz="800">
+                <a:solidFill>
+                  <a:srgbClr val="C8D2E6"/>
+                </a:solidFill>
+                <a:latin typeface="JetBrains Mono"/>
+              </a:rPr>
+              <a:t>FKB CAMPUS  ·  FIRMENKUNDENAKADEMIE  ·  M19</a:t>
+            </a:r>
+          </a:p>
+        </p:txBody>
+      </p:sp>
+      <p:sp>
+        <p:nvSpPr>
+          <p:cNvPr id="5" name="TextBox 4"/>
+          <p:cNvSpPr txBox="1"/>
+          <p:nvPr/>
+        </p:nvSpPr>
+        <p:spPr>
+          <a:xfrm>
+            <a:off x="685800" y="1828800"/>
+            <a:ext cx="10817352" cy="2011680"/>
+          </a:xfrm>
+          <a:prstGeom prst="rect">
+            <a:avLst/>
+          </a:prstGeom>
+          <a:noFill/>
+        </p:spPr>
+        <p:txBody>
           <a:bodyPr wrap="square">
-            <a:normAutofit/>
+            <a:spAutoFit/>
           </a:bodyPr>
           <a:lstStyle/>
           <a:p>
             <a:pPr algn="l"/>
             <a:r>
-              <a:rPr sz="1400" b="0" i="1">
-                <a:solidFill>
-                  <a:srgbClr val="4D5270"/>
-                </a:solidFill>
-                <a:latin typeface="Georgia"/>
+              <a:rPr sz="4600" b="1" i="0">
+                <a:solidFill>
+                  <a:srgbClr val="FFFFFF"/>
+                </a:solidFill>
+                <a:latin typeface="Source Serif 4"/>
               </a:rPr>
-              <a:t>Implizites Expertenwissen systematisch weitergeben und Lerngemeinschaften im FK-Team aufbauen</a:t>
-            </a:r>
+              <a:t>Wissenstransfer im Team</a:t>
+            </a:r>
+          </a:p>
+        </p:txBody>
+      </p:sp>
+      <p:sp>
+        <p:nvSpPr>
+          <p:cNvPr id="6" name="Rectangle 5"/>
+          <p:cNvSpPr/>
+          <p:nvPr/>
+        </p:nvSpPr>
+        <p:spPr>
+          <a:xfrm>
+            <a:off x="685800" y="5029200"/>
+            <a:ext cx="10817352" cy="12700"/>
+          </a:xfrm>
+          <a:prstGeom prst="rect">
+            <a:avLst/>
+          </a:prstGeom>
+          <a:solidFill>
+            <a:srgbClr val="FFFFFF"/>
+          </a:solidFill>
+          <a:ln>
+            <a:noFill/>
+          </a:ln>
+        </p:spPr>
+        <p:style>
+          <a:lnRef idx="1">
+            <a:schemeClr val="accent1"/>
+          </a:lnRef>
+          <a:fillRef idx="3">
+            <a:schemeClr val="accent1"/>
+          </a:fillRef>
+          <a:effectRef idx="2">
+            <a:schemeClr val="accent1"/>
+          </a:effectRef>
+          <a:fontRef idx="minor">
+            <a:schemeClr val="lt1"/>
+          </a:fontRef>
+        </p:style>
+        <p:txBody>
+          <a:bodyPr rtlCol="0" anchor="ctr"/>
+          <a:lstStyle/>
+          <a:p>
+            <a:pPr algn="ctr"/>
           </a:p>
         </p:txBody>
       </p:sp>
@@ -3298,8 +3307,8 @@
         </p:nvSpPr>
         <p:spPr>
           <a:xfrm>
-            <a:off x="6032500" y="5016500"/>
-            <a:ext cx="2540000" cy="177800"/>
+            <a:off x="685800" y="5193792"/>
+            <a:ext cx="5408676" cy="201168"/>
           </a:xfrm>
           <a:prstGeom prst="rect">
             <a:avLst/>
@@ -3307,20 +3316,20 @@
           <a:noFill/>
         </p:spPr>
         <p:txBody>
-          <a:bodyPr wrap="square">
-            <a:normAutofit/>
+          <a:bodyPr wrap="none">
+            <a:spAutoFit/>
           </a:bodyPr>
           <a:lstStyle/>
           <a:p>
             <a:pPr algn="l"/>
             <a:r>
-              <a:rPr sz="900" b="0" i="0">
-                <a:solidFill>
-                  <a:srgbClr val="7B7FA0"/>
-                </a:solidFill>
-                <a:latin typeface="Courier New"/>
+              <a:rPr sz="700">
+                <a:solidFill>
+                  <a:srgbClr val="A0B4D2"/>
+                </a:solidFill>
+                <a:latin typeface="JetBrains Mono"/>
               </a:rPr>
-              <a:t>ZIELSTUFE</a:t>
+              <a:t>KOMPETENZSTUFE</a:t>
             </a:r>
           </a:p>
         </p:txBody>
@@ -3333,8 +3342,8 @@
         </p:nvSpPr>
         <p:spPr>
           <a:xfrm>
-            <a:off x="6032500" y="5207000"/>
-            <a:ext cx="2540000" cy="508000"/>
+            <a:off x="685800" y="5394960"/>
+            <a:ext cx="5408676" cy="320040"/>
           </a:xfrm>
           <a:prstGeom prst="rect">
             <a:avLst/>
@@ -3343,19 +3352,19 @@
         </p:spPr>
         <p:txBody>
           <a:bodyPr wrap="square">
-            <a:normAutofit/>
+            <a:spAutoFit/>
           </a:bodyPr>
           <a:lstStyle/>
           <a:p>
             <a:pPr algn="l"/>
             <a:r>
-              <a:rPr sz="1400" b="0" i="0">
-                <a:solidFill>
-                  <a:srgbClr val="191D2E"/>
-                </a:solidFill>
-                <a:latin typeface="Georgia"/>
+              <a:rPr sz="1100" b="0" i="0">
+                <a:solidFill>
+                  <a:srgbClr val="FFFFFF"/>
+                </a:solidFill>
+                <a:latin typeface="Arial"/>
               </a:rPr>
-              <a:t>Sparringspartner</a:t>
+              <a:t>Sparring</a:t>
             </a:r>
           </a:p>
         </p:txBody>
@@ -3368,8 +3377,8 @@
         </p:nvSpPr>
         <p:spPr>
           <a:xfrm>
-            <a:off x="8890000" y="5016500"/>
-            <a:ext cx="2667000" cy="177800"/>
+            <a:off x="6094476" y="5193792"/>
+            <a:ext cx="5408676" cy="201168"/>
           </a:xfrm>
           <a:prstGeom prst="rect">
             <a:avLst/>
@@ -3377,20 +3386,20 @@
           <a:noFill/>
         </p:spPr>
         <p:txBody>
-          <a:bodyPr wrap="square">
-            <a:normAutofit/>
+          <a:bodyPr wrap="none">
+            <a:spAutoFit/>
           </a:bodyPr>
           <a:lstStyle/>
           <a:p>
             <a:pPr algn="l"/>
             <a:r>
-              <a:rPr sz="900" b="0" i="0">
-                <a:solidFill>
-                  <a:srgbClr val="7B7FA0"/>
-                </a:solidFill>
-                <a:latin typeface="Courier New"/>
+              <a:rPr sz="700">
+                <a:solidFill>
+                  <a:srgbClr val="A0B4D2"/>
+                </a:solidFill>
+                <a:latin typeface="JetBrains Mono"/>
               </a:rPr>
-              <a:t>DAUER</a:t>
+              <a:t>VERSION</a:t>
             </a:r>
           </a:p>
         </p:txBody>
@@ -3403,8 +3412,8 @@
         </p:nvSpPr>
         <p:spPr>
           <a:xfrm>
-            <a:off x="8890000" y="5207000"/>
-            <a:ext cx="2667000" cy="508000"/>
+            <a:off x="6094476" y="5394960"/>
+            <a:ext cx="5408676" cy="320040"/>
           </a:xfrm>
           <a:prstGeom prst="rect">
             <a:avLst/>
@@ -3413,19 +3422,132 @@
         </p:spPr>
         <p:txBody>
           <a:bodyPr wrap="square">
-            <a:normAutofit/>
+            <a:spAutoFit/>
           </a:bodyPr>
           <a:lstStyle/>
           <a:p>
             <a:pPr algn="l"/>
             <a:r>
-              <a:rPr sz="1400" b="0" i="0">
-                <a:solidFill>
-                  <a:srgbClr val="191D2E"/>
-                </a:solidFill>
-                <a:latin typeface="Georgia"/>
+              <a:rPr sz="1100" b="0" i="0">
+                <a:solidFill>
+                  <a:srgbClr val="FFFFFF"/>
+                </a:solidFill>
+                <a:latin typeface="Arial"/>
               </a:rPr>
-              <a:t>90 Min.</a:t>
+              <a:t>v0.4</a:t>
+            </a:r>
+          </a:p>
+        </p:txBody>
+      </p:sp>
+      <p:sp>
+        <p:nvSpPr>
+          <p:cNvPr id="11" name="Rectangle 10"/>
+          <p:cNvSpPr/>
+          <p:nvPr/>
+        </p:nvSpPr>
+        <p:spPr>
+          <a:xfrm>
+            <a:off x="0" y="6510528"/>
+            <a:ext cx="12188952" cy="347472"/>
+          </a:xfrm>
+          <a:prstGeom prst="rect">
+            <a:avLst/>
+          </a:prstGeom>
+          <a:solidFill>
+            <a:srgbClr val="0A1937"/>
+          </a:solidFill>
+          <a:ln>
+            <a:noFill/>
+          </a:ln>
+        </p:spPr>
+        <p:style>
+          <a:lnRef idx="1">
+            <a:schemeClr val="accent1"/>
+          </a:lnRef>
+          <a:fillRef idx="3">
+            <a:schemeClr val="accent1"/>
+          </a:fillRef>
+          <a:effectRef idx="2">
+            <a:schemeClr val="accent1"/>
+          </a:effectRef>
+          <a:fontRef idx="minor">
+            <a:schemeClr val="lt1"/>
+          </a:fontRef>
+        </p:style>
+        <p:txBody>
+          <a:bodyPr rtlCol="0" anchor="ctr"/>
+          <a:lstStyle/>
+          <a:p>
+            <a:pPr algn="ctr"/>
+          </a:p>
+        </p:txBody>
+      </p:sp>
+      <p:sp>
+        <p:nvSpPr>
+          <p:cNvPr id="12" name="TextBox 11"/>
+          <p:cNvSpPr txBox="1"/>
+          <p:nvPr/>
+        </p:nvSpPr>
+        <p:spPr>
+          <a:xfrm>
+            <a:off x="685800" y="6583680"/>
+            <a:ext cx="5408676" cy="256032"/>
+          </a:xfrm>
+          <a:prstGeom prst="rect">
+            <a:avLst/>
+          </a:prstGeom>
+          <a:noFill/>
+        </p:spPr>
+        <p:txBody>
+          <a:bodyPr wrap="none">
+            <a:spAutoFit/>
+          </a:bodyPr>
+          <a:lstStyle/>
+          <a:p>
+            <a:pPr algn="l"/>
+            <a:r>
+              <a:rPr sz="700">
+                <a:solidFill>
+                  <a:srgbClr val="96A5BE"/>
+                </a:solidFill>
+                <a:latin typeface="JetBrains Mono"/>
+              </a:rPr>
+              <a:t>Benedikt Zoller Coaching  ·  FKB Campus  ·  2026</a:t>
+            </a:r>
+          </a:p>
+        </p:txBody>
+      </p:sp>
+      <p:sp>
+        <p:nvSpPr>
+          <p:cNvPr id="13" name="TextBox 12"/>
+          <p:cNvSpPr txBox="1"/>
+          <p:nvPr/>
+        </p:nvSpPr>
+        <p:spPr>
+          <a:xfrm>
+            <a:off x="6094476" y="6583680"/>
+            <a:ext cx="5408676" cy="256032"/>
+          </a:xfrm>
+          <a:prstGeom prst="rect">
+            <a:avLst/>
+          </a:prstGeom>
+          <a:noFill/>
+        </p:spPr>
+        <p:txBody>
+          <a:bodyPr wrap="none">
+            <a:spAutoFit/>
+          </a:bodyPr>
+          <a:lstStyle/>
+          <a:p>
+            <a:pPr algn="r"/>
+            <a:r>
+              <a:rPr sz="700">
+                <a:solidFill>
+                  <a:srgbClr val="96A5BE"/>
+                </a:solidFill>
+                <a:latin typeface="JetBrains Mono"/>
+              </a:rPr>
+              <a:t>Trainer-Präsentation</a:t>
             </a:r>
           </a:p>
         </p:txBody>
@@ -3441,14 +3563,6 @@
 <file path=ppt/slides/slide10.xml><?xml version="1.0" encoding="utf-8"?>
 <p:sld xmlns:a="http://schemas.openxmlformats.org/drawingml/2006/main" xmlns:p="http://schemas.openxmlformats.org/presentationml/2006/main" xmlns:r="http://schemas.openxmlformats.org/officeDocument/2006/relationships">
   <p:cSld>
-    <p:bg>
-      <p:bgPr>
-        <a:solidFill>
-          <a:srgbClr val="F8F8FA"/>
-        </a:solidFill>
-        <a:effectLst/>
-      </p:bgPr>
-    </p:bg>
     <p:spTree>
       <p:nvGrpSpPr>
         <p:cNvPr id="1" name=""/>
@@ -3458,125 +3572,20 @@
       <p:grpSpPr/>
       <p:sp>
         <p:nvSpPr>
-          <p:cNvPr id="2" name="TextBox 1"/>
-          <p:cNvSpPr txBox="1"/>
-          <p:nvPr/>
-        </p:nvSpPr>
-        <p:spPr>
-          <a:xfrm>
-            <a:off x="609600" y="279400"/>
-            <a:ext cx="2540000" cy="279400"/>
-          </a:xfrm>
-          <a:prstGeom prst="rect">
-            <a:avLst/>
-          </a:prstGeom>
-          <a:noFill/>
-        </p:spPr>
-        <p:txBody>
-          <a:bodyPr wrap="square">
-            <a:normAutofit/>
-          </a:bodyPr>
-          <a:lstStyle/>
-          <a:p>
-            <a:pPr algn="l"/>
-            <a:r>
-              <a:rPr sz="1000" b="1" i="0">
-                <a:solidFill>
-                  <a:srgbClr val="191D2E"/>
-                </a:solidFill>
-                <a:latin typeface="Arial"/>
-              </a:rPr>
-              <a:t>FKB  Campus</a:t>
-            </a:r>
-          </a:p>
-        </p:txBody>
-      </p:sp>
-      <p:sp>
-        <p:nvSpPr>
-          <p:cNvPr id="3" name="TextBox 2"/>
-          <p:cNvSpPr txBox="1"/>
-          <p:nvPr/>
-        </p:nvSpPr>
-        <p:spPr>
-          <a:xfrm>
-            <a:off x="609600" y="279400"/>
-            <a:ext cx="10972800" cy="279400"/>
-          </a:xfrm>
-          <a:prstGeom prst="rect">
-            <a:avLst/>
-          </a:prstGeom>
-          <a:noFill/>
-        </p:spPr>
-        <p:txBody>
-          <a:bodyPr wrap="square">
-            <a:normAutofit/>
-          </a:bodyPr>
-          <a:lstStyle/>
-          <a:p>
-            <a:pPr algn="r"/>
-            <a:r>
-              <a:rPr sz="900" b="0" i="0">
-                <a:solidFill>
-                  <a:srgbClr val="7B7FA0"/>
-                </a:solidFill>
-                <a:latin typeface="Courier New"/>
-              </a:rPr>
-              <a:t>III · DAS TEAM ALS COMMUNITY OF PRACTICE</a:t>
-            </a:r>
-          </a:p>
-        </p:txBody>
-      </p:sp>
-      <p:sp>
-        <p:nvSpPr>
-          <p:cNvPr id="4" name="TextBox 3"/>
-          <p:cNvSpPr txBox="1"/>
-          <p:nvPr/>
-        </p:nvSpPr>
-        <p:spPr>
-          <a:xfrm>
-            <a:off x="609600" y="6426200"/>
-            <a:ext cx="10972800" cy="228600"/>
-          </a:xfrm>
-          <a:prstGeom prst="rect">
-            <a:avLst/>
-          </a:prstGeom>
-          <a:noFill/>
-        </p:spPr>
-        <p:txBody>
-          <a:bodyPr wrap="square">
-            <a:normAutofit/>
-          </a:bodyPr>
-          <a:lstStyle/>
-          <a:p>
-            <a:pPr algn="r"/>
-            <a:r>
-              <a:rPr sz="900" b="0" i="0">
-                <a:solidFill>
-                  <a:srgbClr val="7B7FA0"/>
-                </a:solidFill>
-                <a:latin typeface="Courier New"/>
-              </a:rPr>
-              <a:t>10</a:t>
-            </a:r>
-          </a:p>
-        </p:txBody>
-      </p:sp>
-      <p:sp>
-        <p:nvSpPr>
-          <p:cNvPr id="5" name="Rectangle 4"/>
+          <p:cNvPr id="2" name="Rectangle 1"/>
           <p:cNvSpPr/>
           <p:nvPr/>
         </p:nvSpPr>
         <p:spPr>
           <a:xfrm>
-            <a:off x="609600" y="825500"/>
-            <a:ext cx="10972800" cy="6350"/>
+            <a:off x="0" y="0"/>
+            <a:ext cx="12188952" cy="6858000"/>
           </a:xfrm>
           <a:prstGeom prst="rect">
             <a:avLst/>
           </a:prstGeom>
           <a:solidFill>
-            <a:srgbClr val="191D2E"/>
+            <a:srgbClr val="EDEDF3"/>
           </a:solidFill>
           <a:ln>
             <a:noFill/>
@@ -3606,55 +3615,20 @@
       </p:sp>
       <p:sp>
         <p:nvSpPr>
-          <p:cNvPr id="6" name="TextBox 5"/>
-          <p:cNvSpPr txBox="1"/>
-          <p:nvPr/>
-        </p:nvSpPr>
-        <p:spPr>
-          <a:xfrm>
-            <a:off x="609600" y="920750"/>
-            <a:ext cx="10972800" cy="1778000"/>
-          </a:xfrm>
-          <a:prstGeom prst="rect">
-            <a:avLst/>
-          </a:prstGeom>
-          <a:noFill/>
-        </p:spPr>
-        <p:txBody>
-          <a:bodyPr wrap="square">
-            <a:normAutofit/>
-          </a:bodyPr>
-          <a:lstStyle/>
-          <a:p>
-            <a:pPr algn="l"/>
-            <a:r>
-              <a:rPr sz="3800" b="0" i="0">
-                <a:solidFill>
-                  <a:srgbClr val="191D2E"/>
-                </a:solidFill>
-                <a:latin typeface="Georgia"/>
-              </a:rPr>
-              <a:t>Ihr Auftrag: Eine Routine starten</a:t>
-            </a:r>
-          </a:p>
-        </p:txBody>
-      </p:sp>
-      <p:sp>
-        <p:nvSpPr>
-          <p:cNvPr id="7" name="Rectangle 6"/>
+          <p:cNvPr id="3" name="Rectangle 2"/>
           <p:cNvSpPr/>
           <p:nvPr/>
         </p:nvSpPr>
         <p:spPr>
           <a:xfrm>
-            <a:off x="609600" y="2762250"/>
-            <a:ext cx="10972800" cy="6350"/>
+            <a:off x="0" y="0"/>
+            <a:ext cx="12188952" cy="50292"/>
           </a:xfrm>
           <a:prstGeom prst="rect">
             <a:avLst/>
           </a:prstGeom>
           <a:solidFill>
-            <a:srgbClr val="E0E0E8"/>
+            <a:srgbClr val="1F2C56"/>
           </a:solidFill>
           <a:ln>
             <a:noFill/>
@@ -3684,14 +3658,170 @@
       </p:sp>
       <p:sp>
         <p:nvSpPr>
+          <p:cNvPr id="4" name="TextBox 3"/>
+          <p:cNvSpPr txBox="1"/>
+          <p:nvPr/>
+        </p:nvSpPr>
+        <p:spPr>
+          <a:xfrm>
+            <a:off x="685800" y="109728"/>
+            <a:ext cx="10817352" cy="228600"/>
+          </a:xfrm>
+          <a:prstGeom prst="rect">
+            <a:avLst/>
+          </a:prstGeom>
+          <a:noFill/>
+        </p:spPr>
+        <p:txBody>
+          <a:bodyPr wrap="none">
+            <a:spAutoFit/>
+          </a:bodyPr>
+          <a:lstStyle/>
+          <a:p>
+            <a:pPr algn="l"/>
+            <a:r>
+              <a:rPr sz="750">
+                <a:solidFill>
+                  <a:srgbClr val="78808C"/>
+                </a:solidFill>
+                <a:latin typeface="JetBrains Mono"/>
+              </a:rPr>
+              <a:t>M19  ·  INHALT</a:t>
+            </a:r>
+          </a:p>
+        </p:txBody>
+      </p:sp>
+      <p:sp>
+        <p:nvSpPr>
+          <p:cNvPr id="5" name="Rectangle 4"/>
+          <p:cNvSpPr/>
+          <p:nvPr/>
+        </p:nvSpPr>
+        <p:spPr>
+          <a:xfrm>
+            <a:off x="0" y="1234440"/>
+            <a:ext cx="12188952" cy="12700"/>
+          </a:xfrm>
+          <a:prstGeom prst="rect">
+            <a:avLst/>
+          </a:prstGeom>
+          <a:solidFill>
+            <a:srgbClr val="D8DFE4"/>
+          </a:solidFill>
+          <a:ln>
+            <a:noFill/>
+          </a:ln>
+        </p:spPr>
+        <p:style>
+          <a:lnRef idx="1">
+            <a:schemeClr val="accent1"/>
+          </a:lnRef>
+          <a:fillRef idx="3">
+            <a:schemeClr val="accent1"/>
+          </a:fillRef>
+          <a:effectRef idx="2">
+            <a:schemeClr val="accent1"/>
+          </a:effectRef>
+          <a:fontRef idx="minor">
+            <a:schemeClr val="lt1"/>
+          </a:fontRef>
+        </p:style>
+        <p:txBody>
+          <a:bodyPr rtlCol="0" anchor="ctr"/>
+          <a:lstStyle/>
+          <a:p>
+            <a:pPr algn="ctr"/>
+          </a:p>
+        </p:txBody>
+      </p:sp>
+      <p:sp>
+        <p:nvSpPr>
+          <p:cNvPr id="6" name="Rectangle 5"/>
+          <p:cNvSpPr/>
+          <p:nvPr/>
+        </p:nvSpPr>
+        <p:spPr>
+          <a:xfrm>
+            <a:off x="685800" y="502920"/>
+            <a:ext cx="36576" cy="658368"/>
+          </a:xfrm>
+          <a:prstGeom prst="rect">
+            <a:avLst/>
+          </a:prstGeom>
+          <a:solidFill>
+            <a:srgbClr val="D9C089"/>
+          </a:solidFill>
+          <a:ln>
+            <a:noFill/>
+          </a:ln>
+        </p:spPr>
+        <p:style>
+          <a:lnRef idx="1">
+            <a:schemeClr val="accent1"/>
+          </a:lnRef>
+          <a:fillRef idx="3">
+            <a:schemeClr val="accent1"/>
+          </a:fillRef>
+          <a:effectRef idx="2">
+            <a:schemeClr val="accent1"/>
+          </a:effectRef>
+          <a:fontRef idx="minor">
+            <a:schemeClr val="lt1"/>
+          </a:fontRef>
+        </p:style>
+        <p:txBody>
+          <a:bodyPr rtlCol="0" anchor="ctr"/>
+          <a:lstStyle/>
+          <a:p>
+            <a:pPr algn="ctr"/>
+          </a:p>
+        </p:txBody>
+      </p:sp>
+      <p:sp>
+        <p:nvSpPr>
+          <p:cNvPr id="7" name="TextBox 6"/>
+          <p:cNvSpPr txBox="1"/>
+          <p:nvPr/>
+        </p:nvSpPr>
+        <p:spPr>
+          <a:xfrm>
+            <a:off x="813816" y="502920"/>
+            <a:ext cx="10634472" cy="685800"/>
+          </a:xfrm>
+          <a:prstGeom prst="rect">
+            <a:avLst/>
+          </a:prstGeom>
+          <a:noFill/>
+        </p:spPr>
+        <p:txBody>
+          <a:bodyPr wrap="square">
+            <a:spAutoFit/>
+          </a:bodyPr>
+          <a:lstStyle/>
+          <a:p>
+            <a:pPr algn="l"/>
+            <a:r>
+              <a:rPr sz="2400" b="1" i="0">
+                <a:solidFill>
+                  <a:srgbClr val="1F2C56"/>
+                </a:solidFill>
+                <a:latin typeface="Source Serif 4"/>
+              </a:rPr>
+              <a:t>Methode 5: Reverse Mentoring</a:t>
+            </a:r>
+          </a:p>
+        </p:txBody>
+      </p:sp>
+      <p:sp>
+        <p:nvSpPr>
           <p:cNvPr id="8" name="TextBox 7"/>
           <p:cNvSpPr txBox="1"/>
           <p:nvPr/>
         </p:nvSpPr>
         <p:spPr>
           <a:xfrm>
-            <a:off x="609600" y="2851150"/>
-            <a:ext cx="10972800" cy="3448050"/>
+            <a:off x="685800" y="1417320"/>
+            <a:ext cx="10817352" cy="5029200"/>
           </a:xfrm>
           <a:prstGeom prst="rect">
             <a:avLst/>
@@ -3700,83 +3830,313 @@
         </p:spPr>
         <p:txBody>
           <a:bodyPr wrap="square">
-            <a:normAutofit/>
+            <a:spAutoFit/>
           </a:bodyPr>
           <a:lstStyle/>
           <a:p>
             <a:pPr>
               <a:spcBef>
-                <a:spcPts val="600"/>
+                <a:spcPts val="400"/>
               </a:spcBef>
               <a:spcAft>
-                <a:spcPts val="600"/>
+                <a:spcPts val="200"/>
               </a:spcAft>
             </a:pPr>
             <a:r>
-              <a:rPr sz="1400">
-                <a:solidFill>
-                  <a:srgbClr val="191D2E"/>
-                </a:solidFill>
-                <a:latin typeface="Georgia"/>
+              <a:rPr sz="1200">
+                <a:solidFill>
+                  <a:srgbClr val="3D5466"/>
+                </a:solidFill>
+                <a:latin typeface="Arial"/>
               </a:rPr>
-              <a:t>–  Einen Kollegen oder Junior für Tandem-Gespräch anfragen</a:t>
+              <a:t>Was: Jüngere/neuere Berater unterweisen erfahrene Berater in Digitalthemen oder neuen Systemfunktionen.</a:t>
             </a:r>
           </a:p>
           <a:p>
             <a:pPr>
               <a:spcBef>
-                <a:spcPts val="600"/>
+                <a:spcPts val="400"/>
               </a:spcBef>
               <a:spcAft>
-                <a:spcPts val="600"/>
+                <a:spcPts val="200"/>
               </a:spcAft>
             </a:pPr>
             <a:r>
-              <a:rPr sz="1400">
-                <a:solidFill>
-                  <a:srgbClr val="191D2E"/>
-                </a:solidFill>
-                <a:latin typeface="Georgia"/>
+              <a:rPr sz="1200">
+                <a:solidFill>
+                  <a:srgbClr val="3D5466"/>
+                </a:solidFill>
+                <a:latin typeface="Arial"/>
               </a:rPr>
-              <a:t>–  Nächstes Teammeeting: 10 Minuten für Fallreflexion reservieren</a:t>
+              <a:t>Wann: Bei Einführung neuer Tools (z.B. agree-Updates, CRM-Erweiterungen).</a:t>
             </a:r>
           </a:p>
           <a:p>
             <a:pPr>
               <a:spcBef>
-                <a:spcPts val="600"/>
+                <a:spcPts val="400"/>
               </a:spcBef>
               <a:spcAft>
-                <a:spcPts val="600"/>
+                <a:spcPts val="200"/>
               </a:spcAft>
             </a:pPr>
             <a:r>
-              <a:rPr sz="1400">
-                <a:solidFill>
-                  <a:srgbClr val="191D2E"/>
-                </a:solidFill>
-                <a:latin typeface="Georgia"/>
+              <a:rPr sz="1200">
+                <a:solidFill>
+                  <a:srgbClr val="3D5466"/>
+                </a:solidFill>
+                <a:latin typeface="Arial"/>
               </a:rPr>
-              <a:t>–  Eigenes implizites Wissen benennen: Was könnten Sie teilen?</a:t>
+              <a:t>Nutzen: Durchbricht die Hierarchie als Wissensbarriere; wertet beide Seiten auf.</a:t>
             </a:r>
           </a:p>
           <a:p>
             <a:pPr>
               <a:spcBef>
-                <a:spcPts val="600"/>
+                <a:spcPts val="400"/>
               </a:spcBef>
               <a:spcAft>
-                <a:spcPts val="600"/>
+                <a:spcPts val="200"/>
               </a:spcAft>
             </a:pPr>
             <a:r>
-              <a:rPr sz="1400">
-                <a:solidFill>
-                  <a:srgbClr val="191D2E"/>
-                </a:solidFill>
-                <a:latin typeface="Georgia"/>
+              <a:rPr sz="1200">
+                <a:solidFill>
+                  <a:srgbClr val="3D5466"/>
+                </a:solidFill>
+                <a:latin typeface="Arial"/>
               </a:rPr>
-              <a:t>–  Transferbarriere im Team identifizieren und ansprechen</a:t>
+              <a:t>## 4.6 Typische Transferbarrieren und Gegenmaßnahmen</a:t>
+            </a:r>
+          </a:p>
+          <a:p>
+            <a:pPr>
+              <a:spcBef>
+                <a:spcPts val="400"/>
+              </a:spcBef>
+              <a:spcAft>
+                <a:spcPts val="200"/>
+              </a:spcAft>
+            </a:pPr>
+            <a:r>
+              <a:rPr sz="1200">
+                <a:solidFill>
+                  <a:srgbClr val="3D5466"/>
+                </a:solidFill>
+                <a:latin typeface="Arial"/>
+              </a:rPr>
+              <a:t>## 4.7 Praxiscase: Team Ostbayern</a:t>
+            </a:r>
+          </a:p>
+          <a:p>
+            <a:pPr>
+              <a:spcBef>
+                <a:spcPts val="400"/>
+              </a:spcBef>
+              <a:spcAft>
+                <a:spcPts val="200"/>
+              </a:spcAft>
+            </a:pPr>
+            <a:r>
+              <a:rPr sz="1200">
+                <a:solidFill>
+                  <a:srgbClr val="3D5466"/>
+                </a:solidFill>
+                <a:latin typeface="Arial"/>
+              </a:rPr>
+              <a:t>Ausgangssituation</a:t>
+            </a:r>
+          </a:p>
+          <a:p>
+            <a:pPr>
+              <a:spcBef>
+                <a:spcPts val="400"/>
+              </a:spcBef>
+              <a:spcAft>
+                <a:spcPts val="200"/>
+              </a:spcAft>
+            </a:pPr>
+            <a:r>
+              <a:rPr sz="1200">
+                <a:solidFill>
+                  <a:srgbClr val="3D5466"/>
+                </a:solidFill>
+                <a:latin typeface="Arial"/>
+              </a:rPr>
+              <a:t>Gleichzeitig sind drei jüngere Berater seit 2–4 Jahren im Team. Sie beherrschen agree gut, kennen aber die regionalen Besonderheiten kaum.</a:t>
+            </a:r>
+          </a:p>
+          <a:p>
+            <a:pPr>
+              <a:spcBef>
+                <a:spcPts val="400"/>
+              </a:spcBef>
+              <a:spcAft>
+                <a:spcPts val="200"/>
+              </a:spcAft>
+            </a:pPr>
+            <a:r>
+              <a:rPr sz="1200">
+                <a:solidFill>
+                  <a:srgbClr val="3D5466"/>
+                </a:solidFill>
+                <a:latin typeface="Arial"/>
+              </a:rPr>
+              <a:t>Maßnahmen von Claudia Möller</a:t>
+            </a:r>
+          </a:p>
+          <a:p>
+            <a:pPr>
+              <a:spcBef>
+                <a:spcPts val="400"/>
+              </a:spcBef>
+              <a:spcAft>
+                <a:spcPts val="200"/>
+              </a:spcAft>
+            </a:pPr>
+            <a:r>
+              <a:rPr sz="1200">
+                <a:solidFill>
+                  <a:srgbClr val="3D5466"/>
+                </a:solidFill>
+                <a:latin typeface="Arial"/>
+              </a:rPr>
+              <a:t>Schritt 1 – Wissenslandkarte erstellen (Monat 1):</a:t>
+            </a:r>
+          </a:p>
+          <a:p>
+            <a:pPr>
+              <a:spcBef>
+                <a:spcPts val="400"/>
+              </a:spcBef>
+              <a:spcAft>
+                <a:spcPts val="200"/>
+              </a:spcAft>
+            </a:pPr>
+            <a:r>
+              <a:rPr sz="1200">
+                <a:solidFill>
+                  <a:srgbClr val="3D5466"/>
+                </a:solidFill>
+                <a:latin typeface="Arial"/>
+              </a:rPr>
+              <a:t>Schritt 2 – Tandem-Besuche einführen (Monat 2–3):</a:t>
+            </a:r>
+          </a:p>
+          <a:p>
+            <a:pPr>
+              <a:spcBef>
+                <a:spcPts val="400"/>
+              </a:spcBef>
+              <a:spcAft>
+                <a:spcPts val="200"/>
+              </a:spcAft>
+            </a:pPr>
+            <a:r>
+              <a:rPr sz="1200">
+                <a:solidFill>
+                  <a:srgbClr val="3D5466"/>
+                </a:solidFill>
+                <a:latin typeface="Arial"/>
+              </a:rPr>
+              <a:t>Schritt 3 – Monatliche Fallbesprechung (ab Monat 2):</a:t>
+            </a:r>
+          </a:p>
+          <a:p>
+            <a:pPr>
+              <a:spcBef>
+                <a:spcPts val="400"/>
+              </a:spcBef>
+              <a:spcAft>
+                <a:spcPts val="200"/>
+              </a:spcAft>
+            </a:pPr>
+            <a:r>
+              <a:rPr sz="1200">
+                <a:solidFill>
+                  <a:srgbClr val="3D5466"/>
+                </a:solidFill>
+                <a:latin typeface="Arial"/>
+              </a:rPr>
+              <a:t>Ergebnis nach 6 Monaten</a:t>
+            </a:r>
+          </a:p>
+        </p:txBody>
+      </p:sp>
+      <p:sp>
+        <p:nvSpPr>
+          <p:cNvPr id="9" name="Rectangle 8"/>
+          <p:cNvSpPr/>
+          <p:nvPr/>
+        </p:nvSpPr>
+        <p:spPr>
+          <a:xfrm>
+            <a:off x="0" y="6510528"/>
+            <a:ext cx="12188952" cy="347472"/>
+          </a:xfrm>
+          <a:prstGeom prst="rect">
+            <a:avLst/>
+          </a:prstGeom>
+          <a:solidFill>
+            <a:srgbClr val="0A1937"/>
+          </a:solidFill>
+          <a:ln>
+            <a:noFill/>
+          </a:ln>
+        </p:spPr>
+        <p:style>
+          <a:lnRef idx="1">
+            <a:schemeClr val="accent1"/>
+          </a:lnRef>
+          <a:fillRef idx="3">
+            <a:schemeClr val="accent1"/>
+          </a:fillRef>
+          <a:effectRef idx="2">
+            <a:schemeClr val="accent1"/>
+          </a:effectRef>
+          <a:fontRef idx="minor">
+            <a:schemeClr val="lt1"/>
+          </a:fontRef>
+        </p:style>
+        <p:txBody>
+          <a:bodyPr rtlCol="0" anchor="ctr"/>
+          <a:lstStyle/>
+          <a:p>
+            <a:pPr algn="ctr"/>
+          </a:p>
+        </p:txBody>
+      </p:sp>
+      <p:sp>
+        <p:nvSpPr>
+          <p:cNvPr id="10" name="TextBox 9"/>
+          <p:cNvSpPr txBox="1"/>
+          <p:nvPr/>
+        </p:nvSpPr>
+        <p:spPr>
+          <a:xfrm>
+            <a:off x="685800" y="6583680"/>
+            <a:ext cx="6490411" cy="256032"/>
+          </a:xfrm>
+          <a:prstGeom prst="rect">
+            <a:avLst/>
+          </a:prstGeom>
+          <a:noFill/>
+        </p:spPr>
+        <p:txBody>
+          <a:bodyPr wrap="none">
+            <a:spAutoFit/>
+          </a:bodyPr>
+          <a:lstStyle/>
+          <a:p>
+            <a:pPr algn="l"/>
+            <a:r>
+              <a:rPr sz="700">
+                <a:solidFill>
+                  <a:srgbClr val="A0B4D2"/>
+                </a:solidFill>
+                <a:latin typeface="JetBrains Mono"/>
+              </a:rPr>
+              <a:t>Benedikt Zoller Coaching  ·  FKB Campus  ·  M19</a:t>
             </a:r>
           </a:p>
         </p:txBody>
@@ -3792,14 +4152,6 @@
 <file path=ppt/slides/slide11.xml><?xml version="1.0" encoding="utf-8"?>
 <p:sld xmlns:a="http://schemas.openxmlformats.org/drawingml/2006/main" xmlns:p="http://schemas.openxmlformats.org/presentationml/2006/main" xmlns:r="http://schemas.openxmlformats.org/officeDocument/2006/relationships">
   <p:cSld>
-    <p:bg>
-      <p:bgPr>
-        <a:solidFill>
-          <a:srgbClr val="1F2B56"/>
-        </a:solidFill>
-        <a:effectLst/>
-      </p:bgPr>
-    </p:bg>
     <p:spTree>
       <p:nvGrpSpPr>
         <p:cNvPr id="1" name=""/>
@@ -3809,195 +4161,20 @@
       <p:grpSpPr/>
       <p:sp>
         <p:nvSpPr>
-          <p:cNvPr id="2" name="TextBox 1"/>
-          <p:cNvSpPr txBox="1"/>
-          <p:nvPr/>
-        </p:nvSpPr>
-        <p:spPr>
-          <a:xfrm>
-            <a:off x="609600" y="279400"/>
-            <a:ext cx="2540000" cy="279400"/>
-          </a:xfrm>
-          <a:prstGeom prst="rect">
-            <a:avLst/>
-          </a:prstGeom>
-          <a:noFill/>
-        </p:spPr>
-        <p:txBody>
-          <a:bodyPr wrap="square">
-            <a:normAutofit/>
-          </a:bodyPr>
-          <a:lstStyle/>
-          <a:p>
-            <a:pPr algn="l"/>
-            <a:r>
-              <a:rPr sz="1000" b="1" i="0">
-                <a:solidFill>
-                  <a:srgbClr val="F8F8FA"/>
-                </a:solidFill>
-                <a:latin typeface="Arial"/>
-              </a:rPr>
-              <a:t>FKB  Campus</a:t>
-            </a:r>
-          </a:p>
-        </p:txBody>
-      </p:sp>
-      <p:sp>
-        <p:nvSpPr>
-          <p:cNvPr id="3" name="TextBox 2"/>
-          <p:cNvSpPr txBox="1"/>
-          <p:nvPr/>
-        </p:nvSpPr>
-        <p:spPr>
-          <a:xfrm>
-            <a:off x="609600" y="279400"/>
-            <a:ext cx="10972800" cy="279400"/>
-          </a:xfrm>
-          <a:prstGeom prst="rect">
-            <a:avLst/>
-          </a:prstGeom>
-          <a:noFill/>
-        </p:spPr>
-        <p:txBody>
-          <a:bodyPr wrap="square">
-            <a:normAutofit/>
-          </a:bodyPr>
-          <a:lstStyle/>
-          <a:p>
-            <a:pPr algn="r"/>
-            <a:r>
-              <a:rPr sz="900" b="0" i="0">
-                <a:solidFill>
-                  <a:srgbClr val="7B7FA0"/>
-                </a:solidFill>
-                <a:latin typeface="Courier New"/>
-              </a:rPr>
-              <a:t>QUELLENAPPARAT</a:t>
-            </a:r>
-          </a:p>
-        </p:txBody>
-      </p:sp>
-      <p:sp>
-        <p:nvSpPr>
-          <p:cNvPr id="4" name="TextBox 3"/>
-          <p:cNvSpPr txBox="1"/>
-          <p:nvPr/>
-        </p:nvSpPr>
-        <p:spPr>
-          <a:xfrm>
-            <a:off x="609600" y="6426200"/>
-            <a:ext cx="10972800" cy="228600"/>
-          </a:xfrm>
-          <a:prstGeom prst="rect">
-            <a:avLst/>
-          </a:prstGeom>
-          <a:noFill/>
-        </p:spPr>
-        <p:txBody>
-          <a:bodyPr wrap="square">
-            <a:normAutofit/>
-          </a:bodyPr>
-          <a:lstStyle/>
-          <a:p>
-            <a:pPr algn="r"/>
-            <a:r>
-              <a:rPr sz="900" b="0" i="0">
-                <a:solidFill>
-                  <a:srgbClr val="7B7FA0"/>
-                </a:solidFill>
-                <a:latin typeface="Courier New"/>
-              </a:rPr>
-              <a:t>11</a:t>
-            </a:r>
-          </a:p>
-        </p:txBody>
-      </p:sp>
-      <p:sp>
-        <p:nvSpPr>
-          <p:cNvPr id="5" name="TextBox 4"/>
-          <p:cNvSpPr txBox="1"/>
-          <p:nvPr/>
-        </p:nvSpPr>
-        <p:spPr>
-          <a:xfrm>
-            <a:off x="609600" y="863600"/>
-            <a:ext cx="5080000" cy="203200"/>
-          </a:xfrm>
-          <a:prstGeom prst="rect">
-            <a:avLst/>
-          </a:prstGeom>
-          <a:noFill/>
-        </p:spPr>
-        <p:txBody>
-          <a:bodyPr wrap="square">
-            <a:normAutofit/>
-          </a:bodyPr>
-          <a:lstStyle/>
-          <a:p>
-            <a:pPr algn="l"/>
-            <a:r>
-              <a:rPr sz="900" b="0" i="0">
-                <a:solidFill>
-                  <a:srgbClr val="A0AACC"/>
-                </a:solidFill>
-                <a:latin typeface="Courier New"/>
-              </a:rPr>
-              <a:t>Quellenapparat</a:t>
-            </a:r>
-          </a:p>
-        </p:txBody>
-      </p:sp>
-      <p:sp>
-        <p:nvSpPr>
-          <p:cNvPr id="6" name="TextBox 5"/>
-          <p:cNvSpPr txBox="1"/>
-          <p:nvPr/>
-        </p:nvSpPr>
-        <p:spPr>
-          <a:xfrm>
-            <a:off x="609600" y="920750"/>
-            <a:ext cx="10972800" cy="1270000"/>
-          </a:xfrm>
-          <a:prstGeom prst="rect">
-            <a:avLst/>
-          </a:prstGeom>
-          <a:noFill/>
-        </p:spPr>
-        <p:txBody>
-          <a:bodyPr wrap="square">
-            <a:normAutofit/>
-          </a:bodyPr>
-          <a:lstStyle/>
-          <a:p>
-            <a:pPr algn="l"/>
-            <a:r>
-              <a:rPr sz="3800" b="0" i="0">
-                <a:solidFill>
-                  <a:srgbClr val="F8F8FA"/>
-                </a:solidFill>
-                <a:latin typeface="Georgia"/>
-              </a:rPr>
-              <a:t>Quellen.</a:t>
-            </a:r>
-          </a:p>
-        </p:txBody>
-      </p:sp>
-      <p:sp>
-        <p:nvSpPr>
-          <p:cNvPr id="7" name="Rectangle 6"/>
+          <p:cNvPr id="2" name="Rectangle 1"/>
           <p:cNvSpPr/>
           <p:nvPr/>
         </p:nvSpPr>
         <p:spPr>
           <a:xfrm>
-            <a:off x="609600" y="2254250"/>
-            <a:ext cx="10972800" cy="6350"/>
+            <a:off x="0" y="0"/>
+            <a:ext cx="12188952" cy="6858000"/>
           </a:xfrm>
           <a:prstGeom prst="rect">
             <a:avLst/>
           </a:prstGeom>
           <a:solidFill>
-            <a:srgbClr val="3A4880"/>
+            <a:srgbClr val="EDEDF3"/>
           </a:solidFill>
           <a:ln>
             <a:noFill/>
@@ -4027,14 +4204,57 @@
       </p:sp>
       <p:sp>
         <p:nvSpPr>
-          <p:cNvPr id="8" name="TextBox 7"/>
+          <p:cNvPr id="3" name="Rectangle 2"/>
+          <p:cNvSpPr/>
+          <p:nvPr/>
+        </p:nvSpPr>
+        <p:spPr>
+          <a:xfrm>
+            <a:off x="0" y="0"/>
+            <a:ext cx="12188952" cy="50292"/>
+          </a:xfrm>
+          <a:prstGeom prst="rect">
+            <a:avLst/>
+          </a:prstGeom>
+          <a:solidFill>
+            <a:srgbClr val="1F2C56"/>
+          </a:solidFill>
+          <a:ln>
+            <a:noFill/>
+          </a:ln>
+        </p:spPr>
+        <p:style>
+          <a:lnRef idx="1">
+            <a:schemeClr val="accent1"/>
+          </a:lnRef>
+          <a:fillRef idx="3">
+            <a:schemeClr val="accent1"/>
+          </a:fillRef>
+          <a:effectRef idx="2">
+            <a:schemeClr val="accent1"/>
+          </a:effectRef>
+          <a:fontRef idx="minor">
+            <a:schemeClr val="lt1"/>
+          </a:fontRef>
+        </p:style>
+        <p:txBody>
+          <a:bodyPr rtlCol="0" anchor="ctr"/>
+          <a:lstStyle/>
+          <a:p>
+            <a:pPr algn="ctr"/>
+          </a:p>
+        </p:txBody>
+      </p:sp>
+      <p:sp>
+        <p:nvSpPr>
+          <p:cNvPr id="4" name="TextBox 3"/>
           <p:cNvSpPr txBox="1"/>
           <p:nvPr/>
         </p:nvSpPr>
         <p:spPr>
           <a:xfrm>
-            <a:off x="609600" y="2317750"/>
-            <a:ext cx="5207000" cy="444500"/>
+            <a:off x="685800" y="109728"/>
+            <a:ext cx="10817352" cy="228600"/>
           </a:xfrm>
           <a:prstGeom prst="rect">
             <a:avLst/>
@@ -4042,21 +4262,185 @@
           <a:noFill/>
         </p:spPr>
         <p:txBody>
+          <a:bodyPr wrap="none">
+            <a:spAutoFit/>
+          </a:bodyPr>
+          <a:lstStyle/>
+          <a:p>
+            <a:pPr algn="l"/>
+            <a:r>
+              <a:rPr sz="750">
+                <a:solidFill>
+                  <a:srgbClr val="78808C"/>
+                </a:solidFill>
+                <a:latin typeface="JetBrains Mono"/>
+              </a:rPr>
+              <a:t>M19  ·  INHALT</a:t>
+            </a:r>
+          </a:p>
+        </p:txBody>
+      </p:sp>
+      <p:sp>
+        <p:nvSpPr>
+          <p:cNvPr id="5" name="Rectangle 4"/>
+          <p:cNvSpPr/>
+          <p:nvPr/>
+        </p:nvSpPr>
+        <p:spPr>
+          <a:xfrm>
+            <a:off x="0" y="1234440"/>
+            <a:ext cx="12188952" cy="12700"/>
+          </a:xfrm>
+          <a:prstGeom prst="rect">
+            <a:avLst/>
+          </a:prstGeom>
+          <a:solidFill>
+            <a:srgbClr val="D8DFE4"/>
+          </a:solidFill>
+          <a:ln>
+            <a:noFill/>
+          </a:ln>
+        </p:spPr>
+        <p:style>
+          <a:lnRef idx="1">
+            <a:schemeClr val="accent1"/>
+          </a:lnRef>
+          <a:fillRef idx="3">
+            <a:schemeClr val="accent1"/>
+          </a:fillRef>
+          <a:effectRef idx="2">
+            <a:schemeClr val="accent1"/>
+          </a:effectRef>
+          <a:fontRef idx="minor">
+            <a:schemeClr val="lt1"/>
+          </a:fontRef>
+        </p:style>
+        <p:txBody>
+          <a:bodyPr rtlCol="0" anchor="ctr"/>
+          <a:lstStyle/>
+          <a:p>
+            <a:pPr algn="ctr"/>
+          </a:p>
+        </p:txBody>
+      </p:sp>
+      <p:sp>
+        <p:nvSpPr>
+          <p:cNvPr id="6" name="Rectangle 5"/>
+          <p:cNvSpPr/>
+          <p:nvPr/>
+        </p:nvSpPr>
+        <p:spPr>
+          <a:xfrm>
+            <a:off x="685800" y="502920"/>
+            <a:ext cx="36576" cy="658368"/>
+          </a:xfrm>
+          <a:prstGeom prst="rect">
+            <a:avLst/>
+          </a:prstGeom>
+          <a:solidFill>
+            <a:srgbClr val="D9C089"/>
+          </a:solidFill>
+          <a:ln>
+            <a:noFill/>
+          </a:ln>
+        </p:spPr>
+        <p:style>
+          <a:lnRef idx="1">
+            <a:schemeClr val="accent1"/>
+          </a:lnRef>
+          <a:fillRef idx="3">
+            <a:schemeClr val="accent1"/>
+          </a:fillRef>
+          <a:effectRef idx="2">
+            <a:schemeClr val="accent1"/>
+          </a:effectRef>
+          <a:fontRef idx="minor">
+            <a:schemeClr val="lt1"/>
+          </a:fontRef>
+        </p:style>
+        <p:txBody>
+          <a:bodyPr rtlCol="0" anchor="ctr"/>
+          <a:lstStyle/>
+          <a:p>
+            <a:pPr algn="ctr"/>
+          </a:p>
+        </p:txBody>
+      </p:sp>
+      <p:sp>
+        <p:nvSpPr>
+          <p:cNvPr id="7" name="TextBox 6"/>
+          <p:cNvSpPr txBox="1"/>
+          <p:nvPr/>
+        </p:nvSpPr>
+        <p:spPr>
+          <a:xfrm>
+            <a:off x="813816" y="502920"/>
+            <a:ext cx="10634472" cy="685800"/>
+          </a:xfrm>
+          <a:prstGeom prst="rect">
+            <a:avLst/>
+          </a:prstGeom>
+          <a:noFill/>
+        </p:spPr>
+        <p:txBody>
           <a:bodyPr wrap="square">
-            <a:normAutofit/>
+            <a:spAutoFit/>
           </a:bodyPr>
           <a:lstStyle/>
           <a:p>
             <a:pPr algn="l"/>
             <a:r>
-              <a:rPr sz="1000" b="0" i="0">
-                <a:solidFill>
-                  <a:srgbClr val="F8F8FA"/>
-                </a:solidFill>
-                <a:latin typeface="Courier New"/>
+              <a:rPr sz="2400" b="1" i="0">
+                <a:solidFill>
+                  <a:srgbClr val="1F2C56"/>
+                </a:solidFill>
+                <a:latin typeface="Source Serif 4"/>
               </a:rPr>
-              <a:t>(Alle Quellen im APA-7-Format)</a:t>
-            </a:r>
+              <a:t>Arbeitsblatt 1: Wissenslandkarte – eigener Steckbrief</a:t>
+            </a:r>
+          </a:p>
+        </p:txBody>
+      </p:sp>
+      <p:sp>
+        <p:nvSpPr>
+          <p:cNvPr id="8" name="Rectangle 7"/>
+          <p:cNvSpPr/>
+          <p:nvPr/>
+        </p:nvSpPr>
+        <p:spPr>
+          <a:xfrm>
+            <a:off x="0" y="6510528"/>
+            <a:ext cx="12188952" cy="347472"/>
+          </a:xfrm>
+          <a:prstGeom prst="rect">
+            <a:avLst/>
+          </a:prstGeom>
+          <a:solidFill>
+            <a:srgbClr val="0A1937"/>
+          </a:solidFill>
+          <a:ln>
+            <a:noFill/>
+          </a:ln>
+        </p:spPr>
+        <p:style>
+          <a:lnRef idx="1">
+            <a:schemeClr val="accent1"/>
+          </a:lnRef>
+          <a:fillRef idx="3">
+            <a:schemeClr val="accent1"/>
+          </a:fillRef>
+          <a:effectRef idx="2">
+            <a:schemeClr val="accent1"/>
+          </a:effectRef>
+          <a:fontRef idx="minor">
+            <a:schemeClr val="lt1"/>
+          </a:fontRef>
+        </p:style>
+        <p:txBody>
+          <a:bodyPr rtlCol="0" anchor="ctr"/>
+          <a:lstStyle/>
+          <a:p>
+            <a:pPr algn="ctr"/>
           </a:p>
         </p:txBody>
       </p:sp>
@@ -4068,8 +4452,8 @@
         </p:nvSpPr>
         <p:spPr>
           <a:xfrm>
-            <a:off x="609600" y="2800350"/>
-            <a:ext cx="5207000" cy="444500"/>
+            <a:off x="685800" y="6583680"/>
+            <a:ext cx="6490411" cy="256032"/>
           </a:xfrm>
           <a:prstGeom prst="rect">
             <a:avLst/>
@@ -4077,230 +4461,20 @@
           <a:noFill/>
         </p:spPr>
         <p:txBody>
-          <a:bodyPr wrap="square">
-            <a:normAutofit/>
+          <a:bodyPr wrap="none">
+            <a:spAutoFit/>
           </a:bodyPr>
           <a:lstStyle/>
           <a:p>
             <a:pPr algn="l"/>
             <a:r>
-              <a:rPr sz="1000" b="0" i="0">
-                <a:solidFill>
-                  <a:srgbClr val="F8F8FA"/>
-                </a:solidFill>
-                <a:latin typeface="Courier New"/>
+              <a:rPr sz="700">
+                <a:solidFill>
+                  <a:srgbClr val="A0B4D2"/>
+                </a:solidFill>
+                <a:latin typeface="JetBrains Mono"/>
               </a:rPr>
-              <a:t>Anderson, L.W. &amp; Krathwohl, D.R. (Hrsg.). (2001). A taxonomy for learning, teaching, and assessing: A revision of Bloom's educational…</a:t>
-            </a:r>
-          </a:p>
-        </p:txBody>
-      </p:sp>
-      <p:sp>
-        <p:nvSpPr>
-          <p:cNvPr id="10" name="TextBox 9"/>
-          <p:cNvSpPr txBox="1"/>
-          <p:nvPr/>
-        </p:nvSpPr>
-        <p:spPr>
-          <a:xfrm>
-            <a:off x="609600" y="3282950"/>
-            <a:ext cx="5207000" cy="444500"/>
-          </a:xfrm>
-          <a:prstGeom prst="rect">
-            <a:avLst/>
-          </a:prstGeom>
-          <a:noFill/>
-        </p:spPr>
-        <p:txBody>
-          <a:bodyPr wrap="square">
-            <a:normAutofit/>
-          </a:bodyPr>
-          <a:lstStyle/>
-          <a:p>
-            <a:pPr algn="l"/>
-            <a:r>
-              <a:rPr sz="1000" b="0" i="0">
-                <a:solidFill>
-                  <a:srgbClr val="F8F8FA"/>
-                </a:solidFill>
-                <a:latin typeface="Courier New"/>
-              </a:rPr>
-              <a:t>Dreyfus, H.L. &amp; Dreyfus, S.E. (1980). A five-stage model of the mental activities involved in directed skill acquisition (ORC 80-2).…</a:t>
-            </a:r>
-          </a:p>
-        </p:txBody>
-      </p:sp>
-      <p:sp>
-        <p:nvSpPr>
-          <p:cNvPr id="11" name="TextBox 10"/>
-          <p:cNvSpPr txBox="1"/>
-          <p:nvPr/>
-        </p:nvSpPr>
-        <p:spPr>
-          <a:xfrm>
-            <a:off x="609600" y="3765550"/>
-            <a:ext cx="5207000" cy="444500"/>
-          </a:xfrm>
-          <a:prstGeom prst="rect">
-            <a:avLst/>
-          </a:prstGeom>
-          <a:noFill/>
-        </p:spPr>
-        <p:txBody>
-          <a:bodyPr wrap="square">
-            <a:normAutofit/>
-          </a:bodyPr>
-          <a:lstStyle/>
-          <a:p>
-            <a:pPr algn="l"/>
-            <a:r>
-              <a:rPr sz="1000" b="0" i="0">
-                <a:solidFill>
-                  <a:srgbClr val="F8F8FA"/>
-                </a:solidFill>
-                <a:latin typeface="Courier New"/>
-              </a:rPr>
-              <a:t>Kirkpatrick, D.L. (1994). Evaluating Training Programs: The Four Levels. Berrett-Koehler.</a:t>
-            </a:r>
-          </a:p>
-        </p:txBody>
-      </p:sp>
-      <p:sp>
-        <p:nvSpPr>
-          <p:cNvPr id="12" name="TextBox 11"/>
-          <p:cNvSpPr txBox="1"/>
-          <p:nvPr/>
-        </p:nvSpPr>
-        <p:spPr>
-          <a:xfrm>
-            <a:off x="609600" y="4248150"/>
-            <a:ext cx="5207000" cy="444500"/>
-          </a:xfrm>
-          <a:prstGeom prst="rect">
-            <a:avLst/>
-          </a:prstGeom>
-          <a:noFill/>
-        </p:spPr>
-        <p:txBody>
-          <a:bodyPr wrap="square">
-            <a:normAutofit/>
-          </a:bodyPr>
-          <a:lstStyle/>
-          <a:p>
-            <a:pPr algn="l"/>
-            <a:r>
-              <a:rPr sz="1000" b="0" i="0">
-                <a:solidFill>
-                  <a:srgbClr val="F8F8FA"/>
-                </a:solidFill>
-                <a:latin typeface="Courier New"/>
-              </a:rPr>
-              <a:t>Kolb, D.A. (1984). Experiential learning: Experience as the source of learning and development. Prentice Hall.</a:t>
-            </a:r>
-          </a:p>
-        </p:txBody>
-      </p:sp>
-      <p:sp>
-        <p:nvSpPr>
-          <p:cNvPr id="13" name="TextBox 12"/>
-          <p:cNvSpPr txBox="1"/>
-          <p:nvPr/>
-        </p:nvSpPr>
-        <p:spPr>
-          <a:xfrm>
-            <a:off x="6096000" y="2317750"/>
-            <a:ext cx="5232400" cy="444500"/>
-          </a:xfrm>
-          <a:prstGeom prst="rect">
-            <a:avLst/>
-          </a:prstGeom>
-          <a:noFill/>
-        </p:spPr>
-        <p:txBody>
-          <a:bodyPr wrap="square">
-            <a:normAutofit/>
-          </a:bodyPr>
-          <a:lstStyle/>
-          <a:p>
-            <a:pPr algn="l"/>
-            <a:r>
-              <a:rPr sz="1000" b="0" i="0">
-                <a:solidFill>
-                  <a:srgbClr val="F8F8FA"/>
-                </a:solidFill>
-                <a:latin typeface="Courier New"/>
-              </a:rPr>
-              <a:t>Nonaka, I. &amp; Takeuchi, H. (1995). The knowledge-creating company: How Japanese companies create the dynamics of innovation. Oxford…</a:t>
-            </a:r>
-          </a:p>
-        </p:txBody>
-      </p:sp>
-      <p:sp>
-        <p:nvSpPr>
-          <p:cNvPr id="14" name="TextBox 13"/>
-          <p:cNvSpPr txBox="1"/>
-          <p:nvPr/>
-        </p:nvSpPr>
-        <p:spPr>
-          <a:xfrm>
-            <a:off x="6096000" y="2800350"/>
-            <a:ext cx="5232400" cy="444500"/>
-          </a:xfrm>
-          <a:prstGeom prst="rect">
-            <a:avLst/>
-          </a:prstGeom>
-          <a:noFill/>
-        </p:spPr>
-        <p:txBody>
-          <a:bodyPr wrap="square">
-            <a:normAutofit/>
-          </a:bodyPr>
-          <a:lstStyle/>
-          <a:p>
-            <a:pPr algn="l"/>
-            <a:r>
-              <a:rPr sz="1000" b="0" i="0">
-                <a:solidFill>
-                  <a:srgbClr val="F8F8FA"/>
-                </a:solidFill>
-                <a:latin typeface="Courier New"/>
-              </a:rPr>
-              <a:t>Reinmann-Rothmeier, G. &amp; Mandl, H. (2000). Wissensmanagement in der Vernetzung: Konzepte und Erfahrungen. Unterrichtswissenschaft, 28(3),…</a:t>
-            </a:r>
-          </a:p>
-        </p:txBody>
-      </p:sp>
-      <p:sp>
-        <p:nvSpPr>
-          <p:cNvPr id="15" name="TextBox 14"/>
-          <p:cNvSpPr txBox="1"/>
-          <p:nvPr/>
-        </p:nvSpPr>
-        <p:spPr>
-          <a:xfrm>
-            <a:off x="6096000" y="3282950"/>
-            <a:ext cx="5232400" cy="444500"/>
-          </a:xfrm>
-          <a:prstGeom prst="rect">
-            <a:avLst/>
-          </a:prstGeom>
-          <a:noFill/>
-        </p:spPr>
-        <p:txBody>
-          <a:bodyPr wrap="square">
-            <a:normAutofit/>
-          </a:bodyPr>
-          <a:lstStyle/>
-          <a:p>
-            <a:pPr algn="l"/>
-            <a:r>
-              <a:rPr sz="1000" b="0" i="0">
-                <a:solidFill>
-                  <a:srgbClr val="F8F8FA"/>
-                </a:solidFill>
-                <a:latin typeface="Courier New"/>
-              </a:rPr>
-              <a:t>Wenger, E. (1998). Communities of practice: Learning, meaning, and identity. Cambridge University Press.</a:t>
+              <a:t>Benedikt Zoller Coaching  ·  FKB Campus  ·  M19</a:t>
             </a:r>
           </a:p>
         </p:txBody>
@@ -4316,14 +4490,6 @@
 <file path=ppt/slides/slide12.xml><?xml version="1.0" encoding="utf-8"?>
 <p:sld xmlns:a="http://schemas.openxmlformats.org/drawingml/2006/main" xmlns:p="http://schemas.openxmlformats.org/presentationml/2006/main" xmlns:r="http://schemas.openxmlformats.org/officeDocument/2006/relationships">
   <p:cSld>
-    <p:bg>
-      <p:bgPr>
-        <a:solidFill>
-          <a:srgbClr val="F8F8FA"/>
-        </a:solidFill>
-        <a:effectLst/>
-      </p:bgPr>
-    </p:bg>
     <p:spTree>
       <p:nvGrpSpPr>
         <p:cNvPr id="1" name=""/>
@@ -4333,126 +4499,20 @@
       <p:grpSpPr/>
       <p:sp>
         <p:nvSpPr>
-          <p:cNvPr id="2" name="TextBox 1"/>
-          <p:cNvSpPr txBox="1"/>
-          <p:nvPr/>
-        </p:nvSpPr>
-        <p:spPr>
-          <a:xfrm>
-            <a:off x="609600" y="457200"/>
-            <a:ext cx="3175000" cy="279400"/>
-          </a:xfrm>
-          <a:prstGeom prst="rect">
-            <a:avLst/>
-          </a:prstGeom>
-          <a:noFill/>
-        </p:spPr>
-        <p:txBody>
-          <a:bodyPr wrap="square">
-            <a:normAutofit/>
-          </a:bodyPr>
-          <a:lstStyle/>
-          <a:p>
-            <a:pPr algn="l"/>
-            <a:r>
-              <a:rPr sz="1000" b="1" i="0">
-                <a:solidFill>
-                  <a:srgbClr val="191D2E"/>
-                </a:solidFill>
-                <a:latin typeface="Arial"/>
-              </a:rPr>
-              <a:t>FKB  Campus</a:t>
-            </a:r>
-          </a:p>
-        </p:txBody>
-      </p:sp>
-      <p:sp>
-        <p:nvSpPr>
-          <p:cNvPr id="3" name="TextBox 2"/>
-          <p:cNvSpPr txBox="1"/>
-          <p:nvPr/>
-        </p:nvSpPr>
-        <p:spPr>
-          <a:xfrm>
-            <a:off x="609600" y="457200"/>
-            <a:ext cx="10972800" cy="279400"/>
-          </a:xfrm>
-          <a:prstGeom prst="rect">
-            <a:avLst/>
-          </a:prstGeom>
-          <a:noFill/>
-        </p:spPr>
-        <p:txBody>
-          <a:bodyPr wrap="square">
-            <a:normAutofit/>
-          </a:bodyPr>
-          <a:lstStyle/>
-          <a:p>
-            <a:pPr algn="r"/>
-            <a:r>
-              <a:rPr sz="900" b="0" i="0">
-                <a:solidFill>
-                  <a:srgbClr val="7B7FA0"/>
-                </a:solidFill>
-                <a:latin typeface="Courier New"/>
-              </a:rPr>
-              <a:t>Ende · v0.4</a:t>
-            </a:r>
-          </a:p>
-        </p:txBody>
-      </p:sp>
-      <p:sp>
-        <p:nvSpPr>
-          <p:cNvPr id="4" name="TextBox 3"/>
-          <p:cNvSpPr txBox="1"/>
-          <p:nvPr/>
-        </p:nvSpPr>
-        <p:spPr>
-          <a:xfrm>
-            <a:off x="609600" y="1143000"/>
-            <a:ext cx="10972800" cy="3556000"/>
-          </a:xfrm>
-          <a:prstGeom prst="rect">
-            <a:avLst/>
-          </a:prstGeom>
-          <a:noFill/>
-        </p:spPr>
-        <p:txBody>
-          <a:bodyPr wrap="square">
-            <a:normAutofit/>
-          </a:bodyPr>
-          <a:lstStyle/>
-          <a:p>
-            <a:pPr algn="l"/>
-            <a:r>
-              <a:rPr sz="9600" b="0" i="0">
-                <a:solidFill>
-                  <a:srgbClr val="191D2E"/>
-                </a:solidFill>
-                <a:latin typeface="Georgia"/>
-              </a:rPr>
-              <a:t>Danke.
-Fragen?</a:t>
-            </a:r>
-          </a:p>
-        </p:txBody>
-      </p:sp>
-      <p:sp>
-        <p:nvSpPr>
-          <p:cNvPr id="5" name="Rectangle 4"/>
+          <p:cNvPr id="2" name="Rectangle 1"/>
           <p:cNvSpPr/>
           <p:nvPr/>
         </p:nvSpPr>
         <p:spPr>
           <a:xfrm>
-            <a:off x="609600" y="4826000"/>
-            <a:ext cx="10972800" cy="6350"/>
+            <a:off x="0" y="0"/>
+            <a:ext cx="12188952" cy="6858000"/>
           </a:xfrm>
           <a:prstGeom prst="rect">
             <a:avLst/>
           </a:prstGeom>
           <a:solidFill>
-            <a:srgbClr val="191D2E"/>
+            <a:srgbClr val="EDEDF3"/>
           </a:solidFill>
           <a:ln>
             <a:noFill/>
@@ -4482,14 +4542,57 @@
       </p:sp>
       <p:sp>
         <p:nvSpPr>
-          <p:cNvPr id="6" name="TextBox 5"/>
+          <p:cNvPr id="3" name="Rectangle 2"/>
+          <p:cNvSpPr/>
+          <p:nvPr/>
+        </p:nvSpPr>
+        <p:spPr>
+          <a:xfrm>
+            <a:off x="0" y="0"/>
+            <a:ext cx="12188952" cy="50292"/>
+          </a:xfrm>
+          <a:prstGeom prst="rect">
+            <a:avLst/>
+          </a:prstGeom>
+          <a:solidFill>
+            <a:srgbClr val="1F2C56"/>
+          </a:solidFill>
+          <a:ln>
+            <a:noFill/>
+          </a:ln>
+        </p:spPr>
+        <p:style>
+          <a:lnRef idx="1">
+            <a:schemeClr val="accent1"/>
+          </a:lnRef>
+          <a:fillRef idx="3">
+            <a:schemeClr val="accent1"/>
+          </a:fillRef>
+          <a:effectRef idx="2">
+            <a:schemeClr val="accent1"/>
+          </a:effectRef>
+          <a:fontRef idx="minor">
+            <a:schemeClr val="lt1"/>
+          </a:fontRef>
+        </p:style>
+        <p:txBody>
+          <a:bodyPr rtlCol="0" anchor="ctr"/>
+          <a:lstStyle/>
+          <a:p>
+            <a:pPr algn="ctr"/>
+          </a:p>
+        </p:txBody>
+      </p:sp>
+      <p:sp>
+        <p:nvSpPr>
+          <p:cNvPr id="4" name="TextBox 3"/>
           <p:cNvSpPr txBox="1"/>
           <p:nvPr/>
         </p:nvSpPr>
         <p:spPr>
           <a:xfrm>
-            <a:off x="609600" y="4953000"/>
-            <a:ext cx="5715000" cy="1143000"/>
+            <a:off x="685800" y="109728"/>
+            <a:ext cx="10817352" cy="228600"/>
           </a:xfrm>
           <a:prstGeom prst="rect">
             <a:avLst/>
@@ -4497,21 +4600,107 @@
           <a:noFill/>
         </p:spPr>
         <p:txBody>
-          <a:bodyPr wrap="square">
-            <a:normAutofit/>
+          <a:bodyPr wrap="none">
+            <a:spAutoFit/>
           </a:bodyPr>
           <a:lstStyle/>
           <a:p>
             <a:pPr algn="l"/>
             <a:r>
-              <a:rPr sz="1400" b="0" i="1">
-                <a:solidFill>
-                  <a:srgbClr val="191D2E"/>
-                </a:solidFill>
-                <a:latin typeface="Georgia"/>
+              <a:rPr sz="750">
+                <a:solidFill>
+                  <a:srgbClr val="78808C"/>
+                </a:solidFill>
+                <a:latin typeface="JetBrains Mono"/>
               </a:rPr>
-              <a:t>Modul «Wissenstransfer im Team» auf FKB Campus — 5 Lernziele, Praxisfall und Quellenapparat.</a:t>
-            </a:r>
+              <a:t>M19  ·  INHALT</a:t>
+            </a:r>
+          </a:p>
+        </p:txBody>
+      </p:sp>
+      <p:sp>
+        <p:nvSpPr>
+          <p:cNvPr id="5" name="Rectangle 4"/>
+          <p:cNvSpPr/>
+          <p:nvPr/>
+        </p:nvSpPr>
+        <p:spPr>
+          <a:xfrm>
+            <a:off x="0" y="1234440"/>
+            <a:ext cx="12188952" cy="12700"/>
+          </a:xfrm>
+          <a:prstGeom prst="rect">
+            <a:avLst/>
+          </a:prstGeom>
+          <a:solidFill>
+            <a:srgbClr val="D8DFE4"/>
+          </a:solidFill>
+          <a:ln>
+            <a:noFill/>
+          </a:ln>
+        </p:spPr>
+        <p:style>
+          <a:lnRef idx="1">
+            <a:schemeClr val="accent1"/>
+          </a:lnRef>
+          <a:fillRef idx="3">
+            <a:schemeClr val="accent1"/>
+          </a:fillRef>
+          <a:effectRef idx="2">
+            <a:schemeClr val="accent1"/>
+          </a:effectRef>
+          <a:fontRef idx="minor">
+            <a:schemeClr val="lt1"/>
+          </a:fontRef>
+        </p:style>
+        <p:txBody>
+          <a:bodyPr rtlCol="0" anchor="ctr"/>
+          <a:lstStyle/>
+          <a:p>
+            <a:pPr algn="ctr"/>
+          </a:p>
+        </p:txBody>
+      </p:sp>
+      <p:sp>
+        <p:nvSpPr>
+          <p:cNvPr id="6" name="Rectangle 5"/>
+          <p:cNvSpPr/>
+          <p:nvPr/>
+        </p:nvSpPr>
+        <p:spPr>
+          <a:xfrm>
+            <a:off x="685800" y="502920"/>
+            <a:ext cx="36576" cy="658368"/>
+          </a:xfrm>
+          <a:prstGeom prst="rect">
+            <a:avLst/>
+          </a:prstGeom>
+          <a:solidFill>
+            <a:srgbClr val="D9C089"/>
+          </a:solidFill>
+          <a:ln>
+            <a:noFill/>
+          </a:ln>
+        </p:spPr>
+        <p:style>
+          <a:lnRef idx="1">
+            <a:schemeClr val="accent1"/>
+          </a:lnRef>
+          <a:fillRef idx="3">
+            <a:schemeClr val="accent1"/>
+          </a:fillRef>
+          <a:effectRef idx="2">
+            <a:schemeClr val="accent1"/>
+          </a:effectRef>
+          <a:fontRef idx="minor">
+            <a:schemeClr val="lt1"/>
+          </a:fontRef>
+        </p:style>
+        <p:txBody>
+          <a:bodyPr rtlCol="0" anchor="ctr"/>
+          <a:lstStyle/>
+          <a:p>
+            <a:pPr algn="ctr"/>
           </a:p>
         </p:txBody>
       </p:sp>
@@ -4523,8 +4712,8 @@
         </p:nvSpPr>
         <p:spPr>
           <a:xfrm>
-            <a:off x="6731000" y="4953000"/>
-            <a:ext cx="2413000" cy="177800"/>
+            <a:off x="813816" y="502920"/>
+            <a:ext cx="10634472" cy="685800"/>
           </a:xfrm>
           <a:prstGeom prst="rect">
             <a:avLst/>
@@ -4533,19 +4722,19 @@
         </p:spPr>
         <p:txBody>
           <a:bodyPr wrap="square">
-            <a:normAutofit/>
+            <a:spAutoFit/>
           </a:bodyPr>
           <a:lstStyle/>
           <a:p>
             <a:pPr algn="l"/>
             <a:r>
-              <a:rPr sz="900" b="0" i="0">
-                <a:solidFill>
-                  <a:srgbClr val="7B7FA0"/>
-                </a:solidFill>
-                <a:latin typeface="Courier New"/>
+              <a:rPr sz="2400" b="1" i="0">
+                <a:solidFill>
+                  <a:srgbClr val="1F2C56"/>
+                </a:solidFill>
+                <a:latin typeface="Source Serif 4"/>
               </a:rPr>
-              <a:t>Trainer</a:t>
+              <a:t>Arbeitsblatt 2: Fallbesprechung vorbereiten</a:t>
             </a:r>
           </a:p>
         </p:txBody>
@@ -4558,8 +4747,8 @@
         </p:nvSpPr>
         <p:spPr>
           <a:xfrm>
-            <a:off x="6731000" y="5156200"/>
-            <a:ext cx="2413000" cy="381000"/>
+            <a:off x="685800" y="1417320"/>
+            <a:ext cx="10817352" cy="5029200"/>
           </a:xfrm>
           <a:prstGeom prst="rect">
             <a:avLst/>
@@ -4568,55 +4757,70 @@
         </p:spPr>
         <p:txBody>
           <a:bodyPr wrap="square">
-            <a:normAutofit/>
+            <a:spAutoFit/>
           </a:bodyPr>
           <a:lstStyle/>
           <a:p>
-            <a:pPr algn="l"/>
-            <a:r>
-              <a:rPr sz="1400" b="0" i="0">
-                <a:solidFill>
-                  <a:srgbClr val="4D5270"/>
-                </a:solidFill>
-                <a:latin typeface="Georgia"/>
+            <a:pPr>
+              <a:spcBef>
+                <a:spcPts val="400"/>
+              </a:spcBef>
+              <a:spcAft>
+                <a:spcPts val="200"/>
+              </a:spcAft>
+            </a:pPr>
+            <a:r>
+              <a:rPr sz="1200">
+                <a:solidFill>
+                  <a:srgbClr val="3D5466"/>
+                </a:solidFill>
+                <a:latin typeface="Arial"/>
               </a:rPr>
-              <a:t>[Name · Kontakt]</a:t>
-            </a:r>
-          </a:p>
-        </p:txBody>
-      </p:sp>
-      <p:sp>
-        <p:nvSpPr>
-          <p:cNvPr id="9" name="TextBox 8"/>
-          <p:cNvSpPr txBox="1"/>
-          <p:nvPr/>
-        </p:nvSpPr>
-        <p:spPr>
-          <a:xfrm>
-            <a:off x="9398000" y="4953000"/>
-            <a:ext cx="2184400" cy="177800"/>
-          </a:xfrm>
-          <a:prstGeom prst="rect">
-            <a:avLst/>
-          </a:prstGeom>
-          <a:noFill/>
-        </p:spPr>
-        <p:txBody>
-          <a:bodyPr wrap="square">
-            <a:normAutofit/>
-          </a:bodyPr>
-          <a:lstStyle/>
-          <a:p>
-            <a:pPr algn="l"/>
-            <a:r>
-              <a:rPr sz="900" b="0" i="0">
-                <a:solidFill>
-                  <a:srgbClr val="7B7FA0"/>
-                </a:solidFill>
-                <a:latin typeface="Courier New"/>
-              </a:rPr>
-              <a:t>Modul</a:t>
-            </a:r>
+              <a:t>(für den Fallbringer)</a:t>
+            </a:r>
+          </a:p>
+        </p:txBody>
+      </p:sp>
+      <p:sp>
+        <p:nvSpPr>
+          <p:cNvPr id="9" name="Rectangle 8"/>
+          <p:cNvSpPr/>
+          <p:nvPr/>
+        </p:nvSpPr>
+        <p:spPr>
+          <a:xfrm>
+            <a:off x="0" y="6510528"/>
+            <a:ext cx="12188952" cy="347472"/>
+          </a:xfrm>
+          <a:prstGeom prst="rect">
+            <a:avLst/>
+          </a:prstGeom>
+          <a:solidFill>
+            <a:srgbClr val="0A1937"/>
+          </a:solidFill>
+          <a:ln>
+            <a:noFill/>
+          </a:ln>
+        </p:spPr>
+        <p:style>
+          <a:lnRef idx="1">
+            <a:schemeClr val="accent1"/>
+          </a:lnRef>
+          <a:fillRef idx="3">
+            <a:schemeClr val="accent1"/>
+          </a:fillRef>
+          <a:effectRef idx="2">
+            <a:schemeClr val="accent1"/>
+          </a:effectRef>
+          <a:fontRef idx="minor">
+            <a:schemeClr val="lt1"/>
+          </a:fontRef>
+        </p:style>
+        <p:txBody>
+          <a:bodyPr rtlCol="0" anchor="ctr"/>
+          <a:lstStyle/>
+          <a:p>
+            <a:pPr algn="ctr"/>
           </a:p>
         </p:txBody>
       </p:sp>
@@ -4628,8 +4832,8 @@
         </p:nvSpPr>
         <p:spPr>
           <a:xfrm>
-            <a:off x="9398000" y="5156200"/>
-            <a:ext cx="2184400" cy="381000"/>
+            <a:off x="685800" y="6583680"/>
+            <a:ext cx="6490411" cy="256032"/>
           </a:xfrm>
           <a:prstGeom prst="rect">
             <a:avLst/>
@@ -4637,20 +4841,400 @@
           <a:noFill/>
         </p:spPr>
         <p:txBody>
+          <a:bodyPr wrap="none">
+            <a:spAutoFit/>
+          </a:bodyPr>
+          <a:lstStyle/>
+          <a:p>
+            <a:pPr algn="l"/>
+            <a:r>
+              <a:rPr sz="700">
+                <a:solidFill>
+                  <a:srgbClr val="A0B4D2"/>
+                </a:solidFill>
+                <a:latin typeface="JetBrains Mono"/>
+              </a:rPr>
+              <a:t>Benedikt Zoller Coaching  ·  FKB Campus  ·  M19</a:t>
+            </a:r>
+          </a:p>
+        </p:txBody>
+      </p:sp>
+    </p:spTree>
+  </p:cSld>
+  <p:clrMapOvr>
+    <a:masterClrMapping/>
+  </p:clrMapOvr>
+</p:sld>
+</file>
+
+<file path=ppt/slides/slide13.xml><?xml version="1.0" encoding="utf-8"?>
+<p:sld xmlns:a="http://schemas.openxmlformats.org/drawingml/2006/main" xmlns:p="http://schemas.openxmlformats.org/presentationml/2006/main" xmlns:r="http://schemas.openxmlformats.org/officeDocument/2006/relationships">
+  <p:cSld>
+    <p:spTree>
+      <p:nvGrpSpPr>
+        <p:cNvPr id="1" name=""/>
+        <p:cNvGrpSpPr/>
+        <p:nvPr/>
+      </p:nvGrpSpPr>
+      <p:grpSpPr/>
+      <p:sp>
+        <p:nvSpPr>
+          <p:cNvPr id="2" name="Rectangle 1"/>
+          <p:cNvSpPr/>
+          <p:nvPr/>
+        </p:nvSpPr>
+        <p:spPr>
+          <a:xfrm>
+            <a:off x="0" y="0"/>
+            <a:ext cx="12188952" cy="6858000"/>
+          </a:xfrm>
+          <a:prstGeom prst="rect">
+            <a:avLst/>
+          </a:prstGeom>
+          <a:solidFill>
+            <a:srgbClr val="EDEDF3"/>
+          </a:solidFill>
+          <a:ln>
+            <a:noFill/>
+          </a:ln>
+        </p:spPr>
+        <p:style>
+          <a:lnRef idx="1">
+            <a:schemeClr val="accent1"/>
+          </a:lnRef>
+          <a:fillRef idx="3">
+            <a:schemeClr val="accent1"/>
+          </a:fillRef>
+          <a:effectRef idx="2">
+            <a:schemeClr val="accent1"/>
+          </a:effectRef>
+          <a:fontRef idx="minor">
+            <a:schemeClr val="lt1"/>
+          </a:fontRef>
+        </p:style>
+        <p:txBody>
+          <a:bodyPr rtlCol="0" anchor="ctr"/>
+          <a:lstStyle/>
+          <a:p>
+            <a:pPr algn="ctr"/>
+          </a:p>
+        </p:txBody>
+      </p:sp>
+      <p:sp>
+        <p:nvSpPr>
+          <p:cNvPr id="3" name="Rectangle 2"/>
+          <p:cNvSpPr/>
+          <p:nvPr/>
+        </p:nvSpPr>
+        <p:spPr>
+          <a:xfrm>
+            <a:off x="0" y="0"/>
+            <a:ext cx="12188952" cy="50292"/>
+          </a:xfrm>
+          <a:prstGeom prst="rect">
+            <a:avLst/>
+          </a:prstGeom>
+          <a:solidFill>
+            <a:srgbClr val="1F2C56"/>
+          </a:solidFill>
+          <a:ln>
+            <a:noFill/>
+          </a:ln>
+        </p:spPr>
+        <p:style>
+          <a:lnRef idx="1">
+            <a:schemeClr val="accent1"/>
+          </a:lnRef>
+          <a:fillRef idx="3">
+            <a:schemeClr val="accent1"/>
+          </a:fillRef>
+          <a:effectRef idx="2">
+            <a:schemeClr val="accent1"/>
+          </a:effectRef>
+          <a:fontRef idx="minor">
+            <a:schemeClr val="lt1"/>
+          </a:fontRef>
+        </p:style>
+        <p:txBody>
+          <a:bodyPr rtlCol="0" anchor="ctr"/>
+          <a:lstStyle/>
+          <a:p>
+            <a:pPr algn="ctr"/>
+          </a:p>
+        </p:txBody>
+      </p:sp>
+      <p:sp>
+        <p:nvSpPr>
+          <p:cNvPr id="4" name="TextBox 3"/>
+          <p:cNvSpPr txBox="1"/>
+          <p:nvPr/>
+        </p:nvSpPr>
+        <p:spPr>
+          <a:xfrm>
+            <a:off x="685800" y="109728"/>
+            <a:ext cx="10817352" cy="228600"/>
+          </a:xfrm>
+          <a:prstGeom prst="rect">
+            <a:avLst/>
+          </a:prstGeom>
+          <a:noFill/>
+        </p:spPr>
+        <p:txBody>
+          <a:bodyPr wrap="none">
+            <a:spAutoFit/>
+          </a:bodyPr>
+          <a:lstStyle/>
+          <a:p>
+            <a:pPr algn="l"/>
+            <a:r>
+              <a:rPr sz="750">
+                <a:solidFill>
+                  <a:srgbClr val="78808C"/>
+                </a:solidFill>
+                <a:latin typeface="JetBrains Mono"/>
+              </a:rPr>
+              <a:t>M19  ·  INHALT</a:t>
+            </a:r>
+          </a:p>
+        </p:txBody>
+      </p:sp>
+      <p:sp>
+        <p:nvSpPr>
+          <p:cNvPr id="5" name="Rectangle 4"/>
+          <p:cNvSpPr/>
+          <p:nvPr/>
+        </p:nvSpPr>
+        <p:spPr>
+          <a:xfrm>
+            <a:off x="0" y="1234440"/>
+            <a:ext cx="12188952" cy="12700"/>
+          </a:xfrm>
+          <a:prstGeom prst="rect">
+            <a:avLst/>
+          </a:prstGeom>
+          <a:solidFill>
+            <a:srgbClr val="D8DFE4"/>
+          </a:solidFill>
+          <a:ln>
+            <a:noFill/>
+          </a:ln>
+        </p:spPr>
+        <p:style>
+          <a:lnRef idx="1">
+            <a:schemeClr val="accent1"/>
+          </a:lnRef>
+          <a:fillRef idx="3">
+            <a:schemeClr val="accent1"/>
+          </a:fillRef>
+          <a:effectRef idx="2">
+            <a:schemeClr val="accent1"/>
+          </a:effectRef>
+          <a:fontRef idx="minor">
+            <a:schemeClr val="lt1"/>
+          </a:fontRef>
+        </p:style>
+        <p:txBody>
+          <a:bodyPr rtlCol="0" anchor="ctr"/>
+          <a:lstStyle/>
+          <a:p>
+            <a:pPr algn="ctr"/>
+          </a:p>
+        </p:txBody>
+      </p:sp>
+      <p:sp>
+        <p:nvSpPr>
+          <p:cNvPr id="6" name="Rectangle 5"/>
+          <p:cNvSpPr/>
+          <p:nvPr/>
+        </p:nvSpPr>
+        <p:spPr>
+          <a:xfrm>
+            <a:off x="685800" y="502920"/>
+            <a:ext cx="36576" cy="658368"/>
+          </a:xfrm>
+          <a:prstGeom prst="rect">
+            <a:avLst/>
+          </a:prstGeom>
+          <a:solidFill>
+            <a:srgbClr val="D9C089"/>
+          </a:solidFill>
+          <a:ln>
+            <a:noFill/>
+          </a:ln>
+        </p:spPr>
+        <p:style>
+          <a:lnRef idx="1">
+            <a:schemeClr val="accent1"/>
+          </a:lnRef>
+          <a:fillRef idx="3">
+            <a:schemeClr val="accent1"/>
+          </a:fillRef>
+          <a:effectRef idx="2">
+            <a:schemeClr val="accent1"/>
+          </a:effectRef>
+          <a:fontRef idx="minor">
+            <a:schemeClr val="lt1"/>
+          </a:fontRef>
+        </p:style>
+        <p:txBody>
+          <a:bodyPr rtlCol="0" anchor="ctr"/>
+          <a:lstStyle/>
+          <a:p>
+            <a:pPr algn="ctr"/>
+          </a:p>
+        </p:txBody>
+      </p:sp>
+      <p:sp>
+        <p:nvSpPr>
+          <p:cNvPr id="7" name="TextBox 6"/>
+          <p:cNvSpPr txBox="1"/>
+          <p:nvPr/>
+        </p:nvSpPr>
+        <p:spPr>
+          <a:xfrm>
+            <a:off x="813816" y="502920"/>
+            <a:ext cx="10634472" cy="685800"/>
+          </a:xfrm>
+          <a:prstGeom prst="rect">
+            <a:avLst/>
+          </a:prstGeom>
+          <a:noFill/>
+        </p:spPr>
+        <p:txBody>
           <a:bodyPr wrap="square">
-            <a:normAutofit/>
+            <a:spAutoFit/>
           </a:bodyPr>
           <a:lstStyle/>
           <a:p>
             <a:pPr algn="l"/>
             <a:r>
-              <a:rPr sz="1400" b="0" i="0">
-                <a:solidFill>
-                  <a:srgbClr val="191D2E"/>
-                </a:solidFill>
-                <a:latin typeface="Georgia"/>
+              <a:rPr sz="2400" b="1" i="0">
+                <a:solidFill>
+                  <a:srgbClr val="1F2C56"/>
+                </a:solidFill>
+                <a:latin typeface="Source Serif 4"/>
               </a:rPr>
-              <a:t>M19 · Sparringspartner</a:t>
+              <a:t>Arbeitsblatt 3: Wissenstransfer-Maßnahmenplan</a:t>
+            </a:r>
+          </a:p>
+        </p:txBody>
+      </p:sp>
+      <p:sp>
+        <p:nvSpPr>
+          <p:cNvPr id="8" name="TextBox 7"/>
+          <p:cNvSpPr txBox="1"/>
+          <p:nvPr/>
+        </p:nvSpPr>
+        <p:spPr>
+          <a:xfrm>
+            <a:off x="685800" y="1417320"/>
+            <a:ext cx="10817352" cy="5029200"/>
+          </a:xfrm>
+          <a:prstGeom prst="rect">
+            <a:avLst/>
+          </a:prstGeom>
+          <a:noFill/>
+        </p:spPr>
+        <p:txBody>
+          <a:bodyPr wrap="square">
+            <a:spAutoFit/>
+          </a:bodyPr>
+          <a:lstStyle/>
+          <a:p>
+            <a:pPr>
+              <a:spcBef>
+                <a:spcPts val="400"/>
+              </a:spcBef>
+              <a:spcAft>
+                <a:spcPts val="200"/>
+              </a:spcAft>
+            </a:pPr>
+            <a:r>
+              <a:rPr sz="1200">
+                <a:solidFill>
+                  <a:srgbClr val="3D5466"/>
+                </a:solidFill>
+                <a:latin typeface="Arial"/>
+              </a:rPr>
+              <a:t># 5. PRAXISTRANSFER</a:t>
+            </a:r>
+          </a:p>
+        </p:txBody>
+      </p:sp>
+      <p:sp>
+        <p:nvSpPr>
+          <p:cNvPr id="9" name="Rectangle 8"/>
+          <p:cNvSpPr/>
+          <p:nvPr/>
+        </p:nvSpPr>
+        <p:spPr>
+          <a:xfrm>
+            <a:off x="0" y="6510528"/>
+            <a:ext cx="12188952" cy="347472"/>
+          </a:xfrm>
+          <a:prstGeom prst="rect">
+            <a:avLst/>
+          </a:prstGeom>
+          <a:solidFill>
+            <a:srgbClr val="0A1937"/>
+          </a:solidFill>
+          <a:ln>
+            <a:noFill/>
+          </a:ln>
+        </p:spPr>
+        <p:style>
+          <a:lnRef idx="1">
+            <a:schemeClr val="accent1"/>
+          </a:lnRef>
+          <a:fillRef idx="3">
+            <a:schemeClr val="accent1"/>
+          </a:fillRef>
+          <a:effectRef idx="2">
+            <a:schemeClr val="accent1"/>
+          </a:effectRef>
+          <a:fontRef idx="minor">
+            <a:schemeClr val="lt1"/>
+          </a:fontRef>
+        </p:style>
+        <p:txBody>
+          <a:bodyPr rtlCol="0" anchor="ctr"/>
+          <a:lstStyle/>
+          <a:p>
+            <a:pPr algn="ctr"/>
+          </a:p>
+        </p:txBody>
+      </p:sp>
+      <p:sp>
+        <p:nvSpPr>
+          <p:cNvPr id="10" name="TextBox 9"/>
+          <p:cNvSpPr txBox="1"/>
+          <p:nvPr/>
+        </p:nvSpPr>
+        <p:spPr>
+          <a:xfrm>
+            <a:off x="685800" y="6583680"/>
+            <a:ext cx="6490411" cy="256032"/>
+          </a:xfrm>
+          <a:prstGeom prst="rect">
+            <a:avLst/>
+          </a:prstGeom>
+          <a:noFill/>
+        </p:spPr>
+        <p:txBody>
+          <a:bodyPr wrap="none">
+            <a:spAutoFit/>
+          </a:bodyPr>
+          <a:lstStyle/>
+          <a:p>
+            <a:pPr algn="l"/>
+            <a:r>
+              <a:rPr sz="700">
+                <a:solidFill>
+                  <a:srgbClr val="A0B4D2"/>
+                </a:solidFill>
+                <a:latin typeface="JetBrains Mono"/>
+              </a:rPr>
+              <a:t>Benedikt Zoller Coaching  ·  FKB Campus  ·  M19</a:t>
             </a:r>
           </a:p>
         </p:txBody>
@@ -4666,14 +5250,6 @@
 <file path=ppt/slides/slide2.xml><?xml version="1.0" encoding="utf-8"?>
 <p:sld xmlns:a="http://schemas.openxmlformats.org/drawingml/2006/main" xmlns:p="http://schemas.openxmlformats.org/presentationml/2006/main" xmlns:r="http://schemas.openxmlformats.org/officeDocument/2006/relationships">
   <p:cSld>
-    <p:bg>
-      <p:bgPr>
-        <a:solidFill>
-          <a:srgbClr val="F8F8FA"/>
-        </a:solidFill>
-        <a:effectLst/>
-      </p:bgPr>
-    </p:bg>
     <p:spTree>
       <p:nvGrpSpPr>
         <p:cNvPr id="1" name=""/>
@@ -4683,125 +5259,20 @@
       <p:grpSpPr/>
       <p:sp>
         <p:nvSpPr>
-          <p:cNvPr id="2" name="TextBox 1"/>
-          <p:cNvSpPr txBox="1"/>
-          <p:nvPr/>
-        </p:nvSpPr>
-        <p:spPr>
-          <a:xfrm>
-            <a:off x="609600" y="279400"/>
-            <a:ext cx="2540000" cy="279400"/>
-          </a:xfrm>
-          <a:prstGeom prst="rect">
-            <a:avLst/>
-          </a:prstGeom>
-          <a:noFill/>
-        </p:spPr>
-        <p:txBody>
-          <a:bodyPr wrap="square">
-            <a:normAutofit/>
-          </a:bodyPr>
-          <a:lstStyle/>
-          <a:p>
-            <a:pPr algn="l"/>
-            <a:r>
-              <a:rPr sz="1000" b="1" i="0">
-                <a:solidFill>
-                  <a:srgbClr val="191D2E"/>
-                </a:solidFill>
-                <a:latin typeface="Arial"/>
-              </a:rPr>
-              <a:t>FKB  Campus</a:t>
-            </a:r>
-          </a:p>
-        </p:txBody>
-      </p:sp>
-      <p:sp>
-        <p:nvSpPr>
-          <p:cNvPr id="3" name="TextBox 2"/>
-          <p:cNvSpPr txBox="1"/>
-          <p:nvPr/>
-        </p:nvSpPr>
-        <p:spPr>
-          <a:xfrm>
-            <a:off x="609600" y="279400"/>
-            <a:ext cx="10972800" cy="279400"/>
-          </a:xfrm>
-          <a:prstGeom prst="rect">
-            <a:avLst/>
-          </a:prstGeom>
-          <a:noFill/>
-        </p:spPr>
-        <p:txBody>
-          <a:bodyPr wrap="square">
-            <a:normAutofit/>
-          </a:bodyPr>
-          <a:lstStyle/>
-          <a:p>
-            <a:pPr algn="r"/>
-            <a:r>
-              <a:rPr sz="900" b="0" i="0">
-                <a:solidFill>
-                  <a:srgbClr val="7B7FA0"/>
-                </a:solidFill>
-                <a:latin typeface="Courier New"/>
-              </a:rPr>
-              <a:t>§ 00 — LERNZIELE</a:t>
-            </a:r>
-          </a:p>
-        </p:txBody>
-      </p:sp>
-      <p:sp>
-        <p:nvSpPr>
-          <p:cNvPr id="4" name="TextBox 3"/>
-          <p:cNvSpPr txBox="1"/>
-          <p:nvPr/>
-        </p:nvSpPr>
-        <p:spPr>
-          <a:xfrm>
-            <a:off x="609600" y="6426200"/>
-            <a:ext cx="10972800" cy="228600"/>
-          </a:xfrm>
-          <a:prstGeom prst="rect">
-            <a:avLst/>
-          </a:prstGeom>
-          <a:noFill/>
-        </p:spPr>
-        <p:txBody>
-          <a:bodyPr wrap="square">
-            <a:normAutofit/>
-          </a:bodyPr>
-          <a:lstStyle/>
-          <a:p>
-            <a:pPr algn="r"/>
-            <a:r>
-              <a:rPr sz="900" b="0" i="0">
-                <a:solidFill>
-                  <a:srgbClr val="7B7FA0"/>
-                </a:solidFill>
-                <a:latin typeface="Courier New"/>
-              </a:rPr>
-              <a:t>02</a:t>
-            </a:r>
-          </a:p>
-        </p:txBody>
-      </p:sp>
-      <p:sp>
-        <p:nvSpPr>
-          <p:cNvPr id="5" name="Rectangle 4"/>
+          <p:cNvPr id="2" name="Rectangle 1"/>
           <p:cNvSpPr/>
           <p:nvPr/>
         </p:nvSpPr>
         <p:spPr>
           <a:xfrm>
-            <a:off x="609600" y="825500"/>
-            <a:ext cx="10972800" cy="6350"/>
+            <a:off x="0" y="0"/>
+            <a:ext cx="12188952" cy="6858000"/>
           </a:xfrm>
           <a:prstGeom prst="rect">
             <a:avLst/>
           </a:prstGeom>
           <a:solidFill>
-            <a:srgbClr val="191D2E"/>
+            <a:srgbClr val="EDEDF3"/>
           </a:solidFill>
           <a:ln>
             <a:noFill/>
@@ -4831,55 +5302,20 @@
       </p:sp>
       <p:sp>
         <p:nvSpPr>
-          <p:cNvPr id="6" name="TextBox 5"/>
-          <p:cNvSpPr txBox="1"/>
-          <p:nvPr/>
-        </p:nvSpPr>
-        <p:spPr>
-          <a:xfrm>
-            <a:off x="609600" y="920750"/>
-            <a:ext cx="3175000" cy="1651000"/>
-          </a:xfrm>
-          <a:prstGeom prst="rect">
-            <a:avLst/>
-          </a:prstGeom>
-          <a:noFill/>
-        </p:spPr>
-        <p:txBody>
-          <a:bodyPr wrap="square">
-            <a:normAutofit/>
-          </a:bodyPr>
-          <a:lstStyle/>
-          <a:p>
-            <a:pPr algn="l"/>
-            <a:r>
-              <a:rPr sz="4800" b="0" i="1">
-                <a:solidFill>
-                  <a:srgbClr val="1F2B56"/>
-                </a:solidFill>
-                <a:latin typeface="Georgia"/>
-              </a:rPr>
-              <a:t>Inhalt.</a:t>
-            </a:r>
-          </a:p>
-        </p:txBody>
-      </p:sp>
-      <p:sp>
-        <p:nvSpPr>
-          <p:cNvPr id="7" name="Rectangle 6"/>
+          <p:cNvPr id="3" name="Rectangle 2"/>
           <p:cNvSpPr/>
           <p:nvPr/>
         </p:nvSpPr>
         <p:spPr>
           <a:xfrm>
-            <a:off x="4064000" y="889000"/>
-            <a:ext cx="7518399" cy="6350"/>
+            <a:off x="0" y="0"/>
+            <a:ext cx="12188952" cy="50292"/>
           </a:xfrm>
           <a:prstGeom prst="rect">
             <a:avLst/>
           </a:prstGeom>
           <a:solidFill>
-            <a:srgbClr val="E0E0E8"/>
+            <a:srgbClr val="1F2C56"/>
           </a:solidFill>
           <a:ln>
             <a:noFill/>
@@ -4909,14 +5345,14 @@
       </p:sp>
       <p:sp>
         <p:nvSpPr>
-          <p:cNvPr id="8" name="TextBox 7"/>
+          <p:cNvPr id="4" name="TextBox 3"/>
           <p:cNvSpPr txBox="1"/>
           <p:nvPr/>
         </p:nvSpPr>
         <p:spPr>
           <a:xfrm>
-            <a:off x="4064000" y="939799"/>
-            <a:ext cx="762000" cy="647700"/>
+            <a:off x="685800" y="109728"/>
+            <a:ext cx="10817352" cy="228600"/>
           </a:xfrm>
           <a:prstGeom prst="rect">
             <a:avLst/>
@@ -4925,74 +5361,39 @@
         </p:spPr>
         <p:txBody>
           <a:bodyPr wrap="none">
-            <a:normAutofit/>
+            <a:spAutoFit/>
           </a:bodyPr>
           <a:lstStyle/>
           <a:p>
             <a:pPr algn="l"/>
             <a:r>
-              <a:rPr sz="2400" b="0" i="1">
-                <a:solidFill>
-                  <a:srgbClr val="1F2B56"/>
-                </a:solidFill>
-                <a:latin typeface="Georgia"/>
+              <a:rPr sz="750">
+                <a:solidFill>
+                  <a:srgbClr val="78808C"/>
+                </a:solidFill>
+                <a:latin typeface="JetBrains Mono"/>
               </a:rPr>
-              <a:t>I</a:t>
-            </a:r>
-          </a:p>
-        </p:txBody>
-      </p:sp>
-      <p:sp>
-        <p:nvSpPr>
-          <p:cNvPr id="9" name="TextBox 8"/>
-          <p:cNvSpPr txBox="1"/>
-          <p:nvPr/>
-        </p:nvSpPr>
-        <p:spPr>
-          <a:xfrm>
-            <a:off x="4953000" y="952500"/>
-            <a:ext cx="6629400" cy="635000"/>
-          </a:xfrm>
-          <a:prstGeom prst="rect">
-            <a:avLst/>
-          </a:prstGeom>
-          <a:noFill/>
-        </p:spPr>
-        <p:txBody>
-          <a:bodyPr wrap="square">
-            <a:normAutofit/>
-          </a:bodyPr>
-          <a:lstStyle/>
-          <a:p>
-            <a:pPr algn="l"/>
-            <a:r>
-              <a:rPr sz="1400" b="0" i="0">
-                <a:solidFill>
-                  <a:srgbClr val="191D2E"/>
-                </a:solidFill>
-                <a:latin typeface="Georgia"/>
-              </a:rPr>
-              <a:t>Explizites von implizitem Wissen unterscheiden und ungenutzte Transferbereiche identifizieren</a:t>
-            </a:r>
-          </a:p>
-        </p:txBody>
-      </p:sp>
-      <p:sp>
-        <p:nvSpPr>
-          <p:cNvPr id="10" name="Rectangle 9"/>
+              <a:t>LERNZIELE  ·  M19</a:t>
+            </a:r>
+          </a:p>
+        </p:txBody>
+      </p:sp>
+      <p:sp>
+        <p:nvSpPr>
+          <p:cNvPr id="5" name="Rectangle 4"/>
           <p:cNvSpPr/>
           <p:nvPr/>
         </p:nvSpPr>
         <p:spPr>
           <a:xfrm>
-            <a:off x="4064000" y="1587500"/>
-            <a:ext cx="7518399" cy="6350"/>
+            <a:off x="0" y="1234440"/>
+            <a:ext cx="12188952" cy="12700"/>
           </a:xfrm>
           <a:prstGeom prst="rect">
             <a:avLst/>
           </a:prstGeom>
           <a:solidFill>
-            <a:srgbClr val="E0E0E8"/>
+            <a:srgbClr val="D8DFE4"/>
           </a:solidFill>
           <a:ln>
             <a:noFill/>
@@ -5022,14 +5423,14 @@
       </p:sp>
       <p:sp>
         <p:nvSpPr>
-          <p:cNvPr id="11" name="TextBox 10"/>
+          <p:cNvPr id="6" name="TextBox 5"/>
           <p:cNvSpPr txBox="1"/>
           <p:nvPr/>
         </p:nvSpPr>
         <p:spPr>
           <a:xfrm>
-            <a:off x="4064000" y="1638300"/>
-            <a:ext cx="762000" cy="647700"/>
+            <a:off x="685800" y="502920"/>
+            <a:ext cx="10817352" cy="658368"/>
           </a:xfrm>
           <a:prstGeom prst="rect">
             <a:avLst/>
@@ -5037,34 +5438,34 @@
           <a:noFill/>
         </p:spPr>
         <p:txBody>
-          <a:bodyPr wrap="none">
-            <a:normAutofit/>
+          <a:bodyPr wrap="square">
+            <a:spAutoFit/>
           </a:bodyPr>
           <a:lstStyle/>
           <a:p>
             <a:pPr algn="l"/>
             <a:r>
-              <a:rPr sz="2400" b="0" i="1">
-                <a:solidFill>
-                  <a:srgbClr val="1F2B56"/>
-                </a:solidFill>
-                <a:latin typeface="Georgia"/>
+              <a:rPr sz="2600" b="1" i="0">
+                <a:solidFill>
+                  <a:srgbClr val="1F2C56"/>
+                </a:solidFill>
+                <a:latin typeface="Source Serif 4"/>
               </a:rPr>
-              <a:t>II</a:t>
-            </a:r>
-          </a:p>
-        </p:txBody>
-      </p:sp>
-      <p:sp>
-        <p:nvSpPr>
-          <p:cNvPr id="12" name="TextBox 11"/>
+              <a:t>Was Sie heute mitnehmen</a:t>
+            </a:r>
+          </a:p>
+        </p:txBody>
+      </p:sp>
+      <p:sp>
+        <p:nvSpPr>
+          <p:cNvPr id="7" name="TextBox 6"/>
           <p:cNvSpPr txBox="1"/>
           <p:nvPr/>
         </p:nvSpPr>
         <p:spPr>
           <a:xfrm>
-            <a:off x="4953000" y="1651000"/>
-            <a:ext cx="6629400" cy="635000"/>
+            <a:off x="685800" y="1371600"/>
+            <a:ext cx="10817352" cy="5120640"/>
           </a:xfrm>
           <a:prstGeom prst="rect">
             <a:avLst/>
@@ -5073,39 +5474,122 @@
         </p:spPr>
         <p:txBody>
           <a:bodyPr wrap="square">
-            <a:normAutofit/>
+            <a:spAutoFit/>
           </a:bodyPr>
           <a:lstStyle/>
           <a:p>
-            <a:pPr algn="l"/>
-            <a:r>
-              <a:rPr sz="1400" b="0" i="0">
-                <a:solidFill>
-                  <a:srgbClr val="191D2E"/>
-                </a:solidFill>
-                <a:latin typeface="Georgia"/>
+            <a:pPr>
+              <a:spcBef>
+                <a:spcPts val="800"/>
+              </a:spcBef>
+              <a:spcAft>
+                <a:spcPts val="200"/>
+              </a:spcAft>
+            </a:pPr>
+            <a:r>
+              <a:rPr sz="1400">
+                <a:solidFill>
+                  <a:srgbClr val="3D5466"/>
+                </a:solidFill>
+                <a:latin typeface="Arial"/>
               </a:rPr>
-              <a:t>Mindestens zwei Wissenstransfer-Methoden auf den eigenen Teamkontext anwenden</a:t>
-            </a:r>
-          </a:p>
-        </p:txBody>
-      </p:sp>
-      <p:sp>
-        <p:nvSpPr>
-          <p:cNvPr id="13" name="Rectangle 12"/>
+              <a:t>▸  Explizites von implizitem Wissen unterscheiden und ungenutzte Transferbereiche identifizieren</a:t>
+            </a:r>
+          </a:p>
+          <a:p>
+            <a:pPr>
+              <a:spcBef>
+                <a:spcPts val="800"/>
+              </a:spcBef>
+              <a:spcAft>
+                <a:spcPts val="200"/>
+              </a:spcAft>
+            </a:pPr>
+            <a:r>
+              <a:rPr sz="1400">
+                <a:solidFill>
+                  <a:srgbClr val="3D5466"/>
+                </a:solidFill>
+                <a:latin typeface="Arial"/>
+              </a:rPr>
+              <a:t>▸  Mindestens zwei Wissenstransfer-Methoden auf den eigenen Teamkontext anwenden</a:t>
+            </a:r>
+          </a:p>
+          <a:p>
+            <a:pPr>
+              <a:spcBef>
+                <a:spcPts val="800"/>
+              </a:spcBef>
+              <a:spcAft>
+                <a:spcPts val="200"/>
+              </a:spcAft>
+            </a:pPr>
+            <a:r>
+              <a:rPr sz="1400">
+                <a:solidFill>
+                  <a:srgbClr val="3D5466"/>
+                </a:solidFill>
+                <a:latin typeface="Arial"/>
+              </a:rPr>
+              <a:t>▸  Typische Transferbarrieren analysieren und Gegenmaßnahmen ableiten</a:t>
+            </a:r>
+          </a:p>
+          <a:p>
+            <a:pPr>
+              <a:spcBef>
+                <a:spcPts val="800"/>
+              </a:spcBef>
+              <a:spcAft>
+                <a:spcPts val="200"/>
+              </a:spcAft>
+            </a:pPr>
+            <a:r>
+              <a:rPr sz="1400">
+                <a:solidFill>
+                  <a:srgbClr val="3D5466"/>
+                </a:solidFill>
+                <a:latin typeface="Arial"/>
+              </a:rPr>
+              <a:t>▸  Eine geeignete Wissenstransfer-Routine für den Teamkontext auswählen und die Wahl anhand von Transferbarrieren begründen</a:t>
+            </a:r>
+          </a:p>
+          <a:p>
+            <a:pPr>
+              <a:spcBef>
+                <a:spcPts val="800"/>
+              </a:spcBef>
+              <a:spcAft>
+                <a:spcPts val="200"/>
+              </a:spcAft>
+            </a:pPr>
+            <a:r>
+              <a:rPr sz="1400">
+                <a:solidFill>
+                  <a:srgbClr val="3D5466"/>
+                </a:solidFill>
+                <a:latin typeface="Arial"/>
+              </a:rPr>
+              <a:t>▸  Den Nutzen des Teams als Community of Practice bewerten und konkrete Stärkungsschritte begründen</a:t>
+            </a:r>
+          </a:p>
+        </p:txBody>
+      </p:sp>
+      <p:sp>
+        <p:nvSpPr>
+          <p:cNvPr id="8" name="Rectangle 7"/>
           <p:cNvSpPr/>
           <p:nvPr/>
         </p:nvSpPr>
         <p:spPr>
           <a:xfrm>
-            <a:off x="4064000" y="2286000"/>
-            <a:ext cx="7518399" cy="6350"/>
+            <a:off x="0" y="6510528"/>
+            <a:ext cx="12188952" cy="347472"/>
           </a:xfrm>
           <a:prstGeom prst="rect">
             <a:avLst/>
           </a:prstGeom>
           <a:solidFill>
-            <a:srgbClr val="E0E0E8"/>
+            <a:srgbClr val="0A1937"/>
           </a:solidFill>
           <a:ln>
             <a:noFill/>
@@ -5135,14 +5619,14 @@
       </p:sp>
       <p:sp>
         <p:nvSpPr>
-          <p:cNvPr id="14" name="TextBox 13"/>
+          <p:cNvPr id="9" name="TextBox 8"/>
           <p:cNvSpPr txBox="1"/>
           <p:nvPr/>
         </p:nvSpPr>
         <p:spPr>
           <a:xfrm>
-            <a:off x="4064000" y="2336800"/>
-            <a:ext cx="762000" cy="647700"/>
+            <a:off x="685800" y="6583680"/>
+            <a:ext cx="6490411" cy="256032"/>
           </a:xfrm>
           <a:prstGeom prst="rect">
             <a:avLst/>
@@ -5151,280 +5635,19 @@
         </p:spPr>
         <p:txBody>
           <a:bodyPr wrap="none">
-            <a:normAutofit/>
+            <a:spAutoFit/>
           </a:bodyPr>
           <a:lstStyle/>
           <a:p>
             <a:pPr algn="l"/>
             <a:r>
-              <a:rPr sz="2400" b="0" i="1">
-                <a:solidFill>
-                  <a:srgbClr val="1F2B56"/>
-                </a:solidFill>
-                <a:latin typeface="Georgia"/>
+              <a:rPr sz="700">
+                <a:solidFill>
+                  <a:srgbClr val="A0B4D2"/>
+                </a:solidFill>
+                <a:latin typeface="JetBrains Mono"/>
               </a:rPr>
-              <a:t>III</a:t>
-            </a:r>
-          </a:p>
-        </p:txBody>
-      </p:sp>
-      <p:sp>
-        <p:nvSpPr>
-          <p:cNvPr id="15" name="TextBox 14"/>
-          <p:cNvSpPr txBox="1"/>
-          <p:nvPr/>
-        </p:nvSpPr>
-        <p:spPr>
-          <a:xfrm>
-            <a:off x="4953000" y="2349500"/>
-            <a:ext cx="6629400" cy="635000"/>
-          </a:xfrm>
-          <a:prstGeom prst="rect">
-            <a:avLst/>
-          </a:prstGeom>
-          <a:noFill/>
-        </p:spPr>
-        <p:txBody>
-          <a:bodyPr wrap="square">
-            <a:normAutofit/>
-          </a:bodyPr>
-          <a:lstStyle/>
-          <a:p>
-            <a:pPr algn="l"/>
-            <a:r>
-              <a:rPr sz="1400" b="0" i="0">
-                <a:solidFill>
-                  <a:srgbClr val="191D2E"/>
-                </a:solidFill>
-                <a:latin typeface="Georgia"/>
-              </a:rPr>
-              <a:t>Typische Transferbarrieren analysieren und Gegenmaßnahmen ableiten</a:t>
-            </a:r>
-          </a:p>
-        </p:txBody>
-      </p:sp>
-      <p:sp>
-        <p:nvSpPr>
-          <p:cNvPr id="16" name="Rectangle 15"/>
-          <p:cNvSpPr/>
-          <p:nvPr/>
-        </p:nvSpPr>
-        <p:spPr>
-          <a:xfrm>
-            <a:off x="4064000" y="2984500"/>
-            <a:ext cx="7518399" cy="6350"/>
-          </a:xfrm>
-          <a:prstGeom prst="rect">
-            <a:avLst/>
-          </a:prstGeom>
-          <a:solidFill>
-            <a:srgbClr val="E0E0E8"/>
-          </a:solidFill>
-          <a:ln>
-            <a:noFill/>
-          </a:ln>
-        </p:spPr>
-        <p:style>
-          <a:lnRef idx="1">
-            <a:schemeClr val="accent1"/>
-          </a:lnRef>
-          <a:fillRef idx="3">
-            <a:schemeClr val="accent1"/>
-          </a:fillRef>
-          <a:effectRef idx="2">
-            <a:schemeClr val="accent1"/>
-          </a:effectRef>
-          <a:fontRef idx="minor">
-            <a:schemeClr val="lt1"/>
-          </a:fontRef>
-        </p:style>
-        <p:txBody>
-          <a:bodyPr rtlCol="0" anchor="ctr"/>
-          <a:lstStyle/>
-          <a:p>
-            <a:pPr algn="ctr"/>
-          </a:p>
-        </p:txBody>
-      </p:sp>
-      <p:sp>
-        <p:nvSpPr>
-          <p:cNvPr id="17" name="TextBox 16"/>
-          <p:cNvSpPr txBox="1"/>
-          <p:nvPr/>
-        </p:nvSpPr>
-        <p:spPr>
-          <a:xfrm>
-            <a:off x="4064000" y="3035300"/>
-            <a:ext cx="762000" cy="647700"/>
-          </a:xfrm>
-          <a:prstGeom prst="rect">
-            <a:avLst/>
-          </a:prstGeom>
-          <a:noFill/>
-        </p:spPr>
-        <p:txBody>
-          <a:bodyPr wrap="none">
-            <a:normAutofit/>
-          </a:bodyPr>
-          <a:lstStyle/>
-          <a:p>
-            <a:pPr algn="l"/>
-            <a:r>
-              <a:rPr sz="2400" b="0" i="1">
-                <a:solidFill>
-                  <a:srgbClr val="1F2B56"/>
-                </a:solidFill>
-                <a:latin typeface="Georgia"/>
-              </a:rPr>
-              <a:t>IV</a:t>
-            </a:r>
-          </a:p>
-        </p:txBody>
-      </p:sp>
-      <p:sp>
-        <p:nvSpPr>
-          <p:cNvPr id="18" name="TextBox 17"/>
-          <p:cNvSpPr txBox="1"/>
-          <p:nvPr/>
-        </p:nvSpPr>
-        <p:spPr>
-          <a:xfrm>
-            <a:off x="4953000" y="3048000"/>
-            <a:ext cx="6629400" cy="635000"/>
-          </a:xfrm>
-          <a:prstGeom prst="rect">
-            <a:avLst/>
-          </a:prstGeom>
-          <a:noFill/>
-        </p:spPr>
-        <p:txBody>
-          <a:bodyPr wrap="square">
-            <a:normAutofit/>
-          </a:bodyPr>
-          <a:lstStyle/>
-          <a:p>
-            <a:pPr algn="l"/>
-            <a:r>
-              <a:rPr sz="1400" b="0" i="0">
-                <a:solidFill>
-                  <a:srgbClr val="191D2E"/>
-                </a:solidFill>
-                <a:latin typeface="Georgia"/>
-              </a:rPr>
-              <a:t>Eine geeignete Wissenstransfer-Routine für den Teamkontext auswählen und die Wahl anhand von Transferbarrieren begründen</a:t>
-            </a:r>
-          </a:p>
-        </p:txBody>
-      </p:sp>
-      <p:sp>
-        <p:nvSpPr>
-          <p:cNvPr id="19" name="Rectangle 18"/>
-          <p:cNvSpPr/>
-          <p:nvPr/>
-        </p:nvSpPr>
-        <p:spPr>
-          <a:xfrm>
-            <a:off x="4064000" y="3683000"/>
-            <a:ext cx="7518399" cy="6350"/>
-          </a:xfrm>
-          <a:prstGeom prst="rect">
-            <a:avLst/>
-          </a:prstGeom>
-          <a:solidFill>
-            <a:srgbClr val="E0E0E8"/>
-          </a:solidFill>
-          <a:ln>
-            <a:noFill/>
-          </a:ln>
-        </p:spPr>
-        <p:style>
-          <a:lnRef idx="1">
-            <a:schemeClr val="accent1"/>
-          </a:lnRef>
-          <a:fillRef idx="3">
-            <a:schemeClr val="accent1"/>
-          </a:fillRef>
-          <a:effectRef idx="2">
-            <a:schemeClr val="accent1"/>
-          </a:effectRef>
-          <a:fontRef idx="minor">
-            <a:schemeClr val="lt1"/>
-          </a:fontRef>
-        </p:style>
-        <p:txBody>
-          <a:bodyPr rtlCol="0" anchor="ctr"/>
-          <a:lstStyle/>
-          <a:p>
-            <a:pPr algn="ctr"/>
-          </a:p>
-        </p:txBody>
-      </p:sp>
-      <p:sp>
-        <p:nvSpPr>
-          <p:cNvPr id="20" name="TextBox 19"/>
-          <p:cNvSpPr txBox="1"/>
-          <p:nvPr/>
-        </p:nvSpPr>
-        <p:spPr>
-          <a:xfrm>
-            <a:off x="4064000" y="3733799"/>
-            <a:ext cx="762000" cy="647700"/>
-          </a:xfrm>
-          <a:prstGeom prst="rect">
-            <a:avLst/>
-          </a:prstGeom>
-          <a:noFill/>
-        </p:spPr>
-        <p:txBody>
-          <a:bodyPr wrap="none">
-            <a:normAutofit/>
-          </a:bodyPr>
-          <a:lstStyle/>
-          <a:p>
-            <a:pPr algn="l"/>
-            <a:r>
-              <a:rPr sz="2400" b="0" i="1">
-                <a:solidFill>
-                  <a:srgbClr val="1F2B56"/>
-                </a:solidFill>
-                <a:latin typeface="Georgia"/>
-              </a:rPr>
-              <a:t>V</a:t>
-            </a:r>
-          </a:p>
-        </p:txBody>
-      </p:sp>
-      <p:sp>
-        <p:nvSpPr>
-          <p:cNvPr id="21" name="TextBox 20"/>
-          <p:cNvSpPr txBox="1"/>
-          <p:nvPr/>
-        </p:nvSpPr>
-        <p:spPr>
-          <a:xfrm>
-            <a:off x="4953000" y="3746500"/>
-            <a:ext cx="6629400" cy="635000"/>
-          </a:xfrm>
-          <a:prstGeom prst="rect">
-            <a:avLst/>
-          </a:prstGeom>
-          <a:noFill/>
-        </p:spPr>
-        <p:txBody>
-          <a:bodyPr wrap="square">
-            <a:normAutofit/>
-          </a:bodyPr>
-          <a:lstStyle/>
-          <a:p>
-            <a:pPr algn="l"/>
-            <a:r>
-              <a:rPr sz="1400" b="0" i="0">
-                <a:solidFill>
-                  <a:srgbClr val="191D2E"/>
-                </a:solidFill>
-                <a:latin typeface="Georgia"/>
-              </a:rPr>
-              <a:t>Den Nutzen des Teams als Community of Practice bewerten und konkrete Stärkungsschritte begründen</a:t>
+              <a:t>Benedikt Zoller Coaching  ·  FKB Campus  ·  M19</a:t>
             </a:r>
           </a:p>
         </p:txBody>
@@ -5440,14 +5663,6 @@
 <file path=ppt/slides/slide3.xml><?xml version="1.0" encoding="utf-8"?>
 <p:sld xmlns:a="http://schemas.openxmlformats.org/drawingml/2006/main" xmlns:p="http://schemas.openxmlformats.org/presentationml/2006/main" xmlns:r="http://schemas.openxmlformats.org/officeDocument/2006/relationships">
   <p:cSld>
-    <p:bg>
-      <p:bgPr>
-        <a:solidFill>
-          <a:srgbClr val="1F2B56"/>
-        </a:solidFill>
-        <a:effectLst/>
-      </p:bgPr>
-    </p:bg>
     <p:spTree>
       <p:nvGrpSpPr>
         <p:cNvPr id="1" name=""/>
@@ -5457,71 +5672,87 @@
       <p:grpSpPr/>
       <p:sp>
         <p:nvSpPr>
-          <p:cNvPr id="2" name="TextBox 1"/>
-          <p:cNvSpPr txBox="1"/>
-          <p:nvPr/>
-        </p:nvSpPr>
-        <p:spPr>
-          <a:xfrm>
-            <a:off x="609600" y="279400"/>
-            <a:ext cx="2540000" cy="279400"/>
-          </a:xfrm>
-          <a:prstGeom prst="rect">
-            <a:avLst/>
-          </a:prstGeom>
-          <a:noFill/>
-        </p:spPr>
-        <p:txBody>
-          <a:bodyPr wrap="square">
-            <a:normAutofit/>
-          </a:bodyPr>
-          <a:lstStyle/>
-          <a:p>
-            <a:pPr algn="l"/>
-            <a:r>
-              <a:rPr sz="1000" b="1" i="0">
-                <a:solidFill>
-                  <a:srgbClr val="F8F8FA"/>
-                </a:solidFill>
-                <a:latin typeface="Arial"/>
-              </a:rPr>
-              <a:t>FKB  Campus</a:t>
-            </a:r>
-          </a:p>
-        </p:txBody>
-      </p:sp>
-      <p:sp>
-        <p:nvSpPr>
-          <p:cNvPr id="3" name="TextBox 2"/>
-          <p:cNvSpPr txBox="1"/>
-          <p:nvPr/>
-        </p:nvSpPr>
-        <p:spPr>
-          <a:xfrm>
-            <a:off x="609600" y="279400"/>
-            <a:ext cx="10972800" cy="279400"/>
-          </a:xfrm>
-          <a:prstGeom prst="rect">
-            <a:avLst/>
-          </a:prstGeom>
-          <a:noFill/>
-        </p:spPr>
-        <p:txBody>
-          <a:bodyPr wrap="square">
-            <a:normAutofit/>
-          </a:bodyPr>
-          <a:lstStyle/>
-          <a:p>
-            <a:pPr algn="r"/>
-            <a:r>
-              <a:rPr sz="900" b="0" i="0">
-                <a:solidFill>
-                  <a:srgbClr val="7B7FA0"/>
-                </a:solidFill>
-                <a:latin typeface="Courier New"/>
-              </a:rPr>
-              <a:t>WAS EXPERTEN WISSEN — UND NICHT AUFSCHREIBEN</a:t>
-            </a:r>
+          <p:cNvPr id="2" name="Rectangle 1"/>
+          <p:cNvSpPr/>
+          <p:nvPr/>
+        </p:nvSpPr>
+        <p:spPr>
+          <a:xfrm>
+            <a:off x="0" y="0"/>
+            <a:ext cx="12188952" cy="6858000"/>
+          </a:xfrm>
+          <a:prstGeom prst="rect">
+            <a:avLst/>
+          </a:prstGeom>
+          <a:solidFill>
+            <a:srgbClr val="FFFFFF"/>
+          </a:solidFill>
+          <a:ln>
+            <a:noFill/>
+          </a:ln>
+        </p:spPr>
+        <p:style>
+          <a:lnRef idx="1">
+            <a:schemeClr val="accent1"/>
+          </a:lnRef>
+          <a:fillRef idx="3">
+            <a:schemeClr val="accent1"/>
+          </a:fillRef>
+          <a:effectRef idx="2">
+            <a:schemeClr val="accent1"/>
+          </a:effectRef>
+          <a:fontRef idx="minor">
+            <a:schemeClr val="lt1"/>
+          </a:fontRef>
+        </p:style>
+        <p:txBody>
+          <a:bodyPr rtlCol="0" anchor="ctr"/>
+          <a:lstStyle/>
+          <a:p>
+            <a:pPr algn="ctr"/>
+          </a:p>
+        </p:txBody>
+      </p:sp>
+      <p:sp>
+        <p:nvSpPr>
+          <p:cNvPr id="3" name="Rectangle 2"/>
+          <p:cNvSpPr/>
+          <p:nvPr/>
+        </p:nvSpPr>
+        <p:spPr>
+          <a:xfrm>
+            <a:off x="0" y="0"/>
+            <a:ext cx="12188952" cy="50292"/>
+          </a:xfrm>
+          <a:prstGeom prst="rect">
+            <a:avLst/>
+          </a:prstGeom>
+          <a:solidFill>
+            <a:srgbClr val="1F2C56"/>
+          </a:solidFill>
+          <a:ln>
+            <a:noFill/>
+          </a:ln>
+        </p:spPr>
+        <p:style>
+          <a:lnRef idx="1">
+            <a:schemeClr val="accent1"/>
+          </a:lnRef>
+          <a:fillRef idx="3">
+            <a:schemeClr val="accent1"/>
+          </a:fillRef>
+          <a:effectRef idx="2">
+            <a:schemeClr val="accent1"/>
+          </a:effectRef>
+          <a:fontRef idx="minor">
+            <a:schemeClr val="lt1"/>
+          </a:fontRef>
+        </p:style>
+        <p:txBody>
+          <a:bodyPr rtlCol="0" anchor="ctr"/>
+          <a:lstStyle/>
+          <a:p>
+            <a:pPr algn="ctr"/>
           </a:p>
         </p:txBody>
       </p:sp>
@@ -5533,8 +5764,8 @@
         </p:nvSpPr>
         <p:spPr>
           <a:xfrm>
-            <a:off x="609600" y="6426200"/>
-            <a:ext cx="10972800" cy="228600"/>
+            <a:off x="685800" y="109728"/>
+            <a:ext cx="10817352" cy="228600"/>
           </a:xfrm>
           <a:prstGeom prst="rect">
             <a:avLst/>
@@ -5542,20 +5773,20 @@
           <a:noFill/>
         </p:spPr>
         <p:txBody>
-          <a:bodyPr wrap="square">
-            <a:normAutofit/>
+          <a:bodyPr wrap="none">
+            <a:spAutoFit/>
           </a:bodyPr>
           <a:lstStyle/>
           <a:p>
-            <a:pPr algn="r"/>
-            <a:r>
-              <a:rPr sz="900" b="0" i="0">
-                <a:solidFill>
-                  <a:srgbClr val="7B7FA0"/>
-                </a:solidFill>
-                <a:latin typeface="Courier New"/>
+            <a:pPr algn="l"/>
+            <a:r>
+              <a:rPr sz="750">
+                <a:solidFill>
+                  <a:srgbClr val="78808C"/>
+                </a:solidFill>
+                <a:latin typeface="JetBrains Mono"/>
               </a:rPr>
-              <a:t>03</a:t>
+              <a:t>M19  ·  SCHAUBILD</a:t>
             </a:r>
           </a:p>
         </p:txBody>
@@ -5568,8 +5799,8 @@
         </p:nvSpPr>
         <p:spPr>
           <a:xfrm>
-            <a:off x="609600" y="635000"/>
-            <a:ext cx="5461000" cy="5461000"/>
+            <a:off x="685800" y="502920"/>
+            <a:ext cx="10817352" cy="594360"/>
           </a:xfrm>
           <a:prstGeom prst="rect">
             <a:avLst/>
@@ -5578,33 +5809,143 @@
         </p:spPr>
         <p:txBody>
           <a:bodyPr wrap="square">
-            <a:normAutofit/>
+            <a:spAutoFit/>
           </a:bodyPr>
           <a:lstStyle/>
           <a:p>
             <a:pPr algn="l"/>
             <a:r>
-              <a:rPr sz="28000" b="0" i="1">
-                <a:solidFill>
-                  <a:srgbClr val="D9BF7A"/>
-                </a:solidFill>
-                <a:latin typeface="Georgia"/>
+              <a:rPr sz="2000" b="1" i="0">
+                <a:solidFill>
+                  <a:srgbClr val="1F2C56"/>
+                </a:solidFill>
+                <a:latin typeface="Source Serif 4"/>
               </a:rPr>
-              <a:t>I</a:t>
-            </a:r>
-          </a:p>
-        </p:txBody>
-      </p:sp>
-      <p:sp>
-        <p:nvSpPr>
-          <p:cNvPr id="6" name="TextBox 5"/>
+              <a:t>SECI-Modell Wissensspirale nach Nonaka &amp; Takeuchi</a:t>
+            </a:r>
+          </a:p>
+        </p:txBody>
+      </p:sp>
+      <p:sp>
+        <p:nvSpPr>
+          <p:cNvPr id="6" name="Rectangle 5"/>
+          <p:cNvSpPr/>
+          <p:nvPr/>
+        </p:nvSpPr>
+        <p:spPr>
+          <a:xfrm>
+            <a:off x="685800" y="1143000"/>
+            <a:ext cx="10817352" cy="25400"/>
+          </a:xfrm>
+          <a:prstGeom prst="rect">
+            <a:avLst/>
+          </a:prstGeom>
+          <a:solidFill>
+            <a:srgbClr val="D9C089"/>
+          </a:solidFill>
+          <a:ln>
+            <a:noFill/>
+          </a:ln>
+        </p:spPr>
+        <p:style>
+          <a:lnRef idx="1">
+            <a:schemeClr val="accent1"/>
+          </a:lnRef>
+          <a:fillRef idx="3">
+            <a:schemeClr val="accent1"/>
+          </a:fillRef>
+          <a:effectRef idx="2">
+            <a:schemeClr val="accent1"/>
+          </a:effectRef>
+          <a:fontRef idx="minor">
+            <a:schemeClr val="lt1"/>
+          </a:fontRef>
+        </p:style>
+        <p:txBody>
+          <a:bodyPr rtlCol="0" anchor="ctr"/>
+          <a:lstStyle/>
+          <a:p>
+            <a:pPr algn="ctr"/>
+          </a:p>
+        </p:txBody>
+      </p:sp>
+      <p:pic>
+        <p:nvPicPr>
+          <p:cNvPr id="7" name="Picture 6" descr="image.png"/>
+          <p:cNvPicPr>
+            <a:picLocks noChangeAspect="1"/>
+          </p:cNvPicPr>
+          <p:nvPr/>
+        </p:nvPicPr>
+        <p:blipFill>
+          <a:blip r:embed="rId2"/>
+          <a:stretch>
+            <a:fillRect/>
+          </a:stretch>
+        </p:blipFill>
+        <p:spPr>
+          <a:xfrm>
+            <a:off x="2554863" y="1325880"/>
+            <a:ext cx="7079225" cy="4937760"/>
+          </a:xfrm>
+          <a:prstGeom prst="rect">
+            <a:avLst/>
+          </a:prstGeom>
+        </p:spPr>
+      </p:pic>
+      <p:sp>
+        <p:nvSpPr>
+          <p:cNvPr id="8" name="Rectangle 7"/>
+          <p:cNvSpPr/>
+          <p:nvPr/>
+        </p:nvSpPr>
+        <p:spPr>
+          <a:xfrm>
+            <a:off x="0" y="6510528"/>
+            <a:ext cx="12188952" cy="347472"/>
+          </a:xfrm>
+          <a:prstGeom prst="rect">
+            <a:avLst/>
+          </a:prstGeom>
+          <a:solidFill>
+            <a:srgbClr val="0A1937"/>
+          </a:solidFill>
+          <a:ln>
+            <a:noFill/>
+          </a:ln>
+        </p:spPr>
+        <p:style>
+          <a:lnRef idx="1">
+            <a:schemeClr val="accent1"/>
+          </a:lnRef>
+          <a:fillRef idx="3">
+            <a:schemeClr val="accent1"/>
+          </a:fillRef>
+          <a:effectRef idx="2">
+            <a:schemeClr val="accent1"/>
+          </a:effectRef>
+          <a:fontRef idx="minor">
+            <a:schemeClr val="lt1"/>
+          </a:fontRef>
+        </p:style>
+        <p:txBody>
+          <a:bodyPr rtlCol="0" anchor="ctr"/>
+          <a:lstStyle/>
+          <a:p>
+            <a:pPr algn="ctr"/>
+          </a:p>
+        </p:txBody>
+      </p:sp>
+      <p:sp>
+        <p:nvSpPr>
+          <p:cNvPr id="9" name="TextBox 8"/>
           <p:cNvSpPr txBox="1"/>
           <p:nvPr/>
         </p:nvSpPr>
         <p:spPr>
           <a:xfrm>
-            <a:off x="6731000" y="4064000"/>
-            <a:ext cx="4851400" cy="1778000"/>
+            <a:off x="685800" y="6583680"/>
+            <a:ext cx="6490411" cy="256032"/>
           </a:xfrm>
           <a:prstGeom prst="rect">
             <a:avLst/>
@@ -5612,55 +5953,55 @@
           <a:noFill/>
         </p:spPr>
         <p:txBody>
-          <a:bodyPr wrap="square">
-            <a:normAutofit/>
+          <a:bodyPr wrap="none">
+            <a:spAutoFit/>
           </a:bodyPr>
           <a:lstStyle/>
           <a:p>
+            <a:pPr algn="l"/>
+            <a:r>
+              <a:rPr sz="700">
+                <a:solidFill>
+                  <a:srgbClr val="A0B4D2"/>
+                </a:solidFill>
+                <a:latin typeface="JetBrains Mono"/>
+              </a:rPr>
+              <a:t>Benedikt Zoller Coaching  ·  FKB Campus  ·  M19</a:t>
+            </a:r>
+          </a:p>
+        </p:txBody>
+      </p:sp>
+      <p:sp>
+        <p:nvSpPr>
+          <p:cNvPr id="10" name="TextBox 9"/>
+          <p:cNvSpPr txBox="1"/>
+          <p:nvPr/>
+        </p:nvSpPr>
+        <p:spPr>
+          <a:xfrm>
+            <a:off x="7176211" y="6583680"/>
+            <a:ext cx="4326940" cy="256032"/>
+          </a:xfrm>
+          <a:prstGeom prst="rect">
+            <a:avLst/>
+          </a:prstGeom>
+          <a:noFill/>
+        </p:spPr>
+        <p:txBody>
+          <a:bodyPr wrap="none">
+            <a:spAutoFit/>
+          </a:bodyPr>
+          <a:lstStyle/>
+          <a:p>
             <a:pPr algn="r"/>
             <a:r>
-              <a:rPr sz="3800" b="0" i="0">
-                <a:solidFill>
-                  <a:srgbClr val="F8F8FA"/>
-                </a:solidFill>
-                <a:latin typeface="Georgia"/>
+              <a:rPr sz="700">
+                <a:solidFill>
+                  <a:srgbClr val="A0B4D2"/>
+                </a:solidFill>
+                <a:latin typeface="JetBrains Mono"/>
               </a:rPr>
-              <a:t>Was Experten wissen — und nicht aufschreiben</a:t>
-            </a:r>
-          </a:p>
-        </p:txBody>
-      </p:sp>
-      <p:sp>
-        <p:nvSpPr>
-          <p:cNvPr id="7" name="TextBox 6"/>
-          <p:cNvSpPr txBox="1"/>
-          <p:nvPr/>
-        </p:nvSpPr>
-        <p:spPr>
-          <a:xfrm>
-            <a:off x="6731000" y="5842000"/>
-            <a:ext cx="4851400" cy="635000"/>
-          </a:xfrm>
-          <a:prstGeom prst="rect">
-            <a:avLst/>
-          </a:prstGeom>
-          <a:noFill/>
-        </p:spPr>
-        <p:txBody>
-          <a:bodyPr wrap="square">
-            <a:normAutofit/>
-          </a:bodyPr>
-          <a:lstStyle/>
-          <a:p>
-            <a:pPr algn="r"/>
-            <a:r>
-              <a:rPr sz="1400" b="0" i="1">
-                <a:solidFill>
-                  <a:srgbClr val="7B7FA0"/>
-                </a:solidFill>
-                <a:latin typeface="Georgia"/>
-              </a:rPr>
-              <a:t>Implizites Wissen als größter Schatz im Team</a:t>
+              <a:t>Schaubild</a:t>
             </a:r>
           </a:p>
         </p:txBody>
@@ -5676,14 +6017,6 @@
 <file path=ppt/slides/slide4.xml><?xml version="1.0" encoding="utf-8"?>
 <p:sld xmlns:a="http://schemas.openxmlformats.org/drawingml/2006/main" xmlns:p="http://schemas.openxmlformats.org/presentationml/2006/main" xmlns:r="http://schemas.openxmlformats.org/officeDocument/2006/relationships">
   <p:cSld>
-    <p:bg>
-      <p:bgPr>
-        <a:solidFill>
-          <a:srgbClr val="F8F8FA"/>
-        </a:solidFill>
-        <a:effectLst/>
-      </p:bgPr>
-    </p:bg>
     <p:spTree>
       <p:nvGrpSpPr>
         <p:cNvPr id="1" name=""/>
@@ -5693,125 +6026,20 @@
       <p:grpSpPr/>
       <p:sp>
         <p:nvSpPr>
-          <p:cNvPr id="2" name="TextBox 1"/>
-          <p:cNvSpPr txBox="1"/>
-          <p:nvPr/>
-        </p:nvSpPr>
-        <p:spPr>
-          <a:xfrm>
-            <a:off x="609600" y="279400"/>
-            <a:ext cx="2540000" cy="279400"/>
-          </a:xfrm>
-          <a:prstGeom prst="rect">
-            <a:avLst/>
-          </a:prstGeom>
-          <a:noFill/>
-        </p:spPr>
-        <p:txBody>
-          <a:bodyPr wrap="square">
-            <a:normAutofit/>
-          </a:bodyPr>
-          <a:lstStyle/>
-          <a:p>
-            <a:pPr algn="l"/>
-            <a:r>
-              <a:rPr sz="1000" b="1" i="0">
-                <a:solidFill>
-                  <a:srgbClr val="191D2E"/>
-                </a:solidFill>
-                <a:latin typeface="Arial"/>
-              </a:rPr>
-              <a:t>FKB  Campus</a:t>
-            </a:r>
-          </a:p>
-        </p:txBody>
-      </p:sp>
-      <p:sp>
-        <p:nvSpPr>
-          <p:cNvPr id="3" name="TextBox 2"/>
-          <p:cNvSpPr txBox="1"/>
-          <p:nvPr/>
-        </p:nvSpPr>
-        <p:spPr>
-          <a:xfrm>
-            <a:off x="609600" y="279400"/>
-            <a:ext cx="10972800" cy="279400"/>
-          </a:xfrm>
-          <a:prstGeom prst="rect">
-            <a:avLst/>
-          </a:prstGeom>
-          <a:noFill/>
-        </p:spPr>
-        <p:txBody>
-          <a:bodyPr wrap="square">
-            <a:normAutofit/>
-          </a:bodyPr>
-          <a:lstStyle/>
-          <a:p>
-            <a:pPr algn="r"/>
-            <a:r>
-              <a:rPr sz="900" b="0" i="0">
-                <a:solidFill>
-                  <a:srgbClr val="7B7FA0"/>
-                </a:solidFill>
-                <a:latin typeface="Courier New"/>
-              </a:rPr>
-              <a:t>I · WAS EXPERTEN WISSEN — UND NICHT AUFSCHREIBEN</a:t>
-            </a:r>
-          </a:p>
-        </p:txBody>
-      </p:sp>
-      <p:sp>
-        <p:nvSpPr>
-          <p:cNvPr id="4" name="TextBox 3"/>
-          <p:cNvSpPr txBox="1"/>
-          <p:nvPr/>
-        </p:nvSpPr>
-        <p:spPr>
-          <a:xfrm>
-            <a:off x="609600" y="6426200"/>
-            <a:ext cx="10972800" cy="228600"/>
-          </a:xfrm>
-          <a:prstGeom prst="rect">
-            <a:avLst/>
-          </a:prstGeom>
-          <a:noFill/>
-        </p:spPr>
-        <p:txBody>
-          <a:bodyPr wrap="square">
-            <a:normAutofit/>
-          </a:bodyPr>
-          <a:lstStyle/>
-          <a:p>
-            <a:pPr algn="r"/>
-            <a:r>
-              <a:rPr sz="900" b="0" i="0">
-                <a:solidFill>
-                  <a:srgbClr val="7B7FA0"/>
-                </a:solidFill>
-                <a:latin typeface="Courier New"/>
-              </a:rPr>
-              <a:t>04</a:t>
-            </a:r>
-          </a:p>
-        </p:txBody>
-      </p:sp>
-      <p:sp>
-        <p:nvSpPr>
-          <p:cNvPr id="5" name="Rectangle 4"/>
+          <p:cNvPr id="2" name="Rectangle 1"/>
           <p:cNvSpPr/>
           <p:nvPr/>
         </p:nvSpPr>
         <p:spPr>
           <a:xfrm>
-            <a:off x="609600" y="825500"/>
-            <a:ext cx="10972800" cy="6350"/>
+            <a:off x="0" y="0"/>
+            <a:ext cx="12188952" cy="6858000"/>
           </a:xfrm>
           <a:prstGeom prst="rect">
             <a:avLst/>
           </a:prstGeom>
           <a:solidFill>
-            <a:srgbClr val="191D2E"/>
+            <a:srgbClr val="FFFFFF"/>
           </a:solidFill>
           <a:ln>
             <a:noFill/>
@@ -5841,90 +6069,20 @@
       </p:sp>
       <p:sp>
         <p:nvSpPr>
-          <p:cNvPr id="6" name="TextBox 5"/>
-          <p:cNvSpPr txBox="1"/>
-          <p:nvPr/>
-        </p:nvSpPr>
-        <p:spPr>
-          <a:xfrm>
-            <a:off x="609600" y="889000"/>
-            <a:ext cx="3810000" cy="177800"/>
-          </a:xfrm>
-          <a:prstGeom prst="rect">
-            <a:avLst/>
-          </a:prstGeom>
-          <a:noFill/>
-        </p:spPr>
-        <p:txBody>
-          <a:bodyPr wrap="square">
-            <a:normAutofit/>
-          </a:bodyPr>
-          <a:lstStyle/>
-          <a:p>
-            <a:pPr algn="l"/>
-            <a:r>
-              <a:rPr sz="900" b="0" i="0">
-                <a:solidFill>
-                  <a:srgbClr val="7B7FA0"/>
-                </a:solidFill>
-                <a:latin typeface="Courier New"/>
-              </a:rPr>
-              <a:t>Kernaussage</a:t>
-            </a:r>
-          </a:p>
-        </p:txBody>
-      </p:sp>
-      <p:sp>
-        <p:nvSpPr>
-          <p:cNvPr id="7" name="TextBox 6"/>
-          <p:cNvSpPr txBox="1"/>
-          <p:nvPr/>
-        </p:nvSpPr>
-        <p:spPr>
-          <a:xfrm>
-            <a:off x="609600" y="920750"/>
-            <a:ext cx="10972800" cy="1778000"/>
-          </a:xfrm>
-          <a:prstGeom prst="rect">
-            <a:avLst/>
-          </a:prstGeom>
-          <a:noFill/>
-        </p:spPr>
-        <p:txBody>
-          <a:bodyPr wrap="square">
-            <a:normAutofit/>
-          </a:bodyPr>
-          <a:lstStyle/>
-          <a:p>
-            <a:pPr algn="l"/>
-            <a:r>
-              <a:rPr sz="3800" b="0" i="0">
-                <a:solidFill>
-                  <a:srgbClr val="191D2E"/>
-                </a:solidFill>
-                <a:latin typeface="Georgia"/>
-              </a:rPr>
-              <a:t>Explizit vs. implizit: Der Unterschied entscheidet</a:t>
-            </a:r>
-          </a:p>
-        </p:txBody>
-      </p:sp>
-      <p:sp>
-        <p:nvSpPr>
-          <p:cNvPr id="8" name="Rectangle 7"/>
+          <p:cNvPr id="3" name="Rectangle 2"/>
           <p:cNvSpPr/>
           <p:nvPr/>
         </p:nvSpPr>
         <p:spPr>
           <a:xfrm>
-            <a:off x="609600" y="2762250"/>
-            <a:ext cx="10972800" cy="6350"/>
+            <a:off x="0" y="0"/>
+            <a:ext cx="12188952" cy="50292"/>
           </a:xfrm>
           <a:prstGeom prst="rect">
             <a:avLst/>
           </a:prstGeom>
           <a:solidFill>
-            <a:srgbClr val="191D2E"/>
+            <a:srgbClr val="1F2C56"/>
           </a:solidFill>
           <a:ln>
             <a:noFill/>
@@ -5954,14 +6112,194 @@
       </p:sp>
       <p:sp>
         <p:nvSpPr>
+          <p:cNvPr id="4" name="TextBox 3"/>
+          <p:cNvSpPr txBox="1"/>
+          <p:nvPr/>
+        </p:nvSpPr>
+        <p:spPr>
+          <a:xfrm>
+            <a:off x="685800" y="109728"/>
+            <a:ext cx="10817352" cy="228600"/>
+          </a:xfrm>
+          <a:prstGeom prst="rect">
+            <a:avLst/>
+          </a:prstGeom>
+          <a:noFill/>
+        </p:spPr>
+        <p:txBody>
+          <a:bodyPr wrap="none">
+            <a:spAutoFit/>
+          </a:bodyPr>
+          <a:lstStyle/>
+          <a:p>
+            <a:pPr algn="l"/>
+            <a:r>
+              <a:rPr sz="750">
+                <a:solidFill>
+                  <a:srgbClr val="78808C"/>
+                </a:solidFill>
+                <a:latin typeface="JetBrains Mono"/>
+              </a:rPr>
+              <a:t>M19  ·  SCHAUBILD</a:t>
+            </a:r>
+          </a:p>
+        </p:txBody>
+      </p:sp>
+      <p:sp>
+        <p:nvSpPr>
+          <p:cNvPr id="5" name="TextBox 4"/>
+          <p:cNvSpPr txBox="1"/>
+          <p:nvPr/>
+        </p:nvSpPr>
+        <p:spPr>
+          <a:xfrm>
+            <a:off x="685800" y="502920"/>
+            <a:ext cx="10817352" cy="594360"/>
+          </a:xfrm>
+          <a:prstGeom prst="rect">
+            <a:avLst/>
+          </a:prstGeom>
+          <a:noFill/>
+        </p:spPr>
+        <p:txBody>
+          <a:bodyPr wrap="square">
+            <a:spAutoFit/>
+          </a:bodyPr>
+          <a:lstStyle/>
+          <a:p>
+            <a:pPr algn="l"/>
+            <a:r>
+              <a:rPr sz="2000" b="1" i="0">
+                <a:solidFill>
+                  <a:srgbClr val="1F2C56"/>
+                </a:solidFill>
+                <a:latin typeface="Source Serif 4"/>
+              </a:rPr>
+              <a:t>Kolb-Lernzyklus</a:t>
+            </a:r>
+          </a:p>
+        </p:txBody>
+      </p:sp>
+      <p:sp>
+        <p:nvSpPr>
+          <p:cNvPr id="6" name="Rectangle 5"/>
+          <p:cNvSpPr/>
+          <p:nvPr/>
+        </p:nvSpPr>
+        <p:spPr>
+          <a:xfrm>
+            <a:off x="685800" y="1143000"/>
+            <a:ext cx="10817352" cy="25400"/>
+          </a:xfrm>
+          <a:prstGeom prst="rect">
+            <a:avLst/>
+          </a:prstGeom>
+          <a:solidFill>
+            <a:srgbClr val="D9C089"/>
+          </a:solidFill>
+          <a:ln>
+            <a:noFill/>
+          </a:ln>
+        </p:spPr>
+        <p:style>
+          <a:lnRef idx="1">
+            <a:schemeClr val="accent1"/>
+          </a:lnRef>
+          <a:fillRef idx="3">
+            <a:schemeClr val="accent1"/>
+          </a:fillRef>
+          <a:effectRef idx="2">
+            <a:schemeClr val="accent1"/>
+          </a:effectRef>
+          <a:fontRef idx="minor">
+            <a:schemeClr val="lt1"/>
+          </a:fontRef>
+        </p:style>
+        <p:txBody>
+          <a:bodyPr rtlCol="0" anchor="ctr"/>
+          <a:lstStyle/>
+          <a:p>
+            <a:pPr algn="ctr"/>
+          </a:p>
+        </p:txBody>
+      </p:sp>
+      <p:pic>
+        <p:nvPicPr>
+          <p:cNvPr id="7" name="Picture 6" descr="image.png"/>
+          <p:cNvPicPr>
+            <a:picLocks noChangeAspect="1"/>
+          </p:cNvPicPr>
+          <p:nvPr/>
+        </p:nvPicPr>
+        <p:blipFill>
+          <a:blip r:embed="rId2"/>
+          <a:stretch>
+            <a:fillRect/>
+          </a:stretch>
+        </p:blipFill>
+        <p:spPr>
+          <a:xfrm>
+            <a:off x="2554863" y="1325880"/>
+            <a:ext cx="7079225" cy="4937760"/>
+          </a:xfrm>
+          <a:prstGeom prst="rect">
+            <a:avLst/>
+          </a:prstGeom>
+        </p:spPr>
+      </p:pic>
+      <p:sp>
+        <p:nvSpPr>
+          <p:cNvPr id="8" name="Rectangle 7"/>
+          <p:cNvSpPr/>
+          <p:nvPr/>
+        </p:nvSpPr>
+        <p:spPr>
+          <a:xfrm>
+            <a:off x="0" y="6510528"/>
+            <a:ext cx="12188952" cy="347472"/>
+          </a:xfrm>
+          <a:prstGeom prst="rect">
+            <a:avLst/>
+          </a:prstGeom>
+          <a:solidFill>
+            <a:srgbClr val="0A1937"/>
+          </a:solidFill>
+          <a:ln>
+            <a:noFill/>
+          </a:ln>
+        </p:spPr>
+        <p:style>
+          <a:lnRef idx="1">
+            <a:schemeClr val="accent1"/>
+          </a:lnRef>
+          <a:fillRef idx="3">
+            <a:schemeClr val="accent1"/>
+          </a:fillRef>
+          <a:effectRef idx="2">
+            <a:schemeClr val="accent1"/>
+          </a:effectRef>
+          <a:fontRef idx="minor">
+            <a:schemeClr val="lt1"/>
+          </a:fontRef>
+        </p:style>
+        <p:txBody>
+          <a:bodyPr rtlCol="0" anchor="ctr"/>
+          <a:lstStyle/>
+          <a:p>
+            <a:pPr algn="ctr"/>
+          </a:p>
+        </p:txBody>
+      </p:sp>
+      <p:sp>
+        <p:nvSpPr>
           <p:cNvPr id="9" name="TextBox 8"/>
           <p:cNvSpPr txBox="1"/>
           <p:nvPr/>
         </p:nvSpPr>
         <p:spPr>
           <a:xfrm>
-            <a:off x="609600" y="2825750"/>
-            <a:ext cx="5207000" cy="2857500"/>
+            <a:off x="685800" y="6583680"/>
+            <a:ext cx="6490411" cy="256032"/>
           </a:xfrm>
           <a:prstGeom prst="rect">
             <a:avLst/>
@@ -5969,20 +6307,20 @@
           <a:noFill/>
         </p:spPr>
         <p:txBody>
-          <a:bodyPr wrap="square">
-            <a:normAutofit/>
+          <a:bodyPr wrap="none">
+            <a:spAutoFit/>
           </a:bodyPr>
           <a:lstStyle/>
           <a:p>
             <a:pPr algn="l"/>
             <a:r>
-              <a:rPr sz="1400" b="0" i="0">
-                <a:solidFill>
-                  <a:srgbClr val="191D2E"/>
-                </a:solidFill>
-                <a:latin typeface="Georgia"/>
+              <a:rPr sz="700">
+                <a:solidFill>
+                  <a:srgbClr val="A0B4D2"/>
+                </a:solidFill>
+                <a:latin typeface="JetBrains Mono"/>
               </a:rPr>
-              <a:t>Explizites Wissen steht in Handbüchern. Implizites Wissen steckt im Kopf des erfahrenen Beraters: Wie man schwierige Gespräche dreht. Welcher Unternehmer-Typ welche Frage braucht. Was bei Branche X wirklich zählt.</a:t>
+              <a:t>Benedikt Zoller Coaching  ·  FKB Campus  ·  M19</a:t>
             </a:r>
           </a:p>
         </p:txBody>
@@ -5995,8 +6333,8 @@
         </p:nvSpPr>
         <p:spPr>
           <a:xfrm>
-            <a:off x="6096000" y="2825750"/>
-            <a:ext cx="4851400" cy="177800"/>
+            <a:off x="7176211" y="6583680"/>
+            <a:ext cx="4326940" cy="256032"/>
           </a:xfrm>
           <a:prstGeom prst="rect">
             <a:avLst/>
@@ -6004,55 +6342,20 @@
           <a:noFill/>
         </p:spPr>
         <p:txBody>
-          <a:bodyPr wrap="square">
-            <a:normAutofit/>
+          <a:bodyPr wrap="none">
+            <a:spAutoFit/>
           </a:bodyPr>
           <a:lstStyle/>
           <a:p>
-            <a:pPr algn="l"/>
-            <a:r>
-              <a:rPr sz="900" b="0" i="0">
-                <a:solidFill>
-                  <a:srgbClr val="1F2B56"/>
-                </a:solidFill>
-                <a:latin typeface="Courier New"/>
+            <a:pPr algn="r"/>
+            <a:r>
+              <a:rPr sz="700">
+                <a:solidFill>
+                  <a:srgbClr val="A0B4D2"/>
+                </a:solidFill>
+                <a:latin typeface="JetBrains Mono"/>
               </a:rPr>
-              <a:t>Mitnahme</a:t>
-            </a:r>
-          </a:p>
-        </p:txBody>
-      </p:sp>
-      <p:sp>
-        <p:nvSpPr>
-          <p:cNvPr id="11" name="TextBox 10"/>
-          <p:cNvSpPr txBox="1"/>
-          <p:nvPr/>
-        </p:nvSpPr>
-        <p:spPr>
-          <a:xfrm>
-            <a:off x="6096000" y="3041650"/>
-            <a:ext cx="4851400" cy="2667000"/>
-          </a:xfrm>
-          <a:prstGeom prst="rect">
-            <a:avLst/>
-          </a:prstGeom>
-          <a:noFill/>
-        </p:spPr>
-        <p:txBody>
-          <a:bodyPr wrap="square">
-            <a:normAutofit/>
-          </a:bodyPr>
-          <a:lstStyle/>
-          <a:p>
-            <a:pPr algn="l"/>
-            <a:r>
-              <a:rPr sz="1400" b="0" i="1">
-                <a:solidFill>
-                  <a:srgbClr val="191D2E"/>
-                </a:solidFill>
-                <a:latin typeface="Georgia"/>
-              </a:rPr>
-              <a:t>Wenn erfahrene Berater das Team verlassen, geht dieses Wissen verloren — es sei denn, das Team hat es zuvor systematisch geteilt.</a:t>
+              <a:t>Schaubild</a:t>
             </a:r>
           </a:p>
         </p:txBody>
@@ -6068,14 +6371,6 @@
 <file path=ppt/slides/slide5.xml><?xml version="1.0" encoding="utf-8"?>
 <p:sld xmlns:a="http://schemas.openxmlformats.org/drawingml/2006/main" xmlns:p="http://schemas.openxmlformats.org/presentationml/2006/main" xmlns:r="http://schemas.openxmlformats.org/officeDocument/2006/relationships">
   <p:cSld>
-    <p:bg>
-      <p:bgPr>
-        <a:solidFill>
-          <a:srgbClr val="1F2B56"/>
-        </a:solidFill>
-        <a:effectLst/>
-      </p:bgPr>
-    </p:bg>
     <p:spTree>
       <p:nvGrpSpPr>
         <p:cNvPr id="1" name=""/>
@@ -6085,14 +6380,100 @@
       <p:grpSpPr/>
       <p:sp>
         <p:nvSpPr>
-          <p:cNvPr id="2" name="TextBox 1"/>
+          <p:cNvPr id="2" name="Rectangle 1"/>
+          <p:cNvSpPr/>
+          <p:nvPr/>
+        </p:nvSpPr>
+        <p:spPr>
+          <a:xfrm>
+            <a:off x="0" y="0"/>
+            <a:ext cx="12188952" cy="6858000"/>
+          </a:xfrm>
+          <a:prstGeom prst="rect">
+            <a:avLst/>
+          </a:prstGeom>
+          <a:solidFill>
+            <a:srgbClr val="EDEDF3"/>
+          </a:solidFill>
+          <a:ln>
+            <a:noFill/>
+          </a:ln>
+        </p:spPr>
+        <p:style>
+          <a:lnRef idx="1">
+            <a:schemeClr val="accent1"/>
+          </a:lnRef>
+          <a:fillRef idx="3">
+            <a:schemeClr val="accent1"/>
+          </a:fillRef>
+          <a:effectRef idx="2">
+            <a:schemeClr val="accent1"/>
+          </a:effectRef>
+          <a:fontRef idx="minor">
+            <a:schemeClr val="lt1"/>
+          </a:fontRef>
+        </p:style>
+        <p:txBody>
+          <a:bodyPr rtlCol="0" anchor="ctr"/>
+          <a:lstStyle/>
+          <a:p>
+            <a:pPr algn="ctr"/>
+          </a:p>
+        </p:txBody>
+      </p:sp>
+      <p:sp>
+        <p:nvSpPr>
+          <p:cNvPr id="3" name="Rectangle 2"/>
+          <p:cNvSpPr/>
+          <p:nvPr/>
+        </p:nvSpPr>
+        <p:spPr>
+          <a:xfrm>
+            <a:off x="0" y="0"/>
+            <a:ext cx="12188952" cy="50292"/>
+          </a:xfrm>
+          <a:prstGeom prst="rect">
+            <a:avLst/>
+          </a:prstGeom>
+          <a:solidFill>
+            <a:srgbClr val="1F2C56"/>
+          </a:solidFill>
+          <a:ln>
+            <a:noFill/>
+          </a:ln>
+        </p:spPr>
+        <p:style>
+          <a:lnRef idx="1">
+            <a:schemeClr val="accent1"/>
+          </a:lnRef>
+          <a:fillRef idx="3">
+            <a:schemeClr val="accent1"/>
+          </a:fillRef>
+          <a:effectRef idx="2">
+            <a:schemeClr val="accent1"/>
+          </a:effectRef>
+          <a:fontRef idx="minor">
+            <a:schemeClr val="lt1"/>
+          </a:fontRef>
+        </p:style>
+        <p:txBody>
+          <a:bodyPr rtlCol="0" anchor="ctr"/>
+          <a:lstStyle/>
+          <a:p>
+            <a:pPr algn="ctr"/>
+          </a:p>
+        </p:txBody>
+      </p:sp>
+      <p:sp>
+        <p:nvSpPr>
+          <p:cNvPr id="4" name="TextBox 3"/>
           <p:cNvSpPr txBox="1"/>
           <p:nvPr/>
         </p:nvSpPr>
         <p:spPr>
           <a:xfrm>
-            <a:off x="609600" y="279400"/>
-            <a:ext cx="2540000" cy="279400"/>
+            <a:off x="685800" y="109728"/>
+            <a:ext cx="10817352" cy="228600"/>
           </a:xfrm>
           <a:prstGeom prst="rect">
             <a:avLst/>
@@ -6100,34 +6481,354 @@
           <a:noFill/>
         </p:spPr>
         <p:txBody>
+          <a:bodyPr wrap="none">
+            <a:spAutoFit/>
+          </a:bodyPr>
+          <a:lstStyle/>
+          <a:p>
+            <a:pPr algn="l"/>
+            <a:r>
+              <a:rPr sz="750">
+                <a:solidFill>
+                  <a:srgbClr val="78808C"/>
+                </a:solidFill>
+                <a:latin typeface="JetBrains Mono"/>
+              </a:rPr>
+              <a:t>M19  ·  INHALT</a:t>
+            </a:r>
+          </a:p>
+        </p:txBody>
+      </p:sp>
+      <p:sp>
+        <p:nvSpPr>
+          <p:cNvPr id="5" name="Rectangle 4"/>
+          <p:cNvSpPr/>
+          <p:nvPr/>
+        </p:nvSpPr>
+        <p:spPr>
+          <a:xfrm>
+            <a:off x="0" y="1234440"/>
+            <a:ext cx="12188952" cy="12700"/>
+          </a:xfrm>
+          <a:prstGeom prst="rect">
+            <a:avLst/>
+          </a:prstGeom>
+          <a:solidFill>
+            <a:srgbClr val="D8DFE4"/>
+          </a:solidFill>
+          <a:ln>
+            <a:noFill/>
+          </a:ln>
+        </p:spPr>
+        <p:style>
+          <a:lnRef idx="1">
+            <a:schemeClr val="accent1"/>
+          </a:lnRef>
+          <a:fillRef idx="3">
+            <a:schemeClr val="accent1"/>
+          </a:fillRef>
+          <a:effectRef idx="2">
+            <a:schemeClr val="accent1"/>
+          </a:effectRef>
+          <a:fontRef idx="minor">
+            <a:schemeClr val="lt1"/>
+          </a:fontRef>
+        </p:style>
+        <p:txBody>
+          <a:bodyPr rtlCol="0" anchor="ctr"/>
+          <a:lstStyle/>
+          <a:p>
+            <a:pPr algn="ctr"/>
+          </a:p>
+        </p:txBody>
+      </p:sp>
+      <p:sp>
+        <p:nvSpPr>
+          <p:cNvPr id="6" name="Rectangle 5"/>
+          <p:cNvSpPr/>
+          <p:nvPr/>
+        </p:nvSpPr>
+        <p:spPr>
+          <a:xfrm>
+            <a:off x="685800" y="502920"/>
+            <a:ext cx="36576" cy="658368"/>
+          </a:xfrm>
+          <a:prstGeom prst="rect">
+            <a:avLst/>
+          </a:prstGeom>
+          <a:solidFill>
+            <a:srgbClr val="D9C089"/>
+          </a:solidFill>
+          <a:ln>
+            <a:noFill/>
+          </a:ln>
+        </p:spPr>
+        <p:style>
+          <a:lnRef idx="1">
+            <a:schemeClr val="accent1"/>
+          </a:lnRef>
+          <a:fillRef idx="3">
+            <a:schemeClr val="accent1"/>
+          </a:fillRef>
+          <a:effectRef idx="2">
+            <a:schemeClr val="accent1"/>
+          </a:effectRef>
+          <a:fontRef idx="minor">
+            <a:schemeClr val="lt1"/>
+          </a:fontRef>
+        </p:style>
+        <p:txBody>
+          <a:bodyPr rtlCol="0" anchor="ctr"/>
+          <a:lstStyle/>
+          <a:p>
+            <a:pPr algn="ctr"/>
+          </a:p>
+        </p:txBody>
+      </p:sp>
+      <p:sp>
+        <p:nvSpPr>
+          <p:cNvPr id="7" name="TextBox 6"/>
+          <p:cNvSpPr txBox="1"/>
+          <p:nvPr/>
+        </p:nvSpPr>
+        <p:spPr>
+          <a:xfrm>
+            <a:off x="813816" y="502920"/>
+            <a:ext cx="10634472" cy="685800"/>
+          </a:xfrm>
+          <a:prstGeom prst="rect">
+            <a:avLst/>
+          </a:prstGeom>
+          <a:noFill/>
+        </p:spPr>
+        <p:txBody>
           <a:bodyPr wrap="square">
-            <a:normAutofit/>
+            <a:spAutoFit/>
           </a:bodyPr>
           <a:lstStyle/>
           <a:p>
             <a:pPr algn="l"/>
             <a:r>
-              <a:rPr sz="1000" b="1" i="0">
-                <a:solidFill>
-                  <a:srgbClr val="F8F8FA"/>
+              <a:rPr sz="2400" b="1" i="0">
+                <a:solidFill>
+                  <a:srgbClr val="1F2C56"/>
+                </a:solidFill>
+                <a:latin typeface="Source Serif 4"/>
+              </a:rPr>
+              <a:t>Methode 1: Tandem-Kundenbesuch</a:t>
+            </a:r>
+          </a:p>
+        </p:txBody>
+      </p:sp>
+      <p:sp>
+        <p:nvSpPr>
+          <p:cNvPr id="8" name="TextBox 7"/>
+          <p:cNvSpPr txBox="1"/>
+          <p:nvPr/>
+        </p:nvSpPr>
+        <p:spPr>
+          <a:xfrm>
+            <a:off x="685800" y="1417320"/>
+            <a:ext cx="10817352" cy="5029200"/>
+          </a:xfrm>
+          <a:prstGeom prst="rect">
+            <a:avLst/>
+          </a:prstGeom>
+          <a:noFill/>
+        </p:spPr>
+        <p:txBody>
+          <a:bodyPr wrap="square">
+            <a:spAutoFit/>
+          </a:bodyPr>
+          <a:lstStyle/>
+          <a:p>
+            <a:pPr>
+              <a:spcBef>
+                <a:spcPts val="400"/>
+              </a:spcBef>
+              <a:spcAft>
+                <a:spcPts val="200"/>
+              </a:spcAft>
+            </a:pPr>
+            <a:r>
+              <a:rPr sz="1200">
+                <a:solidFill>
+                  <a:srgbClr val="3D5466"/>
                 </a:solidFill>
                 <a:latin typeface="Arial"/>
               </a:rPr>
-              <a:t>FKB  Campus</a:t>
-            </a:r>
-          </a:p>
-        </p:txBody>
-      </p:sp>
-      <p:sp>
-        <p:nvSpPr>
-          <p:cNvPr id="3" name="TextBox 2"/>
+              <a:t>Was: Zwei Berater besuchen gemeinsam einen Kunden – einer führt, einer beobachtet.</a:t>
+            </a:r>
+          </a:p>
+          <a:p>
+            <a:pPr>
+              <a:spcBef>
+                <a:spcPts val="400"/>
+              </a:spcBef>
+              <a:spcAft>
+                <a:spcPts val="200"/>
+              </a:spcAft>
+            </a:pPr>
+            <a:r>
+              <a:rPr sz="1200">
+                <a:solidFill>
+                  <a:srgbClr val="3D5466"/>
+                </a:solidFill>
+                <a:latin typeface="Arial"/>
+              </a:rPr>
+              <a:t>Wann: Bei speziellem Branchenwissen oder neuem Kundensegment.</a:t>
+            </a:r>
+          </a:p>
+          <a:p>
+            <a:pPr>
+              <a:spcBef>
+                <a:spcPts val="400"/>
+              </a:spcBef>
+              <a:spcAft>
+                <a:spcPts val="200"/>
+              </a:spcAft>
+            </a:pPr>
+            <a:r>
+              <a:rPr sz="1200">
+                <a:solidFill>
+                  <a:srgbClr val="3D5466"/>
+                </a:solidFill>
+                <a:latin typeface="Arial"/>
+              </a:rPr>
+              <a:t>Ablauf:</a:t>
+            </a:r>
+          </a:p>
+          <a:p>
+            <a:pPr>
+              <a:spcBef>
+                <a:spcPts val="400"/>
+              </a:spcBef>
+              <a:spcAft>
+                <a:spcPts val="200"/>
+              </a:spcAft>
+            </a:pPr>
+            <a:r>
+              <a:rPr sz="1300">
+                <a:solidFill>
+                  <a:srgbClr val="3D5466"/>
+                </a:solidFill>
+                <a:latin typeface="Arial"/>
+              </a:rPr>
+              <a:t>▸  Kurze Vorbesprechung (10 Min.): Wer übernimmt welche Rolle? Welche Beobachtungsaufgabe hat der Gast?</a:t>
+            </a:r>
+          </a:p>
+          <a:p>
+            <a:pPr>
+              <a:spcBef>
+                <a:spcPts val="400"/>
+              </a:spcBef>
+              <a:spcAft>
+                <a:spcPts val="200"/>
+              </a:spcAft>
+            </a:pPr>
+            <a:r>
+              <a:rPr sz="1300">
+                <a:solidFill>
+                  <a:srgbClr val="3D5466"/>
+                </a:solidFill>
+                <a:latin typeface="Arial"/>
+              </a:rPr>
+              <a:t>▸  Kundenbesuch (gemeinsam, einer führt)</a:t>
+            </a:r>
+          </a:p>
+          <a:p>
+            <a:pPr>
+              <a:spcBef>
+                <a:spcPts val="400"/>
+              </a:spcBef>
+              <a:spcAft>
+                <a:spcPts val="200"/>
+              </a:spcAft>
+            </a:pPr>
+            <a:r>
+              <a:rPr sz="1300">
+                <a:solidFill>
+                  <a:srgbClr val="3D5466"/>
+                </a:solidFill>
+                <a:latin typeface="Arial"/>
+              </a:rPr>
+              <a:t>▸  Nachbesprechung (15 Min.): Beobachter gibt strukturiertes Feedback; Berater teilt Hintergrundwissen</a:t>
+            </a:r>
+          </a:p>
+          <a:p>
+            <a:pPr>
+              <a:spcBef>
+                <a:spcPts val="400"/>
+              </a:spcBef>
+              <a:spcAft>
+                <a:spcPts val="200"/>
+              </a:spcAft>
+            </a:pPr>
+            <a:r>
+              <a:rPr sz="1200">
+                <a:solidFill>
+                  <a:srgbClr val="3D5466"/>
+                </a:solidFill>
+                <a:latin typeface="Arial"/>
+              </a:rPr>
+              <a:t>Qualitätsfaktor: Der Beobachter hat vorab eine konkrete Beobachtungsaufgabe (z.B. „achte auf, wie der Kollege das Thema Nachfolge einführt").</a:t>
+            </a:r>
+          </a:p>
+        </p:txBody>
+      </p:sp>
+      <p:sp>
+        <p:nvSpPr>
+          <p:cNvPr id="9" name="Rectangle 8"/>
+          <p:cNvSpPr/>
+          <p:nvPr/>
+        </p:nvSpPr>
+        <p:spPr>
+          <a:xfrm>
+            <a:off x="0" y="6510528"/>
+            <a:ext cx="12188952" cy="347472"/>
+          </a:xfrm>
+          <a:prstGeom prst="rect">
+            <a:avLst/>
+          </a:prstGeom>
+          <a:solidFill>
+            <a:srgbClr val="0A1937"/>
+          </a:solidFill>
+          <a:ln>
+            <a:noFill/>
+          </a:ln>
+        </p:spPr>
+        <p:style>
+          <a:lnRef idx="1">
+            <a:schemeClr val="accent1"/>
+          </a:lnRef>
+          <a:fillRef idx="3">
+            <a:schemeClr val="accent1"/>
+          </a:fillRef>
+          <a:effectRef idx="2">
+            <a:schemeClr val="accent1"/>
+          </a:effectRef>
+          <a:fontRef idx="minor">
+            <a:schemeClr val="lt1"/>
+          </a:fontRef>
+        </p:style>
+        <p:txBody>
+          <a:bodyPr rtlCol="0" anchor="ctr"/>
+          <a:lstStyle/>
+          <a:p>
+            <a:pPr algn="ctr"/>
+          </a:p>
+        </p:txBody>
+      </p:sp>
+      <p:sp>
+        <p:nvSpPr>
+          <p:cNvPr id="10" name="TextBox 9"/>
           <p:cNvSpPr txBox="1"/>
           <p:nvPr/>
         </p:nvSpPr>
         <p:spPr>
           <a:xfrm>
-            <a:off x="609600" y="279400"/>
-            <a:ext cx="10972800" cy="279400"/>
+            <a:off x="685800" y="6583680"/>
+            <a:ext cx="6490411" cy="256032"/>
           </a:xfrm>
           <a:prstGeom prst="rect">
             <a:avLst/>
@@ -6135,160 +6836,20 @@
           <a:noFill/>
         </p:spPr>
         <p:txBody>
-          <a:bodyPr wrap="square">
-            <a:normAutofit/>
+          <a:bodyPr wrap="none">
+            <a:spAutoFit/>
           </a:bodyPr>
           <a:lstStyle/>
           <a:p>
-            <a:pPr algn="r"/>
-            <a:r>
-              <a:rPr sz="900" b="0" i="0">
-                <a:solidFill>
-                  <a:srgbClr val="7B7FA0"/>
-                </a:solidFill>
-                <a:latin typeface="Courier New"/>
+            <a:pPr algn="l"/>
+            <a:r>
+              <a:rPr sz="700">
+                <a:solidFill>
+                  <a:srgbClr val="A0B4D2"/>
+                </a:solidFill>
+                <a:latin typeface="JetBrains Mono"/>
               </a:rPr>
-              <a:t>WIE WISSENSTRANSFER WIRKLICH FUNKTIONIERT</a:t>
-            </a:r>
-          </a:p>
-        </p:txBody>
-      </p:sp>
-      <p:sp>
-        <p:nvSpPr>
-          <p:cNvPr id="4" name="TextBox 3"/>
-          <p:cNvSpPr txBox="1"/>
-          <p:nvPr/>
-        </p:nvSpPr>
-        <p:spPr>
-          <a:xfrm>
-            <a:off x="609600" y="6426200"/>
-            <a:ext cx="10972800" cy="228600"/>
-          </a:xfrm>
-          <a:prstGeom prst="rect">
-            <a:avLst/>
-          </a:prstGeom>
-          <a:noFill/>
-        </p:spPr>
-        <p:txBody>
-          <a:bodyPr wrap="square">
-            <a:normAutofit/>
-          </a:bodyPr>
-          <a:lstStyle/>
-          <a:p>
-            <a:pPr algn="r"/>
-            <a:r>
-              <a:rPr sz="900" b="0" i="0">
-                <a:solidFill>
-                  <a:srgbClr val="7B7FA0"/>
-                </a:solidFill>
-                <a:latin typeface="Courier New"/>
-              </a:rPr>
-              <a:t>05</a:t>
-            </a:r>
-          </a:p>
-        </p:txBody>
-      </p:sp>
-      <p:sp>
-        <p:nvSpPr>
-          <p:cNvPr id="5" name="TextBox 4"/>
-          <p:cNvSpPr txBox="1"/>
-          <p:nvPr/>
-        </p:nvSpPr>
-        <p:spPr>
-          <a:xfrm>
-            <a:off x="609600" y="635000"/>
-            <a:ext cx="5461000" cy="5461000"/>
-          </a:xfrm>
-          <a:prstGeom prst="rect">
-            <a:avLst/>
-          </a:prstGeom>
-          <a:noFill/>
-        </p:spPr>
-        <p:txBody>
-          <a:bodyPr wrap="square">
-            <a:normAutofit/>
-          </a:bodyPr>
-          <a:lstStyle/>
-          <a:p>
-            <a:pPr algn="l"/>
-            <a:r>
-              <a:rPr sz="28000" b="0" i="1">
-                <a:solidFill>
-                  <a:srgbClr val="D9BF7A"/>
-                </a:solidFill>
-                <a:latin typeface="Georgia"/>
-              </a:rPr>
-              <a:t>II</a:t>
-            </a:r>
-          </a:p>
-        </p:txBody>
-      </p:sp>
-      <p:sp>
-        <p:nvSpPr>
-          <p:cNvPr id="6" name="TextBox 5"/>
-          <p:cNvSpPr txBox="1"/>
-          <p:nvPr/>
-        </p:nvSpPr>
-        <p:spPr>
-          <a:xfrm>
-            <a:off x="6731000" y="4064000"/>
-            <a:ext cx="4851400" cy="1778000"/>
-          </a:xfrm>
-          <a:prstGeom prst="rect">
-            <a:avLst/>
-          </a:prstGeom>
-          <a:noFill/>
-        </p:spPr>
-        <p:txBody>
-          <a:bodyPr wrap="square">
-            <a:normAutofit/>
-          </a:bodyPr>
-          <a:lstStyle/>
-          <a:p>
-            <a:pPr algn="r"/>
-            <a:r>
-              <a:rPr sz="3800" b="0" i="0">
-                <a:solidFill>
-                  <a:srgbClr val="F8F8FA"/>
-                </a:solidFill>
-                <a:latin typeface="Georgia"/>
-              </a:rPr>
-              <a:t>Wie Wissenstransfer wirklich funktioniert</a:t>
-            </a:r>
-          </a:p>
-        </p:txBody>
-      </p:sp>
-      <p:sp>
-        <p:nvSpPr>
-          <p:cNvPr id="7" name="TextBox 6"/>
-          <p:cNvSpPr txBox="1"/>
-          <p:nvPr/>
-        </p:nvSpPr>
-        <p:spPr>
-          <a:xfrm>
-            <a:off x="6731000" y="5842000"/>
-            <a:ext cx="4851400" cy="635000"/>
-          </a:xfrm>
-          <a:prstGeom prst="rect">
-            <a:avLst/>
-          </a:prstGeom>
-          <a:noFill/>
-        </p:spPr>
-        <p:txBody>
-          <a:bodyPr wrap="square">
-            <a:normAutofit/>
-          </a:bodyPr>
-          <a:lstStyle/>
-          <a:p>
-            <a:pPr algn="r"/>
-            <a:r>
-              <a:rPr sz="1400" b="0" i="1">
-                <a:solidFill>
-                  <a:srgbClr val="7B7FA0"/>
-                </a:solidFill>
-                <a:latin typeface="Georgia"/>
-              </a:rPr>
-              <a:t>Zwei Methoden mit sofortigem Effekt</a:t>
+              <a:t>Benedikt Zoller Coaching  ·  FKB Campus  ·  M19</a:t>
             </a:r>
           </a:p>
         </p:txBody>
@@ -6304,14 +6865,6 @@
 <file path=ppt/slides/slide6.xml><?xml version="1.0" encoding="utf-8"?>
 <p:sld xmlns:a="http://schemas.openxmlformats.org/drawingml/2006/main" xmlns:p="http://schemas.openxmlformats.org/presentationml/2006/main" xmlns:r="http://schemas.openxmlformats.org/officeDocument/2006/relationships">
   <p:cSld>
-    <p:bg>
-      <p:bgPr>
-        <a:solidFill>
-          <a:srgbClr val="F8F8FA"/>
-        </a:solidFill>
-        <a:effectLst/>
-      </p:bgPr>
-    </p:bg>
     <p:spTree>
       <p:nvGrpSpPr>
         <p:cNvPr id="1" name=""/>
@@ -6321,125 +6874,20 @@
       <p:grpSpPr/>
       <p:sp>
         <p:nvSpPr>
-          <p:cNvPr id="2" name="TextBox 1"/>
-          <p:cNvSpPr txBox="1"/>
-          <p:nvPr/>
-        </p:nvSpPr>
-        <p:spPr>
-          <a:xfrm>
-            <a:off x="609600" y="279400"/>
-            <a:ext cx="2540000" cy="279400"/>
-          </a:xfrm>
-          <a:prstGeom prst="rect">
-            <a:avLst/>
-          </a:prstGeom>
-          <a:noFill/>
-        </p:spPr>
-        <p:txBody>
-          <a:bodyPr wrap="square">
-            <a:normAutofit/>
-          </a:bodyPr>
-          <a:lstStyle/>
-          <a:p>
-            <a:pPr algn="l"/>
-            <a:r>
-              <a:rPr sz="1000" b="1" i="0">
-                <a:solidFill>
-                  <a:srgbClr val="191D2E"/>
-                </a:solidFill>
-                <a:latin typeface="Arial"/>
-              </a:rPr>
-              <a:t>FKB  Campus</a:t>
-            </a:r>
-          </a:p>
-        </p:txBody>
-      </p:sp>
-      <p:sp>
-        <p:nvSpPr>
-          <p:cNvPr id="3" name="TextBox 2"/>
-          <p:cNvSpPr txBox="1"/>
-          <p:nvPr/>
-        </p:nvSpPr>
-        <p:spPr>
-          <a:xfrm>
-            <a:off x="609600" y="279400"/>
-            <a:ext cx="10972800" cy="279400"/>
-          </a:xfrm>
-          <a:prstGeom prst="rect">
-            <a:avLst/>
-          </a:prstGeom>
-          <a:noFill/>
-        </p:spPr>
-        <p:txBody>
-          <a:bodyPr wrap="square">
-            <a:normAutofit/>
-          </a:bodyPr>
-          <a:lstStyle/>
-          <a:p>
-            <a:pPr algn="r"/>
-            <a:r>
-              <a:rPr sz="900" b="0" i="0">
-                <a:solidFill>
-                  <a:srgbClr val="7B7FA0"/>
-                </a:solidFill>
-                <a:latin typeface="Courier New"/>
-              </a:rPr>
-              <a:t>II · WIE WISSENSTRANSFER WIRKLICH FUNKTIONIERT</a:t>
-            </a:r>
-          </a:p>
-        </p:txBody>
-      </p:sp>
-      <p:sp>
-        <p:nvSpPr>
-          <p:cNvPr id="4" name="TextBox 3"/>
-          <p:cNvSpPr txBox="1"/>
-          <p:nvPr/>
-        </p:nvSpPr>
-        <p:spPr>
-          <a:xfrm>
-            <a:off x="609600" y="6426200"/>
-            <a:ext cx="10972800" cy="228600"/>
-          </a:xfrm>
-          <a:prstGeom prst="rect">
-            <a:avLst/>
-          </a:prstGeom>
-          <a:noFill/>
-        </p:spPr>
-        <p:txBody>
-          <a:bodyPr wrap="square">
-            <a:normAutofit/>
-          </a:bodyPr>
-          <a:lstStyle/>
-          <a:p>
-            <a:pPr algn="r"/>
-            <a:r>
-              <a:rPr sz="900" b="0" i="0">
-                <a:solidFill>
-                  <a:srgbClr val="7B7FA0"/>
-                </a:solidFill>
-                <a:latin typeface="Courier New"/>
-              </a:rPr>
-              <a:t>06</a:t>
-            </a:r>
-          </a:p>
-        </p:txBody>
-      </p:sp>
-      <p:sp>
-        <p:nvSpPr>
-          <p:cNvPr id="5" name="Rectangle 4"/>
+          <p:cNvPr id="2" name="Rectangle 1"/>
           <p:cNvSpPr/>
           <p:nvPr/>
         </p:nvSpPr>
         <p:spPr>
           <a:xfrm>
-            <a:off x="609600" y="825500"/>
-            <a:ext cx="10972800" cy="6350"/>
+            <a:off x="0" y="0"/>
+            <a:ext cx="12188952" cy="6858000"/>
           </a:xfrm>
           <a:prstGeom prst="rect">
             <a:avLst/>
           </a:prstGeom>
           <a:solidFill>
-            <a:srgbClr val="191D2E"/>
+            <a:srgbClr val="EDEDF3"/>
           </a:solidFill>
           <a:ln>
             <a:noFill/>
@@ -6469,55 +6917,20 @@
       </p:sp>
       <p:sp>
         <p:nvSpPr>
-          <p:cNvPr id="6" name="TextBox 5"/>
-          <p:cNvSpPr txBox="1"/>
-          <p:nvPr/>
-        </p:nvSpPr>
-        <p:spPr>
-          <a:xfrm>
-            <a:off x="609600" y="920750"/>
-            <a:ext cx="10972800" cy="1778000"/>
-          </a:xfrm>
-          <a:prstGeom prst="rect">
-            <a:avLst/>
-          </a:prstGeom>
-          <a:noFill/>
-        </p:spPr>
-        <p:txBody>
-          <a:bodyPr wrap="square">
-            <a:normAutofit/>
-          </a:bodyPr>
-          <a:lstStyle/>
-          <a:p>
-            <a:pPr algn="l"/>
-            <a:r>
-              <a:rPr sz="3800" b="0" i="0">
-                <a:solidFill>
-                  <a:srgbClr val="191D2E"/>
-                </a:solidFill>
-                <a:latin typeface="Georgia"/>
-              </a:rPr>
-              <a:t>Methode 1: Tandem-Gespräche</a:t>
-            </a:r>
-          </a:p>
-        </p:txBody>
-      </p:sp>
-      <p:sp>
-        <p:nvSpPr>
-          <p:cNvPr id="7" name="Rectangle 6"/>
+          <p:cNvPr id="3" name="Rectangle 2"/>
           <p:cNvSpPr/>
           <p:nvPr/>
         </p:nvSpPr>
         <p:spPr>
           <a:xfrm>
-            <a:off x="609600" y="2762250"/>
-            <a:ext cx="10972800" cy="6350"/>
+            <a:off x="0" y="0"/>
+            <a:ext cx="12188952" cy="50292"/>
           </a:xfrm>
           <a:prstGeom prst="rect">
             <a:avLst/>
           </a:prstGeom>
           <a:solidFill>
-            <a:srgbClr val="E0E0E8"/>
+            <a:srgbClr val="1F2C56"/>
           </a:solidFill>
           <a:ln>
             <a:noFill/>
@@ -6547,14 +6960,170 @@
       </p:sp>
       <p:sp>
         <p:nvSpPr>
+          <p:cNvPr id="4" name="TextBox 3"/>
+          <p:cNvSpPr txBox="1"/>
+          <p:nvPr/>
+        </p:nvSpPr>
+        <p:spPr>
+          <a:xfrm>
+            <a:off x="685800" y="109728"/>
+            <a:ext cx="10817352" cy="228600"/>
+          </a:xfrm>
+          <a:prstGeom prst="rect">
+            <a:avLst/>
+          </a:prstGeom>
+          <a:noFill/>
+        </p:spPr>
+        <p:txBody>
+          <a:bodyPr wrap="none">
+            <a:spAutoFit/>
+          </a:bodyPr>
+          <a:lstStyle/>
+          <a:p>
+            <a:pPr algn="l"/>
+            <a:r>
+              <a:rPr sz="750">
+                <a:solidFill>
+                  <a:srgbClr val="78808C"/>
+                </a:solidFill>
+                <a:latin typeface="JetBrains Mono"/>
+              </a:rPr>
+              <a:t>M19  ·  INHALT</a:t>
+            </a:r>
+          </a:p>
+        </p:txBody>
+      </p:sp>
+      <p:sp>
+        <p:nvSpPr>
+          <p:cNvPr id="5" name="Rectangle 4"/>
+          <p:cNvSpPr/>
+          <p:nvPr/>
+        </p:nvSpPr>
+        <p:spPr>
+          <a:xfrm>
+            <a:off x="0" y="1234440"/>
+            <a:ext cx="12188952" cy="12700"/>
+          </a:xfrm>
+          <a:prstGeom prst="rect">
+            <a:avLst/>
+          </a:prstGeom>
+          <a:solidFill>
+            <a:srgbClr val="D8DFE4"/>
+          </a:solidFill>
+          <a:ln>
+            <a:noFill/>
+          </a:ln>
+        </p:spPr>
+        <p:style>
+          <a:lnRef idx="1">
+            <a:schemeClr val="accent1"/>
+          </a:lnRef>
+          <a:fillRef idx="3">
+            <a:schemeClr val="accent1"/>
+          </a:fillRef>
+          <a:effectRef idx="2">
+            <a:schemeClr val="accent1"/>
+          </a:effectRef>
+          <a:fontRef idx="minor">
+            <a:schemeClr val="lt1"/>
+          </a:fontRef>
+        </p:style>
+        <p:txBody>
+          <a:bodyPr rtlCol="0" anchor="ctr"/>
+          <a:lstStyle/>
+          <a:p>
+            <a:pPr algn="ctr"/>
+          </a:p>
+        </p:txBody>
+      </p:sp>
+      <p:sp>
+        <p:nvSpPr>
+          <p:cNvPr id="6" name="Rectangle 5"/>
+          <p:cNvSpPr/>
+          <p:nvPr/>
+        </p:nvSpPr>
+        <p:spPr>
+          <a:xfrm>
+            <a:off x="685800" y="502920"/>
+            <a:ext cx="36576" cy="658368"/>
+          </a:xfrm>
+          <a:prstGeom prst="rect">
+            <a:avLst/>
+          </a:prstGeom>
+          <a:solidFill>
+            <a:srgbClr val="D9C089"/>
+          </a:solidFill>
+          <a:ln>
+            <a:noFill/>
+          </a:ln>
+        </p:spPr>
+        <p:style>
+          <a:lnRef idx="1">
+            <a:schemeClr val="accent1"/>
+          </a:lnRef>
+          <a:fillRef idx="3">
+            <a:schemeClr val="accent1"/>
+          </a:fillRef>
+          <a:effectRef idx="2">
+            <a:schemeClr val="accent1"/>
+          </a:effectRef>
+          <a:fontRef idx="minor">
+            <a:schemeClr val="lt1"/>
+          </a:fontRef>
+        </p:style>
+        <p:txBody>
+          <a:bodyPr rtlCol="0" anchor="ctr"/>
+          <a:lstStyle/>
+          <a:p>
+            <a:pPr algn="ctr"/>
+          </a:p>
+        </p:txBody>
+      </p:sp>
+      <p:sp>
+        <p:nvSpPr>
+          <p:cNvPr id="7" name="TextBox 6"/>
+          <p:cNvSpPr txBox="1"/>
+          <p:nvPr/>
+        </p:nvSpPr>
+        <p:spPr>
+          <a:xfrm>
+            <a:off x="813816" y="502920"/>
+            <a:ext cx="10634472" cy="685800"/>
+          </a:xfrm>
+          <a:prstGeom prst="rect">
+            <a:avLst/>
+          </a:prstGeom>
+          <a:noFill/>
+        </p:spPr>
+        <p:txBody>
+          <a:bodyPr wrap="square">
+            <a:spAutoFit/>
+          </a:bodyPr>
+          <a:lstStyle/>
+          <a:p>
+            <a:pPr algn="l"/>
+            <a:r>
+              <a:rPr sz="2400" b="1" i="0">
+                <a:solidFill>
+                  <a:srgbClr val="1F2C56"/>
+                </a:solidFill>
+                <a:latin typeface="Source Serif 4"/>
+              </a:rPr>
+              <a:t>Methode 2: Strukturierte Fallbesprechung</a:t>
+            </a:r>
+          </a:p>
+        </p:txBody>
+      </p:sp>
+      <p:sp>
+        <p:nvSpPr>
           <p:cNvPr id="8" name="TextBox 7"/>
           <p:cNvSpPr txBox="1"/>
           <p:nvPr/>
         </p:nvSpPr>
         <p:spPr>
           <a:xfrm>
-            <a:off x="609600" y="2851150"/>
-            <a:ext cx="10972800" cy="3448050"/>
+            <a:off x="685800" y="1417320"/>
+            <a:ext cx="10817352" cy="5029200"/>
           </a:xfrm>
           <a:prstGeom prst="rect">
             <a:avLst/>
@@ -6563,83 +7132,142 @@
         </p:spPr>
         <p:txBody>
           <a:bodyPr wrap="square">
-            <a:normAutofit/>
+            <a:spAutoFit/>
           </a:bodyPr>
           <a:lstStyle/>
           <a:p>
             <a:pPr>
               <a:spcBef>
-                <a:spcPts val="600"/>
+                <a:spcPts val="400"/>
               </a:spcBef>
               <a:spcAft>
-                <a:spcPts val="600"/>
+                <a:spcPts val="200"/>
               </a:spcAft>
             </a:pPr>
             <a:r>
-              <a:rPr sz="1400">
-                <a:solidFill>
-                  <a:srgbClr val="191D2E"/>
-                </a:solidFill>
-                <a:latin typeface="Georgia"/>
+              <a:rPr sz="1200">
+                <a:solidFill>
+                  <a:srgbClr val="3D5466"/>
+                </a:solidFill>
+                <a:latin typeface="Arial"/>
               </a:rPr>
-              <a:t>–  Erfahrener Berater nimmt Junior mit ins Kundengespräch</a:t>
+              <a:t>Was: 45-minütiges Team-Format, in dem ein Berater einen aktuellen Fall vorstellt und das Team kollektiv reflektiert.</a:t>
             </a:r>
           </a:p>
           <a:p>
             <a:pPr>
               <a:spcBef>
-                <a:spcPts val="600"/>
+                <a:spcPts val="400"/>
               </a:spcBef>
               <a:spcAft>
-                <a:spcPts val="600"/>
+                <a:spcPts val="200"/>
               </a:spcAft>
             </a:pPr>
             <a:r>
-              <a:rPr sz="1400">
-                <a:solidFill>
-                  <a:srgbClr val="191D2E"/>
-                </a:solidFill>
-                <a:latin typeface="Georgia"/>
+              <a:rPr sz="1200">
+                <a:solidFill>
+                  <a:srgbClr val="3D5466"/>
+                </a:solidFill>
+                <a:latin typeface="Arial"/>
               </a:rPr>
-              <a:t>–  Vor dem Gespräch: Vorbereitung gemeinsam besprechen</a:t>
+              <a:t>Struktur:</a:t>
             </a:r>
           </a:p>
           <a:p>
             <a:pPr>
               <a:spcBef>
-                <a:spcPts val="600"/>
+                <a:spcPts val="400"/>
               </a:spcBef>
               <a:spcAft>
-                <a:spcPts val="600"/>
+                <a:spcPts val="200"/>
               </a:spcAft>
             </a:pPr>
             <a:r>
-              <a:rPr sz="1400">
-                <a:solidFill>
-                  <a:srgbClr val="191D2E"/>
-                </a:solidFill>
-                <a:latin typeface="Georgia"/>
+              <a:rPr sz="1200">
+                <a:solidFill>
+                  <a:srgbClr val="3D5466"/>
+                </a:solidFill>
+                <a:latin typeface="Arial"/>
               </a:rPr>
-              <a:t>–  Im Gespräch: Junior beobachtet, notiert Fragen</a:t>
-            </a:r>
-          </a:p>
-          <a:p>
-            <a:pPr>
-              <a:spcBef>
-                <a:spcPts val="600"/>
-              </a:spcBef>
-              <a:spcAft>
-                <a:spcPts val="600"/>
-              </a:spcAft>
-            </a:pPr>
-            <a:r>
-              <a:rPr sz="1400">
-                <a:solidFill>
-                  <a:srgbClr val="191D2E"/>
-                </a:solidFill>
-                <a:latin typeface="Georgia"/>
+              <a:t>Qualitätsfaktor: Die stille Reflexion vor der Diskussion verhindert Gruppendenken (Anchoring-Bias).</a:t>
+            </a:r>
+          </a:p>
+        </p:txBody>
+      </p:sp>
+      <p:sp>
+        <p:nvSpPr>
+          <p:cNvPr id="9" name="Rectangle 8"/>
+          <p:cNvSpPr/>
+          <p:nvPr/>
+        </p:nvSpPr>
+        <p:spPr>
+          <a:xfrm>
+            <a:off x="0" y="6510528"/>
+            <a:ext cx="12188952" cy="347472"/>
+          </a:xfrm>
+          <a:prstGeom prst="rect">
+            <a:avLst/>
+          </a:prstGeom>
+          <a:solidFill>
+            <a:srgbClr val="0A1937"/>
+          </a:solidFill>
+          <a:ln>
+            <a:noFill/>
+          </a:ln>
+        </p:spPr>
+        <p:style>
+          <a:lnRef idx="1">
+            <a:schemeClr val="accent1"/>
+          </a:lnRef>
+          <a:fillRef idx="3">
+            <a:schemeClr val="accent1"/>
+          </a:fillRef>
+          <a:effectRef idx="2">
+            <a:schemeClr val="accent1"/>
+          </a:effectRef>
+          <a:fontRef idx="minor">
+            <a:schemeClr val="lt1"/>
+          </a:fontRef>
+        </p:style>
+        <p:txBody>
+          <a:bodyPr rtlCol="0" anchor="ctr"/>
+          <a:lstStyle/>
+          <a:p>
+            <a:pPr algn="ctr"/>
+          </a:p>
+        </p:txBody>
+      </p:sp>
+      <p:sp>
+        <p:nvSpPr>
+          <p:cNvPr id="10" name="TextBox 9"/>
+          <p:cNvSpPr txBox="1"/>
+          <p:nvPr/>
+        </p:nvSpPr>
+        <p:spPr>
+          <a:xfrm>
+            <a:off x="685800" y="6583680"/>
+            <a:ext cx="6490411" cy="256032"/>
+          </a:xfrm>
+          <a:prstGeom prst="rect">
+            <a:avLst/>
+          </a:prstGeom>
+          <a:noFill/>
+        </p:spPr>
+        <p:txBody>
+          <a:bodyPr wrap="none">
+            <a:spAutoFit/>
+          </a:bodyPr>
+          <a:lstStyle/>
+          <a:p>
+            <a:pPr algn="l"/>
+            <a:r>
+              <a:rPr sz="700">
+                <a:solidFill>
+                  <a:srgbClr val="A0B4D2"/>
+                </a:solidFill>
+                <a:latin typeface="JetBrains Mono"/>
               </a:rPr>
-              <a:t>–  Nach dem Gespräch: 15-minütige Reflexion — Was haben Sie gelernt?</a:t>
+              <a:t>Benedikt Zoller Coaching  ·  FKB Campus  ·  M19</a:t>
             </a:r>
           </a:p>
         </p:txBody>
@@ -6655,14 +7283,6 @@
 <file path=ppt/slides/slide7.xml><?xml version="1.0" encoding="utf-8"?>
 <p:sld xmlns:a="http://schemas.openxmlformats.org/drawingml/2006/main" xmlns:p="http://schemas.openxmlformats.org/presentationml/2006/main" xmlns:r="http://schemas.openxmlformats.org/officeDocument/2006/relationships">
   <p:cSld>
-    <p:bg>
-      <p:bgPr>
-        <a:solidFill>
-          <a:srgbClr val="F8F8FA"/>
-        </a:solidFill>
-        <a:effectLst/>
-      </p:bgPr>
-    </p:bg>
     <p:spTree>
       <p:nvGrpSpPr>
         <p:cNvPr id="1" name=""/>
@@ -6672,125 +7292,20 @@
       <p:grpSpPr/>
       <p:sp>
         <p:nvSpPr>
-          <p:cNvPr id="2" name="TextBox 1"/>
-          <p:cNvSpPr txBox="1"/>
-          <p:nvPr/>
-        </p:nvSpPr>
-        <p:spPr>
-          <a:xfrm>
-            <a:off x="609600" y="279400"/>
-            <a:ext cx="2540000" cy="279400"/>
-          </a:xfrm>
-          <a:prstGeom prst="rect">
-            <a:avLst/>
-          </a:prstGeom>
-          <a:noFill/>
-        </p:spPr>
-        <p:txBody>
-          <a:bodyPr wrap="square">
-            <a:normAutofit/>
-          </a:bodyPr>
-          <a:lstStyle/>
-          <a:p>
-            <a:pPr algn="l"/>
-            <a:r>
-              <a:rPr sz="1000" b="1" i="0">
-                <a:solidFill>
-                  <a:srgbClr val="191D2E"/>
-                </a:solidFill>
-                <a:latin typeface="Arial"/>
-              </a:rPr>
-              <a:t>FKB  Campus</a:t>
-            </a:r>
-          </a:p>
-        </p:txBody>
-      </p:sp>
-      <p:sp>
-        <p:nvSpPr>
-          <p:cNvPr id="3" name="TextBox 2"/>
-          <p:cNvSpPr txBox="1"/>
-          <p:nvPr/>
-        </p:nvSpPr>
-        <p:spPr>
-          <a:xfrm>
-            <a:off x="609600" y="279400"/>
-            <a:ext cx="10972800" cy="279400"/>
-          </a:xfrm>
-          <a:prstGeom prst="rect">
-            <a:avLst/>
-          </a:prstGeom>
-          <a:noFill/>
-        </p:spPr>
-        <p:txBody>
-          <a:bodyPr wrap="square">
-            <a:normAutofit/>
-          </a:bodyPr>
-          <a:lstStyle/>
-          <a:p>
-            <a:pPr algn="r"/>
-            <a:r>
-              <a:rPr sz="900" b="0" i="0">
-                <a:solidFill>
-                  <a:srgbClr val="7B7FA0"/>
-                </a:solidFill>
-                <a:latin typeface="Courier New"/>
-              </a:rPr>
-              <a:t>II · WIE WISSENSTRANSFER WIRKLICH FUNKTIONIERT</a:t>
-            </a:r>
-          </a:p>
-        </p:txBody>
-      </p:sp>
-      <p:sp>
-        <p:nvSpPr>
-          <p:cNvPr id="4" name="TextBox 3"/>
-          <p:cNvSpPr txBox="1"/>
-          <p:nvPr/>
-        </p:nvSpPr>
-        <p:spPr>
-          <a:xfrm>
-            <a:off x="609600" y="6426200"/>
-            <a:ext cx="10972800" cy="228600"/>
-          </a:xfrm>
-          <a:prstGeom prst="rect">
-            <a:avLst/>
-          </a:prstGeom>
-          <a:noFill/>
-        </p:spPr>
-        <p:txBody>
-          <a:bodyPr wrap="square">
-            <a:normAutofit/>
-          </a:bodyPr>
-          <a:lstStyle/>
-          <a:p>
-            <a:pPr algn="r"/>
-            <a:r>
-              <a:rPr sz="900" b="0" i="0">
-                <a:solidFill>
-                  <a:srgbClr val="7B7FA0"/>
-                </a:solidFill>
-                <a:latin typeface="Courier New"/>
-              </a:rPr>
-              <a:t>07</a:t>
-            </a:r>
-          </a:p>
-        </p:txBody>
-      </p:sp>
-      <p:sp>
-        <p:nvSpPr>
-          <p:cNvPr id="5" name="Rectangle 4"/>
+          <p:cNvPr id="2" name="Rectangle 1"/>
           <p:cNvSpPr/>
           <p:nvPr/>
         </p:nvSpPr>
         <p:spPr>
           <a:xfrm>
-            <a:off x="609600" y="825500"/>
-            <a:ext cx="10972800" cy="6350"/>
+            <a:off x="0" y="0"/>
+            <a:ext cx="12188952" cy="6858000"/>
           </a:xfrm>
           <a:prstGeom prst="rect">
             <a:avLst/>
           </a:prstGeom>
           <a:solidFill>
-            <a:srgbClr val="191D2E"/>
+            <a:srgbClr val="EDEDF3"/>
           </a:solidFill>
           <a:ln>
             <a:noFill/>
@@ -6820,55 +7335,20 @@
       </p:sp>
       <p:sp>
         <p:nvSpPr>
-          <p:cNvPr id="6" name="TextBox 5"/>
-          <p:cNvSpPr txBox="1"/>
-          <p:nvPr/>
-        </p:nvSpPr>
-        <p:spPr>
-          <a:xfrm>
-            <a:off x="609600" y="920750"/>
-            <a:ext cx="10972800" cy="1778000"/>
-          </a:xfrm>
-          <a:prstGeom prst="rect">
-            <a:avLst/>
-          </a:prstGeom>
-          <a:noFill/>
-        </p:spPr>
-        <p:txBody>
-          <a:bodyPr wrap="square">
-            <a:normAutofit/>
-          </a:bodyPr>
-          <a:lstStyle/>
-          <a:p>
-            <a:pPr algn="l"/>
-            <a:r>
-              <a:rPr sz="3800" b="0" i="0">
-                <a:solidFill>
-                  <a:srgbClr val="191D2E"/>
-                </a:solidFill>
-                <a:latin typeface="Georgia"/>
-              </a:rPr>
-              <a:t>Methode 2: Kollegiale Fallberatung</a:t>
-            </a:r>
-          </a:p>
-        </p:txBody>
-      </p:sp>
-      <p:sp>
-        <p:nvSpPr>
-          <p:cNvPr id="7" name="Rectangle 6"/>
+          <p:cNvPr id="3" name="Rectangle 2"/>
           <p:cNvSpPr/>
           <p:nvPr/>
         </p:nvSpPr>
         <p:spPr>
           <a:xfrm>
-            <a:off x="609600" y="2762250"/>
-            <a:ext cx="10972800" cy="6350"/>
+            <a:off x="0" y="0"/>
+            <a:ext cx="12188952" cy="50292"/>
           </a:xfrm>
           <a:prstGeom prst="rect">
             <a:avLst/>
           </a:prstGeom>
           <a:solidFill>
-            <a:srgbClr val="E0E0E8"/>
+            <a:srgbClr val="1F2C56"/>
           </a:solidFill>
           <a:ln>
             <a:noFill/>
@@ -6898,14 +7378,170 @@
       </p:sp>
       <p:sp>
         <p:nvSpPr>
+          <p:cNvPr id="4" name="TextBox 3"/>
+          <p:cNvSpPr txBox="1"/>
+          <p:nvPr/>
+        </p:nvSpPr>
+        <p:spPr>
+          <a:xfrm>
+            <a:off x="685800" y="109728"/>
+            <a:ext cx="10817352" cy="228600"/>
+          </a:xfrm>
+          <a:prstGeom prst="rect">
+            <a:avLst/>
+          </a:prstGeom>
+          <a:noFill/>
+        </p:spPr>
+        <p:txBody>
+          <a:bodyPr wrap="none">
+            <a:spAutoFit/>
+          </a:bodyPr>
+          <a:lstStyle/>
+          <a:p>
+            <a:pPr algn="l"/>
+            <a:r>
+              <a:rPr sz="750">
+                <a:solidFill>
+                  <a:srgbClr val="78808C"/>
+                </a:solidFill>
+                <a:latin typeface="JetBrains Mono"/>
+              </a:rPr>
+              <a:t>M19  ·  INHALT</a:t>
+            </a:r>
+          </a:p>
+        </p:txBody>
+      </p:sp>
+      <p:sp>
+        <p:nvSpPr>
+          <p:cNvPr id="5" name="Rectangle 4"/>
+          <p:cNvSpPr/>
+          <p:nvPr/>
+        </p:nvSpPr>
+        <p:spPr>
+          <a:xfrm>
+            <a:off x="0" y="1234440"/>
+            <a:ext cx="12188952" cy="12700"/>
+          </a:xfrm>
+          <a:prstGeom prst="rect">
+            <a:avLst/>
+          </a:prstGeom>
+          <a:solidFill>
+            <a:srgbClr val="D8DFE4"/>
+          </a:solidFill>
+          <a:ln>
+            <a:noFill/>
+          </a:ln>
+        </p:spPr>
+        <p:style>
+          <a:lnRef idx="1">
+            <a:schemeClr val="accent1"/>
+          </a:lnRef>
+          <a:fillRef idx="3">
+            <a:schemeClr val="accent1"/>
+          </a:fillRef>
+          <a:effectRef idx="2">
+            <a:schemeClr val="accent1"/>
+          </a:effectRef>
+          <a:fontRef idx="minor">
+            <a:schemeClr val="lt1"/>
+          </a:fontRef>
+        </p:style>
+        <p:txBody>
+          <a:bodyPr rtlCol="0" anchor="ctr"/>
+          <a:lstStyle/>
+          <a:p>
+            <a:pPr algn="ctr"/>
+          </a:p>
+        </p:txBody>
+      </p:sp>
+      <p:sp>
+        <p:nvSpPr>
+          <p:cNvPr id="6" name="Rectangle 5"/>
+          <p:cNvSpPr/>
+          <p:nvPr/>
+        </p:nvSpPr>
+        <p:spPr>
+          <a:xfrm>
+            <a:off x="685800" y="502920"/>
+            <a:ext cx="36576" cy="658368"/>
+          </a:xfrm>
+          <a:prstGeom prst="rect">
+            <a:avLst/>
+          </a:prstGeom>
+          <a:solidFill>
+            <a:srgbClr val="D9C089"/>
+          </a:solidFill>
+          <a:ln>
+            <a:noFill/>
+          </a:ln>
+        </p:spPr>
+        <p:style>
+          <a:lnRef idx="1">
+            <a:schemeClr val="accent1"/>
+          </a:lnRef>
+          <a:fillRef idx="3">
+            <a:schemeClr val="accent1"/>
+          </a:fillRef>
+          <a:effectRef idx="2">
+            <a:schemeClr val="accent1"/>
+          </a:effectRef>
+          <a:fontRef idx="minor">
+            <a:schemeClr val="lt1"/>
+          </a:fontRef>
+        </p:style>
+        <p:txBody>
+          <a:bodyPr rtlCol="0" anchor="ctr"/>
+          <a:lstStyle/>
+          <a:p>
+            <a:pPr algn="ctr"/>
+          </a:p>
+        </p:txBody>
+      </p:sp>
+      <p:sp>
+        <p:nvSpPr>
+          <p:cNvPr id="7" name="TextBox 6"/>
+          <p:cNvSpPr txBox="1"/>
+          <p:nvPr/>
+        </p:nvSpPr>
+        <p:spPr>
+          <a:xfrm>
+            <a:off x="813816" y="502920"/>
+            <a:ext cx="10634472" cy="685800"/>
+          </a:xfrm>
+          <a:prstGeom prst="rect">
+            <a:avLst/>
+          </a:prstGeom>
+          <a:noFill/>
+        </p:spPr>
+        <p:txBody>
+          <a:bodyPr wrap="square">
+            <a:spAutoFit/>
+          </a:bodyPr>
+          <a:lstStyle/>
+          <a:p>
+            <a:pPr algn="l"/>
+            <a:r>
+              <a:rPr sz="2400" b="1" i="0">
+                <a:solidFill>
+                  <a:srgbClr val="1F2C56"/>
+                </a:solidFill>
+                <a:latin typeface="Source Serif 4"/>
+              </a:rPr>
+              <a:t>Methode 3: Wissenslandkarte</a:t>
+            </a:r>
+          </a:p>
+        </p:txBody>
+      </p:sp>
+      <p:sp>
+        <p:nvSpPr>
           <p:cNvPr id="8" name="TextBox 7"/>
           <p:cNvSpPr txBox="1"/>
           <p:nvPr/>
         </p:nvSpPr>
         <p:spPr>
           <a:xfrm>
-            <a:off x="609600" y="2851150"/>
-            <a:ext cx="10972800" cy="3448050"/>
+            <a:off x="685800" y="1417320"/>
+            <a:ext cx="10817352" cy="5029200"/>
           </a:xfrm>
           <a:prstGeom prst="rect">
             <a:avLst/>
@@ -6914,102 +7550,161 @@
         </p:spPr>
         <p:txBody>
           <a:bodyPr wrap="square">
-            <a:normAutofit/>
+            <a:spAutoFit/>
           </a:bodyPr>
           <a:lstStyle/>
           <a:p>
             <a:pPr>
               <a:spcBef>
-                <a:spcPts val="600"/>
+                <a:spcPts val="400"/>
               </a:spcBef>
               <a:spcAft>
-                <a:spcPts val="600"/>
+                <a:spcPts val="200"/>
               </a:spcAft>
             </a:pPr>
             <a:r>
-              <a:rPr sz="1400">
-                <a:solidFill>
-                  <a:srgbClr val="191D2E"/>
-                </a:solidFill>
-                <a:latin typeface="Georgia"/>
+              <a:rPr sz="1200">
+                <a:solidFill>
+                  <a:srgbClr val="3D5466"/>
+                </a:solidFill>
+                <a:latin typeface="Arial"/>
               </a:rPr>
-              <a:t>–  Ein Berater bringt einen schwierigen Fall mit (5 Min. Schilderung)</a:t>
+              <a:t>Was: Visualisierung, wer im Team über welches Spezialwissen verfügt.</a:t>
             </a:r>
           </a:p>
           <a:p>
             <a:pPr>
               <a:spcBef>
-                <a:spcPts val="600"/>
+                <a:spcPts val="400"/>
               </a:spcBef>
               <a:spcAft>
-                <a:spcPts val="600"/>
+                <a:spcPts val="200"/>
               </a:spcAft>
             </a:pPr>
             <a:r>
-              <a:rPr sz="1400">
-                <a:solidFill>
-                  <a:srgbClr val="191D2E"/>
-                </a:solidFill>
-                <a:latin typeface="Georgia"/>
+              <a:rPr sz="1200">
+                <a:solidFill>
+                  <a:srgbClr val="3D5466"/>
+                </a:solidFill>
+                <a:latin typeface="Arial"/>
               </a:rPr>
-              <a:t>–  Gruppe stellt ausschließlich Fragen — keine Ratschläge</a:t>
+              <a:t>Wann: Einmalig erstellen, halbjährlich aktualisieren.</a:t>
             </a:r>
           </a:p>
           <a:p>
             <a:pPr>
               <a:spcBef>
-                <a:spcPts val="600"/>
+                <a:spcPts val="400"/>
               </a:spcBef>
               <a:spcAft>
-                <a:spcPts val="600"/>
+                <a:spcPts val="200"/>
               </a:spcAft>
             </a:pPr>
             <a:r>
-              <a:rPr sz="1400">
-                <a:solidFill>
-                  <a:srgbClr val="191D2E"/>
-                </a:solidFill>
-                <a:latin typeface="Georgia"/>
+              <a:rPr sz="1200">
+                <a:solidFill>
+                  <a:srgbClr val="3D5466"/>
+                </a:solidFill>
+                <a:latin typeface="Arial"/>
               </a:rPr>
-              <a:t>–  Berater denkt laut nach, findet eigene Lösung</a:t>
+              <a:t>Inhalt: Pro Berater: Branchenexpertise, Sonderwissen (z.B. Nachfolge, Landwirtschaft, Heilberufe), bevorzugte Methoden, Kontaktnetzwerk.</a:t>
             </a:r>
           </a:p>
           <a:p>
             <a:pPr>
               <a:spcBef>
-                <a:spcPts val="600"/>
+                <a:spcPts val="400"/>
               </a:spcBef>
               <a:spcAft>
-                <a:spcPts val="600"/>
+                <a:spcPts val="200"/>
               </a:spcAft>
             </a:pPr>
             <a:r>
-              <a:rPr sz="1400">
-                <a:solidFill>
-                  <a:srgbClr val="191D2E"/>
-                </a:solidFill>
-                <a:latin typeface="Georgia"/>
+              <a:rPr sz="1200">
+                <a:solidFill>
+                  <a:srgbClr val="3D5466"/>
+                </a:solidFill>
+                <a:latin typeface="Arial"/>
               </a:rPr>
-              <a:t>–  Abschluss: Team teilt ähnliche Erfahrungen</a:t>
-            </a:r>
-          </a:p>
-          <a:p>
-            <a:pPr>
-              <a:spcBef>
-                <a:spcPts val="600"/>
-              </a:spcBef>
-              <a:spcAft>
-                <a:spcPts val="600"/>
-              </a:spcAft>
-            </a:pPr>
-            <a:r>
-              <a:rPr sz="1400">
-                <a:solidFill>
-                  <a:srgbClr val="191D2E"/>
-                </a:solidFill>
-                <a:latin typeface="Georgia"/>
+              <a:t>Nutzen: Neue Berater wissen sofort, wen sie bei welchem Thema fragen sollen. Der Teamleiter erkennt Wissensinseln und -lücken.</a:t>
+            </a:r>
+          </a:p>
+        </p:txBody>
+      </p:sp>
+      <p:sp>
+        <p:nvSpPr>
+          <p:cNvPr id="9" name="Rectangle 8"/>
+          <p:cNvSpPr/>
+          <p:nvPr/>
+        </p:nvSpPr>
+        <p:spPr>
+          <a:xfrm>
+            <a:off x="0" y="6510528"/>
+            <a:ext cx="12188952" cy="347472"/>
+          </a:xfrm>
+          <a:prstGeom prst="rect">
+            <a:avLst/>
+          </a:prstGeom>
+          <a:solidFill>
+            <a:srgbClr val="0A1937"/>
+          </a:solidFill>
+          <a:ln>
+            <a:noFill/>
+          </a:ln>
+        </p:spPr>
+        <p:style>
+          <a:lnRef idx="1">
+            <a:schemeClr val="accent1"/>
+          </a:lnRef>
+          <a:fillRef idx="3">
+            <a:schemeClr val="accent1"/>
+          </a:fillRef>
+          <a:effectRef idx="2">
+            <a:schemeClr val="accent1"/>
+          </a:effectRef>
+          <a:fontRef idx="minor">
+            <a:schemeClr val="lt1"/>
+          </a:fontRef>
+        </p:style>
+        <p:txBody>
+          <a:bodyPr rtlCol="0" anchor="ctr"/>
+          <a:lstStyle/>
+          <a:p>
+            <a:pPr algn="ctr"/>
+          </a:p>
+        </p:txBody>
+      </p:sp>
+      <p:sp>
+        <p:nvSpPr>
+          <p:cNvPr id="10" name="TextBox 9"/>
+          <p:cNvSpPr txBox="1"/>
+          <p:nvPr/>
+        </p:nvSpPr>
+        <p:spPr>
+          <a:xfrm>
+            <a:off x="685800" y="6583680"/>
+            <a:ext cx="6490411" cy="256032"/>
+          </a:xfrm>
+          <a:prstGeom prst="rect">
+            <a:avLst/>
+          </a:prstGeom>
+          <a:noFill/>
+        </p:spPr>
+        <p:txBody>
+          <a:bodyPr wrap="none">
+            <a:spAutoFit/>
+          </a:bodyPr>
+          <a:lstStyle/>
+          <a:p>
+            <a:pPr algn="l"/>
+            <a:r>
+              <a:rPr sz="700">
+                <a:solidFill>
+                  <a:srgbClr val="A0B4D2"/>
+                </a:solidFill>
+                <a:latin typeface="JetBrains Mono"/>
               </a:rPr>
-              <a:t>–  Format: 45 Minuten, max. 6 Personen, regelmäßig</a:t>
+              <a:t>Benedikt Zoller Coaching  ·  FKB Campus  ·  M19</a:t>
             </a:r>
           </a:p>
         </p:txBody>
@@ -7025,14 +7720,6 @@
 <file path=ppt/slides/slide8.xml><?xml version="1.0" encoding="utf-8"?>
 <p:sld xmlns:a="http://schemas.openxmlformats.org/drawingml/2006/main" xmlns:p="http://schemas.openxmlformats.org/presentationml/2006/main" xmlns:r="http://schemas.openxmlformats.org/officeDocument/2006/relationships">
   <p:cSld>
-    <p:bg>
-      <p:bgPr>
-        <a:solidFill>
-          <a:srgbClr val="1F2B56"/>
-        </a:solidFill>
-        <a:effectLst/>
-      </p:bgPr>
-    </p:bg>
     <p:spTree>
       <p:nvGrpSpPr>
         <p:cNvPr id="1" name=""/>
@@ -7042,14 +7729,100 @@
       <p:grpSpPr/>
       <p:sp>
         <p:nvSpPr>
-          <p:cNvPr id="2" name="TextBox 1"/>
+          <p:cNvPr id="2" name="Rectangle 1"/>
+          <p:cNvSpPr/>
+          <p:nvPr/>
+        </p:nvSpPr>
+        <p:spPr>
+          <a:xfrm>
+            <a:off x="0" y="0"/>
+            <a:ext cx="12188952" cy="6858000"/>
+          </a:xfrm>
+          <a:prstGeom prst="rect">
+            <a:avLst/>
+          </a:prstGeom>
+          <a:solidFill>
+            <a:srgbClr val="EDEDF3"/>
+          </a:solidFill>
+          <a:ln>
+            <a:noFill/>
+          </a:ln>
+        </p:spPr>
+        <p:style>
+          <a:lnRef idx="1">
+            <a:schemeClr val="accent1"/>
+          </a:lnRef>
+          <a:fillRef idx="3">
+            <a:schemeClr val="accent1"/>
+          </a:fillRef>
+          <a:effectRef idx="2">
+            <a:schemeClr val="accent1"/>
+          </a:effectRef>
+          <a:fontRef idx="minor">
+            <a:schemeClr val="lt1"/>
+          </a:fontRef>
+        </p:style>
+        <p:txBody>
+          <a:bodyPr rtlCol="0" anchor="ctr"/>
+          <a:lstStyle/>
+          <a:p>
+            <a:pPr algn="ctr"/>
+          </a:p>
+        </p:txBody>
+      </p:sp>
+      <p:sp>
+        <p:nvSpPr>
+          <p:cNvPr id="3" name="Rectangle 2"/>
+          <p:cNvSpPr/>
+          <p:nvPr/>
+        </p:nvSpPr>
+        <p:spPr>
+          <a:xfrm>
+            <a:off x="0" y="0"/>
+            <a:ext cx="12188952" cy="50292"/>
+          </a:xfrm>
+          <a:prstGeom prst="rect">
+            <a:avLst/>
+          </a:prstGeom>
+          <a:solidFill>
+            <a:srgbClr val="1F2C56"/>
+          </a:solidFill>
+          <a:ln>
+            <a:noFill/>
+          </a:ln>
+        </p:spPr>
+        <p:style>
+          <a:lnRef idx="1">
+            <a:schemeClr val="accent1"/>
+          </a:lnRef>
+          <a:fillRef idx="3">
+            <a:schemeClr val="accent1"/>
+          </a:fillRef>
+          <a:effectRef idx="2">
+            <a:schemeClr val="accent1"/>
+          </a:effectRef>
+          <a:fontRef idx="minor">
+            <a:schemeClr val="lt1"/>
+          </a:fontRef>
+        </p:style>
+        <p:txBody>
+          <a:bodyPr rtlCol="0" anchor="ctr"/>
+          <a:lstStyle/>
+          <a:p>
+            <a:pPr algn="ctr"/>
+          </a:p>
+        </p:txBody>
+      </p:sp>
+      <p:sp>
+        <p:nvSpPr>
+          <p:cNvPr id="4" name="TextBox 3"/>
           <p:cNvSpPr txBox="1"/>
           <p:nvPr/>
         </p:nvSpPr>
         <p:spPr>
           <a:xfrm>
-            <a:off x="609600" y="279400"/>
-            <a:ext cx="2540000" cy="279400"/>
+            <a:off x="685800" y="109728"/>
+            <a:ext cx="10817352" cy="228600"/>
           </a:xfrm>
           <a:prstGeom prst="rect">
             <a:avLst/>
@@ -7057,34 +7830,278 @@
           <a:noFill/>
         </p:spPr>
         <p:txBody>
+          <a:bodyPr wrap="none">
+            <a:spAutoFit/>
+          </a:bodyPr>
+          <a:lstStyle/>
+          <a:p>
+            <a:pPr algn="l"/>
+            <a:r>
+              <a:rPr sz="750">
+                <a:solidFill>
+                  <a:srgbClr val="78808C"/>
+                </a:solidFill>
+                <a:latin typeface="JetBrains Mono"/>
+              </a:rPr>
+              <a:t>M19  ·  INHALT</a:t>
+            </a:r>
+          </a:p>
+        </p:txBody>
+      </p:sp>
+      <p:sp>
+        <p:nvSpPr>
+          <p:cNvPr id="5" name="Rectangle 4"/>
+          <p:cNvSpPr/>
+          <p:nvPr/>
+        </p:nvSpPr>
+        <p:spPr>
+          <a:xfrm>
+            <a:off x="0" y="1234440"/>
+            <a:ext cx="12188952" cy="12700"/>
+          </a:xfrm>
+          <a:prstGeom prst="rect">
+            <a:avLst/>
+          </a:prstGeom>
+          <a:solidFill>
+            <a:srgbClr val="D8DFE4"/>
+          </a:solidFill>
+          <a:ln>
+            <a:noFill/>
+          </a:ln>
+        </p:spPr>
+        <p:style>
+          <a:lnRef idx="1">
+            <a:schemeClr val="accent1"/>
+          </a:lnRef>
+          <a:fillRef idx="3">
+            <a:schemeClr val="accent1"/>
+          </a:fillRef>
+          <a:effectRef idx="2">
+            <a:schemeClr val="accent1"/>
+          </a:effectRef>
+          <a:fontRef idx="minor">
+            <a:schemeClr val="lt1"/>
+          </a:fontRef>
+        </p:style>
+        <p:txBody>
+          <a:bodyPr rtlCol="0" anchor="ctr"/>
+          <a:lstStyle/>
+          <a:p>
+            <a:pPr algn="ctr"/>
+          </a:p>
+        </p:txBody>
+      </p:sp>
+      <p:sp>
+        <p:nvSpPr>
+          <p:cNvPr id="6" name="Rectangle 5"/>
+          <p:cNvSpPr/>
+          <p:nvPr/>
+        </p:nvSpPr>
+        <p:spPr>
+          <a:xfrm>
+            <a:off x="685800" y="502920"/>
+            <a:ext cx="36576" cy="658368"/>
+          </a:xfrm>
+          <a:prstGeom prst="rect">
+            <a:avLst/>
+          </a:prstGeom>
+          <a:solidFill>
+            <a:srgbClr val="D9C089"/>
+          </a:solidFill>
+          <a:ln>
+            <a:noFill/>
+          </a:ln>
+        </p:spPr>
+        <p:style>
+          <a:lnRef idx="1">
+            <a:schemeClr val="accent1"/>
+          </a:lnRef>
+          <a:fillRef idx="3">
+            <a:schemeClr val="accent1"/>
+          </a:fillRef>
+          <a:effectRef idx="2">
+            <a:schemeClr val="accent1"/>
+          </a:effectRef>
+          <a:fontRef idx="minor">
+            <a:schemeClr val="lt1"/>
+          </a:fontRef>
+        </p:style>
+        <p:txBody>
+          <a:bodyPr rtlCol="0" anchor="ctr"/>
+          <a:lstStyle/>
+          <a:p>
+            <a:pPr algn="ctr"/>
+          </a:p>
+        </p:txBody>
+      </p:sp>
+      <p:sp>
+        <p:nvSpPr>
+          <p:cNvPr id="7" name="TextBox 6"/>
+          <p:cNvSpPr txBox="1"/>
+          <p:nvPr/>
+        </p:nvSpPr>
+        <p:spPr>
+          <a:xfrm>
+            <a:off x="813816" y="502920"/>
+            <a:ext cx="10634472" cy="685800"/>
+          </a:xfrm>
+          <a:prstGeom prst="rect">
+            <a:avLst/>
+          </a:prstGeom>
+          <a:noFill/>
+        </p:spPr>
+        <p:txBody>
           <a:bodyPr wrap="square">
-            <a:normAutofit/>
+            <a:spAutoFit/>
           </a:bodyPr>
           <a:lstStyle/>
           <a:p>
             <a:pPr algn="l"/>
             <a:r>
-              <a:rPr sz="1000" b="1" i="0">
-                <a:solidFill>
-                  <a:srgbClr val="F8F8FA"/>
+              <a:rPr sz="2400" b="1" i="0">
+                <a:solidFill>
+                  <a:srgbClr val="1F2C56"/>
+                </a:solidFill>
+                <a:latin typeface="Source Serif 4"/>
+              </a:rPr>
+              <a:t>Methode 4: Lunch-and-Learn (15 Minuten)</a:t>
+            </a:r>
+          </a:p>
+        </p:txBody>
+      </p:sp>
+      <p:sp>
+        <p:nvSpPr>
+          <p:cNvPr id="8" name="TextBox 7"/>
+          <p:cNvSpPr txBox="1"/>
+          <p:nvPr/>
+        </p:nvSpPr>
+        <p:spPr>
+          <a:xfrm>
+            <a:off x="685800" y="1417320"/>
+            <a:ext cx="10817352" cy="5029200"/>
+          </a:xfrm>
+          <a:prstGeom prst="rect">
+            <a:avLst/>
+          </a:prstGeom>
+          <a:noFill/>
+        </p:spPr>
+        <p:txBody>
+          <a:bodyPr wrap="square">
+            <a:spAutoFit/>
+          </a:bodyPr>
+          <a:lstStyle/>
+          <a:p>
+            <a:pPr>
+              <a:spcBef>
+                <a:spcPts val="400"/>
+              </a:spcBef>
+              <a:spcAft>
+                <a:spcPts val="200"/>
+              </a:spcAft>
+            </a:pPr>
+            <a:r>
+              <a:rPr sz="1200">
+                <a:solidFill>
+                  <a:srgbClr val="3D5466"/>
                 </a:solidFill>
                 <a:latin typeface="Arial"/>
               </a:rPr>
-              <a:t>FKB  Campus</a:t>
-            </a:r>
-          </a:p>
-        </p:txBody>
-      </p:sp>
-      <p:sp>
-        <p:nvSpPr>
-          <p:cNvPr id="3" name="TextBox 2"/>
+              <a:t>Was: Kurzes, informelles Wissensformat – ein Berater erklärt an einem konkreten Beispiel eine Technik oder ein Konzept.</a:t>
+            </a:r>
+          </a:p>
+          <a:p>
+            <a:pPr>
+              <a:spcBef>
+                <a:spcPts val="400"/>
+              </a:spcBef>
+              <a:spcAft>
+                <a:spcPts val="200"/>
+              </a:spcAft>
+            </a:pPr>
+            <a:r>
+              <a:rPr sz="1200">
+                <a:solidFill>
+                  <a:srgbClr val="3D5466"/>
+                </a:solidFill>
+                <a:latin typeface="Arial"/>
+              </a:rPr>
+              <a:t>Wann: Spontan oder geplant, 1–2× pro Monat.</a:t>
+            </a:r>
+          </a:p>
+          <a:p>
+            <a:pPr>
+              <a:spcBef>
+                <a:spcPts val="400"/>
+              </a:spcBef>
+              <a:spcAft>
+                <a:spcPts val="200"/>
+              </a:spcAft>
+            </a:pPr>
+            <a:r>
+              <a:rPr sz="1200">
+                <a:solidFill>
+                  <a:srgbClr val="3D5466"/>
+                </a:solidFill>
+                <a:latin typeface="Arial"/>
+              </a:rPr>
+              <a:t>Qualitätsfaktor: Keine Präsentation, keine Vorbereitung – nur Erzählen + Fragen.</a:t>
+            </a:r>
+          </a:p>
+        </p:txBody>
+      </p:sp>
+      <p:sp>
+        <p:nvSpPr>
+          <p:cNvPr id="9" name="Rectangle 8"/>
+          <p:cNvSpPr/>
+          <p:nvPr/>
+        </p:nvSpPr>
+        <p:spPr>
+          <a:xfrm>
+            <a:off x="0" y="6510528"/>
+            <a:ext cx="12188952" cy="347472"/>
+          </a:xfrm>
+          <a:prstGeom prst="rect">
+            <a:avLst/>
+          </a:prstGeom>
+          <a:solidFill>
+            <a:srgbClr val="0A1937"/>
+          </a:solidFill>
+          <a:ln>
+            <a:noFill/>
+          </a:ln>
+        </p:spPr>
+        <p:style>
+          <a:lnRef idx="1">
+            <a:schemeClr val="accent1"/>
+          </a:lnRef>
+          <a:fillRef idx="3">
+            <a:schemeClr val="accent1"/>
+          </a:fillRef>
+          <a:effectRef idx="2">
+            <a:schemeClr val="accent1"/>
+          </a:effectRef>
+          <a:fontRef idx="minor">
+            <a:schemeClr val="lt1"/>
+          </a:fontRef>
+        </p:style>
+        <p:txBody>
+          <a:bodyPr rtlCol="0" anchor="ctr"/>
+          <a:lstStyle/>
+          <a:p>
+            <a:pPr algn="ctr"/>
+          </a:p>
+        </p:txBody>
+      </p:sp>
+      <p:sp>
+        <p:nvSpPr>
+          <p:cNvPr id="10" name="TextBox 9"/>
           <p:cNvSpPr txBox="1"/>
           <p:nvPr/>
         </p:nvSpPr>
         <p:spPr>
           <a:xfrm>
-            <a:off x="609600" y="279400"/>
-            <a:ext cx="10972800" cy="279400"/>
+            <a:off x="685800" y="6583680"/>
+            <a:ext cx="6490411" cy="256032"/>
           </a:xfrm>
           <a:prstGeom prst="rect">
             <a:avLst/>
@@ -7092,160 +8109,20 @@
           <a:noFill/>
         </p:spPr>
         <p:txBody>
-          <a:bodyPr wrap="square">
-            <a:normAutofit/>
+          <a:bodyPr wrap="none">
+            <a:spAutoFit/>
           </a:bodyPr>
           <a:lstStyle/>
           <a:p>
-            <a:pPr algn="r"/>
-            <a:r>
-              <a:rPr sz="900" b="0" i="0">
-                <a:solidFill>
-                  <a:srgbClr val="7B7FA0"/>
-                </a:solidFill>
-                <a:latin typeface="Courier New"/>
+            <a:pPr algn="l"/>
+            <a:r>
+              <a:rPr sz="700">
+                <a:solidFill>
+                  <a:srgbClr val="A0B4D2"/>
+                </a:solidFill>
+                <a:latin typeface="JetBrains Mono"/>
               </a:rPr>
-              <a:t>DAS TEAM ALS COMMUNITY OF PRACTICE</a:t>
-            </a:r>
-          </a:p>
-        </p:txBody>
-      </p:sp>
-      <p:sp>
-        <p:nvSpPr>
-          <p:cNvPr id="4" name="TextBox 3"/>
-          <p:cNvSpPr txBox="1"/>
-          <p:nvPr/>
-        </p:nvSpPr>
-        <p:spPr>
-          <a:xfrm>
-            <a:off x="609600" y="6426200"/>
-            <a:ext cx="10972800" cy="228600"/>
-          </a:xfrm>
-          <a:prstGeom prst="rect">
-            <a:avLst/>
-          </a:prstGeom>
-          <a:noFill/>
-        </p:spPr>
-        <p:txBody>
-          <a:bodyPr wrap="square">
-            <a:normAutofit/>
-          </a:bodyPr>
-          <a:lstStyle/>
-          <a:p>
-            <a:pPr algn="r"/>
-            <a:r>
-              <a:rPr sz="900" b="0" i="0">
-                <a:solidFill>
-                  <a:srgbClr val="7B7FA0"/>
-                </a:solidFill>
-                <a:latin typeface="Courier New"/>
-              </a:rPr>
-              <a:t>08</a:t>
-            </a:r>
-          </a:p>
-        </p:txBody>
-      </p:sp>
-      <p:sp>
-        <p:nvSpPr>
-          <p:cNvPr id="5" name="TextBox 4"/>
-          <p:cNvSpPr txBox="1"/>
-          <p:nvPr/>
-        </p:nvSpPr>
-        <p:spPr>
-          <a:xfrm>
-            <a:off x="609600" y="635000"/>
-            <a:ext cx="5461000" cy="5461000"/>
-          </a:xfrm>
-          <a:prstGeom prst="rect">
-            <a:avLst/>
-          </a:prstGeom>
-          <a:noFill/>
-        </p:spPr>
-        <p:txBody>
-          <a:bodyPr wrap="square">
-            <a:normAutofit/>
-          </a:bodyPr>
-          <a:lstStyle/>
-          <a:p>
-            <a:pPr algn="l"/>
-            <a:r>
-              <a:rPr sz="28000" b="0" i="1">
-                <a:solidFill>
-                  <a:srgbClr val="D9BF7A"/>
-                </a:solidFill>
-                <a:latin typeface="Georgia"/>
-              </a:rPr>
-              <a:t>III</a:t>
-            </a:r>
-          </a:p>
-        </p:txBody>
-      </p:sp>
-      <p:sp>
-        <p:nvSpPr>
-          <p:cNvPr id="6" name="TextBox 5"/>
-          <p:cNvSpPr txBox="1"/>
-          <p:nvPr/>
-        </p:nvSpPr>
-        <p:spPr>
-          <a:xfrm>
-            <a:off x="6731000" y="4064000"/>
-            <a:ext cx="4851400" cy="1778000"/>
-          </a:xfrm>
-          <a:prstGeom prst="rect">
-            <a:avLst/>
-          </a:prstGeom>
-          <a:noFill/>
-        </p:spPr>
-        <p:txBody>
-          <a:bodyPr wrap="square">
-            <a:normAutofit/>
-          </a:bodyPr>
-          <a:lstStyle/>
-          <a:p>
-            <a:pPr algn="r"/>
-            <a:r>
-              <a:rPr sz="3800" b="0" i="0">
-                <a:solidFill>
-                  <a:srgbClr val="F8F8FA"/>
-                </a:solidFill>
-                <a:latin typeface="Georgia"/>
-              </a:rPr>
-              <a:t>Das Team als Community of Practice</a:t>
-            </a:r>
-          </a:p>
-        </p:txBody>
-      </p:sp>
-      <p:sp>
-        <p:nvSpPr>
-          <p:cNvPr id="7" name="TextBox 6"/>
-          <p:cNvSpPr txBox="1"/>
-          <p:nvPr/>
-        </p:nvSpPr>
-        <p:spPr>
-          <a:xfrm>
-            <a:off x="6731000" y="5842000"/>
-            <a:ext cx="4851400" cy="635000"/>
-          </a:xfrm>
-          <a:prstGeom prst="rect">
-            <a:avLst/>
-          </a:prstGeom>
-          <a:noFill/>
-        </p:spPr>
-        <p:txBody>
-          <a:bodyPr wrap="square">
-            <a:normAutofit/>
-          </a:bodyPr>
-          <a:lstStyle/>
-          <a:p>
-            <a:pPr algn="r"/>
-            <a:r>
-              <a:rPr sz="1400" b="0" i="1">
-                <a:solidFill>
-                  <a:srgbClr val="7B7FA0"/>
-                </a:solidFill>
-                <a:latin typeface="Georgia"/>
-              </a:rPr>
-              <a:t>Gemeinsam besser werden — strukturiert</a:t>
+              <a:t>Benedikt Zoller Coaching  ·  FKB Campus  ·  M19</a:t>
             </a:r>
           </a:p>
         </p:txBody>
@@ -7261,14 +8138,6 @@
 <file path=ppt/slides/slide9.xml><?xml version="1.0" encoding="utf-8"?>
 <p:sld xmlns:a="http://schemas.openxmlformats.org/drawingml/2006/main" xmlns:p="http://schemas.openxmlformats.org/presentationml/2006/main" xmlns:r="http://schemas.openxmlformats.org/officeDocument/2006/relationships">
   <p:cSld>
-    <p:bg>
-      <p:bgPr>
-        <a:solidFill>
-          <a:srgbClr val="F8F8FA"/>
-        </a:solidFill>
-        <a:effectLst/>
-      </p:bgPr>
-    </p:bg>
     <p:spTree>
       <p:nvGrpSpPr>
         <p:cNvPr id="1" name=""/>
@@ -7278,125 +8147,20 @@
       <p:grpSpPr/>
       <p:sp>
         <p:nvSpPr>
-          <p:cNvPr id="2" name="TextBox 1"/>
-          <p:cNvSpPr txBox="1"/>
-          <p:nvPr/>
-        </p:nvSpPr>
-        <p:spPr>
-          <a:xfrm>
-            <a:off x="609600" y="279400"/>
-            <a:ext cx="2540000" cy="279400"/>
-          </a:xfrm>
-          <a:prstGeom prst="rect">
-            <a:avLst/>
-          </a:prstGeom>
-          <a:noFill/>
-        </p:spPr>
-        <p:txBody>
-          <a:bodyPr wrap="square">
-            <a:normAutofit/>
-          </a:bodyPr>
-          <a:lstStyle/>
-          <a:p>
-            <a:pPr algn="l"/>
-            <a:r>
-              <a:rPr sz="1000" b="1" i="0">
-                <a:solidFill>
-                  <a:srgbClr val="191D2E"/>
-                </a:solidFill>
-                <a:latin typeface="Arial"/>
-              </a:rPr>
-              <a:t>FKB  Campus</a:t>
-            </a:r>
-          </a:p>
-        </p:txBody>
-      </p:sp>
-      <p:sp>
-        <p:nvSpPr>
-          <p:cNvPr id="3" name="TextBox 2"/>
-          <p:cNvSpPr txBox="1"/>
-          <p:nvPr/>
-        </p:nvSpPr>
-        <p:spPr>
-          <a:xfrm>
-            <a:off x="609600" y="279400"/>
-            <a:ext cx="10972800" cy="279400"/>
-          </a:xfrm>
-          <a:prstGeom prst="rect">
-            <a:avLst/>
-          </a:prstGeom>
-          <a:noFill/>
-        </p:spPr>
-        <p:txBody>
-          <a:bodyPr wrap="square">
-            <a:normAutofit/>
-          </a:bodyPr>
-          <a:lstStyle/>
-          <a:p>
-            <a:pPr algn="r"/>
-            <a:r>
-              <a:rPr sz="900" b="0" i="0">
-                <a:solidFill>
-                  <a:srgbClr val="7B7FA0"/>
-                </a:solidFill>
-                <a:latin typeface="Courier New"/>
-              </a:rPr>
-              <a:t>III · DAS TEAM ALS COMMUNITY OF PRACTICE</a:t>
-            </a:r>
-          </a:p>
-        </p:txBody>
-      </p:sp>
-      <p:sp>
-        <p:nvSpPr>
-          <p:cNvPr id="4" name="TextBox 3"/>
-          <p:cNvSpPr txBox="1"/>
-          <p:nvPr/>
-        </p:nvSpPr>
-        <p:spPr>
-          <a:xfrm>
-            <a:off x="609600" y="6426200"/>
-            <a:ext cx="10972800" cy="228600"/>
-          </a:xfrm>
-          <a:prstGeom prst="rect">
-            <a:avLst/>
-          </a:prstGeom>
-          <a:noFill/>
-        </p:spPr>
-        <p:txBody>
-          <a:bodyPr wrap="square">
-            <a:normAutofit/>
-          </a:bodyPr>
-          <a:lstStyle/>
-          <a:p>
-            <a:pPr algn="r"/>
-            <a:r>
-              <a:rPr sz="900" b="0" i="0">
-                <a:solidFill>
-                  <a:srgbClr val="7B7FA0"/>
-                </a:solidFill>
-                <a:latin typeface="Courier New"/>
-              </a:rPr>
-              <a:t>09</a:t>
-            </a:r>
-          </a:p>
-        </p:txBody>
-      </p:sp>
-      <p:sp>
-        <p:nvSpPr>
-          <p:cNvPr id="5" name="Rectangle 4"/>
+          <p:cNvPr id="2" name="Rectangle 1"/>
           <p:cNvSpPr/>
           <p:nvPr/>
         </p:nvSpPr>
         <p:spPr>
           <a:xfrm>
-            <a:off x="609600" y="825500"/>
-            <a:ext cx="10972800" cy="6350"/>
+            <a:off x="0" y="0"/>
+            <a:ext cx="12188952" cy="6858000"/>
           </a:xfrm>
           <a:prstGeom prst="rect">
             <a:avLst/>
           </a:prstGeom>
           <a:solidFill>
-            <a:srgbClr val="191D2E"/>
+            <a:srgbClr val="EDEDF3"/>
           </a:solidFill>
           <a:ln>
             <a:noFill/>
@@ -7426,55 +8190,20 @@
       </p:sp>
       <p:sp>
         <p:nvSpPr>
-          <p:cNvPr id="6" name="TextBox 5"/>
-          <p:cNvSpPr txBox="1"/>
-          <p:nvPr/>
-        </p:nvSpPr>
-        <p:spPr>
-          <a:xfrm>
-            <a:off x="609600" y="920750"/>
-            <a:ext cx="10972800" cy="1778000"/>
-          </a:xfrm>
-          <a:prstGeom prst="rect">
-            <a:avLst/>
-          </a:prstGeom>
-          <a:noFill/>
-        </p:spPr>
-        <p:txBody>
-          <a:bodyPr wrap="square">
-            <a:normAutofit/>
-          </a:bodyPr>
-          <a:lstStyle/>
-          <a:p>
-            <a:pPr algn="l"/>
-            <a:r>
-              <a:rPr sz="3800" b="0" i="0">
-                <a:solidFill>
-                  <a:srgbClr val="191D2E"/>
-                </a:solidFill>
-                <a:latin typeface="Georgia"/>
-              </a:rPr>
-              <a:t>Transferbarrieren und wie man sie überwindet</a:t>
-            </a:r>
-          </a:p>
-        </p:txBody>
-      </p:sp>
-      <p:sp>
-        <p:nvSpPr>
-          <p:cNvPr id="7" name="Rectangle 6"/>
+          <p:cNvPr id="3" name="Rectangle 2"/>
           <p:cNvSpPr/>
           <p:nvPr/>
         </p:nvSpPr>
         <p:spPr>
           <a:xfrm>
-            <a:off x="609600" y="2762250"/>
-            <a:ext cx="10972800" cy="6350"/>
+            <a:off x="0" y="0"/>
+            <a:ext cx="12188952" cy="50292"/>
           </a:xfrm>
           <a:prstGeom prst="rect">
             <a:avLst/>
           </a:prstGeom>
           <a:solidFill>
-            <a:srgbClr val="E0E0E8"/>
+            <a:srgbClr val="1F2C56"/>
           </a:solidFill>
           <a:ln>
             <a:noFill/>
@@ -7504,14 +8233,170 @@
       </p:sp>
       <p:sp>
         <p:nvSpPr>
+          <p:cNvPr id="4" name="TextBox 3"/>
+          <p:cNvSpPr txBox="1"/>
+          <p:nvPr/>
+        </p:nvSpPr>
+        <p:spPr>
+          <a:xfrm>
+            <a:off x="685800" y="109728"/>
+            <a:ext cx="10817352" cy="228600"/>
+          </a:xfrm>
+          <a:prstGeom prst="rect">
+            <a:avLst/>
+          </a:prstGeom>
+          <a:noFill/>
+        </p:spPr>
+        <p:txBody>
+          <a:bodyPr wrap="none">
+            <a:spAutoFit/>
+          </a:bodyPr>
+          <a:lstStyle/>
+          <a:p>
+            <a:pPr algn="l"/>
+            <a:r>
+              <a:rPr sz="750">
+                <a:solidFill>
+                  <a:srgbClr val="78808C"/>
+                </a:solidFill>
+                <a:latin typeface="JetBrains Mono"/>
+              </a:rPr>
+              <a:t>M19  ·  INHALT</a:t>
+            </a:r>
+          </a:p>
+        </p:txBody>
+      </p:sp>
+      <p:sp>
+        <p:nvSpPr>
+          <p:cNvPr id="5" name="Rectangle 4"/>
+          <p:cNvSpPr/>
+          <p:nvPr/>
+        </p:nvSpPr>
+        <p:spPr>
+          <a:xfrm>
+            <a:off x="0" y="1234440"/>
+            <a:ext cx="12188952" cy="12700"/>
+          </a:xfrm>
+          <a:prstGeom prst="rect">
+            <a:avLst/>
+          </a:prstGeom>
+          <a:solidFill>
+            <a:srgbClr val="D8DFE4"/>
+          </a:solidFill>
+          <a:ln>
+            <a:noFill/>
+          </a:ln>
+        </p:spPr>
+        <p:style>
+          <a:lnRef idx="1">
+            <a:schemeClr val="accent1"/>
+          </a:lnRef>
+          <a:fillRef idx="3">
+            <a:schemeClr val="accent1"/>
+          </a:fillRef>
+          <a:effectRef idx="2">
+            <a:schemeClr val="accent1"/>
+          </a:effectRef>
+          <a:fontRef idx="minor">
+            <a:schemeClr val="lt1"/>
+          </a:fontRef>
+        </p:style>
+        <p:txBody>
+          <a:bodyPr rtlCol="0" anchor="ctr"/>
+          <a:lstStyle/>
+          <a:p>
+            <a:pPr algn="ctr"/>
+          </a:p>
+        </p:txBody>
+      </p:sp>
+      <p:sp>
+        <p:nvSpPr>
+          <p:cNvPr id="6" name="Rectangle 5"/>
+          <p:cNvSpPr/>
+          <p:nvPr/>
+        </p:nvSpPr>
+        <p:spPr>
+          <a:xfrm>
+            <a:off x="685800" y="502920"/>
+            <a:ext cx="36576" cy="658368"/>
+          </a:xfrm>
+          <a:prstGeom prst="rect">
+            <a:avLst/>
+          </a:prstGeom>
+          <a:solidFill>
+            <a:srgbClr val="D9C089"/>
+          </a:solidFill>
+          <a:ln>
+            <a:noFill/>
+          </a:ln>
+        </p:spPr>
+        <p:style>
+          <a:lnRef idx="1">
+            <a:schemeClr val="accent1"/>
+          </a:lnRef>
+          <a:fillRef idx="3">
+            <a:schemeClr val="accent1"/>
+          </a:fillRef>
+          <a:effectRef idx="2">
+            <a:schemeClr val="accent1"/>
+          </a:effectRef>
+          <a:fontRef idx="minor">
+            <a:schemeClr val="lt1"/>
+          </a:fontRef>
+        </p:style>
+        <p:txBody>
+          <a:bodyPr rtlCol="0" anchor="ctr"/>
+          <a:lstStyle/>
+          <a:p>
+            <a:pPr algn="ctr"/>
+          </a:p>
+        </p:txBody>
+      </p:sp>
+      <p:sp>
+        <p:nvSpPr>
+          <p:cNvPr id="7" name="TextBox 6"/>
+          <p:cNvSpPr txBox="1"/>
+          <p:nvPr/>
+        </p:nvSpPr>
+        <p:spPr>
+          <a:xfrm>
+            <a:off x="813816" y="502920"/>
+            <a:ext cx="10634472" cy="685800"/>
+          </a:xfrm>
+          <a:prstGeom prst="rect">
+            <a:avLst/>
+          </a:prstGeom>
+          <a:noFill/>
+        </p:spPr>
+        <p:txBody>
+          <a:bodyPr wrap="square">
+            <a:spAutoFit/>
+          </a:bodyPr>
+          <a:lstStyle/>
+          <a:p>
+            <a:pPr algn="l"/>
+            <a:r>
+              <a:rPr sz="2400" b="1" i="0">
+                <a:solidFill>
+                  <a:srgbClr val="1F2C56"/>
+                </a:solidFill>
+                <a:latin typeface="Source Serif 4"/>
+              </a:rPr>
+              <a:t>Hinweis: Hybride und standortverteilte Teams</a:t>
+            </a:r>
+          </a:p>
+        </p:txBody>
+      </p:sp>
+      <p:sp>
+        <p:nvSpPr>
           <p:cNvPr id="8" name="TextBox 7"/>
           <p:cNvSpPr txBox="1"/>
           <p:nvPr/>
         </p:nvSpPr>
         <p:spPr>
           <a:xfrm>
-            <a:off x="609600" y="2851150"/>
-            <a:ext cx="10972800" cy="3448050"/>
+            <a:off x="685800" y="1417320"/>
+            <a:ext cx="10817352" cy="5029200"/>
           </a:xfrm>
           <a:prstGeom prst="rect">
             <a:avLst/>
@@ -7520,83 +8405,104 @@
         </p:spPr>
         <p:txBody>
           <a:bodyPr wrap="square">
-            <a:normAutofit/>
+            <a:spAutoFit/>
           </a:bodyPr>
           <a:lstStyle/>
           <a:p>
             <a:pPr>
               <a:spcBef>
-                <a:spcPts val="600"/>
+                <a:spcPts val="400"/>
               </a:spcBef>
               <a:spcAft>
-                <a:spcPts val="600"/>
+                <a:spcPts val="200"/>
               </a:spcAft>
             </a:pPr>
             <a:r>
-              <a:rPr sz="1400">
-                <a:solidFill>
-                  <a:srgbClr val="191D2E"/>
-                </a:solidFill>
-                <a:latin typeface="Georgia"/>
+              <a:rPr sz="1200">
+                <a:solidFill>
+                  <a:srgbClr val="3D5466"/>
+                </a:solidFill>
+                <a:latin typeface="Arial"/>
               </a:rPr>
-              <a:t>–  Zeitdruck: Transfer-Routine in bestehende Meetings integrieren</a:t>
-            </a:r>
-          </a:p>
-          <a:p>
-            <a:pPr>
-              <a:spcBef>
-                <a:spcPts val="600"/>
-              </a:spcBef>
-              <a:spcAft>
-                <a:spcPts val="600"/>
-              </a:spcAft>
-            </a:pPr>
-            <a:r>
-              <a:rPr sz="1400">
-                <a:solidFill>
-                  <a:srgbClr val="191D2E"/>
-                </a:solidFill>
-                <a:latin typeface="Georgia"/>
+              <a:t>Viele VR-Bank-FK-Teams arbeiten inzwischen über mehrere Geschäftsstellen verteilt oder hybrid. Die o.g. Methoden funktionieren auch auf Distanz – mit kleinen Anpassungen:</a:t>
+            </a:r>
+          </a:p>
+        </p:txBody>
+      </p:sp>
+      <p:sp>
+        <p:nvSpPr>
+          <p:cNvPr id="9" name="Rectangle 8"/>
+          <p:cNvSpPr/>
+          <p:nvPr/>
+        </p:nvSpPr>
+        <p:spPr>
+          <a:xfrm>
+            <a:off x="0" y="6510528"/>
+            <a:ext cx="12188952" cy="347472"/>
+          </a:xfrm>
+          <a:prstGeom prst="rect">
+            <a:avLst/>
+          </a:prstGeom>
+          <a:solidFill>
+            <a:srgbClr val="0A1937"/>
+          </a:solidFill>
+          <a:ln>
+            <a:noFill/>
+          </a:ln>
+        </p:spPr>
+        <p:style>
+          <a:lnRef idx="1">
+            <a:schemeClr val="accent1"/>
+          </a:lnRef>
+          <a:fillRef idx="3">
+            <a:schemeClr val="accent1"/>
+          </a:fillRef>
+          <a:effectRef idx="2">
+            <a:schemeClr val="accent1"/>
+          </a:effectRef>
+          <a:fontRef idx="minor">
+            <a:schemeClr val="lt1"/>
+          </a:fontRef>
+        </p:style>
+        <p:txBody>
+          <a:bodyPr rtlCol="0" anchor="ctr"/>
+          <a:lstStyle/>
+          <a:p>
+            <a:pPr algn="ctr"/>
+          </a:p>
+        </p:txBody>
+      </p:sp>
+      <p:sp>
+        <p:nvSpPr>
+          <p:cNvPr id="10" name="TextBox 9"/>
+          <p:cNvSpPr txBox="1"/>
+          <p:nvPr/>
+        </p:nvSpPr>
+        <p:spPr>
+          <a:xfrm>
+            <a:off x="685800" y="6583680"/>
+            <a:ext cx="6490411" cy="256032"/>
+          </a:xfrm>
+          <a:prstGeom prst="rect">
+            <a:avLst/>
+          </a:prstGeom>
+          <a:noFill/>
+        </p:spPr>
+        <p:txBody>
+          <a:bodyPr wrap="none">
+            <a:spAutoFit/>
+          </a:bodyPr>
+          <a:lstStyle/>
+          <a:p>
+            <a:pPr algn="l"/>
+            <a:r>
+              <a:rPr sz="700">
+                <a:solidFill>
+                  <a:srgbClr val="A0B4D2"/>
+                </a:solidFill>
+                <a:latin typeface="JetBrains Mono"/>
               </a:rPr>
-              <a:t>–  Statusdenken: 'Wer gibt, verliert' — das Gegenteil ist wahr</a:t>
-            </a:r>
-          </a:p>
-          <a:p>
-            <a:pPr>
-              <a:spcBef>
-                <a:spcPts val="600"/>
-              </a:spcBef>
-              <a:spcAft>
-                <a:spcPts val="600"/>
-              </a:spcAft>
-            </a:pPr>
-            <a:r>
-              <a:rPr sz="1400">
-                <a:solidFill>
-                  <a:srgbClr val="191D2E"/>
-                </a:solidFill>
-                <a:latin typeface="Georgia"/>
-              </a:rPr>
-              <a:t>–  Fehlende Struktur: Festes Format schlägt guten Willen</a:t>
-            </a:r>
-          </a:p>
-          <a:p>
-            <a:pPr>
-              <a:spcBef>
-                <a:spcPts val="600"/>
-              </a:spcBef>
-              <a:spcAft>
-                <a:spcPts val="600"/>
-              </a:spcAft>
-            </a:pPr>
-            <a:r>
-              <a:rPr sz="1400">
-                <a:solidFill>
-                  <a:srgbClr val="191D2E"/>
-                </a:solidFill>
-                <a:latin typeface="Georgia"/>
-              </a:rPr>
-              <a:t>–  Kein Mandat: Teamleiter muss Wissenstransfer aktiv einfordern</a:t>
+              <a:t>Benedikt Zoller Coaching  ·  FKB Campus  ·  M19</a:t>
             </a:r>
           </a:p>
         </p:txBody>

--- a/public/downloads/praesentation/M19.pptx
+++ b/public/downloads/praesentation/M19.pptx
@@ -3258,7 +3258,42 @@
       </p:sp>
       <p:sp>
         <p:nvSpPr>
-          <p:cNvPr id="6" name="Rectangle 5"/>
+          <p:cNvPr id="6" name="TextBox 5"/>
+          <p:cNvSpPr txBox="1"/>
+          <p:nvPr/>
+        </p:nvSpPr>
+        <p:spPr>
+          <a:xfrm>
+            <a:off x="685800" y="3977639"/>
+            <a:ext cx="10817352" cy="731520"/>
+          </a:xfrm>
+          <a:prstGeom prst="rect">
+            <a:avLst/>
+          </a:prstGeom>
+          <a:noFill/>
+        </p:spPr>
+        <p:txBody>
+          <a:bodyPr wrap="square">
+            <a:spAutoFit/>
+          </a:bodyPr>
+          <a:lstStyle/>
+          <a:p>
+            <a:pPr algn="l"/>
+            <a:r>
+              <a:rPr sz="1900" b="0" i="1">
+                <a:solidFill>
+                  <a:srgbClr val="BECDE6"/>
+                </a:solidFill>
+                <a:latin typeface="Source Serif 4"/>
+              </a:rPr>
+              <a:t>Implizites Expertenwissen systematisch weitergeben und Lerngemeinschaften im FK-Team aufbauen</a:t>
+            </a:r>
+          </a:p>
+        </p:txBody>
+      </p:sp>
+      <p:sp>
+        <p:nvSpPr>
+          <p:cNvPr id="7" name="Rectangle 6"/>
           <p:cNvSpPr/>
           <p:nvPr/>
         </p:nvSpPr>
@@ -3301,14 +3336,14 @@
       </p:sp>
       <p:sp>
         <p:nvSpPr>
-          <p:cNvPr id="7" name="TextBox 6"/>
+          <p:cNvPr id="8" name="TextBox 7"/>
           <p:cNvSpPr txBox="1"/>
           <p:nvPr/>
         </p:nvSpPr>
         <p:spPr>
           <a:xfrm>
             <a:off x="685800" y="5193792"/>
-            <a:ext cx="5408676" cy="201168"/>
+            <a:ext cx="3605784" cy="201168"/>
           </a:xfrm>
           <a:prstGeom prst="rect">
             <a:avLst/>
@@ -3329,21 +3364,21 @@
                 </a:solidFill>
                 <a:latin typeface="JetBrains Mono"/>
               </a:rPr>
-              <a:t>KOMPETENZSTUFE</a:t>
-            </a:r>
-          </a:p>
-        </p:txBody>
-      </p:sp>
-      <p:sp>
-        <p:nvSpPr>
-          <p:cNvPr id="8" name="TextBox 7"/>
+              <a:t>KOMPETENZFELD</a:t>
+            </a:r>
+          </a:p>
+        </p:txBody>
+      </p:sp>
+      <p:sp>
+        <p:nvSpPr>
+          <p:cNvPr id="9" name="TextBox 8"/>
           <p:cNvSpPr txBox="1"/>
           <p:nvPr/>
         </p:nvSpPr>
         <p:spPr>
           <a:xfrm>
             <a:off x="685800" y="5394960"/>
-            <a:ext cx="5408676" cy="320040"/>
+            <a:ext cx="3605784" cy="320040"/>
           </a:xfrm>
           <a:prstGeom prst="rect">
             <a:avLst/>
@@ -3364,21 +3399,21 @@
                 </a:solidFill>
                 <a:latin typeface="Arial"/>
               </a:rPr>
-              <a:t>Sparring</a:t>
-            </a:r>
-          </a:p>
-        </p:txBody>
-      </p:sp>
-      <p:sp>
-        <p:nvSpPr>
-          <p:cNvPr id="9" name="TextBox 8"/>
+              <a:t>K-06 Führung &amp; Entwicklung</a:t>
+            </a:r>
+          </a:p>
+        </p:txBody>
+      </p:sp>
+      <p:sp>
+        <p:nvSpPr>
+          <p:cNvPr id="10" name="TextBox 9"/>
           <p:cNvSpPr txBox="1"/>
           <p:nvPr/>
         </p:nvSpPr>
         <p:spPr>
           <a:xfrm>
-            <a:off x="6094476" y="5193792"/>
-            <a:ext cx="5408676" cy="201168"/>
+            <a:off x="4291584" y="5193792"/>
+            <a:ext cx="3605784" cy="201168"/>
           </a:xfrm>
           <a:prstGeom prst="rect">
             <a:avLst/>
@@ -3399,21 +3434,21 @@
                 </a:solidFill>
                 <a:latin typeface="JetBrains Mono"/>
               </a:rPr>
-              <a:t>VERSION</a:t>
-            </a:r>
-          </a:p>
-        </p:txBody>
-      </p:sp>
-      <p:sp>
-        <p:nvSpPr>
-          <p:cNvPr id="10" name="TextBox 9"/>
+              <a:t>KOMPETENZSTUFE</a:t>
+            </a:r>
+          </a:p>
+        </p:txBody>
+      </p:sp>
+      <p:sp>
+        <p:nvSpPr>
+          <p:cNvPr id="11" name="TextBox 10"/>
           <p:cNvSpPr txBox="1"/>
           <p:nvPr/>
         </p:nvSpPr>
         <p:spPr>
           <a:xfrm>
-            <a:off x="6094476" y="5394960"/>
-            <a:ext cx="5408676" cy="320040"/>
+            <a:off x="4291584" y="5394960"/>
+            <a:ext cx="3605784" cy="320040"/>
           </a:xfrm>
           <a:prstGeom prst="rect">
             <a:avLst/>
@@ -3434,6 +3469,76 @@
                 </a:solidFill>
                 <a:latin typeface="Arial"/>
               </a:rPr>
+              <a:t>Sparringspartner</a:t>
+            </a:r>
+          </a:p>
+        </p:txBody>
+      </p:sp>
+      <p:sp>
+        <p:nvSpPr>
+          <p:cNvPr id="12" name="TextBox 11"/>
+          <p:cNvSpPr txBox="1"/>
+          <p:nvPr/>
+        </p:nvSpPr>
+        <p:spPr>
+          <a:xfrm>
+            <a:off x="7897368" y="5193792"/>
+            <a:ext cx="3605784" cy="201168"/>
+          </a:xfrm>
+          <a:prstGeom prst="rect">
+            <a:avLst/>
+          </a:prstGeom>
+          <a:noFill/>
+        </p:spPr>
+        <p:txBody>
+          <a:bodyPr wrap="none">
+            <a:spAutoFit/>
+          </a:bodyPr>
+          <a:lstStyle/>
+          <a:p>
+            <a:pPr algn="l"/>
+            <a:r>
+              <a:rPr sz="700">
+                <a:solidFill>
+                  <a:srgbClr val="A0B4D2"/>
+                </a:solidFill>
+                <a:latin typeface="JetBrains Mono"/>
+              </a:rPr>
+              <a:t>VERSION</a:t>
+            </a:r>
+          </a:p>
+        </p:txBody>
+      </p:sp>
+      <p:sp>
+        <p:nvSpPr>
+          <p:cNvPr id="13" name="TextBox 12"/>
+          <p:cNvSpPr txBox="1"/>
+          <p:nvPr/>
+        </p:nvSpPr>
+        <p:spPr>
+          <a:xfrm>
+            <a:off x="7897368" y="5394960"/>
+            <a:ext cx="3605784" cy="320040"/>
+          </a:xfrm>
+          <a:prstGeom prst="rect">
+            <a:avLst/>
+          </a:prstGeom>
+          <a:noFill/>
+        </p:spPr>
+        <p:txBody>
+          <a:bodyPr wrap="square">
+            <a:spAutoFit/>
+          </a:bodyPr>
+          <a:lstStyle/>
+          <a:p>
+            <a:pPr algn="l"/>
+            <a:r>
+              <a:rPr sz="1100" b="0" i="0">
+                <a:solidFill>
+                  <a:srgbClr val="FFFFFF"/>
+                </a:solidFill>
+                <a:latin typeface="Arial"/>
+              </a:rPr>
               <a:t>v0.4</a:t>
             </a:r>
           </a:p>
@@ -3441,7 +3546,7 @@
       </p:sp>
       <p:sp>
         <p:nvSpPr>
-          <p:cNvPr id="11" name="Rectangle 10"/>
+          <p:cNvPr id="14" name="Rectangle 13"/>
           <p:cNvSpPr/>
           <p:nvPr/>
         </p:nvSpPr>
@@ -3484,7 +3589,7 @@
       </p:sp>
       <p:sp>
         <p:nvSpPr>
-          <p:cNvPr id="12" name="TextBox 11"/>
+          <p:cNvPr id="15" name="TextBox 14"/>
           <p:cNvSpPr txBox="1"/>
           <p:nvPr/>
         </p:nvSpPr>
@@ -3519,7 +3624,7 @@
       </p:sp>
       <p:sp>
         <p:nvSpPr>
-          <p:cNvPr id="13" name="TextBox 12"/>
+          <p:cNvPr id="16" name="TextBox 15"/>
           <p:cNvSpPr txBox="1"/>
           <p:nvPr/>
         </p:nvSpPr>
